--- a/fine-tune-pc/AI-Fine_Tune.pptx
+++ b/fine-tune-pc/AI-Fine_Tune.pptx
@@ -18,6 +18,9 @@
     <p:sldId id="265" r:id="rId12"/>
     <p:sldId id="269" r:id="rId13"/>
     <p:sldId id="264" r:id="rId14"/>
+    <p:sldId id="272" r:id="rId15"/>
+    <p:sldId id="270" r:id="rId16"/>
+    <p:sldId id="271" r:id="rId17"/>
   </p:sldIdLst>
   <p:sldSz cx="12192000" cy="6858000"/>
   <p:notesSz cx="6858000" cy="9144000"/>
@@ -116,6 +119,11 @@
       </a:defRPr>
     </a:lvl9pPr>
   </p:defaultTextStyle>
+  <p:extLst>
+    <p:ext uri="{EFAFB233-063F-42B5-8137-9DF3F51BA10A}">
+      <p15:sldGuideLst xmlns:p15="http://schemas.microsoft.com/office/powerpoint/2012/main"/>
+    </p:ext>
+  </p:extLst>
 </p:presentation>
 </file>
 
@@ -266,7 +274,7 @@
           <a:p>
             <a:fld id="{0BABB149-4F03-49B4-86F4-31F97909BE1C}" type="datetimeFigureOut">
               <a:rPr lang="en-US" smtClean="0"/>
-              <a:t>1/25/2026</a:t>
+              <a:t>1/27/2026</a:t>
             </a:fld>
             <a:endParaRPr lang="en-US"/>
           </a:p>
@@ -464,7 +472,7 @@
           <a:p>
             <a:fld id="{0BABB149-4F03-49B4-86F4-31F97909BE1C}" type="datetimeFigureOut">
               <a:rPr lang="en-US" smtClean="0"/>
-              <a:t>1/25/2026</a:t>
+              <a:t>1/27/2026</a:t>
             </a:fld>
             <a:endParaRPr lang="en-US"/>
           </a:p>
@@ -672,7 +680,7 @@
           <a:p>
             <a:fld id="{0BABB149-4F03-49B4-86F4-31F97909BE1C}" type="datetimeFigureOut">
               <a:rPr lang="en-US" smtClean="0"/>
-              <a:t>1/25/2026</a:t>
+              <a:t>1/27/2026</a:t>
             </a:fld>
             <a:endParaRPr lang="en-US"/>
           </a:p>
@@ -870,7 +878,7 @@
           <a:p>
             <a:fld id="{0BABB149-4F03-49B4-86F4-31F97909BE1C}" type="datetimeFigureOut">
               <a:rPr lang="en-US" smtClean="0"/>
-              <a:t>1/25/2026</a:t>
+              <a:t>1/27/2026</a:t>
             </a:fld>
             <a:endParaRPr lang="en-US"/>
           </a:p>
@@ -1145,7 +1153,7 @@
           <a:p>
             <a:fld id="{0BABB149-4F03-49B4-86F4-31F97909BE1C}" type="datetimeFigureOut">
               <a:rPr lang="en-US" smtClean="0"/>
-              <a:t>1/25/2026</a:t>
+              <a:t>1/27/2026</a:t>
             </a:fld>
             <a:endParaRPr lang="en-US"/>
           </a:p>
@@ -1410,7 +1418,7 @@
           <a:p>
             <a:fld id="{0BABB149-4F03-49B4-86F4-31F97909BE1C}" type="datetimeFigureOut">
               <a:rPr lang="en-US" smtClean="0"/>
-              <a:t>1/25/2026</a:t>
+              <a:t>1/27/2026</a:t>
             </a:fld>
             <a:endParaRPr lang="en-US"/>
           </a:p>
@@ -1822,7 +1830,7 @@
           <a:p>
             <a:fld id="{0BABB149-4F03-49B4-86F4-31F97909BE1C}" type="datetimeFigureOut">
               <a:rPr lang="en-US" smtClean="0"/>
-              <a:t>1/25/2026</a:t>
+              <a:t>1/27/2026</a:t>
             </a:fld>
             <a:endParaRPr lang="en-US"/>
           </a:p>
@@ -1963,7 +1971,7 @@
           <a:p>
             <a:fld id="{0BABB149-4F03-49B4-86F4-31F97909BE1C}" type="datetimeFigureOut">
               <a:rPr lang="en-US" smtClean="0"/>
-              <a:t>1/25/2026</a:t>
+              <a:t>1/27/2026</a:t>
             </a:fld>
             <a:endParaRPr lang="en-US"/>
           </a:p>
@@ -2076,7 +2084,7 @@
           <a:p>
             <a:fld id="{0BABB149-4F03-49B4-86F4-31F97909BE1C}" type="datetimeFigureOut">
               <a:rPr lang="en-US" smtClean="0"/>
-              <a:t>1/25/2026</a:t>
+              <a:t>1/27/2026</a:t>
             </a:fld>
             <a:endParaRPr lang="en-US"/>
           </a:p>
@@ -2387,7 +2395,7 @@
           <a:p>
             <a:fld id="{0BABB149-4F03-49B4-86F4-31F97909BE1C}" type="datetimeFigureOut">
               <a:rPr lang="en-US" smtClean="0"/>
-              <a:t>1/25/2026</a:t>
+              <a:t>1/27/2026</a:t>
             </a:fld>
             <a:endParaRPr lang="en-US"/>
           </a:p>
@@ -2675,7 +2683,7 @@
           <a:p>
             <a:fld id="{0BABB149-4F03-49B4-86F4-31F97909BE1C}" type="datetimeFigureOut">
               <a:rPr lang="en-US" smtClean="0"/>
-              <a:t>1/25/2026</a:t>
+              <a:t>1/27/2026</a:t>
             </a:fld>
             <a:endParaRPr lang="en-US"/>
           </a:p>
@@ -2916,7 +2924,7 @@
           <a:p>
             <a:fld id="{0BABB149-4F03-49B4-86F4-31F97909BE1C}" type="datetimeFigureOut">
               <a:rPr lang="en-US" smtClean="0"/>
-              <a:t>1/25/2026</a:t>
+              <a:t>1/27/2026</a:t>
             </a:fld>
             <a:endParaRPr lang="en-US"/>
           </a:p>
@@ -4756,7 +4764,62 @@
           <a:bodyPr/>
           <a:lstStyle/>
           <a:p>
-            <a:endParaRPr lang="en-US"/>
+            <a:r>
+              <a:rPr lang="en-US" dirty="0" err="1"/>
+              <a:t>Chuẩn</a:t>
+            </a:r>
+            <a:r>
+              <a:rPr lang="en-US" dirty="0"/>
+              <a:t> </a:t>
+            </a:r>
+            <a:r>
+              <a:rPr lang="en-US" dirty="0" err="1"/>
+              <a:t>bị</a:t>
+            </a:r>
+            <a:r>
+              <a:rPr lang="en-US" dirty="0"/>
+              <a:t> </a:t>
+            </a:r>
+            <a:r>
+              <a:rPr lang="en-US" dirty="0" err="1"/>
+              <a:t>dữ</a:t>
+            </a:r>
+            <a:r>
+              <a:rPr lang="en-US" dirty="0"/>
+              <a:t> </a:t>
+            </a:r>
+            <a:r>
+              <a:rPr lang="en-US" dirty="0" err="1"/>
+              <a:t>liệu</a:t>
+            </a:r>
+            <a:r>
+              <a:rPr lang="en-US" dirty="0"/>
+              <a:t> </a:t>
+            </a:r>
+            <a:r>
+              <a:rPr lang="en-US" dirty="0" err="1"/>
+              <a:t>để</a:t>
+            </a:r>
+            <a:r>
+              <a:rPr lang="en-US" dirty="0"/>
+              <a:t> </a:t>
+            </a:r>
+            <a:r>
+              <a:rPr lang="en-US" dirty="0" err="1"/>
+              <a:t>trainning</a:t>
+            </a:r>
+            <a:r>
+              <a:rPr lang="en-US" dirty="0"/>
+              <a:t> </a:t>
+            </a:r>
+            <a:r>
+              <a:rPr lang="en-US" dirty="0" err="1"/>
+              <a:t>và</a:t>
+            </a:r>
+            <a:r>
+              <a:rPr lang="en-US" dirty="0"/>
+              <a:t> validation</a:t>
+            </a:r>
           </a:p>
         </p:txBody>
       </p:sp>
@@ -4781,7 +4844,214 @@
           <a:bodyPr/>
           <a:lstStyle/>
           <a:p>
-            <a:endParaRPr lang="en-US"/>
+            <a:r>
+              <a:rPr lang="vi-VN" dirty="0"/>
+              <a:t>Việc tạo training</a:t>
+            </a:r>
+            <a:r>
+              <a:rPr lang="en-US" dirty="0"/>
+              <a:t> data</a:t>
+            </a:r>
+            <a:r>
+              <a:rPr lang="vi-VN" dirty="0"/>
+              <a:t> và validation</a:t>
+            </a:r>
+            <a:r>
+              <a:rPr lang="en-US" dirty="0"/>
+              <a:t> data</a:t>
+            </a:r>
+            <a:r>
+              <a:rPr lang="vi-VN" dirty="0"/>
+              <a:t> là phần quan trọng nhất trong Fine-Tune, vì 80% chất lượng fine-tune đến từ dữ liệu, không phải model.</a:t>
+            </a:r>
+            <a:endParaRPr lang="en-US" dirty="0"/>
+          </a:p>
+          <a:p>
+            <a:r>
+              <a:rPr lang="en-US" dirty="0"/>
+              <a:t>Training data </a:t>
+            </a:r>
+            <a:r>
+              <a:rPr lang="en-US" dirty="0" err="1"/>
+              <a:t>nhằm</a:t>
+            </a:r>
+            <a:r>
+              <a:rPr lang="en-US" dirty="0"/>
+              <a:t> </a:t>
+            </a:r>
+            <a:r>
+              <a:rPr lang="en-US" dirty="0" err="1"/>
+              <a:t>dạy</a:t>
+            </a:r>
+            <a:r>
+              <a:rPr lang="en-US" dirty="0"/>
+              <a:t> model, </a:t>
+            </a:r>
+            <a:r>
+              <a:rPr lang="vi-VN" dirty="0"/>
+              <a:t>validation</a:t>
+            </a:r>
+            <a:r>
+              <a:rPr lang="en-US" dirty="0"/>
+              <a:t> data </a:t>
+            </a:r>
+            <a:r>
+              <a:rPr lang="en-US" dirty="0" err="1"/>
+              <a:t>nhằm</a:t>
+            </a:r>
+            <a:r>
+              <a:rPr lang="en-US" dirty="0"/>
+              <a:t> </a:t>
+            </a:r>
+            <a:r>
+              <a:rPr lang="en-US" dirty="0" err="1"/>
+              <a:t>kiểm</a:t>
+            </a:r>
+            <a:r>
+              <a:rPr lang="en-US" dirty="0"/>
+              <a:t> </a:t>
+            </a:r>
+            <a:r>
+              <a:rPr lang="en-US" dirty="0" err="1"/>
+              <a:t>tra</a:t>
+            </a:r>
+            <a:r>
+              <a:rPr lang="en-US" dirty="0"/>
+              <a:t> model </a:t>
+            </a:r>
+            <a:r>
+              <a:rPr lang="en-US" dirty="0" err="1"/>
+              <a:t>có</a:t>
+            </a:r>
+            <a:r>
+              <a:rPr lang="en-US" dirty="0"/>
+              <a:t> </a:t>
+            </a:r>
+            <a:r>
+              <a:rPr lang="en-US" dirty="0" err="1"/>
+              <a:t>học</a:t>
+            </a:r>
+            <a:r>
+              <a:rPr lang="en-US" dirty="0"/>
+              <a:t> </a:t>
+            </a:r>
+            <a:r>
+              <a:rPr lang="en-US" dirty="0" err="1"/>
+              <a:t>thật</a:t>
+            </a:r>
+            <a:r>
+              <a:rPr lang="en-US" dirty="0"/>
+              <a:t> </a:t>
+            </a:r>
+            <a:r>
+              <a:rPr lang="en-US" dirty="0" err="1"/>
+              <a:t>không</a:t>
+            </a:r>
+            <a:endParaRPr lang="en-US" dirty="0"/>
+          </a:p>
+          <a:p>
+            <a:r>
+              <a:rPr lang="en-US" dirty="0" err="1"/>
+              <a:t>Tỉ</a:t>
+            </a:r>
+            <a:r>
+              <a:rPr lang="en-US" dirty="0"/>
+              <a:t> </a:t>
+            </a:r>
+            <a:r>
+              <a:rPr lang="en-US" dirty="0" err="1"/>
+              <a:t>lệ</a:t>
+            </a:r>
+            <a:r>
+              <a:rPr lang="en-US" dirty="0"/>
+              <a:t> data</a:t>
+            </a:r>
+          </a:p>
+          <a:p>
+            <a:pPr lvl="1"/>
+            <a:r>
+              <a:rPr lang="en-US" dirty="0"/>
+              <a:t>Training: </a:t>
+            </a:r>
+            <a:r>
+              <a:rPr lang="en-US" dirty="0" err="1"/>
+              <a:t>chiếm</a:t>
+            </a:r>
+            <a:r>
+              <a:rPr lang="en-US" dirty="0"/>
+              <a:t> 80 % -90% </a:t>
+            </a:r>
+            <a:r>
+              <a:rPr lang="en-US" dirty="0" err="1"/>
+              <a:t>tổng</a:t>
+            </a:r>
+            <a:r>
+              <a:rPr lang="en-US" dirty="0"/>
+              <a:t> </a:t>
+            </a:r>
+            <a:r>
+              <a:rPr lang="en-US" dirty="0" err="1"/>
+              <a:t>dữ</a:t>
+            </a:r>
+            <a:r>
+              <a:rPr lang="en-US" dirty="0"/>
+              <a:t> </a:t>
+            </a:r>
+            <a:r>
+              <a:rPr lang="en-US" dirty="0" err="1"/>
+              <a:t>liệu</a:t>
+            </a:r>
+            <a:endParaRPr lang="en-US" dirty="0"/>
+          </a:p>
+          <a:p>
+            <a:pPr lvl="1"/>
+            <a:r>
+              <a:rPr lang="en-US" dirty="0"/>
+              <a:t>V</a:t>
+            </a:r>
+            <a:r>
+              <a:rPr lang="vi-VN" dirty="0"/>
+              <a:t>alidation</a:t>
+            </a:r>
+            <a:r>
+              <a:rPr lang="en-US" dirty="0"/>
+              <a:t>:</a:t>
+            </a:r>
+            <a:r>
+              <a:rPr lang="vi-VN" dirty="0"/>
+              <a:t> </a:t>
+            </a:r>
+            <a:r>
+              <a:rPr lang="en-US" dirty="0"/>
+              <a:t>10–20% </a:t>
+            </a:r>
+            <a:r>
+              <a:rPr lang="en-US" dirty="0" err="1"/>
+              <a:t>tổng</a:t>
+            </a:r>
+            <a:r>
+              <a:rPr lang="en-US" dirty="0"/>
+              <a:t> </a:t>
+            </a:r>
+            <a:r>
+              <a:rPr lang="en-US" dirty="0" err="1"/>
+              <a:t>dữ</a:t>
+            </a:r>
+            <a:r>
+              <a:rPr lang="en-US" dirty="0"/>
+              <a:t> </a:t>
+            </a:r>
+            <a:r>
+              <a:rPr lang="en-US" dirty="0" err="1"/>
+              <a:t>liệu</a:t>
+            </a:r>
+            <a:endParaRPr lang="en-US" dirty="0"/>
+          </a:p>
+          <a:p>
+            <a:pPr marL="0" indent="0">
+              <a:buNone/>
+            </a:pPr>
+            <a:endParaRPr lang="en-US" dirty="0"/>
           </a:p>
         </p:txBody>
       </p:sp>
@@ -4789,6 +5059,761 @@
     <p:extLst>
       <p:ext uri="{BB962C8B-B14F-4D97-AF65-F5344CB8AC3E}">
         <p14:creationId xmlns:p14="http://schemas.microsoft.com/office/powerpoint/2010/main" val="2067616732"/>
+      </p:ext>
+    </p:extLst>
+  </p:cSld>
+  <p:clrMapOvr>
+    <a:masterClrMapping/>
+  </p:clrMapOvr>
+</p:sld>
+</file>
+
+<file path=ppt/slides/slide14.xml><?xml version="1.0" encoding="utf-8"?>
+<p:sld xmlns:a="http://schemas.openxmlformats.org/drawingml/2006/main" xmlns:r="http://schemas.openxmlformats.org/officeDocument/2006/relationships" xmlns:p="http://schemas.openxmlformats.org/presentationml/2006/main">
+  <p:cSld>
+    <p:spTree>
+      <p:nvGrpSpPr>
+        <p:cNvPr id="1" name=""/>
+        <p:cNvGrpSpPr/>
+        <p:nvPr/>
+      </p:nvGrpSpPr>
+      <p:grpSpPr>
+        <a:xfrm>
+          <a:off x="0" y="0"/>
+          <a:ext cx="0" cy="0"/>
+          <a:chOff x="0" y="0"/>
+          <a:chExt cx="0" cy="0"/>
+        </a:xfrm>
+      </p:grpSpPr>
+      <p:sp>
+        <p:nvSpPr>
+          <p:cNvPr id="2" name="Title 1">
+            <a:extLst>
+              <a:ext uri="{FF2B5EF4-FFF2-40B4-BE49-F238E27FC236}">
+                <a16:creationId xmlns:a16="http://schemas.microsoft.com/office/drawing/2014/main" id="{D3EB5C88-F4AF-455A-8324-E302EED87B34}"/>
+              </a:ext>
+            </a:extLst>
+          </p:cNvPr>
+          <p:cNvSpPr>
+            <a:spLocks noGrp="1"/>
+          </p:cNvSpPr>
+          <p:nvPr>
+            <p:ph type="title"/>
+          </p:nvPr>
+        </p:nvSpPr>
+        <p:spPr/>
+        <p:txBody>
+          <a:bodyPr/>
+          <a:lstStyle/>
+          <a:p>
+            <a:r>
+              <a:rPr lang="en-US" dirty="0" err="1"/>
+              <a:t>Chuẩn</a:t>
+            </a:r>
+            <a:r>
+              <a:rPr lang="en-US" dirty="0"/>
+              <a:t> </a:t>
+            </a:r>
+            <a:r>
+              <a:rPr lang="en-US" dirty="0" err="1"/>
+              <a:t>bị</a:t>
+            </a:r>
+            <a:r>
+              <a:rPr lang="en-US" dirty="0"/>
+              <a:t> </a:t>
+            </a:r>
+            <a:r>
+              <a:rPr lang="en-US" dirty="0" err="1"/>
+              <a:t>dữ</a:t>
+            </a:r>
+            <a:r>
+              <a:rPr lang="en-US" dirty="0"/>
+              <a:t> </a:t>
+            </a:r>
+            <a:r>
+              <a:rPr lang="en-US" dirty="0" err="1"/>
+              <a:t>liệu</a:t>
+            </a:r>
+            <a:r>
+              <a:rPr lang="en-US" dirty="0"/>
+              <a:t> </a:t>
+            </a:r>
+            <a:r>
+              <a:rPr lang="en-US" dirty="0" err="1"/>
+              <a:t>để</a:t>
+            </a:r>
+            <a:r>
+              <a:rPr lang="en-US" dirty="0"/>
+              <a:t> </a:t>
+            </a:r>
+            <a:r>
+              <a:rPr lang="en-US" dirty="0" err="1"/>
+              <a:t>trainning</a:t>
+            </a:r>
+            <a:r>
+              <a:rPr lang="en-US" dirty="0"/>
+              <a:t> </a:t>
+            </a:r>
+            <a:r>
+              <a:rPr lang="en-US" dirty="0" err="1"/>
+              <a:t>và</a:t>
+            </a:r>
+            <a:r>
+              <a:rPr lang="en-US" dirty="0"/>
+              <a:t> validation</a:t>
+            </a:r>
+          </a:p>
+        </p:txBody>
+      </p:sp>
+      <p:sp>
+        <p:nvSpPr>
+          <p:cNvPr id="3" name="Content Placeholder 2">
+            <a:extLst>
+              <a:ext uri="{FF2B5EF4-FFF2-40B4-BE49-F238E27FC236}">
+                <a16:creationId xmlns:a16="http://schemas.microsoft.com/office/drawing/2014/main" id="{7E71AD3B-8519-4A93-ACB3-4399F3171A80}"/>
+              </a:ext>
+            </a:extLst>
+          </p:cNvPr>
+          <p:cNvSpPr>
+            <a:spLocks noGrp="1"/>
+          </p:cNvSpPr>
+          <p:nvPr>
+            <p:ph idx="1"/>
+          </p:nvPr>
+        </p:nvSpPr>
+        <p:spPr/>
+        <p:txBody>
+          <a:bodyPr/>
+          <a:lstStyle/>
+          <a:p>
+            <a:r>
+              <a:rPr lang="en-US" dirty="0" err="1"/>
+              <a:t>Ví</a:t>
+            </a:r>
+            <a:r>
+              <a:rPr lang="en-US" dirty="0"/>
+              <a:t> </a:t>
+            </a:r>
+            <a:r>
+              <a:rPr lang="en-US" dirty="0" err="1"/>
+              <a:t>dụ</a:t>
+            </a:r>
+            <a:r>
+              <a:rPr lang="en-US" dirty="0"/>
+              <a:t>:</a:t>
+            </a:r>
+          </a:p>
+          <a:p>
+            <a:pPr marL="0" indent="0">
+              <a:buNone/>
+            </a:pPr>
+            <a:endParaRPr lang="en-US" dirty="0"/>
+          </a:p>
+        </p:txBody>
+      </p:sp>
+    </p:spTree>
+    <p:extLst>
+      <p:ext uri="{BB962C8B-B14F-4D97-AF65-F5344CB8AC3E}">
+        <p14:creationId xmlns:p14="http://schemas.microsoft.com/office/powerpoint/2010/main" val="2010755086"/>
+      </p:ext>
+    </p:extLst>
+  </p:cSld>
+  <p:clrMapOvr>
+    <a:masterClrMapping/>
+  </p:clrMapOvr>
+</p:sld>
+</file>
+
+<file path=ppt/slides/slide15.xml><?xml version="1.0" encoding="utf-8"?>
+<p:sld xmlns:a="http://schemas.openxmlformats.org/drawingml/2006/main" xmlns:r="http://schemas.openxmlformats.org/officeDocument/2006/relationships" xmlns:p="http://schemas.openxmlformats.org/presentationml/2006/main">
+  <p:cSld>
+    <p:spTree>
+      <p:nvGrpSpPr>
+        <p:cNvPr id="1" name=""/>
+        <p:cNvGrpSpPr/>
+        <p:nvPr/>
+      </p:nvGrpSpPr>
+      <p:grpSpPr>
+        <a:xfrm>
+          <a:off x="0" y="0"/>
+          <a:ext cx="0" cy="0"/>
+          <a:chOff x="0" y="0"/>
+          <a:chExt cx="0" cy="0"/>
+        </a:xfrm>
+      </p:grpSpPr>
+      <p:sp>
+        <p:nvSpPr>
+          <p:cNvPr id="2" name="Title 1">
+            <a:extLst>
+              <a:ext uri="{FF2B5EF4-FFF2-40B4-BE49-F238E27FC236}">
+                <a16:creationId xmlns:a16="http://schemas.microsoft.com/office/drawing/2014/main" id="{D3EB5C88-F4AF-455A-8324-E302EED87B34}"/>
+              </a:ext>
+            </a:extLst>
+          </p:cNvPr>
+          <p:cNvSpPr>
+            <a:spLocks noGrp="1"/>
+          </p:cNvSpPr>
+          <p:nvPr>
+            <p:ph type="title"/>
+          </p:nvPr>
+        </p:nvSpPr>
+        <p:spPr/>
+        <p:txBody>
+          <a:bodyPr/>
+          <a:lstStyle/>
+          <a:p>
+            <a:r>
+              <a:rPr lang="en-US" dirty="0" err="1"/>
+              <a:t>Chuẩn</a:t>
+            </a:r>
+            <a:r>
+              <a:rPr lang="en-US" dirty="0"/>
+              <a:t> </a:t>
+            </a:r>
+            <a:r>
+              <a:rPr lang="en-US" dirty="0" err="1"/>
+              <a:t>bị</a:t>
+            </a:r>
+            <a:r>
+              <a:rPr lang="en-US" dirty="0"/>
+              <a:t> </a:t>
+            </a:r>
+            <a:r>
+              <a:rPr lang="en-US" dirty="0" err="1"/>
+              <a:t>dữ</a:t>
+            </a:r>
+            <a:r>
+              <a:rPr lang="en-US" dirty="0"/>
+              <a:t> </a:t>
+            </a:r>
+            <a:r>
+              <a:rPr lang="en-US" dirty="0" err="1"/>
+              <a:t>liệu</a:t>
+            </a:r>
+            <a:r>
+              <a:rPr lang="en-US" dirty="0"/>
+              <a:t> </a:t>
+            </a:r>
+            <a:r>
+              <a:rPr lang="en-US" dirty="0" err="1"/>
+              <a:t>để</a:t>
+            </a:r>
+            <a:r>
+              <a:rPr lang="en-US" dirty="0"/>
+              <a:t> </a:t>
+            </a:r>
+            <a:r>
+              <a:rPr lang="en-US" dirty="0" err="1"/>
+              <a:t>trainning</a:t>
+            </a:r>
+            <a:r>
+              <a:rPr lang="en-US" dirty="0"/>
+              <a:t> </a:t>
+            </a:r>
+            <a:r>
+              <a:rPr lang="en-US" dirty="0" err="1"/>
+              <a:t>và</a:t>
+            </a:r>
+            <a:r>
+              <a:rPr lang="en-US" dirty="0"/>
+              <a:t> validation</a:t>
+            </a:r>
+          </a:p>
+        </p:txBody>
+      </p:sp>
+      <p:sp>
+        <p:nvSpPr>
+          <p:cNvPr id="3" name="Content Placeholder 2">
+            <a:extLst>
+              <a:ext uri="{FF2B5EF4-FFF2-40B4-BE49-F238E27FC236}">
+                <a16:creationId xmlns:a16="http://schemas.microsoft.com/office/drawing/2014/main" id="{7E71AD3B-8519-4A93-ACB3-4399F3171A80}"/>
+              </a:ext>
+            </a:extLst>
+          </p:cNvPr>
+          <p:cNvSpPr>
+            <a:spLocks noGrp="1"/>
+          </p:cNvSpPr>
+          <p:nvPr>
+            <p:ph idx="1"/>
+          </p:nvPr>
+        </p:nvSpPr>
+        <p:spPr/>
+        <p:txBody>
+          <a:bodyPr>
+            <a:normAutofit fontScale="85000" lnSpcReduction="20000"/>
+          </a:bodyPr>
+          <a:lstStyle/>
+          <a:p>
+            <a:r>
+              <a:rPr lang="vi-VN" dirty="0"/>
+              <a:t>Mục tiêu </a:t>
+            </a:r>
+            <a:r>
+              <a:rPr lang="en-US" dirty="0" err="1"/>
+              <a:t>tranning</a:t>
+            </a:r>
+            <a:r>
+              <a:rPr lang="en-US" dirty="0"/>
+              <a:t> data</a:t>
+            </a:r>
+          </a:p>
+          <a:p>
+            <a:pPr lvl="1"/>
+            <a:r>
+              <a:rPr lang="en-US" dirty="0" err="1"/>
+              <a:t>Dạy</a:t>
+            </a:r>
+            <a:r>
+              <a:rPr lang="en-US" dirty="0"/>
+              <a:t> </a:t>
+            </a:r>
+            <a:r>
+              <a:rPr lang="en-US" dirty="0" err="1"/>
+              <a:t>kiến</a:t>
+            </a:r>
+            <a:r>
+              <a:rPr lang="en-US" dirty="0"/>
+              <a:t> </a:t>
+            </a:r>
+            <a:r>
+              <a:rPr lang="en-US" dirty="0" err="1"/>
+              <a:t>thức</a:t>
+            </a:r>
+            <a:endParaRPr lang="en-US" dirty="0"/>
+          </a:p>
+          <a:p>
+            <a:pPr lvl="1"/>
+            <a:r>
+              <a:rPr lang="en-US" dirty="0" err="1"/>
+              <a:t>Dạy</a:t>
+            </a:r>
+            <a:r>
+              <a:rPr lang="en-US" dirty="0"/>
+              <a:t> </a:t>
+            </a:r>
+            <a:r>
+              <a:rPr lang="en-US" dirty="0" err="1"/>
+              <a:t>cách</a:t>
+            </a:r>
+            <a:r>
+              <a:rPr lang="en-US" dirty="0"/>
+              <a:t> </a:t>
+            </a:r>
+            <a:r>
+              <a:rPr lang="en-US" dirty="0" err="1"/>
+              <a:t>trả</a:t>
+            </a:r>
+            <a:r>
+              <a:rPr lang="en-US" dirty="0"/>
+              <a:t> </a:t>
+            </a:r>
+            <a:r>
+              <a:rPr lang="en-US" dirty="0" err="1"/>
+              <a:t>lời</a:t>
+            </a:r>
+            <a:endParaRPr lang="en-US" dirty="0"/>
+          </a:p>
+          <a:p>
+            <a:pPr lvl="1"/>
+            <a:r>
+              <a:rPr lang="en-US" dirty="0" err="1"/>
+              <a:t>Dạy</a:t>
+            </a:r>
+            <a:r>
+              <a:rPr lang="en-US" dirty="0"/>
+              <a:t> format output</a:t>
+            </a:r>
+          </a:p>
+          <a:p>
+            <a:pPr lvl="1"/>
+            <a:r>
+              <a:rPr lang="en-US" dirty="0" err="1"/>
+              <a:t>Dạy</a:t>
+            </a:r>
+            <a:r>
+              <a:rPr lang="en-US" dirty="0"/>
+              <a:t> tone &amp; </a:t>
+            </a:r>
+            <a:r>
+              <a:rPr lang="en-US" dirty="0" err="1"/>
+              <a:t>phong</a:t>
+            </a:r>
+            <a:r>
+              <a:rPr lang="en-US" dirty="0"/>
+              <a:t> </a:t>
+            </a:r>
+            <a:r>
+              <a:rPr lang="en-US" dirty="0" err="1"/>
+              <a:t>cách</a:t>
+            </a:r>
+            <a:endParaRPr lang="en-US" dirty="0"/>
+          </a:p>
+          <a:p>
+            <a:r>
+              <a:rPr lang="en-US" dirty="0" err="1"/>
+              <a:t>Tiêu</a:t>
+            </a:r>
+            <a:r>
+              <a:rPr lang="en-US" dirty="0"/>
+              <a:t> </a:t>
+            </a:r>
+            <a:r>
+              <a:rPr lang="en-US" dirty="0" err="1"/>
+              <a:t>chí</a:t>
+            </a:r>
+            <a:r>
+              <a:rPr lang="en-US" dirty="0"/>
+              <a:t> </a:t>
+            </a:r>
+            <a:r>
+              <a:rPr lang="en-US" dirty="0" err="1"/>
+              <a:t>của</a:t>
+            </a:r>
+            <a:r>
+              <a:rPr lang="en-US" dirty="0"/>
+              <a:t> </a:t>
+            </a:r>
+            <a:r>
+              <a:rPr lang="en-US" dirty="0" err="1"/>
+              <a:t>tranning</a:t>
+            </a:r>
+            <a:r>
+              <a:rPr lang="en-US" dirty="0"/>
+              <a:t> Data</a:t>
+            </a:r>
+          </a:p>
+          <a:p>
+            <a:pPr lvl="1"/>
+            <a:r>
+              <a:rPr lang="vi-VN" dirty="0"/>
+              <a:t>| Tiêu chí        | Mô tả                               |</a:t>
+            </a:r>
+          </a:p>
+          <a:p>
+            <a:pPr lvl="1"/>
+            <a:r>
+              <a:rPr lang="vi-VN" dirty="0"/>
+              <a:t>| --------------- | ----------------------------------- |</a:t>
+            </a:r>
+          </a:p>
+          <a:p>
+            <a:pPr lvl="1"/>
+            <a:r>
+              <a:rPr lang="vi-VN" dirty="0"/>
+              <a:t>| Rõ ràng         | Prompt cụ thể, không mơ hồ          |</a:t>
+            </a:r>
+          </a:p>
+          <a:p>
+            <a:pPr lvl="1"/>
+            <a:r>
+              <a:rPr lang="vi-VN" dirty="0"/>
+              <a:t>| Chính xác       | Output đúng nghiệp vụ               |</a:t>
+            </a:r>
+          </a:p>
+          <a:p>
+            <a:pPr lvl="1"/>
+            <a:r>
+              <a:rPr lang="vi-VN" dirty="0"/>
+              <a:t>| Nhất quán       | Format &amp; tone thống nhất            |</a:t>
+            </a:r>
+          </a:p>
+          <a:p>
+            <a:pPr lvl="1"/>
+            <a:r>
+              <a:rPr lang="vi-VN" dirty="0"/>
+              <a:t>| Thực tế         | Giống user thật                     |</a:t>
+            </a:r>
+          </a:p>
+          <a:p>
+            <a:pPr lvl="1"/>
+            <a:r>
+              <a:rPr lang="vi-VN" dirty="0"/>
+              <a:t>| Đa dạng         | Bao phủ nhiều tình huống            |</a:t>
+            </a:r>
+          </a:p>
+          <a:p>
+            <a:pPr lvl="1"/>
+            <a:r>
+              <a:rPr lang="vi-VN" dirty="0"/>
+              <a:t>| Không trùng lặp | Tránh overfit                       |</a:t>
+            </a:r>
+          </a:p>
+          <a:p>
+            <a:pPr lvl="1"/>
+            <a:r>
+              <a:rPr lang="vi-VN" dirty="0"/>
+              <a:t>| Dạy tư duy      | Dạy cách lập luận, không chỉ đáp án |</a:t>
+            </a:r>
+            <a:endParaRPr lang="en-US" dirty="0"/>
+          </a:p>
+          <a:p>
+            <a:pPr marL="0" indent="0">
+              <a:buNone/>
+            </a:pPr>
+            <a:endParaRPr lang="en-US" dirty="0"/>
+          </a:p>
+        </p:txBody>
+      </p:sp>
+    </p:spTree>
+    <p:extLst>
+      <p:ext uri="{BB962C8B-B14F-4D97-AF65-F5344CB8AC3E}">
+        <p14:creationId xmlns:p14="http://schemas.microsoft.com/office/powerpoint/2010/main" val="2665586117"/>
+      </p:ext>
+    </p:extLst>
+  </p:cSld>
+  <p:clrMapOvr>
+    <a:masterClrMapping/>
+  </p:clrMapOvr>
+</p:sld>
+</file>
+
+<file path=ppt/slides/slide16.xml><?xml version="1.0" encoding="utf-8"?>
+<p:sld xmlns:a="http://schemas.openxmlformats.org/drawingml/2006/main" xmlns:r="http://schemas.openxmlformats.org/officeDocument/2006/relationships" xmlns:p="http://schemas.openxmlformats.org/presentationml/2006/main">
+  <p:cSld>
+    <p:spTree>
+      <p:nvGrpSpPr>
+        <p:cNvPr id="1" name=""/>
+        <p:cNvGrpSpPr/>
+        <p:nvPr/>
+      </p:nvGrpSpPr>
+      <p:grpSpPr>
+        <a:xfrm>
+          <a:off x="0" y="0"/>
+          <a:ext cx="0" cy="0"/>
+          <a:chOff x="0" y="0"/>
+          <a:chExt cx="0" cy="0"/>
+        </a:xfrm>
+      </p:grpSpPr>
+      <p:sp>
+        <p:nvSpPr>
+          <p:cNvPr id="2" name="Title 1">
+            <a:extLst>
+              <a:ext uri="{FF2B5EF4-FFF2-40B4-BE49-F238E27FC236}">
+                <a16:creationId xmlns:a16="http://schemas.microsoft.com/office/drawing/2014/main" id="{D3EB5C88-F4AF-455A-8324-E302EED87B34}"/>
+              </a:ext>
+            </a:extLst>
+          </p:cNvPr>
+          <p:cNvSpPr>
+            <a:spLocks noGrp="1"/>
+          </p:cNvSpPr>
+          <p:nvPr>
+            <p:ph type="title"/>
+          </p:nvPr>
+        </p:nvSpPr>
+        <p:spPr/>
+        <p:txBody>
+          <a:bodyPr/>
+          <a:lstStyle/>
+          <a:p>
+            <a:r>
+              <a:rPr lang="en-US" dirty="0" err="1"/>
+              <a:t>Chuẩn</a:t>
+            </a:r>
+            <a:r>
+              <a:rPr lang="en-US" dirty="0"/>
+              <a:t> </a:t>
+            </a:r>
+            <a:r>
+              <a:rPr lang="en-US" dirty="0" err="1"/>
+              <a:t>bị</a:t>
+            </a:r>
+            <a:r>
+              <a:rPr lang="en-US" dirty="0"/>
+              <a:t> </a:t>
+            </a:r>
+            <a:r>
+              <a:rPr lang="en-US" dirty="0" err="1"/>
+              <a:t>dữ</a:t>
+            </a:r>
+            <a:r>
+              <a:rPr lang="en-US" dirty="0"/>
+              <a:t> </a:t>
+            </a:r>
+            <a:r>
+              <a:rPr lang="en-US" dirty="0" err="1"/>
+              <a:t>liệu</a:t>
+            </a:r>
+            <a:r>
+              <a:rPr lang="en-US" dirty="0"/>
+              <a:t> </a:t>
+            </a:r>
+            <a:r>
+              <a:rPr lang="en-US" dirty="0" err="1"/>
+              <a:t>để</a:t>
+            </a:r>
+            <a:r>
+              <a:rPr lang="en-US" dirty="0"/>
+              <a:t> </a:t>
+            </a:r>
+            <a:r>
+              <a:rPr lang="en-US" dirty="0" err="1"/>
+              <a:t>trainning</a:t>
+            </a:r>
+            <a:r>
+              <a:rPr lang="en-US" dirty="0"/>
+              <a:t> </a:t>
+            </a:r>
+            <a:r>
+              <a:rPr lang="en-US" dirty="0" err="1"/>
+              <a:t>và</a:t>
+            </a:r>
+            <a:r>
+              <a:rPr lang="en-US" dirty="0"/>
+              <a:t> validation</a:t>
+            </a:r>
+          </a:p>
+        </p:txBody>
+      </p:sp>
+      <p:sp>
+        <p:nvSpPr>
+          <p:cNvPr id="3" name="Content Placeholder 2">
+            <a:extLst>
+              <a:ext uri="{FF2B5EF4-FFF2-40B4-BE49-F238E27FC236}">
+                <a16:creationId xmlns:a16="http://schemas.microsoft.com/office/drawing/2014/main" id="{7E71AD3B-8519-4A93-ACB3-4399F3171A80}"/>
+              </a:ext>
+            </a:extLst>
+          </p:cNvPr>
+          <p:cNvSpPr>
+            <a:spLocks noGrp="1"/>
+          </p:cNvSpPr>
+          <p:nvPr>
+            <p:ph idx="1"/>
+          </p:nvPr>
+        </p:nvSpPr>
+        <p:spPr/>
+        <p:txBody>
+          <a:bodyPr>
+            <a:normAutofit fontScale="85000" lnSpcReduction="20000"/>
+          </a:bodyPr>
+          <a:lstStyle/>
+          <a:p>
+            <a:r>
+              <a:rPr lang="vi-VN" dirty="0"/>
+              <a:t>Mục tiêu </a:t>
+            </a:r>
+            <a:r>
+              <a:rPr lang="en-US" dirty="0"/>
+              <a:t>validation data</a:t>
+            </a:r>
+          </a:p>
+          <a:p>
+            <a:pPr lvl="1"/>
+            <a:r>
+              <a:rPr lang="vi-VN" dirty="0"/>
+              <a:t>Gồm bộ câu hỏi mà model CHƯA BAO GIỜ thấy, dùng để kiểm tra xem model có “hiểu thật” hay chỉ “học vẹt”.</a:t>
+            </a:r>
+          </a:p>
+          <a:p>
+            <a:pPr lvl="1"/>
+            <a:r>
+              <a:rPr lang="vi-VN" dirty="0"/>
+              <a:t>Validation Data KHÔNG được: copy training, Chỉ đổi vài chữ </a:t>
+            </a:r>
+            <a:endParaRPr lang="en-US" dirty="0"/>
+          </a:p>
+          <a:p>
+            <a:r>
+              <a:rPr lang="en-US" dirty="0" err="1"/>
+              <a:t>Tiêu</a:t>
+            </a:r>
+            <a:r>
+              <a:rPr lang="en-US" dirty="0"/>
+              <a:t> </a:t>
+            </a:r>
+            <a:r>
+              <a:rPr lang="en-US" dirty="0" err="1"/>
+              <a:t>chí</a:t>
+            </a:r>
+            <a:r>
+              <a:rPr lang="en-US" dirty="0"/>
+              <a:t> </a:t>
+            </a:r>
+            <a:r>
+              <a:rPr lang="en-US" dirty="0" err="1"/>
+              <a:t>của</a:t>
+            </a:r>
+            <a:r>
+              <a:rPr lang="en-US" dirty="0"/>
+              <a:t> validation Data</a:t>
+            </a:r>
+          </a:p>
+          <a:p>
+            <a:pPr lvl="1"/>
+            <a:r>
+              <a:rPr lang="vi-VN" dirty="0"/>
+              <a:t>| Tiêu chí            | Mô tả                                       |</a:t>
+            </a:r>
+          </a:p>
+          <a:p>
+            <a:pPr lvl="1"/>
+            <a:r>
+              <a:rPr lang="vi-VN" dirty="0"/>
+              <a:t>| --------------------| ------------------------------------------- |</a:t>
+            </a:r>
+          </a:p>
+          <a:p>
+            <a:pPr lvl="1"/>
+            <a:r>
+              <a:rPr lang="vi-VN" dirty="0"/>
+              <a:t>| Không trùng lặp     | Không trùng dữ liệu Training                |</a:t>
+            </a:r>
+          </a:p>
+          <a:p>
+            <a:pPr lvl="1"/>
+            <a:r>
+              <a:rPr lang="vi-VN" dirty="0"/>
+              <a:t>| Câu hỏi mới         | Cùng chủ đề nhưng cách hỏi khác             |</a:t>
+            </a:r>
+          </a:p>
+          <a:p>
+            <a:pPr lvl="1"/>
+            <a:r>
+              <a:rPr lang="vi-VN" dirty="0"/>
+              <a:t>| Yêu cầu suy luận    | Kiểm tra model có hiểu, không chỉ học thuộc |</a:t>
+            </a:r>
+          </a:p>
+          <a:p>
+            <a:pPr lvl="1"/>
+            <a:r>
+              <a:rPr lang="vi-VN" dirty="0"/>
+              <a:t>| Có edge cases       | Bao gồm tình huống khó, bẫy, lỗi            |</a:t>
+            </a:r>
+          </a:p>
+          <a:p>
+            <a:pPr lvl="1"/>
+            <a:r>
+              <a:rPr lang="vi-VN" dirty="0"/>
+              <a:t>| Đa dạng             | Nhiều loại user, mức độ khó                 |</a:t>
+            </a:r>
+          </a:p>
+          <a:p>
+            <a:pPr lvl="1"/>
+            <a:r>
+              <a:rPr lang="vi-VN" dirty="0"/>
+              <a:t>| Thực tế             | Phản ánh hành vi người dùng thật            |</a:t>
+            </a:r>
+          </a:p>
+          <a:p>
+            <a:pPr lvl="1"/>
+            <a:r>
+              <a:rPr lang="vi-VN" dirty="0"/>
+              <a:t>| Kiểm tra format     | Xem model có giữ đúng format trả lời        |</a:t>
+            </a:r>
+          </a:p>
+          <a:p>
+            <a:pPr lvl="1"/>
+            <a:r>
+              <a:rPr lang="vi-VN" dirty="0"/>
+              <a:t>| Chống hallucination | Kiểm tra model có bịa thông tin             |</a:t>
+            </a:r>
+            <a:endParaRPr lang="en-US" dirty="0"/>
+          </a:p>
+        </p:txBody>
+      </p:sp>
+    </p:spTree>
+    <p:extLst>
+      <p:ext uri="{BB962C8B-B14F-4D97-AF65-F5344CB8AC3E}">
+        <p14:creationId xmlns:p14="http://schemas.microsoft.com/office/powerpoint/2010/main" val="676326200"/>
       </p:ext>
     </p:extLst>
   </p:cSld>

--- a/fine-tune-pc/AI-Fine_Tune.pptx
+++ b/fine-tune-pc/AI-Fine_Tune.pptx
@@ -18,9 +18,17 @@
     <p:sldId id="265" r:id="rId12"/>
     <p:sldId id="269" r:id="rId13"/>
     <p:sldId id="264" r:id="rId14"/>
-    <p:sldId id="272" r:id="rId15"/>
-    <p:sldId id="270" r:id="rId16"/>
-    <p:sldId id="271" r:id="rId17"/>
+    <p:sldId id="270" r:id="rId15"/>
+    <p:sldId id="271" r:id="rId16"/>
+    <p:sldId id="272" r:id="rId17"/>
+    <p:sldId id="274" r:id="rId18"/>
+    <p:sldId id="273" r:id="rId19"/>
+    <p:sldId id="275" r:id="rId20"/>
+    <p:sldId id="276" r:id="rId21"/>
+    <p:sldId id="277" r:id="rId22"/>
+    <p:sldId id="278" r:id="rId23"/>
+    <p:sldId id="279" r:id="rId24"/>
+    <p:sldId id="280" r:id="rId25"/>
   </p:sldIdLst>
   <p:sldSz cx="12192000" cy="6858000"/>
   <p:notesSz cx="6858000" cy="9144000"/>
@@ -5183,25 +5191,212 @@
         </p:nvSpPr>
         <p:spPr/>
         <p:txBody>
-          <a:bodyPr/>
+          <a:bodyPr>
+            <a:normAutofit fontScale="85000" lnSpcReduction="20000"/>
+          </a:bodyPr>
           <a:lstStyle/>
           <a:p>
             <a:r>
-              <a:rPr lang="en-US" dirty="0" err="1"/>
-              <a:t>Ví</a:t>
-            </a:r>
-            <a:r>
-              <a:rPr lang="en-US" dirty="0"/>
-              <a:t> </a:t>
-            </a:r>
-            <a:r>
-              <a:rPr lang="en-US" dirty="0" err="1"/>
-              <a:t>dụ</a:t>
-            </a:r>
-            <a:r>
-              <a:rPr lang="en-US" dirty="0"/>
-              <a:t>:</a:t>
-            </a:r>
+              <a:rPr lang="vi-VN" dirty="0"/>
+              <a:t>Mục tiêu </a:t>
+            </a:r>
+            <a:r>
+              <a:rPr lang="en-US" dirty="0" err="1"/>
+              <a:t>tranning</a:t>
+            </a:r>
+            <a:r>
+              <a:rPr lang="en-US" dirty="0"/>
+              <a:t> data</a:t>
+            </a:r>
+          </a:p>
+          <a:p>
+            <a:pPr lvl="1"/>
+            <a:r>
+              <a:rPr lang="en-US" dirty="0" err="1"/>
+              <a:t>Dạy</a:t>
+            </a:r>
+            <a:r>
+              <a:rPr lang="en-US" dirty="0"/>
+              <a:t> </a:t>
+            </a:r>
+            <a:r>
+              <a:rPr lang="en-US" dirty="0" err="1"/>
+              <a:t>kiến</a:t>
+            </a:r>
+            <a:r>
+              <a:rPr lang="en-US" dirty="0"/>
+              <a:t> </a:t>
+            </a:r>
+            <a:r>
+              <a:rPr lang="en-US" dirty="0" err="1"/>
+              <a:t>thức</a:t>
+            </a:r>
+            <a:endParaRPr lang="en-US" dirty="0"/>
+          </a:p>
+          <a:p>
+            <a:pPr lvl="1"/>
+            <a:r>
+              <a:rPr lang="en-US" dirty="0" err="1"/>
+              <a:t>Dạy</a:t>
+            </a:r>
+            <a:r>
+              <a:rPr lang="en-US" dirty="0"/>
+              <a:t> </a:t>
+            </a:r>
+            <a:r>
+              <a:rPr lang="en-US" dirty="0" err="1"/>
+              <a:t>cách</a:t>
+            </a:r>
+            <a:r>
+              <a:rPr lang="en-US" dirty="0"/>
+              <a:t> </a:t>
+            </a:r>
+            <a:r>
+              <a:rPr lang="en-US" dirty="0" err="1"/>
+              <a:t>trả</a:t>
+            </a:r>
+            <a:r>
+              <a:rPr lang="en-US" dirty="0"/>
+              <a:t> </a:t>
+            </a:r>
+            <a:r>
+              <a:rPr lang="en-US" dirty="0" err="1"/>
+              <a:t>lời</a:t>
+            </a:r>
+            <a:endParaRPr lang="en-US" dirty="0"/>
+          </a:p>
+          <a:p>
+            <a:pPr lvl="1"/>
+            <a:r>
+              <a:rPr lang="en-US" dirty="0" err="1"/>
+              <a:t>Dạy</a:t>
+            </a:r>
+            <a:r>
+              <a:rPr lang="en-US" dirty="0"/>
+              <a:t> format output</a:t>
+            </a:r>
+          </a:p>
+          <a:p>
+            <a:pPr lvl="1"/>
+            <a:r>
+              <a:rPr lang="en-US" dirty="0" err="1"/>
+              <a:t>Dạy</a:t>
+            </a:r>
+            <a:r>
+              <a:rPr lang="en-US" dirty="0"/>
+              <a:t> tone &amp; </a:t>
+            </a:r>
+            <a:r>
+              <a:rPr lang="en-US" dirty="0" err="1"/>
+              <a:t>phong</a:t>
+            </a:r>
+            <a:r>
+              <a:rPr lang="en-US" dirty="0"/>
+              <a:t> </a:t>
+            </a:r>
+            <a:r>
+              <a:rPr lang="en-US" dirty="0" err="1"/>
+              <a:t>cách</a:t>
+            </a:r>
+            <a:endParaRPr lang="en-US" dirty="0"/>
+          </a:p>
+          <a:p>
+            <a:r>
+              <a:rPr lang="en-US" dirty="0" err="1"/>
+              <a:t>Tiêu</a:t>
+            </a:r>
+            <a:r>
+              <a:rPr lang="en-US" dirty="0"/>
+              <a:t> </a:t>
+            </a:r>
+            <a:r>
+              <a:rPr lang="en-US" dirty="0" err="1"/>
+              <a:t>chí</a:t>
+            </a:r>
+            <a:r>
+              <a:rPr lang="en-US" dirty="0"/>
+              <a:t> </a:t>
+            </a:r>
+            <a:r>
+              <a:rPr lang="en-US" dirty="0" err="1"/>
+              <a:t>của</a:t>
+            </a:r>
+            <a:r>
+              <a:rPr lang="en-US" dirty="0"/>
+              <a:t> </a:t>
+            </a:r>
+            <a:r>
+              <a:rPr lang="en-US" dirty="0" err="1"/>
+              <a:t>tranning</a:t>
+            </a:r>
+            <a:r>
+              <a:rPr lang="en-US" dirty="0"/>
+              <a:t> Data</a:t>
+            </a:r>
+          </a:p>
+          <a:p>
+            <a:pPr lvl="1"/>
+            <a:r>
+              <a:rPr lang="vi-VN" dirty="0"/>
+              <a:t>| Tiêu chí        | Mô tả                               |</a:t>
+            </a:r>
+          </a:p>
+          <a:p>
+            <a:pPr lvl="1"/>
+            <a:r>
+              <a:rPr lang="vi-VN" dirty="0"/>
+              <a:t>| --------------- | ----------------------------------- |</a:t>
+            </a:r>
+          </a:p>
+          <a:p>
+            <a:pPr lvl="1"/>
+            <a:r>
+              <a:rPr lang="vi-VN" dirty="0"/>
+              <a:t>| Rõ ràng         | Prompt cụ thể, không mơ hồ          |</a:t>
+            </a:r>
+          </a:p>
+          <a:p>
+            <a:pPr lvl="1"/>
+            <a:r>
+              <a:rPr lang="vi-VN" dirty="0"/>
+              <a:t>| Chính xác       | Output đúng nghiệp vụ               |</a:t>
+            </a:r>
+          </a:p>
+          <a:p>
+            <a:pPr lvl="1"/>
+            <a:r>
+              <a:rPr lang="vi-VN" dirty="0"/>
+              <a:t>| Nhất quán       | Format &amp; tone thống nhất            |</a:t>
+            </a:r>
+          </a:p>
+          <a:p>
+            <a:pPr lvl="1"/>
+            <a:r>
+              <a:rPr lang="vi-VN" dirty="0"/>
+              <a:t>| Thực tế         | Giống user thật                     |</a:t>
+            </a:r>
+          </a:p>
+          <a:p>
+            <a:pPr lvl="1"/>
+            <a:r>
+              <a:rPr lang="vi-VN" dirty="0"/>
+              <a:t>| Đa dạng         | Bao phủ nhiều tình huống            |</a:t>
+            </a:r>
+          </a:p>
+          <a:p>
+            <a:pPr lvl="1"/>
+            <a:r>
+              <a:rPr lang="vi-VN" dirty="0"/>
+              <a:t>| Không trùng lặp | Tránh overfit                       |</a:t>
+            </a:r>
+          </a:p>
+          <a:p>
+            <a:pPr lvl="1"/>
+            <a:r>
+              <a:rPr lang="vi-VN" dirty="0"/>
+              <a:t>| Dạy tư duy      | Dạy cách lập luận, không chỉ đáp án |</a:t>
+            </a:r>
+            <a:endParaRPr lang="en-US" dirty="0"/>
           </a:p>
           <a:p>
             <a:pPr marL="0" indent="0">
@@ -5214,7 +5409,7 @@
     </p:spTree>
     <p:extLst>
       <p:ext uri="{BB962C8B-B14F-4D97-AF65-F5344CB8AC3E}">
-        <p14:creationId xmlns:p14="http://schemas.microsoft.com/office/powerpoint/2010/main" val="2010755086"/>
+        <p14:creationId xmlns:p14="http://schemas.microsoft.com/office/powerpoint/2010/main" val="2665586117"/>
       </p:ext>
     </p:extLst>
   </p:cSld>
@@ -5349,207 +5544,120 @@
               <a:t>Mục tiêu </a:t>
             </a:r>
             <a:r>
-              <a:rPr lang="en-US" dirty="0" err="1"/>
-              <a:t>tranning</a:t>
-            </a:r>
-            <a:r>
-              <a:rPr lang="en-US" dirty="0"/>
-              <a:t> data</a:t>
+              <a:rPr lang="en-US" dirty="0"/>
+              <a:t>validation data</a:t>
             </a:r>
           </a:p>
           <a:p>
             <a:pPr lvl="1"/>
             <a:r>
-              <a:rPr lang="en-US" dirty="0" err="1"/>
-              <a:t>Dạy</a:t>
-            </a:r>
-            <a:r>
-              <a:rPr lang="en-US" dirty="0"/>
-              <a:t> </a:t>
-            </a:r>
-            <a:r>
-              <a:rPr lang="en-US" dirty="0" err="1"/>
-              <a:t>kiến</a:t>
-            </a:r>
-            <a:r>
-              <a:rPr lang="en-US" dirty="0"/>
-              <a:t> </a:t>
-            </a:r>
-            <a:r>
-              <a:rPr lang="en-US" dirty="0" err="1"/>
-              <a:t>thức</a:t>
+              <a:rPr lang="vi-VN" dirty="0"/>
+              <a:t>Gồm bộ câu hỏi mà model CHƯA BAO GIỜ thấy, dùng để kiểm tra xem model có “hiểu thật” hay chỉ “học vẹt”.</a:t>
+            </a:r>
+          </a:p>
+          <a:p>
+            <a:pPr lvl="1"/>
+            <a:r>
+              <a:rPr lang="vi-VN" dirty="0"/>
+              <a:t>Validation Data KHÔNG được: copy training, Chỉ đổi vài chữ </a:t>
             </a:r>
             <a:endParaRPr lang="en-US" dirty="0"/>
           </a:p>
           <a:p>
+            <a:r>
+              <a:rPr lang="en-US" dirty="0" err="1"/>
+              <a:t>Tiêu</a:t>
+            </a:r>
+            <a:r>
+              <a:rPr lang="en-US" dirty="0"/>
+              <a:t> </a:t>
+            </a:r>
+            <a:r>
+              <a:rPr lang="en-US" dirty="0" err="1"/>
+              <a:t>chí</a:t>
+            </a:r>
+            <a:r>
+              <a:rPr lang="en-US" dirty="0"/>
+              <a:t> </a:t>
+            </a:r>
+            <a:r>
+              <a:rPr lang="en-US" dirty="0" err="1"/>
+              <a:t>của</a:t>
+            </a:r>
+            <a:r>
+              <a:rPr lang="en-US" dirty="0"/>
+              <a:t> validation Data</a:t>
+            </a:r>
+          </a:p>
+          <a:p>
             <a:pPr lvl="1"/>
             <a:r>
-              <a:rPr lang="en-US" dirty="0" err="1"/>
-              <a:t>Dạy</a:t>
-            </a:r>
-            <a:r>
-              <a:rPr lang="en-US" dirty="0"/>
-              <a:t> </a:t>
-            </a:r>
-            <a:r>
-              <a:rPr lang="en-US" dirty="0" err="1"/>
-              <a:t>cách</a:t>
-            </a:r>
-            <a:r>
-              <a:rPr lang="en-US" dirty="0"/>
-              <a:t> </a:t>
-            </a:r>
-            <a:r>
-              <a:rPr lang="en-US" dirty="0" err="1"/>
-              <a:t>trả</a:t>
-            </a:r>
-            <a:r>
-              <a:rPr lang="en-US" dirty="0"/>
-              <a:t> </a:t>
-            </a:r>
-            <a:r>
-              <a:rPr lang="en-US" dirty="0" err="1"/>
-              <a:t>lời</a:t>
-            </a:r>
-            <a:endParaRPr lang="en-US" dirty="0"/>
+              <a:rPr lang="vi-VN" dirty="0"/>
+              <a:t>| Tiêu chí            | Mô tả                                       |</a:t>
+            </a:r>
           </a:p>
           <a:p>
             <a:pPr lvl="1"/>
             <a:r>
-              <a:rPr lang="en-US" dirty="0" err="1"/>
-              <a:t>Dạy</a:t>
-            </a:r>
-            <a:r>
-              <a:rPr lang="en-US" dirty="0"/>
-              <a:t> format output</a:t>
+              <a:rPr lang="vi-VN" dirty="0"/>
+              <a:t>| --------------------| ------------------------------------------- |</a:t>
             </a:r>
           </a:p>
           <a:p>
             <a:pPr lvl="1"/>
             <a:r>
-              <a:rPr lang="en-US" dirty="0" err="1"/>
-              <a:t>Dạy</a:t>
-            </a:r>
-            <a:r>
-              <a:rPr lang="en-US" dirty="0"/>
-              <a:t> tone &amp; </a:t>
-            </a:r>
-            <a:r>
-              <a:rPr lang="en-US" dirty="0" err="1"/>
-              <a:t>phong</a:t>
-            </a:r>
-            <a:r>
-              <a:rPr lang="en-US" dirty="0"/>
-              <a:t> </a:t>
-            </a:r>
-            <a:r>
-              <a:rPr lang="en-US" dirty="0" err="1"/>
-              <a:t>cách</a:t>
-            </a:r>
-            <a:endParaRPr lang="en-US" dirty="0"/>
-          </a:p>
-          <a:p>
-            <a:r>
-              <a:rPr lang="en-US" dirty="0" err="1"/>
-              <a:t>Tiêu</a:t>
-            </a:r>
-            <a:r>
-              <a:rPr lang="en-US" dirty="0"/>
-              <a:t> </a:t>
-            </a:r>
-            <a:r>
-              <a:rPr lang="en-US" dirty="0" err="1"/>
-              <a:t>chí</a:t>
-            </a:r>
-            <a:r>
-              <a:rPr lang="en-US" dirty="0"/>
-              <a:t> </a:t>
-            </a:r>
-            <a:r>
-              <a:rPr lang="en-US" dirty="0" err="1"/>
-              <a:t>của</a:t>
-            </a:r>
-            <a:r>
-              <a:rPr lang="en-US" dirty="0"/>
-              <a:t> </a:t>
-            </a:r>
-            <a:r>
-              <a:rPr lang="en-US" dirty="0" err="1"/>
-              <a:t>tranning</a:t>
-            </a:r>
-            <a:r>
-              <a:rPr lang="en-US" dirty="0"/>
-              <a:t> Data</a:t>
+              <a:rPr lang="vi-VN" dirty="0"/>
+              <a:t>| Không trùng lặp     | Không trùng dữ liệu Training                |</a:t>
             </a:r>
           </a:p>
           <a:p>
             <a:pPr lvl="1"/>
             <a:r>
               <a:rPr lang="vi-VN" dirty="0"/>
-              <a:t>| Tiêu chí        | Mô tả                               |</a:t>
+              <a:t>| Câu hỏi mới         | Cùng chủ đề nhưng cách hỏi khác             |</a:t>
             </a:r>
           </a:p>
           <a:p>
             <a:pPr lvl="1"/>
             <a:r>
               <a:rPr lang="vi-VN" dirty="0"/>
-              <a:t>| --------------- | ----------------------------------- |</a:t>
+              <a:t>| Yêu cầu suy luận    | Kiểm tra model có hiểu, không chỉ học thuộc |</a:t>
             </a:r>
           </a:p>
           <a:p>
             <a:pPr lvl="1"/>
             <a:r>
               <a:rPr lang="vi-VN" dirty="0"/>
-              <a:t>| Rõ ràng         | Prompt cụ thể, không mơ hồ          |</a:t>
+              <a:t>| Có edge cases       | Bao gồm tình huống khó, bẫy, lỗi            |</a:t>
             </a:r>
           </a:p>
           <a:p>
             <a:pPr lvl="1"/>
             <a:r>
               <a:rPr lang="vi-VN" dirty="0"/>
-              <a:t>| Chính xác       | Output đúng nghiệp vụ               |</a:t>
+              <a:t>| Đa dạng             | Nhiều loại user, mức độ khó                 |</a:t>
             </a:r>
           </a:p>
           <a:p>
             <a:pPr lvl="1"/>
             <a:r>
               <a:rPr lang="vi-VN" dirty="0"/>
-              <a:t>| Nhất quán       | Format &amp; tone thống nhất            |</a:t>
+              <a:t>| Thực tế             | Phản ánh hành vi người dùng thật            |</a:t>
             </a:r>
           </a:p>
           <a:p>
             <a:pPr lvl="1"/>
             <a:r>
               <a:rPr lang="vi-VN" dirty="0"/>
-              <a:t>| Thực tế         | Giống user thật                     |</a:t>
+              <a:t>| Kiểm tra format     | Xem model có giữ đúng format trả lời        |</a:t>
             </a:r>
           </a:p>
           <a:p>
             <a:pPr lvl="1"/>
             <a:r>
               <a:rPr lang="vi-VN" dirty="0"/>
-              <a:t>| Đa dạng         | Bao phủ nhiều tình huống            |</a:t>
-            </a:r>
-          </a:p>
-          <a:p>
-            <a:pPr lvl="1"/>
-            <a:r>
-              <a:rPr lang="vi-VN" dirty="0"/>
-              <a:t>| Không trùng lặp | Tránh overfit                       |</a:t>
-            </a:r>
-          </a:p>
-          <a:p>
-            <a:pPr lvl="1"/>
-            <a:r>
-              <a:rPr lang="vi-VN" dirty="0"/>
-              <a:t>| Dạy tư duy      | Dạy cách lập luận, không chỉ đáp án |</a:t>
-            </a:r>
-            <a:endParaRPr lang="en-US" dirty="0"/>
-          </a:p>
-          <a:p>
-            <a:pPr marL="0" indent="0">
-              <a:buNone/>
-            </a:pPr>
+              <a:t>| Chống hallucination | Kiểm tra model có bịa thông tin             |</a:t>
+            </a:r>
             <a:endParaRPr lang="en-US" dirty="0"/>
           </a:p>
         </p:txBody>
@@ -5557,7 +5665,7 @@
     </p:spTree>
     <p:extLst>
       <p:ext uri="{BB962C8B-B14F-4D97-AF65-F5344CB8AC3E}">
-        <p14:creationId xmlns:p14="http://schemas.microsoft.com/office/powerpoint/2010/main" val="2665586117"/>
+        <p14:creationId xmlns:p14="http://schemas.microsoft.com/office/powerpoint/2010/main" val="676326200"/>
       </p:ext>
     </p:extLst>
   </p:cSld>
@@ -5682,130 +5790,30 @@
         </p:nvSpPr>
         <p:spPr/>
         <p:txBody>
-          <a:bodyPr>
-            <a:normAutofit fontScale="85000" lnSpcReduction="20000"/>
-          </a:bodyPr>
+          <a:bodyPr/>
           <a:lstStyle/>
           <a:p>
             <a:r>
-              <a:rPr lang="vi-VN" dirty="0"/>
-              <a:t>Mục tiêu </a:t>
-            </a:r>
-            <a:r>
-              <a:rPr lang="en-US" dirty="0"/>
-              <a:t>validation data</a:t>
-            </a:r>
-          </a:p>
-          <a:p>
-            <a:pPr lvl="1"/>
-            <a:r>
-              <a:rPr lang="vi-VN" dirty="0"/>
-              <a:t>Gồm bộ câu hỏi mà model CHƯA BAO GIỜ thấy, dùng để kiểm tra xem model có “hiểu thật” hay chỉ “học vẹt”.</a:t>
-            </a:r>
-          </a:p>
-          <a:p>
-            <a:pPr lvl="1"/>
-            <a:r>
-              <a:rPr lang="vi-VN" dirty="0"/>
-              <a:t>Validation Data KHÔNG được: copy training, Chỉ đổi vài chữ </a:t>
-            </a:r>
-            <a:endParaRPr lang="en-US" dirty="0"/>
-          </a:p>
-          <a:p>
-            <a:r>
-              <a:rPr lang="en-US" dirty="0" err="1"/>
-              <a:t>Tiêu</a:t>
-            </a:r>
-            <a:r>
-              <a:rPr lang="en-US" dirty="0"/>
-              <a:t> </a:t>
-            </a:r>
-            <a:r>
-              <a:rPr lang="en-US" dirty="0" err="1"/>
-              <a:t>chí</a:t>
-            </a:r>
-            <a:r>
-              <a:rPr lang="en-US" dirty="0"/>
-              <a:t> </a:t>
-            </a:r>
-            <a:r>
-              <a:rPr lang="en-US" dirty="0" err="1"/>
-              <a:t>của</a:t>
-            </a:r>
-            <a:r>
-              <a:rPr lang="en-US" dirty="0"/>
-              <a:t> validation Data</a:t>
-            </a:r>
-          </a:p>
-          <a:p>
-            <a:pPr lvl="1"/>
-            <a:r>
-              <a:rPr lang="vi-VN" dirty="0"/>
-              <a:t>| Tiêu chí            | Mô tả                                       |</a:t>
-            </a:r>
-          </a:p>
-          <a:p>
-            <a:pPr lvl="1"/>
-            <a:r>
-              <a:rPr lang="vi-VN" dirty="0"/>
-              <a:t>| --------------------| ------------------------------------------- |</a:t>
-            </a:r>
-          </a:p>
-          <a:p>
-            <a:pPr lvl="1"/>
-            <a:r>
-              <a:rPr lang="vi-VN" dirty="0"/>
-              <a:t>| Không trùng lặp     | Không trùng dữ liệu Training                |</a:t>
-            </a:r>
-          </a:p>
-          <a:p>
-            <a:pPr lvl="1"/>
-            <a:r>
-              <a:rPr lang="vi-VN" dirty="0"/>
-              <a:t>| Câu hỏi mới         | Cùng chủ đề nhưng cách hỏi khác             |</a:t>
-            </a:r>
-          </a:p>
-          <a:p>
-            <a:pPr lvl="1"/>
-            <a:r>
-              <a:rPr lang="vi-VN" dirty="0"/>
-              <a:t>| Yêu cầu suy luận    | Kiểm tra model có hiểu, không chỉ học thuộc |</a:t>
-            </a:r>
-          </a:p>
-          <a:p>
-            <a:pPr lvl="1"/>
-            <a:r>
-              <a:rPr lang="vi-VN" dirty="0"/>
-              <a:t>| Có edge cases       | Bao gồm tình huống khó, bẫy, lỗi            |</a:t>
-            </a:r>
-          </a:p>
-          <a:p>
-            <a:pPr lvl="1"/>
-            <a:r>
-              <a:rPr lang="vi-VN" dirty="0"/>
-              <a:t>| Đa dạng             | Nhiều loại user, mức độ khó                 |</a:t>
-            </a:r>
-          </a:p>
-          <a:p>
-            <a:pPr lvl="1"/>
-            <a:r>
-              <a:rPr lang="vi-VN" dirty="0"/>
-              <a:t>| Thực tế             | Phản ánh hành vi người dùng thật            |</a:t>
-            </a:r>
-          </a:p>
-          <a:p>
-            <a:pPr lvl="1"/>
-            <a:r>
-              <a:rPr lang="vi-VN" dirty="0"/>
-              <a:t>| Kiểm tra format     | Xem model có giữ đúng format trả lời        |</a:t>
-            </a:r>
-          </a:p>
-          <a:p>
-            <a:pPr lvl="1"/>
-            <a:r>
-              <a:rPr lang="vi-VN" dirty="0"/>
-              <a:t>| Chống hallucination | Kiểm tra model có bịa thông tin             |</a:t>
-            </a:r>
+              <a:rPr lang="en-US" dirty="0" err="1"/>
+              <a:t>Ví</a:t>
+            </a:r>
+            <a:r>
+              <a:rPr lang="en-US" dirty="0"/>
+              <a:t> </a:t>
+            </a:r>
+            <a:r>
+              <a:rPr lang="en-US" dirty="0" err="1"/>
+              <a:t>dụ</a:t>
+            </a:r>
+            <a:r>
+              <a:rPr lang="en-US" dirty="0"/>
+              <a:t>:</a:t>
+            </a:r>
+          </a:p>
+          <a:p>
+            <a:pPr marL="0" indent="0">
+              <a:buNone/>
+            </a:pPr>
             <a:endParaRPr lang="en-US" dirty="0"/>
           </a:p>
         </p:txBody>
@@ -5813,7 +5821,1013 @@
     </p:spTree>
     <p:extLst>
       <p:ext uri="{BB962C8B-B14F-4D97-AF65-F5344CB8AC3E}">
-        <p14:creationId xmlns:p14="http://schemas.microsoft.com/office/powerpoint/2010/main" val="676326200"/>
+        <p14:creationId xmlns:p14="http://schemas.microsoft.com/office/powerpoint/2010/main" val="2010755086"/>
+      </p:ext>
+    </p:extLst>
+  </p:cSld>
+  <p:clrMapOvr>
+    <a:masterClrMapping/>
+  </p:clrMapOvr>
+</p:sld>
+</file>
+
+<file path=ppt/slides/slide17.xml><?xml version="1.0" encoding="utf-8"?>
+<p:sld xmlns:a="http://schemas.openxmlformats.org/drawingml/2006/main" xmlns:r="http://schemas.openxmlformats.org/officeDocument/2006/relationships" xmlns:p="http://schemas.openxmlformats.org/presentationml/2006/main">
+  <p:cSld>
+    <p:spTree>
+      <p:nvGrpSpPr>
+        <p:cNvPr id="1" name=""/>
+        <p:cNvGrpSpPr/>
+        <p:nvPr/>
+      </p:nvGrpSpPr>
+      <p:grpSpPr>
+        <a:xfrm>
+          <a:off x="0" y="0"/>
+          <a:ext cx="0" cy="0"/>
+          <a:chOff x="0" y="0"/>
+          <a:chExt cx="0" cy="0"/>
+        </a:xfrm>
+      </p:grpSpPr>
+      <p:sp>
+        <p:nvSpPr>
+          <p:cNvPr id="2" name="Title 1">
+            <a:extLst>
+              <a:ext uri="{FF2B5EF4-FFF2-40B4-BE49-F238E27FC236}">
+                <a16:creationId xmlns:a16="http://schemas.microsoft.com/office/drawing/2014/main" id="{D3EB5C88-F4AF-455A-8324-E302EED87B34}"/>
+              </a:ext>
+            </a:extLst>
+          </p:cNvPr>
+          <p:cNvSpPr>
+            <a:spLocks noGrp="1"/>
+          </p:cNvSpPr>
+          <p:nvPr>
+            <p:ph type="title"/>
+          </p:nvPr>
+        </p:nvSpPr>
+        <p:spPr/>
+        <p:txBody>
+          <a:bodyPr/>
+          <a:lstStyle/>
+          <a:p>
+            <a:r>
+              <a:rPr lang="en-US" dirty="0"/>
+              <a:t>Flow Fine-Tune</a:t>
+            </a:r>
+          </a:p>
+        </p:txBody>
+      </p:sp>
+      <p:sp>
+        <p:nvSpPr>
+          <p:cNvPr id="3" name="Content Placeholder 2">
+            <a:extLst>
+              <a:ext uri="{FF2B5EF4-FFF2-40B4-BE49-F238E27FC236}">
+                <a16:creationId xmlns:a16="http://schemas.microsoft.com/office/drawing/2014/main" id="{7E71AD3B-8519-4A93-ACB3-4399F3171A80}"/>
+              </a:ext>
+            </a:extLst>
+          </p:cNvPr>
+          <p:cNvSpPr>
+            <a:spLocks noGrp="1"/>
+          </p:cNvSpPr>
+          <p:nvPr>
+            <p:ph idx="1"/>
+          </p:nvPr>
+        </p:nvSpPr>
+        <p:spPr/>
+        <p:txBody>
+          <a:bodyPr>
+            <a:normAutofit fontScale="40000" lnSpcReduction="20000"/>
+          </a:bodyPr>
+          <a:lstStyle/>
+          <a:p>
+            <a:pPr marL="0" indent="0">
+              <a:buNone/>
+            </a:pPr>
+            <a:r>
+              <a:rPr lang="en-US" dirty="0"/>
+              <a:t>Problem Definition</a:t>
+            </a:r>
+          </a:p>
+          <a:p>
+            <a:pPr marL="0" indent="0">
+              <a:buNone/>
+            </a:pPr>
+            <a:r>
+              <a:rPr lang="en-US" dirty="0"/>
+              <a:t>        ↓</a:t>
+            </a:r>
+          </a:p>
+          <a:p>
+            <a:pPr marL="0" indent="0">
+              <a:buNone/>
+            </a:pPr>
+            <a:r>
+              <a:rPr lang="en-US" dirty="0"/>
+              <a:t>Prompt / RAG First</a:t>
+            </a:r>
+          </a:p>
+          <a:p>
+            <a:pPr marL="0" indent="0">
+              <a:buNone/>
+            </a:pPr>
+            <a:r>
+              <a:rPr lang="en-US" dirty="0"/>
+              <a:t>        ↓</a:t>
+            </a:r>
+          </a:p>
+          <a:p>
+            <a:pPr marL="0" indent="0">
+              <a:buNone/>
+            </a:pPr>
+            <a:r>
+              <a:rPr lang="en-US" dirty="0"/>
+              <a:t>Choose Fine-Tune Method</a:t>
+            </a:r>
+          </a:p>
+          <a:p>
+            <a:pPr marL="0" indent="0">
+              <a:buNone/>
+            </a:pPr>
+            <a:r>
+              <a:rPr lang="en-US" dirty="0"/>
+              <a:t>        ↓</a:t>
+            </a:r>
+          </a:p>
+          <a:p>
+            <a:pPr marL="0" indent="0">
+              <a:buNone/>
+            </a:pPr>
+            <a:r>
+              <a:rPr lang="en-US" dirty="0"/>
+              <a:t>Prepare Training / Validation / Test Data</a:t>
+            </a:r>
+          </a:p>
+          <a:p>
+            <a:pPr marL="0" indent="0">
+              <a:buNone/>
+            </a:pPr>
+            <a:r>
+              <a:rPr lang="en-US" dirty="0"/>
+              <a:t>        ↓</a:t>
+            </a:r>
+          </a:p>
+          <a:p>
+            <a:pPr marL="0" indent="0">
+              <a:buNone/>
+            </a:pPr>
+            <a:r>
+              <a:rPr lang="en-US" dirty="0"/>
+              <a:t>Local Fine-Tune (Experiment)</a:t>
+            </a:r>
+          </a:p>
+          <a:p>
+            <a:pPr marL="0" indent="0">
+              <a:buNone/>
+            </a:pPr>
+            <a:r>
+              <a:rPr lang="en-US" dirty="0"/>
+              <a:t>        ↓</a:t>
+            </a:r>
+          </a:p>
+          <a:p>
+            <a:pPr marL="0" indent="0">
+              <a:buNone/>
+            </a:pPr>
+            <a:r>
+              <a:rPr lang="en-US" dirty="0"/>
+              <a:t>Evaluate → Improve Data</a:t>
+            </a:r>
+          </a:p>
+          <a:p>
+            <a:pPr marL="0" indent="0">
+              <a:buNone/>
+            </a:pPr>
+            <a:r>
+              <a:rPr lang="en-US" dirty="0"/>
+              <a:t>        ↓</a:t>
+            </a:r>
+          </a:p>
+          <a:p>
+            <a:pPr marL="0" indent="0">
+              <a:buNone/>
+            </a:pPr>
+            <a:r>
+              <a:rPr lang="en-US" dirty="0"/>
+              <a:t>Azure Fine-Tune (Production)</a:t>
+            </a:r>
+          </a:p>
+          <a:p>
+            <a:pPr marL="0" indent="0">
+              <a:buNone/>
+            </a:pPr>
+            <a:r>
+              <a:rPr lang="en-US" dirty="0"/>
+              <a:t>        ↓</a:t>
+            </a:r>
+          </a:p>
+          <a:p>
+            <a:pPr marL="0" indent="0">
+              <a:buNone/>
+            </a:pPr>
+            <a:r>
+              <a:rPr lang="en-US" dirty="0"/>
+              <a:t>Final Evaluation</a:t>
+            </a:r>
+          </a:p>
+          <a:p>
+            <a:pPr marL="0" indent="0">
+              <a:buNone/>
+            </a:pPr>
+            <a:r>
+              <a:rPr lang="en-US" dirty="0"/>
+              <a:t>        ↓</a:t>
+            </a:r>
+          </a:p>
+          <a:p>
+            <a:pPr marL="0" indent="0">
+              <a:buNone/>
+            </a:pPr>
+            <a:r>
+              <a:rPr lang="en-US" dirty="0"/>
+              <a:t>Deploy &amp; Monitor</a:t>
+            </a:r>
+          </a:p>
+          <a:p>
+            <a:pPr marL="0" indent="0">
+              <a:buNone/>
+            </a:pPr>
+            <a:endParaRPr lang="en-US" dirty="0"/>
+          </a:p>
+        </p:txBody>
+      </p:sp>
+    </p:spTree>
+    <p:extLst>
+      <p:ext uri="{BB962C8B-B14F-4D97-AF65-F5344CB8AC3E}">
+        <p14:creationId xmlns:p14="http://schemas.microsoft.com/office/powerpoint/2010/main" val="2097357192"/>
+      </p:ext>
+    </p:extLst>
+  </p:cSld>
+  <p:clrMapOvr>
+    <a:masterClrMapping/>
+  </p:clrMapOvr>
+</p:sld>
+</file>
+
+<file path=ppt/slides/slide18.xml><?xml version="1.0" encoding="utf-8"?>
+<p:sld xmlns:a="http://schemas.openxmlformats.org/drawingml/2006/main" xmlns:r="http://schemas.openxmlformats.org/officeDocument/2006/relationships" xmlns:p="http://schemas.openxmlformats.org/presentationml/2006/main">
+  <p:cSld>
+    <p:spTree>
+      <p:nvGrpSpPr>
+        <p:cNvPr id="1" name=""/>
+        <p:cNvGrpSpPr/>
+        <p:nvPr/>
+      </p:nvGrpSpPr>
+      <p:grpSpPr>
+        <a:xfrm>
+          <a:off x="0" y="0"/>
+          <a:ext cx="0" cy="0"/>
+          <a:chOff x="0" y="0"/>
+          <a:chExt cx="0" cy="0"/>
+        </a:xfrm>
+      </p:grpSpPr>
+      <p:sp>
+        <p:nvSpPr>
+          <p:cNvPr id="2" name="Title 1">
+            <a:extLst>
+              <a:ext uri="{FF2B5EF4-FFF2-40B4-BE49-F238E27FC236}">
+                <a16:creationId xmlns:a16="http://schemas.microsoft.com/office/drawing/2014/main" id="{D3EB5C88-F4AF-455A-8324-E302EED87B34}"/>
+              </a:ext>
+            </a:extLst>
+          </p:cNvPr>
+          <p:cNvSpPr>
+            <a:spLocks noGrp="1"/>
+          </p:cNvSpPr>
+          <p:nvPr>
+            <p:ph type="title"/>
+          </p:nvPr>
+        </p:nvSpPr>
+        <p:spPr/>
+        <p:txBody>
+          <a:bodyPr/>
+          <a:lstStyle/>
+          <a:p>
+            <a:r>
+              <a:rPr lang="en-US" dirty="0"/>
+              <a:t>Flow Fine-Tune</a:t>
+            </a:r>
+          </a:p>
+        </p:txBody>
+      </p:sp>
+      <p:sp>
+        <p:nvSpPr>
+          <p:cNvPr id="3" name="Content Placeholder 2">
+            <a:extLst>
+              <a:ext uri="{FF2B5EF4-FFF2-40B4-BE49-F238E27FC236}">
+                <a16:creationId xmlns:a16="http://schemas.microsoft.com/office/drawing/2014/main" id="{7E71AD3B-8519-4A93-ACB3-4399F3171A80}"/>
+              </a:ext>
+            </a:extLst>
+          </p:cNvPr>
+          <p:cNvSpPr>
+            <a:spLocks noGrp="1"/>
+          </p:cNvSpPr>
+          <p:nvPr>
+            <p:ph idx="1"/>
+          </p:nvPr>
+        </p:nvSpPr>
+        <p:spPr/>
+        <p:txBody>
+          <a:bodyPr>
+            <a:normAutofit/>
+          </a:bodyPr>
+          <a:lstStyle/>
+          <a:p>
+            <a:pPr marL="0" indent="0">
+              <a:buNone/>
+            </a:pPr>
+            <a:r>
+              <a:rPr lang="en-US" dirty="0"/>
+              <a:t>1.Xác </a:t>
+            </a:r>
+            <a:r>
+              <a:rPr lang="en-US" dirty="0" err="1"/>
+              <a:t>định</a:t>
+            </a:r>
+            <a:r>
+              <a:rPr lang="en-US" dirty="0"/>
+              <a:t> </a:t>
+            </a:r>
+            <a:r>
+              <a:rPr lang="en-US" dirty="0" err="1"/>
+              <a:t>bài</a:t>
+            </a:r>
+            <a:r>
+              <a:rPr lang="en-US" dirty="0"/>
+              <a:t> </a:t>
+            </a:r>
+            <a:r>
+              <a:rPr lang="en-US" dirty="0" err="1"/>
+              <a:t>toán</a:t>
+            </a:r>
+            <a:r>
+              <a:rPr lang="en-US" dirty="0"/>
+              <a:t> — </a:t>
+            </a:r>
+            <a:r>
+              <a:rPr lang="en-US" dirty="0" err="1"/>
+              <a:t>Có</a:t>
+            </a:r>
+            <a:r>
+              <a:rPr lang="en-US" dirty="0"/>
+              <a:t> </a:t>
+            </a:r>
+            <a:r>
+              <a:rPr lang="en-US" dirty="0" err="1"/>
+              <a:t>cần</a:t>
+            </a:r>
+            <a:r>
+              <a:rPr lang="en-US" dirty="0"/>
+              <a:t> Fine-Tune </a:t>
+            </a:r>
+            <a:r>
+              <a:rPr lang="en-US" dirty="0" err="1"/>
+              <a:t>không</a:t>
+            </a:r>
+            <a:r>
+              <a:rPr lang="en-US" dirty="0"/>
+              <a:t>?</a:t>
+            </a:r>
+          </a:p>
+          <a:p>
+            <a:r>
+              <a:rPr lang="en-US" dirty="0"/>
+              <a:t>Prompt Engineering → RAG → Fine-Tune</a:t>
+            </a:r>
+          </a:p>
+          <a:p>
+            <a:r>
+              <a:rPr lang="en-US" dirty="0" err="1"/>
+              <a:t>Chỉ</a:t>
+            </a:r>
+            <a:r>
+              <a:rPr lang="en-US" dirty="0"/>
+              <a:t> fine-tune </a:t>
+            </a:r>
+            <a:r>
+              <a:rPr lang="en-US" dirty="0" err="1"/>
+              <a:t>nếu</a:t>
+            </a:r>
+            <a:r>
+              <a:rPr lang="en-US" dirty="0"/>
+              <a:t> prompt/RAG </a:t>
+            </a:r>
+            <a:r>
+              <a:rPr lang="en-US" dirty="0" err="1"/>
+              <a:t>không</a:t>
+            </a:r>
+            <a:r>
+              <a:rPr lang="en-US" dirty="0"/>
+              <a:t> </a:t>
+            </a:r>
+            <a:r>
+              <a:rPr lang="en-US" dirty="0" err="1"/>
+              <a:t>đủ</a:t>
+            </a:r>
+            <a:r>
+              <a:rPr lang="en-US" dirty="0"/>
+              <a:t>.</a:t>
+            </a:r>
+          </a:p>
+          <a:p>
+            <a:pPr marL="0" indent="0">
+              <a:buNone/>
+            </a:pPr>
+            <a:r>
+              <a:rPr lang="en-US" dirty="0"/>
+              <a:t>2. </a:t>
+            </a:r>
+            <a:r>
+              <a:rPr lang="en-US" dirty="0" err="1"/>
+              <a:t>Xác</a:t>
+            </a:r>
+            <a:r>
+              <a:rPr lang="en-US" dirty="0"/>
+              <a:t> </a:t>
+            </a:r>
+            <a:r>
+              <a:rPr lang="en-US" dirty="0" err="1"/>
+              <a:t>định</a:t>
+            </a:r>
+            <a:r>
+              <a:rPr lang="en-US" dirty="0"/>
+              <a:t> </a:t>
+            </a:r>
+            <a:r>
+              <a:rPr lang="en-US" dirty="0" err="1"/>
+              <a:t>mục</a:t>
+            </a:r>
+            <a:r>
+              <a:rPr lang="en-US" dirty="0"/>
+              <a:t> </a:t>
+            </a:r>
+            <a:r>
+              <a:rPr lang="en-US" dirty="0" err="1"/>
+              <a:t>tiêu</a:t>
+            </a:r>
+            <a:r>
+              <a:rPr lang="en-US" dirty="0"/>
+              <a:t> Fine-Tune</a:t>
+            </a:r>
+          </a:p>
+          <a:p>
+            <a:r>
+              <a:rPr lang="vi-VN" dirty="0" err="1"/>
+              <a:t>Dạy</a:t>
+            </a:r>
+            <a:r>
+              <a:rPr lang="vi-VN" dirty="0"/>
+              <a:t> </a:t>
+            </a:r>
+            <a:r>
+              <a:rPr lang="vi-VN" dirty="0" err="1"/>
+              <a:t>kiến</a:t>
+            </a:r>
+            <a:r>
+              <a:rPr lang="vi-VN" dirty="0"/>
+              <a:t> </a:t>
+            </a:r>
+            <a:r>
+              <a:rPr lang="vi-VN" dirty="0" err="1"/>
+              <a:t>thức</a:t>
+            </a:r>
+            <a:r>
+              <a:rPr lang="en-US" dirty="0"/>
+              <a:t>? </a:t>
+            </a:r>
+            <a:r>
+              <a:rPr lang="vi-VN" dirty="0" err="1"/>
+              <a:t>Dạy</a:t>
+            </a:r>
+            <a:r>
+              <a:rPr lang="vi-VN" dirty="0"/>
+              <a:t> phong </a:t>
+            </a:r>
+            <a:r>
+              <a:rPr lang="vi-VN" dirty="0" err="1"/>
+              <a:t>cách</a:t>
+            </a:r>
+            <a:r>
+              <a:rPr lang="vi-VN" dirty="0"/>
+              <a:t>?</a:t>
+            </a:r>
+            <a:r>
+              <a:rPr lang="en-US" dirty="0"/>
+              <a:t> </a:t>
+            </a:r>
+            <a:r>
+              <a:rPr lang="vi-VN" dirty="0" err="1"/>
+              <a:t>Dạy</a:t>
+            </a:r>
+            <a:r>
+              <a:rPr lang="vi-VN" dirty="0"/>
+              <a:t> </a:t>
+            </a:r>
+            <a:r>
+              <a:rPr lang="vi-VN" dirty="0" err="1"/>
+              <a:t>reasoning</a:t>
+            </a:r>
+            <a:r>
+              <a:rPr lang="vi-VN" dirty="0"/>
+              <a:t>?</a:t>
+            </a:r>
+            <a:r>
+              <a:rPr lang="en-US" dirty="0"/>
+              <a:t> </a:t>
+            </a:r>
+            <a:r>
+              <a:rPr lang="vi-VN" dirty="0" err="1"/>
+              <a:t>Giảm</a:t>
+            </a:r>
+            <a:r>
+              <a:rPr lang="vi-VN" dirty="0"/>
+              <a:t> </a:t>
+            </a:r>
+            <a:r>
+              <a:rPr lang="vi-VN" dirty="0" err="1"/>
+              <a:t>hallucination</a:t>
+            </a:r>
+            <a:r>
+              <a:rPr lang="vi-VN" dirty="0"/>
+              <a:t>?</a:t>
+            </a:r>
+            <a:endParaRPr lang="en-US" dirty="0"/>
+          </a:p>
+          <a:p>
+            <a:r>
+              <a:rPr lang="en-US" dirty="0"/>
+              <a:t>👉 </a:t>
+            </a:r>
+            <a:r>
+              <a:rPr lang="vi-VN" dirty="0" err="1"/>
+              <a:t>Tránh</a:t>
+            </a:r>
+            <a:r>
+              <a:rPr lang="vi-VN" dirty="0"/>
+              <a:t> </a:t>
+            </a:r>
+            <a:r>
+              <a:rPr lang="vi-VN" dirty="0" err="1"/>
+              <a:t>fine-tune</a:t>
+            </a:r>
+            <a:r>
+              <a:rPr lang="vi-VN" dirty="0"/>
+              <a:t> mơ </a:t>
+            </a:r>
+            <a:r>
+              <a:rPr lang="vi-VN" dirty="0" err="1"/>
+              <a:t>hồ</a:t>
+            </a:r>
+            <a:r>
+              <a:rPr lang="vi-VN" dirty="0"/>
+              <a:t>.</a:t>
+            </a:r>
+            <a:endParaRPr lang="en-US" dirty="0"/>
+          </a:p>
+        </p:txBody>
+      </p:sp>
+    </p:spTree>
+    <p:extLst>
+      <p:ext uri="{BB962C8B-B14F-4D97-AF65-F5344CB8AC3E}">
+        <p14:creationId xmlns:p14="http://schemas.microsoft.com/office/powerpoint/2010/main" val="3919238436"/>
+      </p:ext>
+    </p:extLst>
+  </p:cSld>
+  <p:clrMapOvr>
+    <a:masterClrMapping/>
+  </p:clrMapOvr>
+</p:sld>
+</file>
+
+<file path=ppt/slides/slide19.xml><?xml version="1.0" encoding="utf-8"?>
+<p:sld xmlns:a="http://schemas.openxmlformats.org/drawingml/2006/main" xmlns:r="http://schemas.openxmlformats.org/officeDocument/2006/relationships" xmlns:p="http://schemas.openxmlformats.org/presentationml/2006/main">
+  <p:cSld>
+    <p:spTree>
+      <p:nvGrpSpPr>
+        <p:cNvPr id="1" name=""/>
+        <p:cNvGrpSpPr/>
+        <p:nvPr/>
+      </p:nvGrpSpPr>
+      <p:grpSpPr>
+        <a:xfrm>
+          <a:off x="0" y="0"/>
+          <a:ext cx="0" cy="0"/>
+          <a:chOff x="0" y="0"/>
+          <a:chExt cx="0" cy="0"/>
+        </a:xfrm>
+      </p:grpSpPr>
+      <p:sp>
+        <p:nvSpPr>
+          <p:cNvPr id="2" name="Title 1">
+            <a:extLst>
+              <a:ext uri="{FF2B5EF4-FFF2-40B4-BE49-F238E27FC236}">
+                <a16:creationId xmlns:a16="http://schemas.microsoft.com/office/drawing/2014/main" id="{D3EB5C88-F4AF-455A-8324-E302EED87B34}"/>
+              </a:ext>
+            </a:extLst>
+          </p:cNvPr>
+          <p:cNvSpPr>
+            <a:spLocks noGrp="1"/>
+          </p:cNvSpPr>
+          <p:nvPr>
+            <p:ph type="title"/>
+          </p:nvPr>
+        </p:nvSpPr>
+        <p:spPr/>
+        <p:txBody>
+          <a:bodyPr/>
+          <a:lstStyle/>
+          <a:p>
+            <a:r>
+              <a:rPr lang="en-US" dirty="0"/>
+              <a:t>Flow Fine-Tune</a:t>
+            </a:r>
+          </a:p>
+        </p:txBody>
+      </p:sp>
+      <p:sp>
+        <p:nvSpPr>
+          <p:cNvPr id="3" name="Content Placeholder 2">
+            <a:extLst>
+              <a:ext uri="{FF2B5EF4-FFF2-40B4-BE49-F238E27FC236}">
+                <a16:creationId xmlns:a16="http://schemas.microsoft.com/office/drawing/2014/main" id="{7E71AD3B-8519-4A93-ACB3-4399F3171A80}"/>
+              </a:ext>
+            </a:extLst>
+          </p:cNvPr>
+          <p:cNvSpPr>
+            <a:spLocks noGrp="1"/>
+          </p:cNvSpPr>
+          <p:nvPr>
+            <p:ph idx="1"/>
+          </p:nvPr>
+        </p:nvSpPr>
+        <p:spPr/>
+        <p:txBody>
+          <a:bodyPr>
+            <a:normAutofit fontScale="55000" lnSpcReduction="20000"/>
+          </a:bodyPr>
+          <a:lstStyle/>
+          <a:p>
+            <a:pPr marL="0" indent="0">
+              <a:buNone/>
+            </a:pPr>
+            <a:r>
+              <a:rPr lang="en-US" dirty="0"/>
+              <a:t>3. </a:t>
+            </a:r>
+            <a:r>
+              <a:rPr lang="en-US" dirty="0" err="1"/>
+              <a:t>Chuẩn</a:t>
+            </a:r>
+            <a:r>
+              <a:rPr lang="en-US" dirty="0"/>
+              <a:t> </a:t>
+            </a:r>
+            <a:r>
+              <a:rPr lang="en-US" dirty="0" err="1"/>
+              <a:t>bị</a:t>
+            </a:r>
+            <a:r>
+              <a:rPr lang="en-US" dirty="0"/>
+              <a:t> </a:t>
+            </a:r>
+            <a:r>
+              <a:rPr lang="en-US" dirty="0" err="1"/>
+              <a:t>dữ</a:t>
+            </a:r>
+            <a:r>
+              <a:rPr lang="en-US" dirty="0"/>
+              <a:t> </a:t>
+            </a:r>
+            <a:r>
+              <a:rPr lang="en-US" dirty="0" err="1"/>
+              <a:t>liệu</a:t>
+            </a:r>
+            <a:endParaRPr lang="en-US" dirty="0"/>
+          </a:p>
+          <a:p>
+            <a:r>
+              <a:rPr lang="en-US" dirty="0"/>
+              <a:t>Training data, Validation data, Testing data (</a:t>
+            </a:r>
+            <a:r>
+              <a:rPr lang="en-US" dirty="0" err="1"/>
+              <a:t>khuyến</a:t>
+            </a:r>
+            <a:r>
+              <a:rPr lang="en-US" dirty="0"/>
+              <a:t> </a:t>
+            </a:r>
+            <a:r>
+              <a:rPr lang="en-US" dirty="0" err="1"/>
+              <a:t>khích</a:t>
+            </a:r>
+            <a:r>
+              <a:rPr lang="en-US" dirty="0"/>
+              <a:t> them, </a:t>
+            </a:r>
+            <a:r>
+              <a:rPr lang="en-US" dirty="0" err="1"/>
+              <a:t>đánh</a:t>
+            </a:r>
+            <a:r>
+              <a:rPr lang="en-US" dirty="0"/>
+              <a:t> </a:t>
+            </a:r>
+            <a:r>
+              <a:rPr lang="en-US" dirty="0" err="1"/>
+              <a:t>giá</a:t>
+            </a:r>
+            <a:r>
+              <a:rPr lang="en-US" dirty="0"/>
+              <a:t> </a:t>
+            </a:r>
+            <a:r>
+              <a:rPr lang="en-US" dirty="0" err="1"/>
+              <a:t>trung</a:t>
+            </a:r>
+            <a:r>
+              <a:rPr lang="en-US" dirty="0"/>
+              <a:t> </a:t>
+            </a:r>
+            <a:r>
+              <a:rPr lang="en-US" dirty="0" err="1"/>
+              <a:t>lập</a:t>
+            </a:r>
+            <a:r>
+              <a:rPr lang="en-US" dirty="0"/>
+              <a:t>)</a:t>
+            </a:r>
+          </a:p>
+          <a:p>
+            <a:pPr marL="0" indent="0">
+              <a:buNone/>
+            </a:pPr>
+            <a:endParaRPr lang="en-US" dirty="0"/>
+          </a:p>
+          <a:p>
+            <a:pPr marL="0" indent="0">
+              <a:buNone/>
+            </a:pPr>
+            <a:r>
+              <a:rPr lang="en-US" dirty="0"/>
+              <a:t>4. Fine-Tune Local (Experiment Phase)</a:t>
+            </a:r>
+          </a:p>
+          <a:p>
+            <a:r>
+              <a:rPr lang="vi-VN" dirty="0" err="1"/>
+              <a:t>Debug</a:t>
+            </a:r>
+            <a:r>
+              <a:rPr lang="vi-VN" dirty="0"/>
+              <a:t> </a:t>
+            </a:r>
+            <a:r>
+              <a:rPr lang="vi-VN" dirty="0" err="1"/>
+              <a:t>dataset</a:t>
+            </a:r>
+            <a:endParaRPr lang="en-US" dirty="0"/>
+          </a:p>
+          <a:p>
+            <a:r>
+              <a:rPr lang="vi-VN" dirty="0" err="1"/>
+              <a:t>Ước</a:t>
+            </a:r>
+            <a:r>
+              <a:rPr lang="vi-VN" dirty="0"/>
+              <a:t> </a:t>
+            </a:r>
+            <a:r>
+              <a:rPr lang="vi-VN" dirty="0" err="1"/>
+              <a:t>lượng</a:t>
+            </a:r>
+            <a:r>
+              <a:rPr lang="vi-VN" dirty="0"/>
+              <a:t> chi </a:t>
+            </a:r>
+            <a:r>
+              <a:rPr lang="vi-VN" dirty="0" err="1"/>
+              <a:t>phí</a:t>
+            </a:r>
+            <a:endParaRPr lang="en-US" dirty="0"/>
+          </a:p>
+          <a:p>
+            <a:r>
+              <a:rPr lang="vi-VN" dirty="0" err="1"/>
+              <a:t>Kiểm</a:t>
+            </a:r>
+            <a:r>
+              <a:rPr lang="vi-VN" dirty="0"/>
+              <a:t> tra </a:t>
+            </a:r>
+            <a:r>
+              <a:rPr lang="vi-VN" dirty="0" err="1"/>
+              <a:t>model</a:t>
+            </a:r>
+            <a:r>
+              <a:rPr lang="vi-VN" dirty="0"/>
+              <a:t> </a:t>
+            </a:r>
+            <a:r>
+              <a:rPr lang="vi-VN" dirty="0" err="1"/>
+              <a:t>có</a:t>
+            </a:r>
+            <a:r>
+              <a:rPr lang="vi-VN" dirty="0"/>
+              <a:t> </a:t>
+            </a:r>
+            <a:r>
+              <a:rPr lang="vi-VN" dirty="0" err="1"/>
+              <a:t>học</a:t>
+            </a:r>
+            <a:r>
+              <a:rPr lang="vi-VN" dirty="0"/>
+              <a:t> </a:t>
+            </a:r>
+            <a:r>
+              <a:rPr lang="vi-VN" dirty="0" err="1"/>
+              <a:t>đúng</a:t>
+            </a:r>
+            <a:r>
+              <a:rPr lang="vi-VN" dirty="0"/>
+              <a:t> không</a:t>
+            </a:r>
+            <a:endParaRPr lang="en-US" dirty="0"/>
+          </a:p>
+          <a:p>
+            <a:endParaRPr lang="en-US" dirty="0"/>
+          </a:p>
+          <a:p>
+            <a:pPr marL="0" indent="0">
+              <a:buNone/>
+            </a:pPr>
+            <a:r>
+              <a:rPr lang="en-US" dirty="0"/>
+              <a:t>5. </a:t>
+            </a:r>
+            <a:r>
+              <a:rPr lang="en-US" dirty="0" err="1"/>
+              <a:t>Đánh</a:t>
+            </a:r>
+            <a:r>
+              <a:rPr lang="en-US" dirty="0"/>
+              <a:t> </a:t>
+            </a:r>
+            <a:r>
+              <a:rPr lang="en-US" dirty="0" err="1"/>
+              <a:t>giá</a:t>
+            </a:r>
+            <a:r>
+              <a:rPr lang="en-US" dirty="0"/>
+              <a:t> </a:t>
+            </a:r>
+            <a:r>
+              <a:rPr lang="en-US" dirty="0" err="1"/>
+              <a:t>kết</a:t>
+            </a:r>
+            <a:r>
+              <a:rPr lang="en-US" dirty="0"/>
+              <a:t> </a:t>
+            </a:r>
+            <a:r>
+              <a:rPr lang="en-US" dirty="0" err="1"/>
+              <a:t>quả</a:t>
+            </a:r>
+            <a:r>
+              <a:rPr lang="en-US" dirty="0"/>
+              <a:t> Local</a:t>
+            </a:r>
+          </a:p>
+          <a:p>
+            <a:pPr marL="0" indent="0">
+              <a:buNone/>
+            </a:pPr>
+            <a:r>
+              <a:rPr lang="en-US" dirty="0"/>
+              <a:t>| </a:t>
+            </a:r>
+            <a:r>
+              <a:rPr lang="en-US" dirty="0" err="1"/>
+              <a:t>Nếu</a:t>
+            </a:r>
+            <a:r>
+              <a:rPr lang="en-US" dirty="0"/>
+              <a:t>        | </a:t>
+            </a:r>
+            <a:r>
+              <a:rPr lang="en-US" dirty="0" err="1"/>
+              <a:t>Hành</a:t>
+            </a:r>
+            <a:r>
+              <a:rPr lang="en-US" dirty="0"/>
+              <a:t> </a:t>
+            </a:r>
+            <a:r>
+              <a:rPr lang="en-US" dirty="0" err="1"/>
+              <a:t>động</a:t>
+            </a:r>
+            <a:r>
+              <a:rPr lang="en-US" dirty="0"/>
+              <a:t>                     |</a:t>
+            </a:r>
+          </a:p>
+          <a:p>
+            <a:pPr marL="0" indent="0">
+              <a:buNone/>
+            </a:pPr>
+            <a:r>
+              <a:rPr lang="en-US" dirty="0"/>
+              <a:t>| ---------- | ----------------------------- |</a:t>
+            </a:r>
+          </a:p>
+          <a:p>
+            <a:pPr marL="0" indent="0">
+              <a:buNone/>
+            </a:pPr>
+            <a:r>
+              <a:rPr lang="en-US" dirty="0"/>
+              <a:t>| Output </a:t>
+            </a:r>
+            <a:r>
+              <a:rPr lang="en-US" dirty="0" err="1"/>
+              <a:t>kém</a:t>
+            </a:r>
+            <a:r>
+              <a:rPr lang="en-US" dirty="0"/>
+              <a:t> | </a:t>
+            </a:r>
+            <a:r>
+              <a:rPr lang="en-US" dirty="0" err="1"/>
+              <a:t>Sửa</a:t>
+            </a:r>
+            <a:r>
+              <a:rPr lang="en-US" dirty="0"/>
+              <a:t> dataset                   |</a:t>
+            </a:r>
+          </a:p>
+          <a:p>
+            <a:pPr marL="0" indent="0">
+              <a:buNone/>
+            </a:pPr>
+            <a:r>
+              <a:rPr lang="en-US" dirty="0"/>
+              <a:t>| Format </a:t>
+            </a:r>
+            <a:r>
+              <a:rPr lang="en-US" dirty="0" err="1"/>
+              <a:t>lỗi</a:t>
+            </a:r>
+            <a:r>
+              <a:rPr lang="en-US" dirty="0"/>
+              <a:t> | </a:t>
+            </a:r>
+            <a:r>
+              <a:rPr lang="en-US" dirty="0" err="1"/>
+              <a:t>Sửa</a:t>
+            </a:r>
+            <a:r>
+              <a:rPr lang="en-US" dirty="0"/>
+              <a:t> system prompt             |</a:t>
+            </a:r>
+          </a:p>
+          <a:p>
+            <a:pPr marL="0" indent="0">
+              <a:buNone/>
+            </a:pPr>
+            <a:r>
+              <a:rPr lang="en-US" dirty="0"/>
+              <a:t>| Overfit    | </a:t>
+            </a:r>
+            <a:r>
+              <a:rPr lang="en-US" dirty="0" err="1"/>
+              <a:t>Tăng</a:t>
+            </a:r>
+            <a:r>
+              <a:rPr lang="en-US" dirty="0"/>
+              <a:t> validation / </a:t>
+            </a:r>
+            <a:r>
+              <a:rPr lang="en-US" dirty="0" err="1"/>
+              <a:t>giảm</a:t>
+            </a:r>
+            <a:r>
+              <a:rPr lang="en-US" dirty="0"/>
+              <a:t> epochs |</a:t>
+            </a:r>
+          </a:p>
+        </p:txBody>
+      </p:sp>
+    </p:spTree>
+    <p:extLst>
+      <p:ext uri="{BB962C8B-B14F-4D97-AF65-F5344CB8AC3E}">
+        <p14:creationId xmlns:p14="http://schemas.microsoft.com/office/powerpoint/2010/main" val="4070601008"/>
       </p:ext>
     </p:extLst>
   </p:cSld>
@@ -5887,7 +6901,7 @@
         <p:spPr/>
         <p:txBody>
           <a:bodyPr>
-            <a:normAutofit fontScale="92500"/>
+            <a:normAutofit lnSpcReduction="10000"/>
           </a:bodyPr>
           <a:lstStyle/>
           <a:p>
@@ -5997,159 +7011,147 @@
             </a:r>
             <a:r>
               <a:rPr lang="vi-VN" dirty="0"/>
+              <a:t> </a:t>
+            </a:r>
+            <a:r>
+              <a:rPr lang="vi-VN" dirty="0" err="1"/>
+              <a:t>đã</a:t>
+            </a:r>
+            <a:r>
+              <a:rPr lang="vi-VN" dirty="0"/>
+              <a:t> </a:t>
+            </a:r>
+            <a:r>
+              <a:rPr lang="vi-VN" dirty="0" err="1"/>
+              <a:t>trải</a:t>
+            </a:r>
+            <a:r>
+              <a:rPr lang="vi-VN" dirty="0"/>
+              <a:t> qua giai </a:t>
+            </a:r>
+            <a:r>
+              <a:rPr lang="vi-VN" dirty="0" err="1"/>
+              <a:t>đoạn</a:t>
+            </a:r>
+            <a:r>
+              <a:rPr lang="vi-VN" dirty="0"/>
+              <a:t> </a:t>
+            </a:r>
+            <a:r>
+              <a:rPr lang="vi-VN" dirty="0" err="1"/>
+              <a:t>huấn</a:t>
+            </a:r>
+            <a:r>
+              <a:rPr lang="vi-VN" dirty="0"/>
+              <a:t> </a:t>
+            </a:r>
+            <a:r>
+              <a:rPr lang="vi-VN" dirty="0" err="1"/>
+              <a:t>luyện</a:t>
+            </a:r>
+            <a:r>
+              <a:rPr lang="vi-VN" dirty="0"/>
+              <a:t> ban </a:t>
+            </a:r>
+            <a:r>
+              <a:rPr lang="vi-VN" dirty="0" err="1"/>
+              <a:t>đầu</a:t>
+            </a:r>
+            <a:r>
+              <a:rPr lang="vi-VN" dirty="0"/>
+              <a:t> trên </a:t>
+            </a:r>
+            <a:r>
+              <a:rPr lang="vi-VN" dirty="0" err="1"/>
+              <a:t>một</a:t>
+            </a:r>
+            <a:r>
+              <a:rPr lang="vi-VN" dirty="0"/>
+              <a:t> </a:t>
+            </a:r>
+            <a:r>
+              <a:rPr lang="vi-VN" dirty="0" err="1"/>
+              <a:t>tập</a:t>
+            </a:r>
+            <a:r>
+              <a:rPr lang="vi-VN" dirty="0"/>
+              <a:t> </a:t>
+            </a:r>
+            <a:r>
+              <a:rPr lang="vi-VN" dirty="0" err="1"/>
+              <a:t>dữ</a:t>
+            </a:r>
+            <a:r>
+              <a:rPr lang="vi-VN" dirty="0"/>
+              <a:t> </a:t>
+            </a:r>
+            <a:r>
+              <a:rPr lang="vi-VN" dirty="0" err="1"/>
+              <a:t>liệu</a:t>
+            </a:r>
+            <a:r>
+              <a:rPr lang="en-US" dirty="0"/>
+              <a:t> </a:t>
+            </a:r>
+            <a:r>
+              <a:rPr lang="vi-VN" dirty="0" err="1"/>
+              <a:t>khổng</a:t>
+            </a:r>
+            <a:r>
+              <a:rPr lang="vi-VN" dirty="0"/>
+              <a:t> </a:t>
+            </a:r>
+            <a:r>
+              <a:rPr lang="vi-VN" dirty="0" err="1"/>
+              <a:t>lồ</a:t>
+            </a:r>
+            <a:r>
+              <a:rPr lang="en-US" dirty="0"/>
               <a:t> (</a:t>
             </a:r>
             <a:r>
-              <a:rPr lang="vi-VN" dirty="0" err="1"/>
-              <a:t>thường</a:t>
-            </a:r>
-            <a:r>
-              <a:rPr lang="vi-VN" dirty="0"/>
-              <a:t> </a:t>
-            </a:r>
-            <a:r>
-              <a:rPr lang="vi-VN" dirty="0" err="1"/>
-              <a:t>là</a:t>
-            </a:r>
-            <a:r>
-              <a:rPr lang="vi-VN" dirty="0"/>
-              <a:t> </a:t>
-            </a:r>
-            <a:r>
-              <a:rPr lang="vi-VN" dirty="0" err="1"/>
-              <a:t>các</a:t>
-            </a:r>
-            <a:r>
-              <a:rPr lang="vi-VN" dirty="0"/>
-              <a:t> mô </a:t>
-            </a:r>
-            <a:r>
-              <a:rPr lang="vi-VN" dirty="0" err="1"/>
+              <a:rPr lang="vi-VN" dirty="0"/>
+              <a:t>văn </a:t>
+            </a:r>
+            <a:r>
+              <a:rPr lang="vi-VN" dirty="0" err="1"/>
+              <a:t>bản</a:t>
+            </a:r>
+            <a:r>
+              <a:rPr lang="en-US" dirty="0"/>
+              <a:t>, </a:t>
+            </a:r>
+            <a:r>
+              <a:rPr lang="en-US" dirty="0" err="1"/>
               <a:t>hình</a:t>
             </a:r>
             <a:r>
-              <a:rPr lang="vi-VN" dirty="0"/>
-              <a:t> ngôn </a:t>
-            </a:r>
-            <a:r>
-              <a:rPr lang="vi-VN" dirty="0" err="1"/>
-              <a:t>ngữ</a:t>
-            </a:r>
-            <a:r>
-              <a:rPr lang="vi-VN" dirty="0"/>
-              <a:t> </a:t>
-            </a:r>
-            <a:r>
-              <a:rPr lang="vi-VN" dirty="0" err="1"/>
-              <a:t>lớn</a:t>
-            </a:r>
-            <a:r>
-              <a:rPr lang="vi-VN" dirty="0"/>
-              <a:t> - LLM như GPT) </a:t>
-            </a:r>
-            <a:r>
-              <a:rPr lang="vi-VN" dirty="0" err="1"/>
-              <a:t>đã</a:t>
-            </a:r>
-            <a:r>
-              <a:rPr lang="vi-VN" dirty="0"/>
-              <a:t> </a:t>
-            </a:r>
-            <a:r>
-              <a:rPr lang="vi-VN" dirty="0" err="1"/>
-              <a:t>trải</a:t>
-            </a:r>
-            <a:r>
-              <a:rPr lang="vi-VN" dirty="0"/>
-              <a:t> qua giai </a:t>
-            </a:r>
-            <a:r>
-              <a:rPr lang="vi-VN" dirty="0" err="1"/>
-              <a:t>đoạn</a:t>
-            </a:r>
-            <a:r>
-              <a:rPr lang="vi-VN" dirty="0"/>
-              <a:t> </a:t>
-            </a:r>
-            <a:r>
-              <a:rPr lang="vi-VN" dirty="0" err="1"/>
-              <a:t>huấn</a:t>
-            </a:r>
-            <a:r>
-              <a:rPr lang="vi-VN" dirty="0"/>
-              <a:t> </a:t>
-            </a:r>
-            <a:r>
-              <a:rPr lang="vi-VN" dirty="0" err="1"/>
-              <a:t>luyện</a:t>
-            </a:r>
-            <a:r>
-              <a:rPr lang="vi-VN" dirty="0"/>
-              <a:t> ban </a:t>
-            </a:r>
-            <a:r>
-              <a:rPr lang="vi-VN" dirty="0" err="1"/>
-              <a:t>đầu</a:t>
-            </a:r>
-            <a:r>
-              <a:rPr lang="vi-VN" dirty="0"/>
-              <a:t> trên </a:t>
-            </a:r>
-            <a:r>
-              <a:rPr lang="vi-VN" dirty="0" err="1"/>
-              <a:t>một</a:t>
-            </a:r>
-            <a:r>
-              <a:rPr lang="vi-VN" dirty="0"/>
-              <a:t> </a:t>
-            </a:r>
-            <a:r>
-              <a:rPr lang="vi-VN" dirty="0" err="1"/>
-              <a:t>tập</a:t>
-            </a:r>
-            <a:r>
-              <a:rPr lang="vi-VN" dirty="0"/>
-              <a:t> </a:t>
-            </a:r>
-            <a:r>
-              <a:rPr lang="vi-VN" dirty="0" err="1"/>
-              <a:t>dữ</a:t>
-            </a:r>
-            <a:r>
-              <a:rPr lang="vi-VN" dirty="0"/>
-              <a:t> </a:t>
-            </a:r>
-            <a:r>
-              <a:rPr lang="vi-VN" dirty="0" err="1"/>
-              <a:t>liệu</a:t>
-            </a:r>
-            <a:r>
-              <a:rPr lang="vi-VN" dirty="0"/>
-              <a:t> văn </a:t>
-            </a:r>
-            <a:r>
-              <a:rPr lang="vi-VN" dirty="0" err="1"/>
-              <a:t>bản</a:t>
-            </a:r>
-            <a:r>
-              <a:rPr lang="vi-VN" dirty="0"/>
-              <a:t> </a:t>
-            </a:r>
-            <a:r>
-              <a:rPr lang="vi-VN" dirty="0" err="1"/>
-              <a:t>khổng</a:t>
-            </a:r>
-            <a:r>
-              <a:rPr lang="vi-VN" dirty="0"/>
-              <a:t> </a:t>
-            </a:r>
-            <a:r>
-              <a:rPr lang="vi-VN" dirty="0" err="1"/>
-              <a:t>lồ</a:t>
-            </a:r>
-            <a:r>
-              <a:rPr lang="en-US" dirty="0"/>
-              <a:t>.</a:t>
+              <a:rPr lang="en-US" dirty="0"/>
+              <a:t> </a:t>
+            </a:r>
+            <a:r>
+              <a:rPr lang="en-US" dirty="0" err="1"/>
+              <a:t>ảnh</a:t>
+            </a:r>
+            <a:r>
+              <a:rPr lang="en-US" dirty="0"/>
+              <a:t>, </a:t>
+            </a:r>
+            <a:r>
+              <a:rPr lang="en-US" dirty="0" err="1"/>
+              <a:t>âm</a:t>
+            </a:r>
+            <a:r>
+              <a:rPr lang="en-US" dirty="0"/>
+              <a:t> </a:t>
+            </a:r>
+            <a:r>
+              <a:rPr lang="en-US" dirty="0" err="1"/>
+              <a:t>thanh</a:t>
+            </a:r>
+            <a:r>
+              <a:rPr lang="en-US" dirty="0"/>
+              <a:t>…)</a:t>
             </a:r>
           </a:p>
           <a:p>
@@ -6772,6 +7774,2076 @@
     <p:extLst>
       <p:ext uri="{BB962C8B-B14F-4D97-AF65-F5344CB8AC3E}">
         <p14:creationId xmlns:p14="http://schemas.microsoft.com/office/powerpoint/2010/main" val="1338160652"/>
+      </p:ext>
+    </p:extLst>
+  </p:cSld>
+  <p:clrMapOvr>
+    <a:masterClrMapping/>
+  </p:clrMapOvr>
+</p:sld>
+</file>
+
+<file path=ppt/slides/slide20.xml><?xml version="1.0" encoding="utf-8"?>
+<p:sld xmlns:a="http://schemas.openxmlformats.org/drawingml/2006/main" xmlns:r="http://schemas.openxmlformats.org/officeDocument/2006/relationships" xmlns:p="http://schemas.openxmlformats.org/presentationml/2006/main">
+  <p:cSld>
+    <p:spTree>
+      <p:nvGrpSpPr>
+        <p:cNvPr id="1" name=""/>
+        <p:cNvGrpSpPr/>
+        <p:nvPr/>
+      </p:nvGrpSpPr>
+      <p:grpSpPr>
+        <a:xfrm>
+          <a:off x="0" y="0"/>
+          <a:ext cx="0" cy="0"/>
+          <a:chOff x="0" y="0"/>
+          <a:chExt cx="0" cy="0"/>
+        </a:xfrm>
+      </p:grpSpPr>
+      <p:sp>
+        <p:nvSpPr>
+          <p:cNvPr id="2" name="Title 1">
+            <a:extLst>
+              <a:ext uri="{FF2B5EF4-FFF2-40B4-BE49-F238E27FC236}">
+                <a16:creationId xmlns:a16="http://schemas.microsoft.com/office/drawing/2014/main" id="{D3EB5C88-F4AF-455A-8324-E302EED87B34}"/>
+              </a:ext>
+            </a:extLst>
+          </p:cNvPr>
+          <p:cNvSpPr>
+            <a:spLocks noGrp="1"/>
+          </p:cNvSpPr>
+          <p:nvPr>
+            <p:ph type="title"/>
+          </p:nvPr>
+        </p:nvSpPr>
+        <p:spPr/>
+        <p:txBody>
+          <a:bodyPr/>
+          <a:lstStyle/>
+          <a:p>
+            <a:r>
+              <a:rPr lang="en-US" dirty="0"/>
+              <a:t>Flow Fine-Tune</a:t>
+            </a:r>
+          </a:p>
+        </p:txBody>
+      </p:sp>
+      <p:sp>
+        <p:nvSpPr>
+          <p:cNvPr id="3" name="Content Placeholder 2">
+            <a:extLst>
+              <a:ext uri="{FF2B5EF4-FFF2-40B4-BE49-F238E27FC236}">
+                <a16:creationId xmlns:a16="http://schemas.microsoft.com/office/drawing/2014/main" id="{7E71AD3B-8519-4A93-ACB3-4399F3171A80}"/>
+              </a:ext>
+            </a:extLst>
+          </p:cNvPr>
+          <p:cNvSpPr>
+            <a:spLocks noGrp="1"/>
+          </p:cNvSpPr>
+          <p:nvPr>
+            <p:ph idx="1"/>
+          </p:nvPr>
+        </p:nvSpPr>
+        <p:spPr/>
+        <p:txBody>
+          <a:bodyPr>
+            <a:normAutofit fontScale="92500" lnSpcReduction="20000"/>
+          </a:bodyPr>
+          <a:lstStyle/>
+          <a:p>
+            <a:pPr marL="0" indent="0">
+              <a:buNone/>
+            </a:pPr>
+            <a:r>
+              <a:rPr lang="en-US" dirty="0"/>
+              <a:t>3. Fine-Tune Production </a:t>
+            </a:r>
+            <a:r>
+              <a:rPr lang="en-US" dirty="0" err="1"/>
+              <a:t>trên</a:t>
+            </a:r>
+            <a:r>
+              <a:rPr lang="en-US" dirty="0"/>
+              <a:t> Azure</a:t>
+            </a:r>
+          </a:p>
+          <a:p>
+            <a:pPr lvl="1"/>
+            <a:r>
+              <a:rPr lang="en-US" dirty="0"/>
+              <a:t>Training data, Validation data, Testing data (</a:t>
+            </a:r>
+            <a:r>
+              <a:rPr lang="en-US" dirty="0" err="1"/>
+              <a:t>khuyến</a:t>
+            </a:r>
+            <a:r>
+              <a:rPr lang="en-US" dirty="0"/>
+              <a:t> </a:t>
+            </a:r>
+            <a:r>
+              <a:rPr lang="en-US" dirty="0" err="1"/>
+              <a:t>khích</a:t>
+            </a:r>
+            <a:r>
+              <a:rPr lang="en-US" dirty="0"/>
+              <a:t> them, </a:t>
+            </a:r>
+            <a:r>
+              <a:rPr lang="en-US" dirty="0" err="1"/>
+              <a:t>đánh</a:t>
+            </a:r>
+            <a:r>
+              <a:rPr lang="en-US" dirty="0"/>
+              <a:t> </a:t>
+            </a:r>
+            <a:r>
+              <a:rPr lang="en-US" dirty="0" err="1"/>
+              <a:t>giá</a:t>
+            </a:r>
+            <a:r>
+              <a:rPr lang="en-US" dirty="0"/>
+              <a:t> </a:t>
+            </a:r>
+            <a:r>
+              <a:rPr lang="en-US" dirty="0" err="1"/>
+              <a:t>trung</a:t>
+            </a:r>
+            <a:r>
+              <a:rPr lang="en-US" dirty="0"/>
+              <a:t> </a:t>
+            </a:r>
+            <a:r>
+              <a:rPr lang="en-US" dirty="0" err="1"/>
+              <a:t>lập</a:t>
+            </a:r>
+            <a:r>
+              <a:rPr lang="en-US" dirty="0"/>
+              <a:t>)</a:t>
+            </a:r>
+          </a:p>
+          <a:p>
+            <a:pPr marL="0" indent="0">
+              <a:buNone/>
+            </a:pPr>
+            <a:endParaRPr lang="en-US" dirty="0"/>
+          </a:p>
+          <a:p>
+            <a:pPr marL="0" indent="0">
+              <a:buNone/>
+            </a:pPr>
+            <a:r>
+              <a:rPr lang="en-US" dirty="0"/>
+              <a:t>4. </a:t>
+            </a:r>
+            <a:r>
+              <a:rPr lang="en-US" dirty="0" err="1"/>
+              <a:t>Đánh</a:t>
+            </a:r>
+            <a:r>
+              <a:rPr lang="en-US" dirty="0"/>
+              <a:t> </a:t>
+            </a:r>
+            <a:r>
+              <a:rPr lang="en-US" dirty="0" err="1"/>
+              <a:t>giá</a:t>
+            </a:r>
+            <a:r>
+              <a:rPr lang="en-US" dirty="0"/>
+              <a:t> Production (Offline Evaluation</a:t>
+            </a:r>
+          </a:p>
+          <a:p>
+            <a:pPr lvl="1"/>
+            <a:r>
+              <a:rPr lang="vi-VN" dirty="0"/>
+              <a:t>So </a:t>
+            </a:r>
+            <a:r>
+              <a:rPr lang="vi-VN" dirty="0" err="1"/>
+              <a:t>sánh</a:t>
+            </a:r>
+            <a:r>
+              <a:rPr lang="vi-VN" dirty="0"/>
+              <a:t>:</a:t>
+            </a:r>
+            <a:r>
+              <a:rPr lang="en-US" dirty="0"/>
+              <a:t> </a:t>
+            </a:r>
+            <a:r>
+              <a:rPr lang="vi-VN" dirty="0" err="1"/>
+              <a:t>Base</a:t>
+            </a:r>
+            <a:r>
+              <a:rPr lang="vi-VN" dirty="0"/>
+              <a:t> </a:t>
+            </a:r>
+            <a:r>
+              <a:rPr lang="vi-VN" dirty="0" err="1"/>
+              <a:t>model</a:t>
+            </a:r>
+            <a:r>
+              <a:rPr lang="en-US" dirty="0"/>
+              <a:t> + </a:t>
+            </a:r>
+            <a:r>
+              <a:rPr lang="vi-VN" dirty="0" err="1"/>
+              <a:t>Prompt-only</a:t>
+            </a:r>
+            <a:r>
+              <a:rPr lang="en-US" dirty="0"/>
+              <a:t> </a:t>
+            </a:r>
+            <a:r>
+              <a:rPr lang="en-US" dirty="0" err="1"/>
+              <a:t>và</a:t>
+            </a:r>
+            <a:r>
+              <a:rPr lang="en-US" dirty="0"/>
+              <a:t> </a:t>
+            </a:r>
+            <a:r>
+              <a:rPr lang="vi-VN" dirty="0" err="1"/>
+              <a:t>Fine-tuned</a:t>
+            </a:r>
+            <a:r>
+              <a:rPr lang="vi-VN" dirty="0"/>
+              <a:t> </a:t>
+            </a:r>
+            <a:r>
+              <a:rPr lang="vi-VN" dirty="0" err="1"/>
+              <a:t>model</a:t>
+            </a:r>
+            <a:endParaRPr lang="en-US" dirty="0"/>
+          </a:p>
+          <a:p>
+            <a:pPr lvl="1"/>
+            <a:r>
+              <a:rPr lang="vi-VN" dirty="0" err="1"/>
+              <a:t>Chỉ</a:t>
+            </a:r>
+            <a:r>
+              <a:rPr lang="vi-VN" dirty="0"/>
+              <a:t> </a:t>
+            </a:r>
+            <a:r>
+              <a:rPr lang="vi-VN" dirty="0" err="1"/>
+              <a:t>deploy</a:t>
+            </a:r>
+            <a:r>
+              <a:rPr lang="vi-VN" dirty="0"/>
+              <a:t> </a:t>
+            </a:r>
+            <a:r>
+              <a:rPr lang="vi-VN" dirty="0" err="1"/>
+              <a:t>nếu</a:t>
+            </a:r>
+            <a:r>
+              <a:rPr lang="vi-VN" dirty="0"/>
+              <a:t> </a:t>
+            </a:r>
+            <a:r>
+              <a:rPr lang="vi-VN" dirty="0" err="1"/>
+              <a:t>fine-tune</a:t>
+            </a:r>
+            <a:r>
+              <a:rPr lang="vi-VN" dirty="0"/>
+              <a:t> </a:t>
+            </a:r>
+            <a:r>
+              <a:rPr lang="vi-VN" dirty="0" err="1"/>
+              <a:t>thật</a:t>
+            </a:r>
+            <a:r>
+              <a:rPr lang="vi-VN" dirty="0"/>
+              <a:t> </a:t>
+            </a:r>
+            <a:r>
+              <a:rPr lang="vi-VN" dirty="0" err="1"/>
+              <a:t>sự</a:t>
+            </a:r>
+            <a:r>
+              <a:rPr lang="vi-VN" dirty="0"/>
+              <a:t> </a:t>
+            </a:r>
+            <a:r>
+              <a:rPr lang="vi-VN" dirty="0" err="1"/>
+              <a:t>tốt</a:t>
+            </a:r>
+            <a:r>
+              <a:rPr lang="vi-VN" dirty="0"/>
+              <a:t> hơn.</a:t>
+            </a:r>
+            <a:endParaRPr lang="en-US" dirty="0"/>
+          </a:p>
+          <a:p>
+            <a:pPr lvl="1"/>
+            <a:r>
+              <a:rPr lang="vi-VN" dirty="0" err="1"/>
+              <a:t>Debug</a:t>
+            </a:r>
+            <a:r>
+              <a:rPr lang="vi-VN" dirty="0"/>
+              <a:t> </a:t>
+            </a:r>
+            <a:r>
+              <a:rPr lang="vi-VN" dirty="0" err="1"/>
+              <a:t>dataset</a:t>
+            </a:r>
+            <a:endParaRPr lang="en-US" dirty="0"/>
+          </a:p>
+          <a:p>
+            <a:pPr lvl="1"/>
+            <a:r>
+              <a:rPr lang="vi-VN" dirty="0" err="1"/>
+              <a:t>Ước</a:t>
+            </a:r>
+            <a:r>
+              <a:rPr lang="vi-VN" dirty="0"/>
+              <a:t> </a:t>
+            </a:r>
+            <a:r>
+              <a:rPr lang="vi-VN" dirty="0" err="1"/>
+              <a:t>lượng</a:t>
+            </a:r>
+            <a:r>
+              <a:rPr lang="vi-VN" dirty="0"/>
+              <a:t> chi </a:t>
+            </a:r>
+            <a:r>
+              <a:rPr lang="vi-VN" dirty="0" err="1"/>
+              <a:t>phí</a:t>
+            </a:r>
+            <a:endParaRPr lang="en-US" dirty="0"/>
+          </a:p>
+          <a:p>
+            <a:pPr lvl="1"/>
+            <a:r>
+              <a:rPr lang="vi-VN" dirty="0" err="1"/>
+              <a:t>Kiểm</a:t>
+            </a:r>
+            <a:r>
+              <a:rPr lang="vi-VN" dirty="0"/>
+              <a:t> tra </a:t>
+            </a:r>
+            <a:r>
+              <a:rPr lang="vi-VN" dirty="0" err="1"/>
+              <a:t>model</a:t>
+            </a:r>
+            <a:r>
+              <a:rPr lang="vi-VN" dirty="0"/>
+              <a:t> </a:t>
+            </a:r>
+            <a:r>
+              <a:rPr lang="vi-VN" dirty="0" err="1"/>
+              <a:t>có</a:t>
+            </a:r>
+            <a:r>
+              <a:rPr lang="vi-VN" dirty="0"/>
+              <a:t> </a:t>
+            </a:r>
+            <a:r>
+              <a:rPr lang="vi-VN" dirty="0" err="1"/>
+              <a:t>học</a:t>
+            </a:r>
+            <a:r>
+              <a:rPr lang="vi-VN" dirty="0"/>
+              <a:t> </a:t>
+            </a:r>
+            <a:r>
+              <a:rPr lang="vi-VN" dirty="0" err="1"/>
+              <a:t>đúng</a:t>
+            </a:r>
+            <a:r>
+              <a:rPr lang="vi-VN" dirty="0"/>
+              <a:t> không</a:t>
+            </a:r>
+            <a:endParaRPr lang="en-US" dirty="0"/>
+          </a:p>
+          <a:p>
+            <a:endParaRPr lang="en-US" dirty="0"/>
+          </a:p>
+          <a:p>
+            <a:pPr marL="0" indent="0">
+              <a:buNone/>
+            </a:pPr>
+            <a:r>
+              <a:rPr lang="en-US" dirty="0"/>
+              <a:t>5. Deploy + Monitor (Production)</a:t>
+            </a:r>
+          </a:p>
+          <a:p>
+            <a:pPr lvl="1"/>
+            <a:r>
+              <a:rPr lang="en-US" dirty="0"/>
+              <a:t>Monitor hallucination, Monitor drift, Thu </a:t>
+            </a:r>
+            <a:r>
+              <a:rPr lang="en-US" dirty="0" err="1"/>
+              <a:t>thập</a:t>
+            </a:r>
+            <a:r>
+              <a:rPr lang="en-US" dirty="0"/>
+              <a:t> feedback user</a:t>
+            </a:r>
+          </a:p>
+        </p:txBody>
+      </p:sp>
+    </p:spTree>
+    <p:extLst>
+      <p:ext uri="{BB962C8B-B14F-4D97-AF65-F5344CB8AC3E}">
+        <p14:creationId xmlns:p14="http://schemas.microsoft.com/office/powerpoint/2010/main" val="1716746187"/>
+      </p:ext>
+    </p:extLst>
+  </p:cSld>
+  <p:clrMapOvr>
+    <a:masterClrMapping/>
+  </p:clrMapOvr>
+</p:sld>
+</file>
+
+<file path=ppt/slides/slide21.xml><?xml version="1.0" encoding="utf-8"?>
+<p:sld xmlns:a="http://schemas.openxmlformats.org/drawingml/2006/main" xmlns:r="http://schemas.openxmlformats.org/officeDocument/2006/relationships" xmlns:p="http://schemas.openxmlformats.org/presentationml/2006/main">
+  <p:cSld>
+    <p:spTree>
+      <p:nvGrpSpPr>
+        <p:cNvPr id="1" name=""/>
+        <p:cNvGrpSpPr/>
+        <p:nvPr/>
+      </p:nvGrpSpPr>
+      <p:grpSpPr>
+        <a:xfrm>
+          <a:off x="0" y="0"/>
+          <a:ext cx="0" cy="0"/>
+          <a:chOff x="0" y="0"/>
+          <a:chExt cx="0" cy="0"/>
+        </a:xfrm>
+      </p:grpSpPr>
+      <p:sp>
+        <p:nvSpPr>
+          <p:cNvPr id="2" name="Title 1">
+            <a:extLst>
+              <a:ext uri="{FF2B5EF4-FFF2-40B4-BE49-F238E27FC236}">
+                <a16:creationId xmlns:a16="http://schemas.microsoft.com/office/drawing/2014/main" id="{D3EB5C88-F4AF-455A-8324-E302EED87B34}"/>
+              </a:ext>
+            </a:extLst>
+          </p:cNvPr>
+          <p:cNvSpPr>
+            <a:spLocks noGrp="1"/>
+          </p:cNvSpPr>
+          <p:nvPr>
+            <p:ph type="title"/>
+          </p:nvPr>
+        </p:nvSpPr>
+        <p:spPr/>
+        <p:txBody>
+          <a:bodyPr/>
+          <a:lstStyle/>
+          <a:p>
+            <a:r>
+              <a:rPr lang="en-US" dirty="0" err="1"/>
+              <a:t>Các</a:t>
+            </a:r>
+            <a:r>
+              <a:rPr lang="en-US" dirty="0"/>
+              <a:t> chi </a:t>
+            </a:r>
+            <a:r>
+              <a:rPr lang="en-US" dirty="0" err="1"/>
+              <a:t>phí</a:t>
+            </a:r>
+            <a:r>
+              <a:rPr lang="en-US" dirty="0"/>
+              <a:t> </a:t>
+            </a:r>
+            <a:r>
+              <a:rPr lang="en-US" dirty="0" err="1"/>
+              <a:t>khi</a:t>
+            </a:r>
+            <a:r>
+              <a:rPr lang="en-US" dirty="0"/>
+              <a:t> </a:t>
+            </a:r>
+            <a:r>
+              <a:rPr lang="en-US" dirty="0" err="1"/>
+              <a:t>triển</a:t>
+            </a:r>
+            <a:r>
+              <a:rPr lang="en-US" dirty="0"/>
+              <a:t> </a:t>
+            </a:r>
+            <a:r>
+              <a:rPr lang="en-US" dirty="0" err="1"/>
+              <a:t>khai</a:t>
+            </a:r>
+            <a:r>
+              <a:rPr lang="en-US" dirty="0"/>
+              <a:t> Fine-Tune </a:t>
+            </a:r>
+            <a:r>
+              <a:rPr lang="en-US" dirty="0" err="1"/>
+              <a:t>trên</a:t>
+            </a:r>
+            <a:r>
+              <a:rPr lang="en-US" dirty="0"/>
+              <a:t> Azure</a:t>
+            </a:r>
+          </a:p>
+        </p:txBody>
+      </p:sp>
+      <p:sp>
+        <p:nvSpPr>
+          <p:cNvPr id="3" name="Content Placeholder 2">
+            <a:extLst>
+              <a:ext uri="{FF2B5EF4-FFF2-40B4-BE49-F238E27FC236}">
+                <a16:creationId xmlns:a16="http://schemas.microsoft.com/office/drawing/2014/main" id="{7E71AD3B-8519-4A93-ACB3-4399F3171A80}"/>
+              </a:ext>
+            </a:extLst>
+          </p:cNvPr>
+          <p:cNvSpPr>
+            <a:spLocks noGrp="1"/>
+          </p:cNvSpPr>
+          <p:nvPr>
+            <p:ph idx="1"/>
+          </p:nvPr>
+        </p:nvSpPr>
+        <p:spPr/>
+        <p:txBody>
+          <a:bodyPr>
+            <a:normAutofit/>
+          </a:bodyPr>
+          <a:lstStyle/>
+          <a:p>
+            <a:pPr marL="514350" indent="-514350">
+              <a:buAutoNum type="arabicPeriod"/>
+            </a:pPr>
+            <a:r>
+              <a:rPr lang="en-US" dirty="0"/>
+              <a:t>Chi </a:t>
+            </a:r>
+            <a:r>
+              <a:rPr lang="en-US" dirty="0" err="1"/>
+              <a:t>phí</a:t>
+            </a:r>
+            <a:r>
+              <a:rPr lang="en-US" dirty="0"/>
+              <a:t> training local</a:t>
+            </a:r>
+          </a:p>
+          <a:p>
+            <a:pPr lvl="1"/>
+            <a:r>
+              <a:rPr lang="en-US" dirty="0"/>
+              <a:t>| </a:t>
+            </a:r>
+            <a:r>
+              <a:rPr lang="en-US" dirty="0" err="1"/>
+              <a:t>Công</a:t>
+            </a:r>
+            <a:r>
+              <a:rPr lang="en-US" dirty="0"/>
+              <a:t> </a:t>
+            </a:r>
+            <a:r>
+              <a:rPr lang="en-US" dirty="0" err="1"/>
+              <a:t>việc</a:t>
+            </a:r>
+            <a:r>
+              <a:rPr lang="en-US" dirty="0"/>
+              <a:t>         | Cost     |</a:t>
+            </a:r>
+          </a:p>
+          <a:p>
+            <a:pPr lvl="1"/>
+            <a:r>
+              <a:rPr lang="en-US" dirty="0"/>
+              <a:t>| ----------------- | -------- |</a:t>
+            </a:r>
+          </a:p>
+          <a:p>
+            <a:pPr lvl="1"/>
+            <a:r>
+              <a:rPr lang="en-US" dirty="0"/>
+              <a:t>| </a:t>
+            </a:r>
+            <a:r>
+              <a:rPr lang="en-US" dirty="0" err="1"/>
+              <a:t>Chuẩn</a:t>
+            </a:r>
+            <a:r>
+              <a:rPr lang="en-US" dirty="0"/>
+              <a:t> </a:t>
+            </a:r>
+            <a:r>
+              <a:rPr lang="en-US" dirty="0" err="1"/>
+              <a:t>bị</a:t>
+            </a:r>
+            <a:r>
+              <a:rPr lang="en-US" dirty="0"/>
+              <a:t> data        | </a:t>
+            </a:r>
+            <a:r>
+              <a:rPr lang="en-US" dirty="0" err="1"/>
+              <a:t>Nhân</a:t>
+            </a:r>
+            <a:r>
+              <a:rPr lang="en-US" dirty="0"/>
+              <a:t> </a:t>
+            </a:r>
+            <a:r>
+              <a:rPr lang="en-US" dirty="0" err="1"/>
+              <a:t>lực</a:t>
+            </a:r>
+            <a:r>
+              <a:rPr lang="en-US" dirty="0"/>
+              <a:t> |</a:t>
+            </a:r>
+          </a:p>
+          <a:p>
+            <a:pPr lvl="1"/>
+            <a:r>
+              <a:rPr lang="en-US" dirty="0"/>
+              <a:t>| Clean data        | </a:t>
+            </a:r>
+            <a:r>
+              <a:rPr lang="en-US" dirty="0" err="1"/>
+              <a:t>Nhân</a:t>
+            </a:r>
+            <a:r>
+              <a:rPr lang="en-US" dirty="0"/>
+              <a:t> </a:t>
+            </a:r>
+            <a:r>
+              <a:rPr lang="en-US" dirty="0" err="1"/>
+              <a:t>lực</a:t>
+            </a:r>
+            <a:r>
+              <a:rPr lang="en-US" dirty="0"/>
+              <a:t> |</a:t>
+            </a:r>
+          </a:p>
+          <a:p>
+            <a:pPr lvl="1"/>
+            <a:r>
+              <a:rPr lang="en-US" dirty="0"/>
+              <a:t>| Review answer     | </a:t>
+            </a:r>
+            <a:r>
+              <a:rPr lang="en-US" dirty="0" err="1"/>
+              <a:t>Nhân</a:t>
+            </a:r>
+            <a:r>
+              <a:rPr lang="en-US" dirty="0"/>
+              <a:t> </a:t>
+            </a:r>
+            <a:r>
+              <a:rPr lang="en-US" dirty="0" err="1"/>
+              <a:t>lực</a:t>
+            </a:r>
+            <a:r>
+              <a:rPr lang="en-US" dirty="0"/>
+              <a:t> |</a:t>
+            </a:r>
+          </a:p>
+          <a:p>
+            <a:pPr lvl="1"/>
+            <a:r>
+              <a:rPr lang="en-US" dirty="0"/>
+              <a:t>| Fix hallucination | </a:t>
+            </a:r>
+            <a:r>
+              <a:rPr lang="en-US" dirty="0" err="1"/>
+              <a:t>Nhân</a:t>
+            </a:r>
+            <a:r>
+              <a:rPr lang="en-US" dirty="0"/>
+              <a:t> </a:t>
+            </a:r>
+            <a:r>
+              <a:rPr lang="en-US" dirty="0" err="1"/>
+              <a:t>lực</a:t>
+            </a:r>
+            <a:r>
+              <a:rPr lang="en-US" dirty="0"/>
+              <a:t> |</a:t>
+            </a:r>
+          </a:p>
+          <a:p>
+            <a:pPr marL="514350" indent="-514350">
+              <a:buAutoNum type="arabicPeriod"/>
+            </a:pPr>
+            <a:r>
+              <a:rPr lang="en-US" dirty="0"/>
+              <a:t>Chi </a:t>
+            </a:r>
+            <a:r>
+              <a:rPr lang="en-US" dirty="0" err="1"/>
+              <a:t>phí</a:t>
+            </a:r>
+            <a:r>
+              <a:rPr lang="en-US" dirty="0"/>
+              <a:t> </a:t>
+            </a:r>
+            <a:r>
+              <a:rPr lang="en-US" dirty="0" err="1"/>
+              <a:t>triển</a:t>
+            </a:r>
+            <a:r>
+              <a:rPr lang="en-US" dirty="0"/>
+              <a:t> </a:t>
+            </a:r>
+            <a:r>
+              <a:rPr lang="en-US" dirty="0" err="1"/>
+              <a:t>khai</a:t>
+            </a:r>
+            <a:r>
+              <a:rPr lang="en-US" dirty="0"/>
+              <a:t> </a:t>
+            </a:r>
+            <a:r>
+              <a:rPr lang="en-US" dirty="0" err="1"/>
+              <a:t>trên</a:t>
+            </a:r>
+            <a:r>
+              <a:rPr lang="en-US" dirty="0"/>
+              <a:t> Azure</a:t>
+            </a:r>
+          </a:p>
+          <a:p>
+            <a:pPr lvl="1"/>
+            <a:r>
+              <a:rPr lang="en-US" dirty="0"/>
+              <a:t>Chi </a:t>
+            </a:r>
+            <a:r>
+              <a:rPr lang="en-US" dirty="0" err="1"/>
+              <a:t>phí</a:t>
+            </a:r>
+            <a:r>
+              <a:rPr lang="en-US" dirty="0"/>
+              <a:t> Fine-Tune </a:t>
+            </a:r>
+            <a:r>
+              <a:rPr lang="en-US" dirty="0" err="1"/>
+              <a:t>trên</a:t>
+            </a:r>
+            <a:r>
+              <a:rPr lang="en-US" dirty="0"/>
+              <a:t> Azure = Training + Storage + Inference + Operations</a:t>
+            </a:r>
+          </a:p>
+        </p:txBody>
+      </p:sp>
+    </p:spTree>
+    <p:extLst>
+      <p:ext uri="{BB962C8B-B14F-4D97-AF65-F5344CB8AC3E}">
+        <p14:creationId xmlns:p14="http://schemas.microsoft.com/office/powerpoint/2010/main" val="229429348"/>
+      </p:ext>
+    </p:extLst>
+  </p:cSld>
+  <p:clrMapOvr>
+    <a:masterClrMapping/>
+  </p:clrMapOvr>
+</p:sld>
+</file>
+
+<file path=ppt/slides/slide22.xml><?xml version="1.0" encoding="utf-8"?>
+<p:sld xmlns:a="http://schemas.openxmlformats.org/drawingml/2006/main" xmlns:r="http://schemas.openxmlformats.org/officeDocument/2006/relationships" xmlns:p="http://schemas.openxmlformats.org/presentationml/2006/main">
+  <p:cSld>
+    <p:spTree>
+      <p:nvGrpSpPr>
+        <p:cNvPr id="1" name=""/>
+        <p:cNvGrpSpPr/>
+        <p:nvPr/>
+      </p:nvGrpSpPr>
+      <p:grpSpPr>
+        <a:xfrm>
+          <a:off x="0" y="0"/>
+          <a:ext cx="0" cy="0"/>
+          <a:chOff x="0" y="0"/>
+          <a:chExt cx="0" cy="0"/>
+        </a:xfrm>
+      </p:grpSpPr>
+      <p:sp>
+        <p:nvSpPr>
+          <p:cNvPr id="2" name="Title 1">
+            <a:extLst>
+              <a:ext uri="{FF2B5EF4-FFF2-40B4-BE49-F238E27FC236}">
+                <a16:creationId xmlns:a16="http://schemas.microsoft.com/office/drawing/2014/main" id="{D3EB5C88-F4AF-455A-8324-E302EED87B34}"/>
+              </a:ext>
+            </a:extLst>
+          </p:cNvPr>
+          <p:cNvSpPr>
+            <a:spLocks noGrp="1"/>
+          </p:cNvSpPr>
+          <p:nvPr>
+            <p:ph type="title"/>
+          </p:nvPr>
+        </p:nvSpPr>
+        <p:spPr/>
+        <p:txBody>
+          <a:bodyPr/>
+          <a:lstStyle/>
+          <a:p>
+            <a:r>
+              <a:rPr lang="en-US" dirty="0" err="1"/>
+              <a:t>Các</a:t>
+            </a:r>
+            <a:r>
+              <a:rPr lang="en-US" dirty="0"/>
+              <a:t> chi </a:t>
+            </a:r>
+            <a:r>
+              <a:rPr lang="en-US" dirty="0" err="1"/>
+              <a:t>phí</a:t>
+            </a:r>
+            <a:r>
+              <a:rPr lang="en-US" dirty="0"/>
+              <a:t> </a:t>
+            </a:r>
+            <a:r>
+              <a:rPr lang="en-US" dirty="0" err="1"/>
+              <a:t>khi</a:t>
+            </a:r>
+            <a:r>
+              <a:rPr lang="en-US" dirty="0"/>
+              <a:t> </a:t>
+            </a:r>
+            <a:r>
+              <a:rPr lang="en-US" dirty="0" err="1"/>
+              <a:t>triển</a:t>
+            </a:r>
+            <a:r>
+              <a:rPr lang="en-US" dirty="0"/>
+              <a:t> </a:t>
+            </a:r>
+            <a:r>
+              <a:rPr lang="en-US" dirty="0" err="1"/>
+              <a:t>khai</a:t>
+            </a:r>
+            <a:r>
+              <a:rPr lang="en-US" dirty="0"/>
+              <a:t> Fine-Tune </a:t>
+            </a:r>
+            <a:r>
+              <a:rPr lang="en-US" dirty="0" err="1"/>
+              <a:t>trên</a:t>
+            </a:r>
+            <a:r>
+              <a:rPr lang="en-US" dirty="0"/>
+              <a:t> Azure</a:t>
+            </a:r>
+          </a:p>
+        </p:txBody>
+      </p:sp>
+      <p:sp>
+        <p:nvSpPr>
+          <p:cNvPr id="3" name="Content Placeholder 2">
+            <a:extLst>
+              <a:ext uri="{FF2B5EF4-FFF2-40B4-BE49-F238E27FC236}">
+                <a16:creationId xmlns:a16="http://schemas.microsoft.com/office/drawing/2014/main" id="{7E71AD3B-8519-4A93-ACB3-4399F3171A80}"/>
+              </a:ext>
+            </a:extLst>
+          </p:cNvPr>
+          <p:cNvSpPr>
+            <a:spLocks noGrp="1"/>
+          </p:cNvSpPr>
+          <p:nvPr>
+            <p:ph idx="1"/>
+          </p:nvPr>
+        </p:nvSpPr>
+        <p:spPr/>
+        <p:txBody>
+          <a:bodyPr>
+            <a:normAutofit fontScale="92500" lnSpcReduction="20000"/>
+          </a:bodyPr>
+          <a:lstStyle/>
+          <a:p>
+            <a:pPr marL="0" indent="0">
+              <a:buNone/>
+            </a:pPr>
+            <a:r>
+              <a:rPr lang="en-US" dirty="0"/>
+              <a:t>Chi </a:t>
+            </a:r>
+            <a:r>
+              <a:rPr lang="en-US" dirty="0" err="1"/>
+              <a:t>phí</a:t>
+            </a:r>
+            <a:r>
+              <a:rPr lang="en-US" dirty="0"/>
+              <a:t> </a:t>
+            </a:r>
+            <a:r>
+              <a:rPr lang="en-US" dirty="0" err="1"/>
+              <a:t>triển</a:t>
+            </a:r>
+            <a:r>
+              <a:rPr lang="en-US" dirty="0"/>
+              <a:t> </a:t>
+            </a:r>
+            <a:r>
+              <a:rPr lang="en-US" dirty="0" err="1"/>
+              <a:t>khai</a:t>
+            </a:r>
+            <a:r>
+              <a:rPr lang="en-US" dirty="0"/>
+              <a:t> </a:t>
+            </a:r>
+            <a:r>
+              <a:rPr lang="en-US" dirty="0" err="1"/>
+              <a:t>trên</a:t>
+            </a:r>
+            <a:r>
+              <a:rPr lang="en-US" dirty="0"/>
+              <a:t> Azure</a:t>
+            </a:r>
+          </a:p>
+          <a:p>
+            <a:pPr marL="514350" indent="-514350">
+              <a:buFont typeface="+mj-lt"/>
+              <a:buAutoNum type="arabicPeriod"/>
+            </a:pPr>
+            <a:r>
+              <a:rPr lang="it-IT" dirty="0"/>
+              <a:t>Chi phí Compute Training (Lớn nhất)</a:t>
+            </a:r>
+          </a:p>
+          <a:p>
+            <a:pPr lvl="1"/>
+            <a:r>
+              <a:rPr lang="vi-VN" dirty="0" err="1"/>
+              <a:t>Bạn</a:t>
+            </a:r>
+            <a:r>
+              <a:rPr lang="vi-VN" dirty="0"/>
+              <a:t> </a:t>
+            </a:r>
+            <a:r>
+              <a:rPr lang="vi-VN" dirty="0" err="1"/>
+              <a:t>trả</a:t>
+            </a:r>
+            <a:r>
+              <a:rPr lang="vi-VN" dirty="0"/>
+              <a:t> </a:t>
+            </a:r>
+            <a:r>
+              <a:rPr lang="vi-VN" dirty="0" err="1"/>
+              <a:t>tiền</a:t>
+            </a:r>
+            <a:r>
+              <a:rPr lang="vi-VN" dirty="0"/>
+              <a:t> cho:</a:t>
+            </a:r>
+            <a:endParaRPr lang="en-US" dirty="0"/>
+          </a:p>
+          <a:p>
+            <a:pPr lvl="2"/>
+            <a:r>
+              <a:rPr lang="vi-VN" dirty="0" err="1"/>
+              <a:t>Số</a:t>
+            </a:r>
+            <a:r>
+              <a:rPr lang="vi-VN" dirty="0"/>
+              <a:t> </a:t>
+            </a:r>
+            <a:r>
+              <a:rPr lang="vi-VN" dirty="0" err="1"/>
+              <a:t>token</a:t>
+            </a:r>
+            <a:r>
+              <a:rPr lang="vi-VN" dirty="0"/>
+              <a:t> trong </a:t>
+            </a:r>
+            <a:r>
+              <a:rPr lang="vi-VN" dirty="0" err="1"/>
+              <a:t>training</a:t>
+            </a:r>
+            <a:r>
+              <a:rPr lang="vi-VN" dirty="0"/>
+              <a:t> </a:t>
+            </a:r>
+            <a:r>
+              <a:rPr lang="vi-VN" dirty="0" err="1"/>
+              <a:t>data</a:t>
+            </a:r>
+            <a:endParaRPr lang="en-US" dirty="0"/>
+          </a:p>
+          <a:p>
+            <a:pPr lvl="2"/>
+            <a:r>
+              <a:rPr lang="vi-VN" dirty="0" err="1"/>
+              <a:t>Số</a:t>
+            </a:r>
+            <a:r>
+              <a:rPr lang="vi-VN" dirty="0"/>
+              <a:t> </a:t>
+            </a:r>
+            <a:r>
+              <a:rPr lang="vi-VN" dirty="0" err="1"/>
+              <a:t>epochs</a:t>
+            </a:r>
+            <a:endParaRPr lang="en-US" dirty="0"/>
+          </a:p>
+          <a:p>
+            <a:pPr lvl="2"/>
+            <a:r>
+              <a:rPr lang="vi-VN" dirty="0" err="1"/>
+              <a:t>Model</a:t>
+            </a:r>
+            <a:r>
+              <a:rPr lang="vi-VN" dirty="0"/>
+              <a:t> </a:t>
+            </a:r>
+            <a:r>
+              <a:rPr lang="vi-VN" dirty="0" err="1"/>
+              <a:t>được</a:t>
+            </a:r>
+            <a:r>
+              <a:rPr lang="vi-VN" dirty="0"/>
+              <a:t> </a:t>
+            </a:r>
+            <a:r>
+              <a:rPr lang="vi-VN" dirty="0" err="1"/>
+              <a:t>fine-tune</a:t>
+            </a:r>
+            <a:endParaRPr lang="en-US" dirty="0"/>
+          </a:p>
+          <a:p>
+            <a:pPr lvl="1"/>
+            <a:r>
+              <a:rPr lang="en-US" dirty="0"/>
+              <a:t>Chi </a:t>
+            </a:r>
+            <a:r>
+              <a:rPr lang="en-US" dirty="0" err="1"/>
+              <a:t>tiết</a:t>
+            </a:r>
+            <a:endParaRPr lang="it-IT" dirty="0"/>
+          </a:p>
+          <a:p>
+            <a:pPr lvl="2"/>
+            <a:r>
+              <a:rPr lang="vi-VN" dirty="0"/>
+              <a:t>| </a:t>
+            </a:r>
+            <a:r>
+              <a:rPr lang="vi-VN" dirty="0" err="1"/>
+              <a:t>Yếu</a:t>
+            </a:r>
+            <a:r>
+              <a:rPr lang="vi-VN" dirty="0"/>
+              <a:t> </a:t>
+            </a:r>
+            <a:r>
+              <a:rPr lang="vi-VN" dirty="0" err="1"/>
+              <a:t>tố</a:t>
+            </a:r>
+            <a:r>
+              <a:rPr lang="vi-VN" dirty="0"/>
+              <a:t>        | </a:t>
+            </a:r>
+            <a:r>
+              <a:rPr lang="vi-VN" dirty="0" err="1"/>
+              <a:t>Ảnh</a:t>
+            </a:r>
+            <a:r>
+              <a:rPr lang="vi-VN" dirty="0"/>
+              <a:t> </a:t>
+            </a:r>
+            <a:r>
+              <a:rPr lang="vi-VN" dirty="0" err="1"/>
+              <a:t>hưởng</a:t>
+            </a:r>
+            <a:r>
+              <a:rPr lang="vi-VN" dirty="0"/>
+              <a:t>               |</a:t>
+            </a:r>
+          </a:p>
+          <a:p>
+            <a:pPr lvl="2"/>
+            <a:r>
+              <a:rPr lang="vi-VN" dirty="0"/>
+              <a:t>| ------------- | ----------------------- |</a:t>
+            </a:r>
+          </a:p>
+          <a:p>
+            <a:pPr lvl="2"/>
+            <a:r>
+              <a:rPr lang="vi-VN" dirty="0"/>
+              <a:t>| </a:t>
+            </a:r>
+            <a:r>
+              <a:rPr lang="vi-VN" dirty="0" err="1"/>
+              <a:t>Dataset</a:t>
+            </a:r>
+            <a:r>
+              <a:rPr lang="vi-VN" dirty="0"/>
+              <a:t> </a:t>
+            </a:r>
+            <a:r>
+              <a:rPr lang="vi-VN" dirty="0" err="1"/>
+              <a:t>size</a:t>
+            </a:r>
+            <a:r>
+              <a:rPr lang="vi-VN" dirty="0"/>
+              <a:t>  | </a:t>
+            </a:r>
+            <a:r>
+              <a:rPr lang="vi-VN" dirty="0" err="1"/>
+              <a:t>Càng</a:t>
+            </a:r>
+            <a:r>
+              <a:rPr lang="vi-VN" dirty="0"/>
+              <a:t> </a:t>
+            </a:r>
+            <a:r>
+              <a:rPr lang="vi-VN" dirty="0" err="1"/>
+              <a:t>lớn</a:t>
+            </a:r>
+            <a:r>
+              <a:rPr lang="vi-VN" dirty="0"/>
+              <a:t> </a:t>
+            </a:r>
+            <a:r>
+              <a:rPr lang="vi-VN" dirty="0" err="1"/>
+              <a:t>càng</a:t>
+            </a:r>
+            <a:r>
+              <a:rPr lang="vi-VN" dirty="0"/>
+              <a:t> </a:t>
+            </a:r>
+            <a:r>
+              <a:rPr lang="vi-VN" dirty="0" err="1"/>
+              <a:t>tốn</a:t>
+            </a:r>
+            <a:r>
+              <a:rPr lang="vi-VN" dirty="0"/>
+              <a:t>       |</a:t>
+            </a:r>
+          </a:p>
+          <a:p>
+            <a:pPr lvl="2"/>
+            <a:r>
+              <a:rPr lang="vi-VN" dirty="0"/>
+              <a:t>| </a:t>
+            </a:r>
+            <a:r>
+              <a:rPr lang="vi-VN" dirty="0" err="1"/>
+              <a:t>Epochs</a:t>
+            </a:r>
+            <a:r>
+              <a:rPr lang="vi-VN" dirty="0"/>
+              <a:t>        | </a:t>
+            </a:r>
+            <a:r>
+              <a:rPr lang="vi-VN" dirty="0" err="1"/>
+              <a:t>Epochs</a:t>
+            </a:r>
+            <a:r>
+              <a:rPr lang="vi-VN" dirty="0"/>
+              <a:t> </a:t>
+            </a:r>
+            <a:r>
+              <a:rPr lang="vi-VN" dirty="0" err="1"/>
+              <a:t>nhiều</a:t>
+            </a:r>
+            <a:r>
+              <a:rPr lang="vi-VN" dirty="0"/>
+              <a:t> = </a:t>
+            </a:r>
+            <a:r>
+              <a:rPr lang="vi-VN" dirty="0" err="1"/>
+              <a:t>tốn</a:t>
+            </a:r>
+            <a:r>
+              <a:rPr lang="vi-VN" dirty="0"/>
+              <a:t>      |</a:t>
+            </a:r>
+          </a:p>
+          <a:p>
+            <a:pPr lvl="2"/>
+            <a:r>
+              <a:rPr lang="vi-VN" dirty="0"/>
+              <a:t>| </a:t>
+            </a:r>
+            <a:r>
+              <a:rPr lang="vi-VN" dirty="0" err="1"/>
+              <a:t>Model</a:t>
+            </a:r>
+            <a:r>
+              <a:rPr lang="vi-VN" dirty="0"/>
+              <a:t> </a:t>
+            </a:r>
+            <a:r>
+              <a:rPr lang="vi-VN" dirty="0" err="1"/>
+              <a:t>size</a:t>
+            </a:r>
+            <a:r>
+              <a:rPr lang="vi-VN" dirty="0"/>
+              <a:t>    | GPT-4o &gt; GPT-4o-mini    |</a:t>
+            </a:r>
+          </a:p>
+          <a:p>
+            <a:pPr lvl="2"/>
+            <a:r>
+              <a:rPr lang="vi-VN" dirty="0"/>
+              <a:t>| </a:t>
+            </a:r>
+            <a:r>
+              <a:rPr lang="vi-VN" dirty="0" err="1"/>
+              <a:t>Prompt</a:t>
+            </a:r>
+            <a:r>
+              <a:rPr lang="vi-VN" dirty="0"/>
+              <a:t> </a:t>
+            </a:r>
+            <a:r>
+              <a:rPr lang="vi-VN" dirty="0" err="1"/>
+              <a:t>length</a:t>
+            </a:r>
+            <a:r>
+              <a:rPr lang="vi-VN" dirty="0"/>
+              <a:t> | </a:t>
+            </a:r>
+            <a:r>
+              <a:rPr lang="vi-VN" dirty="0" err="1"/>
+              <a:t>Prompt</a:t>
+            </a:r>
+            <a:r>
+              <a:rPr lang="vi-VN" dirty="0"/>
+              <a:t> </a:t>
+            </a:r>
+            <a:r>
+              <a:rPr lang="vi-VN" dirty="0" err="1"/>
+              <a:t>dài</a:t>
+            </a:r>
+            <a:r>
+              <a:rPr lang="vi-VN" dirty="0"/>
+              <a:t> = tăng </a:t>
+            </a:r>
+            <a:r>
+              <a:rPr lang="vi-VN" dirty="0" err="1"/>
+              <a:t>token</a:t>
+            </a:r>
+            <a:r>
+              <a:rPr lang="vi-VN" dirty="0"/>
+              <a:t> |</a:t>
+            </a:r>
+          </a:p>
+          <a:p>
+            <a:pPr lvl="2"/>
+            <a:r>
+              <a:rPr lang="en-US" dirty="0"/>
+              <a:t>Tip: </a:t>
+            </a:r>
+            <a:r>
+              <a:rPr lang="vi-VN" dirty="0" err="1"/>
+              <a:t>Fine-tune</a:t>
+            </a:r>
+            <a:r>
+              <a:rPr lang="vi-VN" dirty="0"/>
+              <a:t> GPT-4o-mini </a:t>
+            </a:r>
+            <a:r>
+              <a:rPr lang="vi-VN" dirty="0" err="1"/>
+              <a:t>rẻ</a:t>
+            </a:r>
+            <a:r>
+              <a:rPr lang="vi-VN" dirty="0"/>
+              <a:t> hơn </a:t>
+            </a:r>
+            <a:r>
+              <a:rPr lang="vi-VN" dirty="0" err="1"/>
+              <a:t>rất</a:t>
+            </a:r>
+            <a:r>
+              <a:rPr lang="vi-VN" dirty="0"/>
+              <a:t> </a:t>
+            </a:r>
+            <a:r>
+              <a:rPr lang="vi-VN" dirty="0" err="1"/>
+              <a:t>nhiều</a:t>
+            </a:r>
+            <a:r>
+              <a:rPr lang="vi-VN" dirty="0"/>
+              <a:t> so </a:t>
+            </a:r>
+            <a:r>
+              <a:rPr lang="vi-VN" dirty="0" err="1"/>
+              <a:t>với</a:t>
+            </a:r>
+            <a:r>
+              <a:rPr lang="vi-VN" dirty="0"/>
+              <a:t> GPT-4o </a:t>
+            </a:r>
+            <a:r>
+              <a:rPr lang="vi-VN" dirty="0" err="1"/>
+              <a:t>full</a:t>
+            </a:r>
+            <a:r>
+              <a:rPr lang="vi-VN" dirty="0"/>
+              <a:t>.</a:t>
+            </a:r>
+            <a:endParaRPr lang="en-US" dirty="0"/>
+          </a:p>
+        </p:txBody>
+      </p:sp>
+    </p:spTree>
+    <p:extLst>
+      <p:ext uri="{BB962C8B-B14F-4D97-AF65-F5344CB8AC3E}">
+        <p14:creationId xmlns:p14="http://schemas.microsoft.com/office/powerpoint/2010/main" val="1973793886"/>
+      </p:ext>
+    </p:extLst>
+  </p:cSld>
+  <p:clrMapOvr>
+    <a:masterClrMapping/>
+  </p:clrMapOvr>
+</p:sld>
+</file>
+
+<file path=ppt/slides/slide23.xml><?xml version="1.0" encoding="utf-8"?>
+<p:sld xmlns:a="http://schemas.openxmlformats.org/drawingml/2006/main" xmlns:r="http://schemas.openxmlformats.org/officeDocument/2006/relationships" xmlns:p="http://schemas.openxmlformats.org/presentationml/2006/main">
+  <p:cSld>
+    <p:spTree>
+      <p:nvGrpSpPr>
+        <p:cNvPr id="1" name=""/>
+        <p:cNvGrpSpPr/>
+        <p:nvPr/>
+      </p:nvGrpSpPr>
+      <p:grpSpPr>
+        <a:xfrm>
+          <a:off x="0" y="0"/>
+          <a:ext cx="0" cy="0"/>
+          <a:chOff x="0" y="0"/>
+          <a:chExt cx="0" cy="0"/>
+        </a:xfrm>
+      </p:grpSpPr>
+      <p:sp>
+        <p:nvSpPr>
+          <p:cNvPr id="2" name="Title 1">
+            <a:extLst>
+              <a:ext uri="{FF2B5EF4-FFF2-40B4-BE49-F238E27FC236}">
+                <a16:creationId xmlns:a16="http://schemas.microsoft.com/office/drawing/2014/main" id="{D3EB5C88-F4AF-455A-8324-E302EED87B34}"/>
+              </a:ext>
+            </a:extLst>
+          </p:cNvPr>
+          <p:cNvSpPr>
+            <a:spLocks noGrp="1"/>
+          </p:cNvSpPr>
+          <p:nvPr>
+            <p:ph type="title"/>
+          </p:nvPr>
+        </p:nvSpPr>
+        <p:spPr/>
+        <p:txBody>
+          <a:bodyPr/>
+          <a:lstStyle/>
+          <a:p>
+            <a:r>
+              <a:rPr lang="en-US" dirty="0" err="1"/>
+              <a:t>Các</a:t>
+            </a:r>
+            <a:r>
+              <a:rPr lang="en-US" dirty="0"/>
+              <a:t> chi </a:t>
+            </a:r>
+            <a:r>
+              <a:rPr lang="en-US" dirty="0" err="1"/>
+              <a:t>phí</a:t>
+            </a:r>
+            <a:r>
+              <a:rPr lang="en-US" dirty="0"/>
+              <a:t> </a:t>
+            </a:r>
+            <a:r>
+              <a:rPr lang="en-US" dirty="0" err="1"/>
+              <a:t>khi</a:t>
+            </a:r>
+            <a:r>
+              <a:rPr lang="en-US" dirty="0"/>
+              <a:t> </a:t>
+            </a:r>
+            <a:r>
+              <a:rPr lang="en-US" dirty="0" err="1"/>
+              <a:t>triển</a:t>
+            </a:r>
+            <a:r>
+              <a:rPr lang="en-US" dirty="0"/>
+              <a:t> </a:t>
+            </a:r>
+            <a:r>
+              <a:rPr lang="en-US" dirty="0" err="1"/>
+              <a:t>khai</a:t>
+            </a:r>
+            <a:r>
+              <a:rPr lang="en-US" dirty="0"/>
+              <a:t> Fine-Tune </a:t>
+            </a:r>
+            <a:r>
+              <a:rPr lang="en-US" dirty="0" err="1"/>
+              <a:t>trên</a:t>
+            </a:r>
+            <a:r>
+              <a:rPr lang="en-US" dirty="0"/>
+              <a:t> Azure</a:t>
+            </a:r>
+          </a:p>
+        </p:txBody>
+      </p:sp>
+      <p:sp>
+        <p:nvSpPr>
+          <p:cNvPr id="3" name="Content Placeholder 2">
+            <a:extLst>
+              <a:ext uri="{FF2B5EF4-FFF2-40B4-BE49-F238E27FC236}">
+                <a16:creationId xmlns:a16="http://schemas.microsoft.com/office/drawing/2014/main" id="{7E71AD3B-8519-4A93-ACB3-4399F3171A80}"/>
+              </a:ext>
+            </a:extLst>
+          </p:cNvPr>
+          <p:cNvSpPr>
+            <a:spLocks noGrp="1"/>
+          </p:cNvSpPr>
+          <p:nvPr>
+            <p:ph idx="1"/>
+          </p:nvPr>
+        </p:nvSpPr>
+        <p:spPr/>
+        <p:txBody>
+          <a:bodyPr>
+            <a:normAutofit fontScale="92500" lnSpcReduction="20000"/>
+          </a:bodyPr>
+          <a:lstStyle/>
+          <a:p>
+            <a:pPr marL="0" indent="0">
+              <a:buNone/>
+            </a:pPr>
+            <a:r>
+              <a:rPr lang="en-US" dirty="0"/>
+              <a:t>Chi </a:t>
+            </a:r>
+            <a:r>
+              <a:rPr lang="en-US" dirty="0" err="1"/>
+              <a:t>phí</a:t>
+            </a:r>
+            <a:r>
+              <a:rPr lang="en-US" dirty="0"/>
+              <a:t> </a:t>
+            </a:r>
+            <a:r>
+              <a:rPr lang="en-US" dirty="0" err="1"/>
+              <a:t>triển</a:t>
+            </a:r>
+            <a:r>
+              <a:rPr lang="en-US" dirty="0"/>
+              <a:t> </a:t>
+            </a:r>
+            <a:r>
+              <a:rPr lang="en-US" dirty="0" err="1"/>
+              <a:t>khai</a:t>
+            </a:r>
+            <a:r>
+              <a:rPr lang="en-US" dirty="0"/>
+              <a:t> </a:t>
+            </a:r>
+            <a:r>
+              <a:rPr lang="en-US" dirty="0" err="1"/>
+              <a:t>trên</a:t>
+            </a:r>
+            <a:r>
+              <a:rPr lang="en-US" dirty="0"/>
+              <a:t> Azure</a:t>
+            </a:r>
+          </a:p>
+          <a:p>
+            <a:pPr marL="514350" indent="-514350">
+              <a:buFont typeface="+mj-lt"/>
+              <a:buAutoNum type="arabicPeriod"/>
+            </a:pPr>
+            <a:r>
+              <a:rPr lang="it-IT" dirty="0"/>
+              <a:t>Chi phí Storage (Dữ liệu &amp; Model)</a:t>
+            </a:r>
+          </a:p>
+          <a:p>
+            <a:pPr lvl="1"/>
+            <a:r>
+              <a:rPr lang="it-IT" dirty="0"/>
+              <a:t>Chi phí lưu tr</a:t>
+            </a:r>
+            <a:r>
+              <a:rPr lang="en-US" dirty="0"/>
+              <a:t>ữ dataset (</a:t>
+            </a:r>
+            <a:r>
+              <a:rPr lang="en-US" dirty="0" err="1"/>
+              <a:t>trainning</a:t>
+            </a:r>
+            <a:r>
+              <a:rPr lang="en-US" dirty="0"/>
+              <a:t> </a:t>
+            </a:r>
+            <a:r>
+              <a:rPr lang="en-US" dirty="0" err="1"/>
+              <a:t>và</a:t>
+            </a:r>
+            <a:r>
+              <a:rPr lang="en-US" dirty="0"/>
+              <a:t> validation data)</a:t>
+            </a:r>
+          </a:p>
+          <a:p>
+            <a:pPr lvl="1"/>
+            <a:r>
+              <a:rPr lang="en-US" dirty="0"/>
+              <a:t>Chi </a:t>
+            </a:r>
+            <a:r>
+              <a:rPr lang="en-US" dirty="0" err="1"/>
+              <a:t>phí</a:t>
+            </a:r>
+            <a:r>
+              <a:rPr lang="en-US" dirty="0"/>
+              <a:t> </a:t>
+            </a:r>
+            <a:r>
+              <a:rPr lang="en-US" dirty="0" err="1"/>
+              <a:t>lưu</a:t>
+            </a:r>
+            <a:r>
+              <a:rPr lang="en-US" dirty="0"/>
+              <a:t> </a:t>
+            </a:r>
+            <a:r>
+              <a:rPr lang="en-US" dirty="0" err="1"/>
+              <a:t>trữ</a:t>
+            </a:r>
+            <a:r>
+              <a:rPr lang="en-US" dirty="0"/>
+              <a:t> Logs &amp; metrics </a:t>
+            </a:r>
+            <a:r>
+              <a:rPr lang="en-US" dirty="0" err="1"/>
+              <a:t>trong</a:t>
+            </a:r>
+            <a:r>
+              <a:rPr lang="en-US" dirty="0"/>
+              <a:t> </a:t>
+            </a:r>
+            <a:r>
+              <a:rPr lang="en-US" dirty="0" err="1"/>
+              <a:t>quá</a:t>
+            </a:r>
+            <a:r>
+              <a:rPr lang="en-US" dirty="0"/>
+              <a:t> </a:t>
+            </a:r>
+            <a:r>
+              <a:rPr lang="en-US" dirty="0" err="1"/>
+              <a:t>trình</a:t>
+            </a:r>
+            <a:r>
+              <a:rPr lang="en-US" dirty="0"/>
+              <a:t> training</a:t>
+            </a:r>
+            <a:endParaRPr lang="it-IT" dirty="0"/>
+          </a:p>
+          <a:p>
+            <a:pPr lvl="1"/>
+            <a:r>
+              <a:rPr lang="vi-VN" dirty="0"/>
+              <a:t>Chi </a:t>
+            </a:r>
+            <a:r>
+              <a:rPr lang="vi-VN" dirty="0" err="1"/>
+              <a:t>phí</a:t>
+            </a:r>
+            <a:r>
+              <a:rPr lang="vi-VN" dirty="0"/>
+              <a:t> </a:t>
+            </a:r>
+            <a:r>
+              <a:rPr lang="vi-VN" dirty="0" err="1"/>
+              <a:t>thường</a:t>
+            </a:r>
+            <a:r>
+              <a:rPr lang="vi-VN" dirty="0"/>
+              <a:t> </a:t>
+            </a:r>
+            <a:r>
+              <a:rPr lang="vi-VN" dirty="0" err="1"/>
+              <a:t>nhỏ</a:t>
+            </a:r>
+            <a:r>
+              <a:rPr lang="en-US" dirty="0"/>
+              <a:t> (</a:t>
+            </a:r>
+            <a:r>
+              <a:rPr lang="en-US" dirty="0" err="1"/>
+              <a:t>trừ</a:t>
+            </a:r>
+            <a:r>
+              <a:rPr lang="en-US" dirty="0"/>
+              <a:t> </a:t>
+            </a:r>
+            <a:r>
+              <a:rPr lang="en-US" dirty="0" err="1"/>
+              <a:t>khi</a:t>
+            </a:r>
+            <a:r>
+              <a:rPr lang="en-US" dirty="0"/>
+              <a:t> dataset </a:t>
+            </a:r>
+            <a:r>
+              <a:rPr lang="en-US" dirty="0" err="1"/>
+              <a:t>rất</a:t>
+            </a:r>
+            <a:r>
+              <a:rPr lang="en-US" dirty="0"/>
+              <a:t> </a:t>
+            </a:r>
+            <a:r>
+              <a:rPr lang="en-US" dirty="0" err="1"/>
+              <a:t>lớn</a:t>
+            </a:r>
+            <a:r>
+              <a:rPr lang="en-US" dirty="0"/>
+              <a:t>)</a:t>
+            </a:r>
+          </a:p>
+          <a:p>
+            <a:pPr marL="0" indent="0">
+              <a:buNone/>
+            </a:pPr>
+            <a:r>
+              <a:rPr lang="en-US" dirty="0"/>
+              <a:t>2. </a:t>
+            </a:r>
+            <a:r>
+              <a:rPr lang="it-IT" dirty="0"/>
+              <a:t>Chi phí Inference Model Fine-Tuned (Khi chạy thật)</a:t>
+            </a:r>
+          </a:p>
+          <a:p>
+            <a:pPr lvl="1"/>
+            <a:r>
+              <a:rPr lang="it-IT" dirty="0"/>
+              <a:t>Sau khi deploy, bạn trả tiền cho:</a:t>
+            </a:r>
+          </a:p>
+          <a:p>
+            <a:pPr lvl="2"/>
+            <a:r>
+              <a:rPr lang="it-IT" dirty="0"/>
+              <a:t>Token input, Token output</a:t>
+            </a:r>
+          </a:p>
+          <a:p>
+            <a:pPr lvl="2"/>
+            <a:r>
+              <a:rPr lang="it-IT" dirty="0"/>
+              <a:t>Model inference compute</a:t>
+            </a:r>
+          </a:p>
+          <a:p>
+            <a:pPr lvl="1"/>
+            <a:r>
+              <a:rPr lang="it-IT" dirty="0"/>
+              <a:t>So sánh</a:t>
+            </a:r>
+          </a:p>
+          <a:p>
+            <a:pPr lvl="2"/>
+            <a:r>
+              <a:rPr lang="vi-VN" dirty="0"/>
+              <a:t>| </a:t>
+            </a:r>
+            <a:r>
+              <a:rPr lang="vi-VN" dirty="0" err="1"/>
+              <a:t>Base</a:t>
+            </a:r>
+            <a:r>
+              <a:rPr lang="vi-VN" dirty="0"/>
+              <a:t> </a:t>
+            </a:r>
+            <a:r>
+              <a:rPr lang="vi-VN" dirty="0" err="1"/>
+              <a:t>Model</a:t>
+            </a:r>
+            <a:r>
+              <a:rPr lang="vi-VN" dirty="0"/>
+              <a:t>        | </a:t>
+            </a:r>
+            <a:r>
+              <a:rPr lang="vi-VN" dirty="0" err="1"/>
+              <a:t>Fine-Tuned</a:t>
+            </a:r>
+            <a:r>
+              <a:rPr lang="vi-VN" dirty="0"/>
+              <a:t> </a:t>
+            </a:r>
+            <a:r>
+              <a:rPr lang="vi-VN" dirty="0" err="1"/>
+              <a:t>Model</a:t>
+            </a:r>
+            <a:r>
+              <a:rPr lang="vi-VN" dirty="0"/>
+              <a:t>          |</a:t>
+            </a:r>
+          </a:p>
+          <a:p>
+            <a:pPr lvl="2"/>
+            <a:r>
+              <a:rPr lang="vi-VN" dirty="0"/>
+              <a:t>| ----------------- | ------------------------- |</a:t>
+            </a:r>
+          </a:p>
+          <a:p>
+            <a:pPr lvl="2"/>
+            <a:r>
+              <a:rPr lang="vi-VN" dirty="0"/>
+              <a:t>| </a:t>
+            </a:r>
+            <a:r>
+              <a:rPr lang="vi-VN" dirty="0" err="1"/>
+              <a:t>Rẻ</a:t>
+            </a:r>
+            <a:r>
+              <a:rPr lang="vi-VN" dirty="0"/>
+              <a:t>                | </a:t>
+            </a:r>
+            <a:r>
+              <a:rPr lang="vi-VN" dirty="0" err="1"/>
+              <a:t>Thường</a:t>
+            </a:r>
+            <a:r>
+              <a:rPr lang="vi-VN" dirty="0"/>
+              <a:t> **</a:t>
+            </a:r>
+            <a:r>
+              <a:rPr lang="vi-VN" dirty="0" err="1"/>
+              <a:t>đắt</a:t>
+            </a:r>
+            <a:r>
+              <a:rPr lang="vi-VN" dirty="0"/>
+              <a:t> hơn 10–30%** |</a:t>
+            </a:r>
+          </a:p>
+          <a:p>
+            <a:pPr lvl="2"/>
+            <a:r>
+              <a:rPr lang="vi-VN" dirty="0"/>
+              <a:t>| Không </a:t>
+            </a:r>
+            <a:r>
+              <a:rPr lang="vi-VN" dirty="0" err="1"/>
+              <a:t>tối</a:t>
+            </a:r>
+            <a:r>
+              <a:rPr lang="vi-VN" dirty="0"/>
+              <a:t> ưu </a:t>
+            </a:r>
+            <a:r>
+              <a:rPr lang="vi-VN" dirty="0" err="1"/>
+              <a:t>task</a:t>
+            </a:r>
+            <a:r>
+              <a:rPr lang="vi-VN" dirty="0"/>
+              <a:t> | </a:t>
+            </a:r>
+            <a:r>
+              <a:rPr lang="vi-VN" dirty="0" err="1"/>
+              <a:t>Chính</a:t>
+            </a:r>
+            <a:r>
+              <a:rPr lang="vi-VN" dirty="0"/>
+              <a:t> </a:t>
+            </a:r>
+            <a:r>
+              <a:rPr lang="vi-VN" dirty="0" err="1"/>
+              <a:t>xác</a:t>
+            </a:r>
+            <a:r>
+              <a:rPr lang="vi-VN" dirty="0"/>
+              <a:t> hơn             |</a:t>
+            </a:r>
+          </a:p>
+          <a:p>
+            <a:pPr lvl="1"/>
+            <a:endParaRPr lang="en-US" dirty="0"/>
+          </a:p>
+        </p:txBody>
+      </p:sp>
+    </p:spTree>
+    <p:extLst>
+      <p:ext uri="{BB962C8B-B14F-4D97-AF65-F5344CB8AC3E}">
+        <p14:creationId xmlns:p14="http://schemas.microsoft.com/office/powerpoint/2010/main" val="2715320065"/>
+      </p:ext>
+    </p:extLst>
+  </p:cSld>
+  <p:clrMapOvr>
+    <a:masterClrMapping/>
+  </p:clrMapOvr>
+</p:sld>
+</file>
+
+<file path=ppt/slides/slide24.xml><?xml version="1.0" encoding="utf-8"?>
+<p:sld xmlns:a="http://schemas.openxmlformats.org/drawingml/2006/main" xmlns:r="http://schemas.openxmlformats.org/officeDocument/2006/relationships" xmlns:p="http://schemas.openxmlformats.org/presentationml/2006/main">
+  <p:cSld>
+    <p:spTree>
+      <p:nvGrpSpPr>
+        <p:cNvPr id="1" name=""/>
+        <p:cNvGrpSpPr/>
+        <p:nvPr/>
+      </p:nvGrpSpPr>
+      <p:grpSpPr>
+        <a:xfrm>
+          <a:off x="0" y="0"/>
+          <a:ext cx="0" cy="0"/>
+          <a:chOff x="0" y="0"/>
+          <a:chExt cx="0" cy="0"/>
+        </a:xfrm>
+      </p:grpSpPr>
+      <p:sp>
+        <p:nvSpPr>
+          <p:cNvPr id="2" name="Title 1">
+            <a:extLst>
+              <a:ext uri="{FF2B5EF4-FFF2-40B4-BE49-F238E27FC236}">
+                <a16:creationId xmlns:a16="http://schemas.microsoft.com/office/drawing/2014/main" id="{D3EB5C88-F4AF-455A-8324-E302EED87B34}"/>
+              </a:ext>
+            </a:extLst>
+          </p:cNvPr>
+          <p:cNvSpPr>
+            <a:spLocks noGrp="1"/>
+          </p:cNvSpPr>
+          <p:nvPr>
+            <p:ph type="title"/>
+          </p:nvPr>
+        </p:nvSpPr>
+        <p:spPr/>
+        <p:txBody>
+          <a:bodyPr/>
+          <a:lstStyle/>
+          <a:p>
+            <a:r>
+              <a:rPr lang="en-US" dirty="0" err="1"/>
+              <a:t>Các</a:t>
+            </a:r>
+            <a:r>
+              <a:rPr lang="en-US" dirty="0"/>
+              <a:t> chi </a:t>
+            </a:r>
+            <a:r>
+              <a:rPr lang="en-US" dirty="0" err="1"/>
+              <a:t>phí</a:t>
+            </a:r>
+            <a:r>
+              <a:rPr lang="en-US" dirty="0"/>
+              <a:t> </a:t>
+            </a:r>
+            <a:r>
+              <a:rPr lang="en-US" dirty="0" err="1"/>
+              <a:t>khi</a:t>
+            </a:r>
+            <a:r>
+              <a:rPr lang="en-US" dirty="0"/>
+              <a:t> </a:t>
+            </a:r>
+            <a:r>
+              <a:rPr lang="en-US" dirty="0" err="1"/>
+              <a:t>triển</a:t>
+            </a:r>
+            <a:r>
+              <a:rPr lang="en-US" dirty="0"/>
+              <a:t> </a:t>
+            </a:r>
+            <a:r>
+              <a:rPr lang="en-US" dirty="0" err="1"/>
+              <a:t>khai</a:t>
+            </a:r>
+            <a:r>
+              <a:rPr lang="en-US" dirty="0"/>
+              <a:t> Fine-Tune </a:t>
+            </a:r>
+            <a:r>
+              <a:rPr lang="en-US" dirty="0" err="1"/>
+              <a:t>trên</a:t>
+            </a:r>
+            <a:r>
+              <a:rPr lang="en-US" dirty="0"/>
+              <a:t> Azure</a:t>
+            </a:r>
+          </a:p>
+        </p:txBody>
+      </p:sp>
+      <p:sp>
+        <p:nvSpPr>
+          <p:cNvPr id="3" name="Content Placeholder 2">
+            <a:extLst>
+              <a:ext uri="{FF2B5EF4-FFF2-40B4-BE49-F238E27FC236}">
+                <a16:creationId xmlns:a16="http://schemas.microsoft.com/office/drawing/2014/main" id="{7E71AD3B-8519-4A93-ACB3-4399F3171A80}"/>
+              </a:ext>
+            </a:extLst>
+          </p:cNvPr>
+          <p:cNvSpPr>
+            <a:spLocks noGrp="1"/>
+          </p:cNvSpPr>
+          <p:nvPr>
+            <p:ph idx="1"/>
+          </p:nvPr>
+        </p:nvSpPr>
+        <p:spPr/>
+        <p:txBody>
+          <a:bodyPr>
+            <a:normAutofit/>
+          </a:bodyPr>
+          <a:lstStyle/>
+          <a:p>
+            <a:pPr marL="0" indent="0">
+              <a:buNone/>
+            </a:pPr>
+            <a:r>
+              <a:rPr lang="en-US" dirty="0"/>
+              <a:t>Chi </a:t>
+            </a:r>
+            <a:r>
+              <a:rPr lang="en-US" dirty="0" err="1"/>
+              <a:t>phí</a:t>
+            </a:r>
+            <a:r>
+              <a:rPr lang="en-US" dirty="0"/>
+              <a:t> </a:t>
+            </a:r>
+            <a:r>
+              <a:rPr lang="en-US" dirty="0" err="1"/>
+              <a:t>triển</a:t>
+            </a:r>
+            <a:r>
+              <a:rPr lang="en-US" dirty="0"/>
+              <a:t> </a:t>
+            </a:r>
+            <a:r>
+              <a:rPr lang="en-US" dirty="0" err="1"/>
+              <a:t>khai</a:t>
+            </a:r>
+            <a:r>
+              <a:rPr lang="en-US" dirty="0"/>
+              <a:t> </a:t>
+            </a:r>
+            <a:r>
+              <a:rPr lang="en-US" dirty="0" err="1"/>
+              <a:t>trên</a:t>
+            </a:r>
+            <a:r>
+              <a:rPr lang="en-US" dirty="0"/>
+              <a:t> Azure</a:t>
+            </a:r>
+          </a:p>
+          <a:p>
+            <a:pPr marL="514350" indent="-514350">
+              <a:buFont typeface="+mj-lt"/>
+              <a:buAutoNum type="arabicPeriod"/>
+            </a:pPr>
+            <a:r>
+              <a:rPr lang="it-IT" dirty="0"/>
+              <a:t>Các chi khác của </a:t>
+            </a:r>
+            <a:r>
+              <a:rPr lang="en-US" dirty="0" err="1"/>
+              <a:t>ứng</a:t>
+            </a:r>
+            <a:r>
+              <a:rPr lang="en-US" dirty="0"/>
+              <a:t> </a:t>
+            </a:r>
+            <a:r>
+              <a:rPr lang="en-US" dirty="0" err="1"/>
+              <a:t>dụng</a:t>
+            </a:r>
+            <a:endParaRPr lang="it-IT" dirty="0"/>
+          </a:p>
+          <a:p>
+            <a:pPr lvl="1"/>
+            <a:r>
+              <a:rPr lang="en-US" dirty="0"/>
+              <a:t>Chi </a:t>
+            </a:r>
+            <a:r>
+              <a:rPr lang="en-US" dirty="0" err="1"/>
+              <a:t>phí</a:t>
+            </a:r>
+            <a:r>
+              <a:rPr lang="en-US" dirty="0"/>
+              <a:t> Infrastructure </a:t>
+            </a:r>
+            <a:r>
+              <a:rPr lang="en-US" dirty="0" err="1"/>
+              <a:t>phụ</a:t>
+            </a:r>
+            <a:r>
+              <a:rPr lang="en-US" dirty="0"/>
+              <a:t> </a:t>
+            </a:r>
+            <a:r>
+              <a:rPr lang="en-US" dirty="0" err="1"/>
+              <a:t>trợ</a:t>
+            </a:r>
+            <a:r>
+              <a:rPr lang="en-US" dirty="0"/>
+              <a:t>: API backend, Cache, RAG vector DB</a:t>
+            </a:r>
+          </a:p>
+          <a:p>
+            <a:pPr lvl="1"/>
+            <a:r>
+              <a:rPr lang="en-US" dirty="0"/>
+              <a:t>Chi </a:t>
+            </a:r>
+            <a:r>
+              <a:rPr lang="en-US" dirty="0" err="1"/>
+              <a:t>phí</a:t>
+            </a:r>
+            <a:r>
+              <a:rPr lang="en-US" dirty="0"/>
+              <a:t> Networking: Private Endpoint, Outbound traffic, Firewall</a:t>
+            </a:r>
+            <a:endParaRPr lang="it-IT" dirty="0"/>
+          </a:p>
+          <a:p>
+            <a:pPr lvl="1"/>
+            <a:r>
+              <a:rPr lang="en-US" dirty="0"/>
+              <a:t>Chi </a:t>
+            </a:r>
+            <a:r>
+              <a:rPr lang="en-US" dirty="0" err="1"/>
+              <a:t>phí</a:t>
+            </a:r>
+            <a:r>
+              <a:rPr lang="en-US" dirty="0"/>
+              <a:t> </a:t>
+            </a:r>
+            <a:r>
+              <a:rPr lang="en-US" dirty="0" err="1"/>
+              <a:t>MLOps</a:t>
+            </a:r>
+            <a:r>
+              <a:rPr lang="en-US" dirty="0"/>
+              <a:t> / DevOps: CI/CD pipelines (Azure DevOps), Versioning models (Storage), Retraining (Compute)</a:t>
+            </a:r>
+          </a:p>
+          <a:p>
+            <a:pPr marL="0" indent="0">
+              <a:buNone/>
+            </a:pPr>
+            <a:endParaRPr lang="en-US" dirty="0"/>
+          </a:p>
+        </p:txBody>
+      </p:sp>
+    </p:spTree>
+    <p:extLst>
+      <p:ext uri="{BB962C8B-B14F-4D97-AF65-F5344CB8AC3E}">
+        <p14:creationId xmlns:p14="http://schemas.microsoft.com/office/powerpoint/2010/main" val="404534197"/>
       </p:ext>
     </p:extLst>
   </p:cSld>

--- a/fine-tune-pc/AI-Fine_Tune.pptx
+++ b/fine-tune-pc/AI-Fine_Tune.pptx
@@ -5,30 +5,29 @@
     <p:sldMasterId id="2147483648" r:id="rId1"/>
   </p:sldMasterIdLst>
   <p:sldIdLst>
-    <p:sldId id="256" r:id="rId2"/>
+    <p:sldId id="281" r:id="rId2"/>
     <p:sldId id="257" r:id="rId3"/>
     <p:sldId id="258" r:id="rId4"/>
-    <p:sldId id="260" r:id="rId5"/>
-    <p:sldId id="259" r:id="rId6"/>
-    <p:sldId id="261" r:id="rId7"/>
-    <p:sldId id="267" r:id="rId8"/>
-    <p:sldId id="262" r:id="rId9"/>
-    <p:sldId id="268" r:id="rId10"/>
+    <p:sldId id="268" r:id="rId5"/>
+    <p:sldId id="260" r:id="rId6"/>
+    <p:sldId id="259" r:id="rId7"/>
+    <p:sldId id="261" r:id="rId8"/>
+    <p:sldId id="267" r:id="rId9"/>
+    <p:sldId id="262" r:id="rId10"/>
     <p:sldId id="263" r:id="rId11"/>
     <p:sldId id="265" r:id="rId12"/>
     <p:sldId id="269" r:id="rId13"/>
     <p:sldId id="264" r:id="rId14"/>
     <p:sldId id="270" r:id="rId15"/>
     <p:sldId id="271" r:id="rId16"/>
-    <p:sldId id="272" r:id="rId17"/>
-    <p:sldId id="274" r:id="rId18"/>
-    <p:sldId id="273" r:id="rId19"/>
-    <p:sldId id="275" r:id="rId20"/>
-    <p:sldId id="276" r:id="rId21"/>
-    <p:sldId id="277" r:id="rId22"/>
-    <p:sldId id="278" r:id="rId23"/>
-    <p:sldId id="279" r:id="rId24"/>
-    <p:sldId id="280" r:id="rId25"/>
+    <p:sldId id="274" r:id="rId17"/>
+    <p:sldId id="273" r:id="rId18"/>
+    <p:sldId id="275" r:id="rId19"/>
+    <p:sldId id="276" r:id="rId20"/>
+    <p:sldId id="277" r:id="rId21"/>
+    <p:sldId id="278" r:id="rId22"/>
+    <p:sldId id="279" r:id="rId23"/>
+    <p:sldId id="280" r:id="rId24"/>
   </p:sldIdLst>
   <p:sldSz cx="12192000" cy="6858000"/>
   <p:notesSz cx="6858000" cy="9144000"/>
@@ -3351,10 +3350,10 @@
       </p:grpSpPr>
       <p:sp>
         <p:nvSpPr>
-          <p:cNvPr id="2" name="Title 1">
+          <p:cNvPr id="3" name="Content Placeholder 2">
             <a:extLst>
               <a:ext uri="{FF2B5EF4-FFF2-40B4-BE49-F238E27FC236}">
-                <a16:creationId xmlns:a16="http://schemas.microsoft.com/office/drawing/2014/main" id="{07C45F54-7DFF-43FA-83E7-0975C6C03D62}"/>
+                <a16:creationId xmlns:a16="http://schemas.microsoft.com/office/drawing/2014/main" id="{0129DF2D-E0B7-4C15-82FC-84B3D1B5EC25}"/>
               </a:ext>
             </a:extLst>
           </p:cNvPr>
@@ -3362,39 +3361,1025 @@
             <a:spLocks noGrp="1"/>
           </p:cNvSpPr>
           <p:nvPr>
-            <p:ph type="ctrTitle"/>
+            <p:ph idx="1"/>
           </p:nvPr>
         </p:nvSpPr>
-        <p:spPr/>
+        <p:spPr>
+          <a:xfrm>
+            <a:off x="838200" y="332509"/>
+            <a:ext cx="10515600" cy="5844454"/>
+          </a:xfrm>
+        </p:spPr>
         <p:txBody>
-          <a:bodyPr/>
+          <a:bodyPr>
+            <a:normAutofit lnSpcReduction="10000"/>
+          </a:bodyPr>
           <a:lstStyle/>
           <a:p>
-            <a:endParaRPr lang="en-US"/>
-          </a:p>
-        </p:txBody>
-      </p:sp>
-      <p:sp>
-        <p:nvSpPr>
-          <p:cNvPr id="3" name="Subtitle 2">
-            <a:extLst>
-              <a:ext uri="{FF2B5EF4-FFF2-40B4-BE49-F238E27FC236}">
-                <a16:creationId xmlns:a16="http://schemas.microsoft.com/office/drawing/2014/main" id="{75917F7A-8473-4148-866F-71985FFC58B9}"/>
-              </a:ext>
-            </a:extLst>
-          </p:cNvPr>
-          <p:cNvSpPr>
-            <a:spLocks noGrp="1"/>
-          </p:cNvSpPr>
-          <p:nvPr>
-            <p:ph type="subTitle" idx="1"/>
-          </p:nvPr>
-        </p:nvSpPr>
-        <p:spPr/>
-        <p:txBody>
-          <a:bodyPr/>
-          <a:lstStyle/>
-          <a:p>
+            <a:r>
+              <a:rPr lang="vi-VN" dirty="0"/>
+              <a:t>Trong </a:t>
+            </a:r>
+            <a:r>
+              <a:rPr lang="vi-VN" dirty="0" err="1"/>
+              <a:t>vài</a:t>
+            </a:r>
+            <a:r>
+              <a:rPr lang="vi-VN" dirty="0"/>
+              <a:t> năm </a:t>
+            </a:r>
+            <a:r>
+              <a:rPr lang="vi-VN" dirty="0" err="1"/>
+              <a:t>gần</a:t>
+            </a:r>
+            <a:r>
+              <a:rPr lang="vi-VN" dirty="0"/>
+              <a:t> đây, khi </a:t>
+            </a:r>
+            <a:r>
+              <a:rPr lang="vi-VN" dirty="0" err="1"/>
+              <a:t>nói</a:t>
+            </a:r>
+            <a:r>
+              <a:rPr lang="vi-VN" dirty="0"/>
+              <a:t> </a:t>
+            </a:r>
+            <a:r>
+              <a:rPr lang="vi-VN" dirty="0" err="1"/>
+              <a:t>đến</a:t>
+            </a:r>
+            <a:r>
+              <a:rPr lang="vi-VN" dirty="0"/>
+              <a:t> </a:t>
+            </a:r>
+            <a:r>
+              <a:rPr lang="vi-VN" dirty="0" err="1"/>
+              <a:t>việc</a:t>
+            </a:r>
+            <a:r>
+              <a:rPr lang="vi-VN" dirty="0"/>
+              <a:t> xây </a:t>
+            </a:r>
+            <a:r>
+              <a:rPr lang="vi-VN" dirty="0" err="1"/>
+              <a:t>dựng</a:t>
+            </a:r>
+            <a:r>
+              <a:rPr lang="vi-VN" dirty="0"/>
+              <a:t> </a:t>
+            </a:r>
+            <a:r>
+              <a:rPr lang="vi-VN" dirty="0" err="1"/>
+              <a:t>chatbot</a:t>
+            </a:r>
+            <a:r>
+              <a:rPr lang="vi-VN" dirty="0"/>
+              <a:t> hay AI </a:t>
+            </a:r>
+            <a:r>
+              <a:rPr lang="vi-VN" dirty="0" err="1"/>
+              <a:t>assistant</a:t>
+            </a:r>
+            <a:r>
+              <a:rPr lang="vi-VN" dirty="0"/>
+              <a:t>, </a:t>
+            </a:r>
+            <a:r>
+              <a:rPr lang="vi-VN" dirty="0" err="1"/>
+              <a:t>chúng</a:t>
+            </a:r>
+            <a:r>
+              <a:rPr lang="vi-VN" dirty="0"/>
+              <a:t> ta </a:t>
+            </a:r>
+            <a:r>
+              <a:rPr lang="vi-VN" dirty="0" err="1"/>
+              <a:t>thường</a:t>
+            </a:r>
+            <a:r>
+              <a:rPr lang="vi-VN" dirty="0"/>
+              <a:t> nghe </a:t>
+            </a:r>
+            <a:r>
+              <a:rPr lang="vi-VN" dirty="0" err="1"/>
+              <a:t>rất</a:t>
+            </a:r>
+            <a:r>
+              <a:rPr lang="vi-VN" dirty="0"/>
+              <a:t> </a:t>
+            </a:r>
+            <a:r>
+              <a:rPr lang="vi-VN" dirty="0" err="1"/>
+              <a:t>nhiều</a:t>
+            </a:r>
+            <a:r>
+              <a:rPr lang="vi-VN" dirty="0"/>
+              <a:t> </a:t>
+            </a:r>
+            <a:r>
+              <a:rPr lang="vi-VN" dirty="0" err="1"/>
+              <a:t>về</a:t>
+            </a:r>
+            <a:r>
+              <a:rPr lang="vi-VN" dirty="0"/>
+              <a:t> </a:t>
+            </a:r>
+            <a:r>
+              <a:rPr lang="vi-VN" dirty="0" err="1"/>
+              <a:t>prompt</a:t>
+            </a:r>
+            <a:r>
+              <a:rPr lang="vi-VN" dirty="0"/>
+              <a:t> </a:t>
+            </a:r>
+            <a:r>
+              <a:rPr lang="vi-VN" dirty="0" err="1"/>
+              <a:t>engineering</a:t>
+            </a:r>
+            <a:r>
+              <a:rPr lang="vi-VN" dirty="0"/>
+              <a:t>, RAG hay </a:t>
+            </a:r>
+            <a:r>
+              <a:rPr lang="vi-VN" dirty="0" err="1"/>
+              <a:t>các</a:t>
+            </a:r>
+            <a:r>
+              <a:rPr lang="vi-VN" dirty="0"/>
+              <a:t> mô </a:t>
+            </a:r>
+            <a:r>
+              <a:rPr lang="vi-VN" dirty="0" err="1"/>
+              <a:t>hình</a:t>
+            </a:r>
+            <a:r>
+              <a:rPr lang="vi-VN" dirty="0"/>
+              <a:t> ngôn </a:t>
+            </a:r>
+            <a:r>
+              <a:rPr lang="vi-VN" dirty="0" err="1"/>
+              <a:t>ngữ</a:t>
+            </a:r>
+            <a:r>
+              <a:rPr lang="vi-VN" dirty="0"/>
+              <a:t> </a:t>
+            </a:r>
+            <a:r>
+              <a:rPr lang="vi-VN" dirty="0" err="1"/>
+              <a:t>lớn</a:t>
+            </a:r>
+            <a:r>
+              <a:rPr lang="vi-VN" dirty="0"/>
+              <a:t> như GPT. Nhưng khi </a:t>
+            </a:r>
+            <a:r>
+              <a:rPr lang="vi-VN" dirty="0" err="1"/>
+              <a:t>hệ</a:t>
+            </a:r>
+            <a:r>
+              <a:rPr lang="vi-VN" dirty="0"/>
+              <a:t> </a:t>
+            </a:r>
+            <a:r>
+              <a:rPr lang="vi-VN" dirty="0" err="1"/>
+              <a:t>thống</a:t>
+            </a:r>
+            <a:r>
+              <a:rPr lang="vi-VN" dirty="0"/>
+              <a:t> </a:t>
+            </a:r>
+            <a:r>
+              <a:rPr lang="vi-VN" dirty="0" err="1"/>
+              <a:t>bắt</a:t>
+            </a:r>
+            <a:r>
+              <a:rPr lang="vi-VN" dirty="0"/>
+              <a:t> </a:t>
+            </a:r>
+            <a:r>
+              <a:rPr lang="vi-VN" dirty="0" err="1"/>
+              <a:t>đầu</a:t>
+            </a:r>
+            <a:r>
+              <a:rPr lang="vi-VN" dirty="0"/>
+              <a:t> đi </a:t>
+            </a:r>
+            <a:r>
+              <a:rPr lang="vi-VN" dirty="0" err="1"/>
+              <a:t>vào</a:t>
+            </a:r>
+            <a:r>
+              <a:rPr lang="vi-VN" dirty="0"/>
+              <a:t> </a:t>
+            </a:r>
+            <a:r>
+              <a:rPr lang="vi-VN" dirty="0" err="1"/>
+              <a:t>vận</a:t>
+            </a:r>
+            <a:r>
+              <a:rPr lang="vi-VN" dirty="0"/>
+              <a:t> </a:t>
+            </a:r>
+            <a:r>
+              <a:rPr lang="vi-VN" dirty="0" err="1"/>
+              <a:t>hành</a:t>
+            </a:r>
+            <a:r>
+              <a:rPr lang="vi-VN" dirty="0"/>
+              <a:t> </a:t>
+            </a:r>
+            <a:r>
+              <a:rPr lang="vi-VN" dirty="0" err="1"/>
+              <a:t>thực</a:t>
+            </a:r>
+            <a:r>
+              <a:rPr lang="vi-VN" dirty="0"/>
+              <a:t> </a:t>
+            </a:r>
+            <a:r>
+              <a:rPr lang="vi-VN" dirty="0" err="1"/>
+              <a:t>tế</a:t>
+            </a:r>
+            <a:r>
+              <a:rPr lang="vi-VN" dirty="0"/>
+              <a:t>, </a:t>
+            </a:r>
+            <a:r>
+              <a:rPr lang="vi-VN" dirty="0" err="1"/>
+              <a:t>một</a:t>
+            </a:r>
+            <a:r>
+              <a:rPr lang="vi-VN" dirty="0"/>
+              <a:t> câu </a:t>
+            </a:r>
+            <a:r>
+              <a:rPr lang="vi-VN" dirty="0" err="1"/>
+              <a:t>hỏi</a:t>
+            </a:r>
+            <a:r>
+              <a:rPr lang="vi-VN" dirty="0"/>
+              <a:t> </a:t>
+            </a:r>
+            <a:r>
+              <a:rPr lang="vi-VN" dirty="0" err="1"/>
+              <a:t>rất</a:t>
+            </a:r>
+            <a:r>
+              <a:rPr lang="vi-VN" dirty="0"/>
+              <a:t> quan </a:t>
+            </a:r>
+            <a:r>
+              <a:rPr lang="vi-VN" dirty="0" err="1"/>
+              <a:t>trọng</a:t>
+            </a:r>
+            <a:r>
+              <a:rPr lang="vi-VN" dirty="0"/>
+              <a:t> </a:t>
+            </a:r>
+            <a:r>
+              <a:rPr lang="vi-VN" dirty="0" err="1"/>
+              <a:t>sẽ</a:t>
+            </a:r>
+            <a:r>
+              <a:rPr lang="vi-VN" dirty="0"/>
+              <a:t> </a:t>
+            </a:r>
+            <a:r>
+              <a:rPr lang="vi-VN" dirty="0" err="1"/>
+              <a:t>xuất</a:t>
+            </a:r>
+            <a:r>
+              <a:rPr lang="vi-VN" dirty="0"/>
+              <a:t> </a:t>
+            </a:r>
+            <a:r>
+              <a:rPr lang="vi-VN" dirty="0" err="1"/>
+              <a:t>hiện</a:t>
+            </a:r>
+            <a:r>
+              <a:rPr lang="vi-VN" dirty="0"/>
+              <a:t>: </a:t>
+            </a:r>
+            <a:r>
+              <a:rPr lang="vi-VN" i="1" dirty="0" err="1"/>
+              <a:t>làm</a:t>
+            </a:r>
+            <a:r>
+              <a:rPr lang="vi-VN" i="1" dirty="0"/>
+              <a:t> sao </a:t>
+            </a:r>
+            <a:r>
+              <a:rPr lang="vi-VN" i="1" dirty="0" err="1"/>
+              <a:t>để</a:t>
+            </a:r>
+            <a:r>
+              <a:rPr lang="vi-VN" i="1" dirty="0"/>
+              <a:t> mô </a:t>
+            </a:r>
+            <a:r>
+              <a:rPr lang="vi-VN" i="1" dirty="0" err="1"/>
+              <a:t>hình</a:t>
+            </a:r>
+            <a:r>
+              <a:rPr lang="vi-VN" i="1" dirty="0"/>
+              <a:t> </a:t>
+            </a:r>
+            <a:r>
+              <a:rPr lang="vi-VN" i="1" dirty="0" err="1"/>
+              <a:t>hiểu</a:t>
+            </a:r>
+            <a:r>
+              <a:rPr lang="vi-VN" i="1" dirty="0"/>
+              <a:t> </a:t>
+            </a:r>
+            <a:r>
+              <a:rPr lang="vi-VN" i="1" dirty="0" err="1"/>
+              <a:t>đúng</a:t>
+            </a:r>
+            <a:r>
+              <a:rPr lang="vi-VN" i="1" dirty="0"/>
+              <a:t> </a:t>
+            </a:r>
+            <a:r>
+              <a:rPr lang="vi-VN" i="1" dirty="0" err="1"/>
+              <a:t>nghiệp</a:t>
+            </a:r>
+            <a:r>
+              <a:rPr lang="vi-VN" i="1" dirty="0"/>
+              <a:t> </a:t>
+            </a:r>
+            <a:r>
+              <a:rPr lang="vi-VN" i="1" dirty="0" err="1"/>
+              <a:t>vụ</a:t>
+            </a:r>
+            <a:r>
+              <a:rPr lang="vi-VN" i="1" dirty="0"/>
+              <a:t>, </a:t>
+            </a:r>
+            <a:r>
+              <a:rPr lang="vi-VN" i="1" dirty="0" err="1"/>
+              <a:t>nói</a:t>
+            </a:r>
+            <a:r>
+              <a:rPr lang="vi-VN" i="1" dirty="0"/>
+              <a:t> </a:t>
+            </a:r>
+            <a:r>
+              <a:rPr lang="vi-VN" i="1" dirty="0" err="1"/>
+              <a:t>đúng</a:t>
+            </a:r>
+            <a:r>
+              <a:rPr lang="vi-VN" i="1" dirty="0"/>
+              <a:t> </a:t>
+            </a:r>
+            <a:r>
+              <a:rPr lang="vi-VN" i="1" dirty="0" err="1"/>
+              <a:t>giọng</a:t>
+            </a:r>
+            <a:r>
+              <a:rPr lang="vi-VN" i="1" dirty="0"/>
+              <a:t> </a:t>
+            </a:r>
+            <a:r>
+              <a:rPr lang="vi-VN" i="1" dirty="0" err="1"/>
+              <a:t>và</a:t>
+            </a:r>
+            <a:r>
+              <a:rPr lang="vi-VN" i="1" dirty="0"/>
+              <a:t> </a:t>
+            </a:r>
+            <a:r>
+              <a:rPr lang="vi-VN" i="1" dirty="0" err="1"/>
+              <a:t>trả</a:t>
+            </a:r>
+            <a:r>
+              <a:rPr lang="vi-VN" i="1" dirty="0"/>
+              <a:t> </a:t>
+            </a:r>
+            <a:r>
+              <a:rPr lang="vi-VN" i="1" dirty="0" err="1"/>
+              <a:t>lời</a:t>
+            </a:r>
+            <a:r>
+              <a:rPr lang="vi-VN" i="1" dirty="0"/>
+              <a:t> </a:t>
+            </a:r>
+            <a:r>
+              <a:rPr lang="vi-VN" i="1" dirty="0" err="1"/>
+              <a:t>nhất</a:t>
+            </a:r>
+            <a:r>
+              <a:rPr lang="vi-VN" i="1" dirty="0"/>
+              <a:t> </a:t>
+            </a:r>
+            <a:r>
+              <a:rPr lang="vi-VN" i="1" dirty="0" err="1"/>
+              <a:t>quán</a:t>
+            </a:r>
+            <a:r>
+              <a:rPr lang="vi-VN" i="1" dirty="0"/>
+              <a:t> theo mong </a:t>
+            </a:r>
+            <a:r>
+              <a:rPr lang="vi-VN" i="1" dirty="0" err="1"/>
+              <a:t>muốn</a:t>
+            </a:r>
+            <a:r>
+              <a:rPr lang="vi-VN" i="1" dirty="0"/>
+              <a:t> </a:t>
+            </a:r>
+            <a:r>
+              <a:rPr lang="vi-VN" i="1" dirty="0" err="1"/>
+              <a:t>của</a:t>
+            </a:r>
+            <a:r>
+              <a:rPr lang="vi-VN" i="1" dirty="0"/>
+              <a:t> </a:t>
+            </a:r>
+            <a:r>
+              <a:rPr lang="vi-VN" i="1" dirty="0" err="1"/>
+              <a:t>chúng</a:t>
+            </a:r>
+            <a:r>
+              <a:rPr lang="vi-VN" i="1" dirty="0"/>
+              <a:t> ta?</a:t>
+            </a:r>
+            <a:endParaRPr lang="vi-VN" dirty="0"/>
+          </a:p>
+          <a:p>
+            <a:r>
+              <a:rPr lang="vi-VN" dirty="0" err="1"/>
+              <a:t>Fine-tuning</a:t>
+            </a:r>
+            <a:r>
+              <a:rPr lang="vi-VN" dirty="0"/>
+              <a:t> trên </a:t>
+            </a:r>
+            <a:r>
+              <a:rPr lang="vi-VN" dirty="0" err="1"/>
+              <a:t>Azure</a:t>
+            </a:r>
+            <a:r>
+              <a:rPr lang="vi-VN" dirty="0"/>
+              <a:t> ra </a:t>
+            </a:r>
+            <a:r>
+              <a:rPr lang="vi-VN" dirty="0" err="1"/>
+              <a:t>đời</a:t>
+            </a:r>
+            <a:r>
+              <a:rPr lang="vi-VN" dirty="0"/>
+              <a:t> </a:t>
+            </a:r>
+            <a:r>
+              <a:rPr lang="vi-VN" dirty="0" err="1"/>
+              <a:t>để</a:t>
+            </a:r>
+            <a:r>
+              <a:rPr lang="vi-VN" dirty="0"/>
+              <a:t> </a:t>
+            </a:r>
+            <a:r>
+              <a:rPr lang="vi-VN" dirty="0" err="1"/>
+              <a:t>giải</a:t>
+            </a:r>
+            <a:r>
+              <a:rPr lang="vi-VN" dirty="0"/>
+              <a:t> </a:t>
+            </a:r>
+            <a:r>
+              <a:rPr lang="vi-VN" dirty="0" err="1"/>
+              <a:t>quyết</a:t>
+            </a:r>
+            <a:r>
+              <a:rPr lang="vi-VN" dirty="0"/>
+              <a:t> </a:t>
+            </a:r>
+            <a:r>
+              <a:rPr lang="vi-VN" dirty="0" err="1"/>
+              <a:t>chính</a:t>
+            </a:r>
+            <a:r>
+              <a:rPr lang="vi-VN" dirty="0"/>
+              <a:t> </a:t>
+            </a:r>
+            <a:r>
+              <a:rPr lang="vi-VN" dirty="0" err="1"/>
+              <a:t>bài</a:t>
+            </a:r>
+            <a:r>
+              <a:rPr lang="vi-VN" dirty="0"/>
+              <a:t> </a:t>
+            </a:r>
+            <a:r>
+              <a:rPr lang="vi-VN" dirty="0" err="1"/>
+              <a:t>toán</a:t>
+            </a:r>
+            <a:r>
+              <a:rPr lang="vi-VN" dirty="0"/>
+              <a:t> </a:t>
+            </a:r>
+            <a:r>
+              <a:rPr lang="vi-VN" dirty="0" err="1"/>
+              <a:t>đó</a:t>
+            </a:r>
+            <a:r>
+              <a:rPr lang="vi-VN" dirty="0"/>
+              <a:t>. </a:t>
+            </a:r>
+            <a:r>
+              <a:rPr lang="vi-VN" dirty="0" err="1"/>
+              <a:t>Nó</a:t>
+            </a:r>
+            <a:r>
+              <a:rPr lang="vi-VN" dirty="0"/>
+              <a:t> không </a:t>
+            </a:r>
+            <a:r>
+              <a:rPr lang="vi-VN" dirty="0" err="1"/>
+              <a:t>nhằm</a:t>
+            </a:r>
+            <a:r>
+              <a:rPr lang="vi-VN" dirty="0"/>
+              <a:t> thay </a:t>
+            </a:r>
+            <a:r>
+              <a:rPr lang="vi-VN" dirty="0" err="1"/>
+              <a:t>thế</a:t>
+            </a:r>
+            <a:r>
+              <a:rPr lang="vi-VN" dirty="0"/>
+              <a:t> </a:t>
+            </a:r>
+            <a:r>
+              <a:rPr lang="vi-VN" dirty="0" err="1"/>
+              <a:t>prompt</a:t>
+            </a:r>
+            <a:r>
+              <a:rPr lang="vi-VN" dirty="0"/>
+              <a:t> hay RAG, </a:t>
+            </a:r>
+            <a:r>
+              <a:rPr lang="vi-VN" dirty="0" err="1"/>
+              <a:t>mà</a:t>
+            </a:r>
+            <a:r>
+              <a:rPr lang="vi-VN" dirty="0"/>
+              <a:t> </a:t>
+            </a:r>
+            <a:r>
+              <a:rPr lang="vi-VN" dirty="0" err="1"/>
+              <a:t>bổ</a:t>
+            </a:r>
+            <a:r>
+              <a:rPr lang="vi-VN" dirty="0"/>
+              <a:t> sung thêm </a:t>
+            </a:r>
+            <a:r>
+              <a:rPr lang="vi-VN" dirty="0" err="1"/>
+              <a:t>một</a:t>
+            </a:r>
+            <a:r>
+              <a:rPr lang="vi-VN" dirty="0"/>
+              <a:t> </a:t>
+            </a:r>
+            <a:r>
+              <a:rPr lang="vi-VN" dirty="0" err="1"/>
+              <a:t>lớp</a:t>
+            </a:r>
+            <a:r>
+              <a:rPr lang="vi-VN" dirty="0"/>
+              <a:t> “</a:t>
+            </a:r>
+            <a:r>
+              <a:rPr lang="vi-VN" dirty="0" err="1"/>
+              <a:t>trí</a:t>
+            </a:r>
+            <a:r>
+              <a:rPr lang="vi-VN" dirty="0"/>
+              <a:t> </a:t>
+            </a:r>
+            <a:r>
+              <a:rPr lang="vi-VN" dirty="0" err="1"/>
+              <a:t>nhớ</a:t>
+            </a:r>
+            <a:r>
+              <a:rPr lang="vi-VN" dirty="0"/>
+              <a:t> </a:t>
+            </a:r>
+            <a:r>
+              <a:rPr lang="vi-VN" dirty="0" err="1"/>
+              <a:t>dài</a:t>
+            </a:r>
+            <a:r>
+              <a:rPr lang="vi-VN" dirty="0"/>
+              <a:t> </a:t>
+            </a:r>
+            <a:r>
+              <a:rPr lang="vi-VN" dirty="0" err="1"/>
+              <a:t>hạn</a:t>
+            </a:r>
+            <a:r>
+              <a:rPr lang="vi-VN" dirty="0"/>
+              <a:t>”, </a:t>
+            </a:r>
+            <a:r>
+              <a:rPr lang="vi-VN" dirty="0" err="1"/>
+              <a:t>giúp</a:t>
+            </a:r>
+            <a:r>
+              <a:rPr lang="vi-VN" dirty="0"/>
+              <a:t> mô </a:t>
+            </a:r>
+            <a:r>
+              <a:rPr lang="vi-VN" dirty="0" err="1"/>
+              <a:t>hình</a:t>
+            </a:r>
+            <a:r>
+              <a:rPr lang="vi-VN" dirty="0"/>
+              <a:t> </a:t>
+            </a:r>
+            <a:r>
+              <a:rPr lang="vi-VN" dirty="0" err="1"/>
+              <a:t>học</a:t>
+            </a:r>
+            <a:r>
+              <a:rPr lang="vi-VN" dirty="0"/>
+              <a:t> </a:t>
+            </a:r>
+            <a:r>
+              <a:rPr lang="vi-VN" dirty="0" err="1"/>
+              <a:t>được</a:t>
+            </a:r>
+            <a:r>
+              <a:rPr lang="vi-VN" dirty="0"/>
+              <a:t> phong </a:t>
+            </a:r>
+            <a:r>
+              <a:rPr lang="vi-VN" dirty="0" err="1"/>
+              <a:t>cách</a:t>
+            </a:r>
+            <a:r>
+              <a:rPr lang="vi-VN" dirty="0"/>
+              <a:t>, </a:t>
+            </a:r>
+            <a:r>
+              <a:rPr lang="vi-VN" dirty="0" err="1"/>
+              <a:t>định</a:t>
+            </a:r>
+            <a:r>
+              <a:rPr lang="vi-VN" dirty="0"/>
+              <a:t> </a:t>
+            </a:r>
+            <a:r>
+              <a:rPr lang="vi-VN" dirty="0" err="1"/>
+              <a:t>dạng</a:t>
+            </a:r>
+            <a:r>
+              <a:rPr lang="vi-VN" dirty="0"/>
+              <a:t> </a:t>
+            </a:r>
+            <a:r>
+              <a:rPr lang="vi-VN" dirty="0" err="1"/>
+              <a:t>và</a:t>
+            </a:r>
+            <a:r>
+              <a:rPr lang="vi-VN" dirty="0"/>
+              <a:t> </a:t>
+            </a:r>
+            <a:r>
+              <a:rPr lang="vi-VN" dirty="0" err="1"/>
+              <a:t>kiến</a:t>
+            </a:r>
+            <a:r>
+              <a:rPr lang="vi-VN" dirty="0"/>
+              <a:t> </a:t>
+            </a:r>
+            <a:r>
+              <a:rPr lang="vi-VN" dirty="0" err="1"/>
+              <a:t>thức</a:t>
+            </a:r>
+            <a:r>
+              <a:rPr lang="vi-VN" dirty="0"/>
+              <a:t> chuyên sâu </a:t>
+            </a:r>
+            <a:r>
+              <a:rPr lang="vi-VN" dirty="0" err="1"/>
+              <a:t>của</a:t>
+            </a:r>
+            <a:r>
+              <a:rPr lang="vi-VN" dirty="0"/>
+              <a:t> </a:t>
+            </a:r>
+            <a:r>
+              <a:rPr lang="vi-VN" dirty="0" err="1"/>
+              <a:t>từng</a:t>
+            </a:r>
+            <a:r>
+              <a:rPr lang="vi-VN" dirty="0"/>
+              <a:t> </a:t>
+            </a:r>
+            <a:r>
+              <a:rPr lang="vi-VN" dirty="0" err="1"/>
+              <a:t>tổ</a:t>
+            </a:r>
+            <a:r>
+              <a:rPr lang="vi-VN" dirty="0"/>
+              <a:t> </a:t>
+            </a:r>
+            <a:r>
+              <a:rPr lang="vi-VN" dirty="0" err="1"/>
+              <a:t>chức</a:t>
+            </a:r>
+            <a:r>
+              <a:rPr lang="vi-VN" dirty="0"/>
+              <a:t>. Trong </a:t>
+            </a:r>
+            <a:r>
+              <a:rPr lang="vi-VN" dirty="0" err="1"/>
+              <a:t>phần</a:t>
+            </a:r>
+            <a:r>
+              <a:rPr lang="vi-VN" dirty="0"/>
+              <a:t> </a:t>
+            </a:r>
+            <a:r>
+              <a:rPr lang="vi-VN" dirty="0" err="1"/>
+              <a:t>trình</a:t>
+            </a:r>
+            <a:r>
+              <a:rPr lang="vi-VN" dirty="0"/>
+              <a:t> </a:t>
+            </a:r>
+            <a:r>
+              <a:rPr lang="vi-VN" dirty="0" err="1"/>
+              <a:t>bày</a:t>
+            </a:r>
+            <a:r>
+              <a:rPr lang="vi-VN" dirty="0"/>
+              <a:t> hôm nay, </a:t>
+            </a:r>
+            <a:r>
+              <a:rPr lang="vi-VN" dirty="0" err="1"/>
+              <a:t>chúng</a:t>
+            </a:r>
+            <a:r>
+              <a:rPr lang="vi-VN" dirty="0"/>
+              <a:t> ta </a:t>
+            </a:r>
+            <a:r>
+              <a:rPr lang="vi-VN" dirty="0" err="1"/>
+              <a:t>sẽ</a:t>
+            </a:r>
+            <a:r>
+              <a:rPr lang="vi-VN" dirty="0"/>
+              <a:t> </a:t>
+            </a:r>
+            <a:r>
+              <a:rPr lang="vi-VN" dirty="0" err="1"/>
+              <a:t>cùng</a:t>
+            </a:r>
+            <a:r>
+              <a:rPr lang="vi-VN" dirty="0"/>
+              <a:t> nhau </a:t>
+            </a:r>
+            <a:r>
+              <a:rPr lang="vi-VN" dirty="0" err="1"/>
+              <a:t>nhìn</a:t>
+            </a:r>
+            <a:r>
+              <a:rPr lang="vi-VN" dirty="0"/>
+              <a:t> </a:t>
+            </a:r>
+            <a:r>
+              <a:rPr lang="vi-VN" dirty="0" err="1"/>
+              <a:t>lại</a:t>
+            </a:r>
+            <a:r>
+              <a:rPr lang="vi-VN" dirty="0"/>
+              <a:t> khi </a:t>
+            </a:r>
+            <a:r>
+              <a:rPr lang="vi-VN" dirty="0" err="1"/>
+              <a:t>nào</a:t>
+            </a:r>
+            <a:r>
+              <a:rPr lang="vi-VN" dirty="0"/>
+              <a:t> nên </a:t>
+            </a:r>
+            <a:r>
+              <a:rPr lang="vi-VN" dirty="0" err="1"/>
+              <a:t>fine-tune</a:t>
+            </a:r>
+            <a:r>
+              <a:rPr lang="vi-VN" dirty="0"/>
+              <a:t>, </a:t>
+            </a:r>
+            <a:r>
+              <a:rPr lang="vi-VN" dirty="0" err="1"/>
+              <a:t>fine-tune</a:t>
+            </a:r>
+            <a:r>
+              <a:rPr lang="vi-VN" dirty="0"/>
+              <a:t> </a:t>
+            </a:r>
+            <a:r>
+              <a:rPr lang="vi-VN" dirty="0" err="1"/>
+              <a:t>để</a:t>
+            </a:r>
+            <a:r>
+              <a:rPr lang="vi-VN" dirty="0"/>
+              <a:t> </a:t>
+            </a:r>
+            <a:r>
+              <a:rPr lang="vi-VN" dirty="0" err="1"/>
+              <a:t>giải</a:t>
+            </a:r>
+            <a:r>
+              <a:rPr lang="vi-VN" dirty="0"/>
+              <a:t> </a:t>
+            </a:r>
+            <a:r>
+              <a:rPr lang="vi-VN" dirty="0" err="1"/>
+              <a:t>quyết</a:t>
+            </a:r>
+            <a:r>
+              <a:rPr lang="vi-VN" dirty="0"/>
+              <a:t> </a:t>
+            </a:r>
+            <a:r>
+              <a:rPr lang="vi-VN" dirty="0" err="1"/>
+              <a:t>vấn</a:t>
+            </a:r>
+            <a:r>
+              <a:rPr lang="vi-VN" dirty="0"/>
+              <a:t> </a:t>
+            </a:r>
+            <a:r>
+              <a:rPr lang="vi-VN" dirty="0" err="1"/>
+              <a:t>đề</a:t>
+            </a:r>
+            <a:r>
+              <a:rPr lang="vi-VN" dirty="0"/>
+              <a:t> </a:t>
+            </a:r>
+            <a:r>
+              <a:rPr lang="vi-VN" dirty="0" err="1"/>
+              <a:t>gì</a:t>
+            </a:r>
+            <a:r>
+              <a:rPr lang="vi-VN" dirty="0"/>
+              <a:t>, </a:t>
+            </a:r>
+            <a:r>
+              <a:rPr lang="vi-VN" dirty="0" err="1"/>
+              <a:t>và</a:t>
+            </a:r>
+            <a:r>
+              <a:rPr lang="vi-VN" dirty="0"/>
+              <a:t> quan </a:t>
+            </a:r>
+            <a:r>
+              <a:rPr lang="vi-VN" dirty="0" err="1"/>
+              <a:t>trọng</a:t>
+            </a:r>
+            <a:r>
+              <a:rPr lang="vi-VN" dirty="0"/>
+              <a:t> </a:t>
+            </a:r>
+            <a:r>
+              <a:rPr lang="vi-VN" dirty="0" err="1"/>
+              <a:t>nhất</a:t>
+            </a:r>
+            <a:r>
+              <a:rPr lang="vi-VN" dirty="0"/>
+              <a:t> </a:t>
+            </a:r>
+            <a:r>
+              <a:rPr lang="vi-VN" dirty="0" err="1"/>
+              <a:t>là</a:t>
+            </a:r>
+            <a:r>
+              <a:rPr lang="vi-VN" dirty="0"/>
+              <a:t> </a:t>
+            </a:r>
+            <a:r>
+              <a:rPr lang="vi-VN" dirty="0" err="1"/>
+              <a:t>làm</a:t>
+            </a:r>
+            <a:r>
+              <a:rPr lang="vi-VN" dirty="0"/>
+              <a:t> </a:t>
+            </a:r>
+            <a:r>
+              <a:rPr lang="vi-VN" dirty="0" err="1"/>
+              <a:t>thế</a:t>
+            </a:r>
+            <a:r>
+              <a:rPr lang="vi-VN" dirty="0"/>
+              <a:t> </a:t>
+            </a:r>
+            <a:r>
+              <a:rPr lang="vi-VN" dirty="0" err="1"/>
+              <a:t>nào</a:t>
+            </a:r>
+            <a:r>
+              <a:rPr lang="vi-VN" dirty="0"/>
+              <a:t> </a:t>
+            </a:r>
+            <a:r>
+              <a:rPr lang="vi-VN" dirty="0" err="1"/>
+              <a:t>để</a:t>
+            </a:r>
+            <a:r>
+              <a:rPr lang="vi-VN" dirty="0"/>
+              <a:t> </a:t>
+            </a:r>
+            <a:r>
+              <a:rPr lang="vi-VN" dirty="0" err="1"/>
+              <a:t>triển</a:t>
+            </a:r>
+            <a:r>
+              <a:rPr lang="vi-VN" dirty="0"/>
+              <a:t> khai </a:t>
+            </a:r>
+            <a:r>
+              <a:rPr lang="vi-VN" dirty="0" err="1"/>
+              <a:t>fine-tune</a:t>
+            </a:r>
+            <a:r>
+              <a:rPr lang="vi-VN" dirty="0"/>
+              <a:t> trên </a:t>
+            </a:r>
+            <a:r>
+              <a:rPr lang="vi-VN" dirty="0" err="1"/>
+              <a:t>Azure</a:t>
+            </a:r>
+            <a:r>
+              <a:rPr lang="vi-VN" dirty="0"/>
+              <a:t> </a:t>
+            </a:r>
+            <a:r>
+              <a:rPr lang="vi-VN" dirty="0" err="1"/>
+              <a:t>một</a:t>
+            </a:r>
+            <a:r>
+              <a:rPr lang="vi-VN" dirty="0"/>
+              <a:t> </a:t>
+            </a:r>
+            <a:r>
+              <a:rPr lang="vi-VN" dirty="0" err="1"/>
+              <a:t>cách</a:t>
+            </a:r>
+            <a:r>
+              <a:rPr lang="vi-VN" dirty="0"/>
+              <a:t> </a:t>
+            </a:r>
+            <a:r>
+              <a:rPr lang="vi-VN" dirty="0" err="1"/>
+              <a:t>hiệu</a:t>
+            </a:r>
+            <a:r>
+              <a:rPr lang="vi-VN" dirty="0"/>
+              <a:t> </a:t>
+            </a:r>
+            <a:r>
+              <a:rPr lang="vi-VN" dirty="0" err="1"/>
+              <a:t>quả</a:t>
+            </a:r>
+            <a:r>
+              <a:rPr lang="vi-VN" dirty="0"/>
+              <a:t> </a:t>
+            </a:r>
+            <a:r>
+              <a:rPr lang="vi-VN" dirty="0" err="1"/>
+              <a:t>và</a:t>
+            </a:r>
+            <a:r>
+              <a:rPr lang="vi-VN" dirty="0"/>
+              <a:t> </a:t>
+            </a:r>
+            <a:r>
+              <a:rPr lang="vi-VN" dirty="0" err="1"/>
+              <a:t>tối</a:t>
+            </a:r>
+            <a:r>
+              <a:rPr lang="vi-VN" dirty="0"/>
+              <a:t> ưu chi </a:t>
+            </a:r>
+            <a:r>
+              <a:rPr lang="vi-VN" dirty="0" err="1"/>
+              <a:t>phí</a:t>
+            </a:r>
+            <a:r>
+              <a:rPr lang="vi-VN" dirty="0"/>
+              <a:t>.</a:t>
+            </a:r>
+          </a:p>
+          <a:p>
+            <a:pPr marL="0" indent="0">
+              <a:buNone/>
+            </a:pPr>
             <a:endParaRPr lang="en-US" dirty="0"/>
           </a:p>
         </p:txBody>
@@ -3402,7 +4387,7 @@
     </p:spTree>
     <p:extLst>
       <p:ext uri="{BB962C8B-B14F-4D97-AF65-F5344CB8AC3E}">
-        <p14:creationId xmlns:p14="http://schemas.microsoft.com/office/powerpoint/2010/main" val="3576189695"/>
+        <p14:creationId xmlns:p14="http://schemas.microsoft.com/office/powerpoint/2010/main" val="1681999362"/>
       </p:ext>
     </p:extLst>
   </p:cSld>
@@ -5714,60 +6699,8 @@
           <a:lstStyle/>
           <a:p>
             <a:r>
-              <a:rPr lang="en-US" dirty="0" err="1"/>
-              <a:t>Chuẩn</a:t>
-            </a:r>
-            <a:r>
-              <a:rPr lang="en-US" dirty="0"/>
-              <a:t> </a:t>
-            </a:r>
-            <a:r>
-              <a:rPr lang="en-US" dirty="0" err="1"/>
-              <a:t>bị</a:t>
-            </a:r>
-            <a:r>
-              <a:rPr lang="en-US" dirty="0"/>
-              <a:t> </a:t>
-            </a:r>
-            <a:r>
-              <a:rPr lang="en-US" dirty="0" err="1"/>
-              <a:t>dữ</a:t>
-            </a:r>
-            <a:r>
-              <a:rPr lang="en-US" dirty="0"/>
-              <a:t> </a:t>
-            </a:r>
-            <a:r>
-              <a:rPr lang="en-US" dirty="0" err="1"/>
-              <a:t>liệu</a:t>
-            </a:r>
-            <a:r>
-              <a:rPr lang="en-US" dirty="0"/>
-              <a:t> </a:t>
-            </a:r>
-            <a:r>
-              <a:rPr lang="en-US" dirty="0" err="1"/>
-              <a:t>để</a:t>
-            </a:r>
-            <a:r>
-              <a:rPr lang="en-US" dirty="0"/>
-              <a:t> </a:t>
-            </a:r>
-            <a:r>
-              <a:rPr lang="en-US" dirty="0" err="1"/>
-              <a:t>trainning</a:t>
-            </a:r>
-            <a:r>
-              <a:rPr lang="en-US" dirty="0"/>
-              <a:t> </a:t>
-            </a:r>
-            <a:r>
-              <a:rPr lang="en-US" dirty="0" err="1"/>
-              <a:t>và</a:t>
-            </a:r>
-            <a:r>
-              <a:rPr lang="en-US" dirty="0"/>
-              <a:t> validation</a:t>
+              <a:rPr lang="en-US" dirty="0"/>
+              <a:t>Flow Fine-Tune</a:t>
             </a:r>
           </a:p>
         </p:txBody>
@@ -5790,24 +6723,161 @@
         </p:nvSpPr>
         <p:spPr/>
         <p:txBody>
-          <a:bodyPr/>
+          <a:bodyPr>
+            <a:normAutofit fontScale="40000" lnSpcReduction="20000"/>
+          </a:bodyPr>
           <a:lstStyle/>
           <a:p>
-            <a:r>
-              <a:rPr lang="en-US" dirty="0" err="1"/>
-              <a:t>Ví</a:t>
-            </a:r>
-            <a:r>
-              <a:rPr lang="en-US" dirty="0"/>
-              <a:t> </a:t>
-            </a:r>
-            <a:r>
-              <a:rPr lang="en-US" dirty="0" err="1"/>
-              <a:t>dụ</a:t>
-            </a:r>
-            <a:r>
-              <a:rPr lang="en-US" dirty="0"/>
-              <a:t>:</a:t>
+            <a:pPr marL="0" indent="0">
+              <a:buNone/>
+            </a:pPr>
+            <a:r>
+              <a:rPr lang="en-US" dirty="0"/>
+              <a:t>Problem Definition</a:t>
+            </a:r>
+          </a:p>
+          <a:p>
+            <a:pPr marL="0" indent="0">
+              <a:buNone/>
+            </a:pPr>
+            <a:r>
+              <a:rPr lang="en-US" dirty="0"/>
+              <a:t>        ↓</a:t>
+            </a:r>
+          </a:p>
+          <a:p>
+            <a:pPr marL="0" indent="0">
+              <a:buNone/>
+            </a:pPr>
+            <a:r>
+              <a:rPr lang="en-US" dirty="0"/>
+              <a:t>Prompt / RAG First</a:t>
+            </a:r>
+          </a:p>
+          <a:p>
+            <a:pPr marL="0" indent="0">
+              <a:buNone/>
+            </a:pPr>
+            <a:r>
+              <a:rPr lang="en-US" dirty="0"/>
+              <a:t>        ↓</a:t>
+            </a:r>
+          </a:p>
+          <a:p>
+            <a:pPr marL="0" indent="0">
+              <a:buNone/>
+            </a:pPr>
+            <a:r>
+              <a:rPr lang="en-US" dirty="0"/>
+              <a:t>Choose Fine-Tune Method</a:t>
+            </a:r>
+          </a:p>
+          <a:p>
+            <a:pPr marL="0" indent="0">
+              <a:buNone/>
+            </a:pPr>
+            <a:r>
+              <a:rPr lang="en-US" dirty="0"/>
+              <a:t>        ↓</a:t>
+            </a:r>
+          </a:p>
+          <a:p>
+            <a:pPr marL="0" indent="0">
+              <a:buNone/>
+            </a:pPr>
+            <a:r>
+              <a:rPr lang="en-US" dirty="0"/>
+              <a:t>Prepare Training / Validation / Test Data</a:t>
+            </a:r>
+          </a:p>
+          <a:p>
+            <a:pPr marL="0" indent="0">
+              <a:buNone/>
+            </a:pPr>
+            <a:r>
+              <a:rPr lang="en-US" dirty="0"/>
+              <a:t>        ↓</a:t>
+            </a:r>
+          </a:p>
+          <a:p>
+            <a:pPr marL="0" indent="0">
+              <a:buNone/>
+            </a:pPr>
+            <a:r>
+              <a:rPr lang="en-US" dirty="0"/>
+              <a:t>Local Fine-Tune (Experiment)</a:t>
+            </a:r>
+          </a:p>
+          <a:p>
+            <a:pPr marL="0" indent="0">
+              <a:buNone/>
+            </a:pPr>
+            <a:r>
+              <a:rPr lang="en-US" dirty="0"/>
+              <a:t>        ↓</a:t>
+            </a:r>
+          </a:p>
+          <a:p>
+            <a:pPr marL="0" indent="0">
+              <a:buNone/>
+            </a:pPr>
+            <a:r>
+              <a:rPr lang="en-US" dirty="0"/>
+              <a:t>Evaluate → Improve Data</a:t>
+            </a:r>
+          </a:p>
+          <a:p>
+            <a:pPr marL="0" indent="0">
+              <a:buNone/>
+            </a:pPr>
+            <a:r>
+              <a:rPr lang="en-US" dirty="0"/>
+              <a:t>        ↓</a:t>
+            </a:r>
+          </a:p>
+          <a:p>
+            <a:pPr marL="0" indent="0">
+              <a:buNone/>
+            </a:pPr>
+            <a:r>
+              <a:rPr lang="en-US" dirty="0"/>
+              <a:t>Azure Fine-Tune (Production)</a:t>
+            </a:r>
+          </a:p>
+          <a:p>
+            <a:pPr marL="0" indent="0">
+              <a:buNone/>
+            </a:pPr>
+            <a:r>
+              <a:rPr lang="en-US" dirty="0"/>
+              <a:t>        ↓</a:t>
+            </a:r>
+          </a:p>
+          <a:p>
+            <a:pPr marL="0" indent="0">
+              <a:buNone/>
+            </a:pPr>
+            <a:r>
+              <a:rPr lang="en-US" dirty="0"/>
+              <a:t>Final Evaluation</a:t>
+            </a:r>
+          </a:p>
+          <a:p>
+            <a:pPr marL="0" indent="0">
+              <a:buNone/>
+            </a:pPr>
+            <a:r>
+              <a:rPr lang="en-US" dirty="0"/>
+              <a:t>        ↓</a:t>
+            </a:r>
+          </a:p>
+          <a:p>
+            <a:pPr marL="0" indent="0">
+              <a:buNone/>
+            </a:pPr>
+            <a:r>
+              <a:rPr lang="en-US" dirty="0"/>
+              <a:t>Deploy &amp; Monitor</a:t>
             </a:r>
           </a:p>
           <a:p>
@@ -5821,7 +6891,7 @@
     </p:spTree>
     <p:extLst>
       <p:ext uri="{BB962C8B-B14F-4D97-AF65-F5344CB8AC3E}">
-        <p14:creationId xmlns:p14="http://schemas.microsoft.com/office/powerpoint/2010/main" val="2010755086"/>
+        <p14:creationId xmlns:p14="http://schemas.microsoft.com/office/powerpoint/2010/main" val="2097357192"/>
       </p:ext>
     </p:extLst>
   </p:cSld>
@@ -5895,7 +6965,7 @@
         <p:spPr/>
         <p:txBody>
           <a:bodyPr>
-            <a:normAutofit fontScale="40000" lnSpcReduction="20000"/>
+            <a:normAutofit/>
           </a:bodyPr>
           <a:lstStyle/>
           <a:p>
@@ -5904,7 +6974,95 @@
             </a:pPr>
             <a:r>
               <a:rPr lang="en-US" dirty="0"/>
-              <a:t>Problem Definition</a:t>
+              <a:t>1.Xác </a:t>
+            </a:r>
+            <a:r>
+              <a:rPr lang="en-US" dirty="0" err="1"/>
+              <a:t>định</a:t>
+            </a:r>
+            <a:r>
+              <a:rPr lang="en-US" dirty="0"/>
+              <a:t> </a:t>
+            </a:r>
+            <a:r>
+              <a:rPr lang="en-US" dirty="0" err="1"/>
+              <a:t>bài</a:t>
+            </a:r>
+            <a:r>
+              <a:rPr lang="en-US" dirty="0"/>
+              <a:t> </a:t>
+            </a:r>
+            <a:r>
+              <a:rPr lang="en-US" dirty="0" err="1"/>
+              <a:t>toán</a:t>
+            </a:r>
+            <a:r>
+              <a:rPr lang="en-US" dirty="0"/>
+              <a:t> — </a:t>
+            </a:r>
+            <a:r>
+              <a:rPr lang="en-US" dirty="0" err="1"/>
+              <a:t>Có</a:t>
+            </a:r>
+            <a:r>
+              <a:rPr lang="en-US" dirty="0"/>
+              <a:t> </a:t>
+            </a:r>
+            <a:r>
+              <a:rPr lang="en-US" dirty="0" err="1"/>
+              <a:t>cần</a:t>
+            </a:r>
+            <a:r>
+              <a:rPr lang="en-US" dirty="0"/>
+              <a:t> Fine-Tune </a:t>
+            </a:r>
+            <a:r>
+              <a:rPr lang="en-US" dirty="0" err="1"/>
+              <a:t>không</a:t>
+            </a:r>
+            <a:r>
+              <a:rPr lang="en-US" dirty="0"/>
+              <a:t>?</a:t>
+            </a:r>
+          </a:p>
+          <a:p>
+            <a:r>
+              <a:rPr lang="en-US" dirty="0"/>
+              <a:t>Prompt Engineering → RAG → Fine-Tune</a:t>
+            </a:r>
+          </a:p>
+          <a:p>
+            <a:r>
+              <a:rPr lang="en-US" dirty="0" err="1"/>
+              <a:t>Chỉ</a:t>
+            </a:r>
+            <a:r>
+              <a:rPr lang="en-US" dirty="0"/>
+              <a:t> fine-tune </a:t>
+            </a:r>
+            <a:r>
+              <a:rPr lang="en-US" dirty="0" err="1"/>
+              <a:t>nếu</a:t>
+            </a:r>
+            <a:r>
+              <a:rPr lang="en-US" dirty="0"/>
+              <a:t> prompt/RAG </a:t>
+            </a:r>
+            <a:r>
+              <a:rPr lang="en-US" dirty="0" err="1"/>
+              <a:t>không</a:t>
+            </a:r>
+            <a:r>
+              <a:rPr lang="en-US" dirty="0"/>
+              <a:t> </a:t>
+            </a:r>
+            <a:r>
+              <a:rPr lang="en-US" dirty="0" err="1"/>
+              <a:t>đủ</a:t>
+            </a:r>
+            <a:r>
+              <a:rPr lang="en-US" dirty="0"/>
+              <a:t>.</a:t>
             </a:r>
           </a:p>
           <a:p>
@@ -5913,148 +7071,153 @@
             </a:pPr>
             <a:r>
               <a:rPr lang="en-US" dirty="0"/>
-              <a:t>        ↓</a:t>
-            </a:r>
-          </a:p>
-          <a:p>
-            <a:pPr marL="0" indent="0">
-              <a:buNone/>
-            </a:pPr>
-            <a:r>
-              <a:rPr lang="en-US" dirty="0"/>
-              <a:t>Prompt / RAG First</a:t>
-            </a:r>
-          </a:p>
-          <a:p>
-            <a:pPr marL="0" indent="0">
-              <a:buNone/>
-            </a:pPr>
-            <a:r>
-              <a:rPr lang="en-US" dirty="0"/>
-              <a:t>        ↓</a:t>
-            </a:r>
-          </a:p>
-          <a:p>
-            <a:pPr marL="0" indent="0">
-              <a:buNone/>
-            </a:pPr>
-            <a:r>
-              <a:rPr lang="en-US" dirty="0"/>
-              <a:t>Choose Fine-Tune Method</a:t>
-            </a:r>
-          </a:p>
-          <a:p>
-            <a:pPr marL="0" indent="0">
-              <a:buNone/>
-            </a:pPr>
-            <a:r>
-              <a:rPr lang="en-US" dirty="0"/>
-              <a:t>        ↓</a:t>
-            </a:r>
-          </a:p>
-          <a:p>
-            <a:pPr marL="0" indent="0">
-              <a:buNone/>
-            </a:pPr>
-            <a:r>
-              <a:rPr lang="en-US" dirty="0"/>
-              <a:t>Prepare Training / Validation / Test Data</a:t>
-            </a:r>
-          </a:p>
-          <a:p>
-            <a:pPr marL="0" indent="0">
-              <a:buNone/>
-            </a:pPr>
-            <a:r>
-              <a:rPr lang="en-US" dirty="0"/>
-              <a:t>        ↓</a:t>
-            </a:r>
-          </a:p>
-          <a:p>
-            <a:pPr marL="0" indent="0">
-              <a:buNone/>
-            </a:pPr>
-            <a:r>
-              <a:rPr lang="en-US" dirty="0"/>
-              <a:t>Local Fine-Tune (Experiment)</a:t>
-            </a:r>
-          </a:p>
-          <a:p>
-            <a:pPr marL="0" indent="0">
-              <a:buNone/>
-            </a:pPr>
-            <a:r>
-              <a:rPr lang="en-US" dirty="0"/>
-              <a:t>        ↓</a:t>
-            </a:r>
-          </a:p>
-          <a:p>
-            <a:pPr marL="0" indent="0">
-              <a:buNone/>
-            </a:pPr>
-            <a:r>
-              <a:rPr lang="en-US" dirty="0"/>
-              <a:t>Evaluate → Improve Data</a:t>
-            </a:r>
-          </a:p>
-          <a:p>
-            <a:pPr marL="0" indent="0">
-              <a:buNone/>
-            </a:pPr>
-            <a:r>
-              <a:rPr lang="en-US" dirty="0"/>
-              <a:t>        ↓</a:t>
-            </a:r>
-          </a:p>
-          <a:p>
-            <a:pPr marL="0" indent="0">
-              <a:buNone/>
-            </a:pPr>
-            <a:r>
-              <a:rPr lang="en-US" dirty="0"/>
-              <a:t>Azure Fine-Tune (Production)</a:t>
-            </a:r>
-          </a:p>
-          <a:p>
-            <a:pPr marL="0" indent="0">
-              <a:buNone/>
-            </a:pPr>
-            <a:r>
-              <a:rPr lang="en-US" dirty="0"/>
-              <a:t>        ↓</a:t>
-            </a:r>
-          </a:p>
-          <a:p>
-            <a:pPr marL="0" indent="0">
-              <a:buNone/>
-            </a:pPr>
-            <a:r>
-              <a:rPr lang="en-US" dirty="0"/>
-              <a:t>Final Evaluation</a:t>
-            </a:r>
-          </a:p>
-          <a:p>
-            <a:pPr marL="0" indent="0">
-              <a:buNone/>
-            </a:pPr>
-            <a:r>
-              <a:rPr lang="en-US" dirty="0"/>
-              <a:t>        ↓</a:t>
-            </a:r>
-          </a:p>
-          <a:p>
-            <a:pPr marL="0" indent="0">
-              <a:buNone/>
-            </a:pPr>
-            <a:r>
-              <a:rPr lang="en-US" dirty="0"/>
-              <a:t>Deploy &amp; Monitor</a:t>
-            </a:r>
-          </a:p>
-          <a:p>
-            <a:pPr marL="0" indent="0">
-              <a:buNone/>
-            </a:pPr>
+              <a:t>2. </a:t>
+            </a:r>
+            <a:r>
+              <a:rPr lang="en-US" dirty="0" err="1"/>
+              <a:t>Xác</a:t>
+            </a:r>
+            <a:r>
+              <a:rPr lang="en-US" dirty="0"/>
+              <a:t> </a:t>
+            </a:r>
+            <a:r>
+              <a:rPr lang="en-US" dirty="0" err="1"/>
+              <a:t>định</a:t>
+            </a:r>
+            <a:r>
+              <a:rPr lang="en-US" dirty="0"/>
+              <a:t> </a:t>
+            </a:r>
+            <a:r>
+              <a:rPr lang="en-US" dirty="0" err="1"/>
+              <a:t>mục</a:t>
+            </a:r>
+            <a:r>
+              <a:rPr lang="en-US" dirty="0"/>
+              <a:t> </a:t>
+            </a:r>
+            <a:r>
+              <a:rPr lang="en-US" dirty="0" err="1"/>
+              <a:t>tiêu</a:t>
+            </a:r>
+            <a:r>
+              <a:rPr lang="en-US" dirty="0"/>
+              <a:t> Fine-Tune</a:t>
+            </a:r>
+          </a:p>
+          <a:p>
+            <a:r>
+              <a:rPr lang="vi-VN" dirty="0" err="1"/>
+              <a:t>Dạy</a:t>
+            </a:r>
+            <a:r>
+              <a:rPr lang="vi-VN" dirty="0"/>
+              <a:t> </a:t>
+            </a:r>
+            <a:r>
+              <a:rPr lang="vi-VN" dirty="0" err="1"/>
+              <a:t>kiến</a:t>
+            </a:r>
+            <a:r>
+              <a:rPr lang="vi-VN" dirty="0"/>
+              <a:t> </a:t>
+            </a:r>
+            <a:r>
+              <a:rPr lang="vi-VN" dirty="0" err="1"/>
+              <a:t>thức</a:t>
+            </a:r>
+            <a:r>
+              <a:rPr lang="en-US" dirty="0"/>
+              <a:t>? </a:t>
+            </a:r>
+            <a:r>
+              <a:rPr lang="vi-VN" dirty="0" err="1"/>
+              <a:t>Dạy</a:t>
+            </a:r>
+            <a:r>
+              <a:rPr lang="vi-VN" dirty="0"/>
+              <a:t> phong </a:t>
+            </a:r>
+            <a:r>
+              <a:rPr lang="vi-VN" dirty="0" err="1"/>
+              <a:t>cách</a:t>
+            </a:r>
+            <a:r>
+              <a:rPr lang="vi-VN" dirty="0"/>
+              <a:t>?</a:t>
+            </a:r>
+            <a:r>
+              <a:rPr lang="en-US" dirty="0"/>
+              <a:t> </a:t>
+            </a:r>
+            <a:r>
+              <a:rPr lang="vi-VN" dirty="0" err="1"/>
+              <a:t>Dạy</a:t>
+            </a:r>
+            <a:r>
+              <a:rPr lang="vi-VN" dirty="0"/>
+              <a:t> </a:t>
+            </a:r>
+            <a:r>
+              <a:rPr lang="vi-VN" dirty="0" err="1"/>
+              <a:t>reasoning</a:t>
+            </a:r>
+            <a:r>
+              <a:rPr lang="vi-VN" dirty="0"/>
+              <a:t>?</a:t>
+            </a:r>
+            <a:r>
+              <a:rPr lang="en-US" dirty="0"/>
+              <a:t> </a:t>
+            </a:r>
+            <a:r>
+              <a:rPr lang="vi-VN" dirty="0" err="1"/>
+              <a:t>Giảm</a:t>
+            </a:r>
+            <a:r>
+              <a:rPr lang="vi-VN" dirty="0"/>
+              <a:t> </a:t>
+            </a:r>
+            <a:r>
+              <a:rPr lang="vi-VN" dirty="0" err="1"/>
+              <a:t>hallucination</a:t>
+            </a:r>
+            <a:r>
+              <a:rPr lang="vi-VN" dirty="0"/>
+              <a:t>?</a:t>
+            </a:r>
+            <a:endParaRPr lang="en-US" dirty="0"/>
+          </a:p>
+          <a:p>
+            <a:r>
+              <a:rPr lang="en-US" dirty="0"/>
+              <a:t>👉 </a:t>
+            </a:r>
+            <a:r>
+              <a:rPr lang="vi-VN" dirty="0" err="1"/>
+              <a:t>Tránh</a:t>
+            </a:r>
+            <a:r>
+              <a:rPr lang="vi-VN" dirty="0"/>
+              <a:t> </a:t>
+            </a:r>
+            <a:r>
+              <a:rPr lang="vi-VN" dirty="0" err="1"/>
+              <a:t>fine-tune</a:t>
+            </a:r>
+            <a:r>
+              <a:rPr lang="vi-VN" dirty="0"/>
+              <a:t> mơ </a:t>
+            </a:r>
+            <a:r>
+              <a:rPr lang="vi-VN" dirty="0" err="1"/>
+              <a:t>hồ</a:t>
+            </a:r>
+            <a:r>
+              <a:rPr lang="vi-VN" dirty="0"/>
+              <a:t>.</a:t>
+            </a:r>
             <a:endParaRPr lang="en-US" dirty="0"/>
           </a:p>
         </p:txBody>
@@ -6062,7 +7225,7 @@
     </p:spTree>
     <p:extLst>
       <p:ext uri="{BB962C8B-B14F-4D97-AF65-F5344CB8AC3E}">
-        <p14:creationId xmlns:p14="http://schemas.microsoft.com/office/powerpoint/2010/main" val="2097357192"/>
+        <p14:creationId xmlns:p14="http://schemas.microsoft.com/office/powerpoint/2010/main" val="3919238436"/>
       </p:ext>
     </p:extLst>
   </p:cSld>
@@ -6136,7 +7299,7 @@
         <p:spPr/>
         <p:txBody>
           <a:bodyPr>
-            <a:normAutofit/>
+            <a:normAutofit fontScale="55000" lnSpcReduction="20000"/>
           </a:bodyPr>
           <a:lstStyle/>
           <a:p>
@@ -6145,258 +7308,355 @@
             </a:pPr>
             <a:r>
               <a:rPr lang="en-US" dirty="0"/>
-              <a:t>1.Xác </a:t>
-            </a:r>
-            <a:r>
-              <a:rPr lang="en-US" dirty="0" err="1"/>
-              <a:t>định</a:t>
-            </a:r>
-            <a:r>
-              <a:rPr lang="en-US" dirty="0"/>
-              <a:t> </a:t>
-            </a:r>
-            <a:r>
-              <a:rPr lang="en-US" dirty="0" err="1"/>
-              <a:t>bài</a:t>
-            </a:r>
-            <a:r>
-              <a:rPr lang="en-US" dirty="0"/>
-              <a:t> </a:t>
-            </a:r>
-            <a:r>
-              <a:rPr lang="en-US" dirty="0" err="1"/>
-              <a:t>toán</a:t>
-            </a:r>
-            <a:r>
-              <a:rPr lang="en-US" dirty="0"/>
-              <a:t> — </a:t>
-            </a:r>
-            <a:r>
-              <a:rPr lang="en-US" dirty="0" err="1"/>
-              <a:t>Có</a:t>
-            </a:r>
-            <a:r>
-              <a:rPr lang="en-US" dirty="0"/>
-              <a:t> </a:t>
-            </a:r>
-            <a:r>
-              <a:rPr lang="en-US" dirty="0" err="1"/>
-              <a:t>cần</a:t>
-            </a:r>
-            <a:r>
-              <a:rPr lang="en-US" dirty="0"/>
-              <a:t> Fine-Tune </a:t>
-            </a:r>
-            <a:r>
-              <a:rPr lang="en-US" dirty="0" err="1"/>
-              <a:t>không</a:t>
-            </a:r>
-            <a:r>
-              <a:rPr lang="en-US" dirty="0"/>
-              <a:t>?</a:t>
-            </a:r>
-          </a:p>
-          <a:p>
-            <a:r>
-              <a:rPr lang="en-US" dirty="0"/>
-              <a:t>Prompt Engineering → RAG → Fine-Tune</a:t>
-            </a:r>
-          </a:p>
-          <a:p>
-            <a:r>
-              <a:rPr lang="en-US" dirty="0" err="1"/>
-              <a:t>Chỉ</a:t>
-            </a:r>
-            <a:r>
-              <a:rPr lang="en-US" dirty="0"/>
-              <a:t> fine-tune </a:t>
-            </a:r>
-            <a:r>
-              <a:rPr lang="en-US" dirty="0" err="1"/>
-              <a:t>nếu</a:t>
-            </a:r>
-            <a:r>
-              <a:rPr lang="en-US" dirty="0"/>
-              <a:t> prompt/RAG </a:t>
-            </a:r>
-            <a:r>
-              <a:rPr lang="en-US" dirty="0" err="1"/>
-              <a:t>không</a:t>
-            </a:r>
-            <a:r>
-              <a:rPr lang="en-US" dirty="0"/>
-              <a:t> </a:t>
-            </a:r>
-            <a:r>
-              <a:rPr lang="en-US" dirty="0" err="1"/>
-              <a:t>đủ</a:t>
-            </a:r>
-            <a:r>
-              <a:rPr lang="en-US" dirty="0"/>
-              <a:t>.</a:t>
+              <a:t>1. </a:t>
+            </a:r>
+            <a:r>
+              <a:rPr lang="en-US" dirty="0" err="1"/>
+              <a:t>Chuẩn</a:t>
+            </a:r>
+            <a:r>
+              <a:rPr lang="en-US" dirty="0"/>
+              <a:t> </a:t>
+            </a:r>
+            <a:r>
+              <a:rPr lang="en-US" dirty="0" err="1"/>
+              <a:t>bị</a:t>
+            </a:r>
+            <a:r>
+              <a:rPr lang="en-US" dirty="0"/>
+              <a:t> </a:t>
+            </a:r>
+            <a:r>
+              <a:rPr lang="en-US" dirty="0" err="1"/>
+              <a:t>dữ</a:t>
+            </a:r>
+            <a:r>
+              <a:rPr lang="en-US" dirty="0"/>
+              <a:t> </a:t>
+            </a:r>
+            <a:r>
+              <a:rPr lang="en-US" dirty="0" err="1"/>
+              <a:t>liệu</a:t>
+            </a:r>
+            <a:endParaRPr lang="en-US" dirty="0"/>
+          </a:p>
+          <a:p>
+            <a:r>
+              <a:rPr lang="en-US" dirty="0"/>
+              <a:t>Training data, Validation data, Testing data (</a:t>
+            </a:r>
+            <a:r>
+              <a:rPr lang="en-US" dirty="0" err="1"/>
+              <a:t>khuyến</a:t>
+            </a:r>
+            <a:r>
+              <a:rPr lang="en-US" dirty="0"/>
+              <a:t> </a:t>
+            </a:r>
+            <a:r>
+              <a:rPr lang="en-US" dirty="0" err="1"/>
+              <a:t>khích</a:t>
+            </a:r>
+            <a:r>
+              <a:rPr lang="en-US" dirty="0"/>
+              <a:t> them, </a:t>
+            </a:r>
+            <a:r>
+              <a:rPr lang="en-US" dirty="0" err="1"/>
+              <a:t>đánh</a:t>
+            </a:r>
+            <a:r>
+              <a:rPr lang="en-US" dirty="0"/>
+              <a:t> </a:t>
+            </a:r>
+            <a:r>
+              <a:rPr lang="en-US" dirty="0" err="1"/>
+              <a:t>giá</a:t>
+            </a:r>
+            <a:r>
+              <a:rPr lang="en-US" dirty="0"/>
+              <a:t> </a:t>
+            </a:r>
+            <a:r>
+              <a:rPr lang="en-US" dirty="0" err="1"/>
+              <a:t>trung</a:t>
+            </a:r>
+            <a:r>
+              <a:rPr lang="en-US" dirty="0"/>
+              <a:t> </a:t>
+            </a:r>
+            <a:r>
+              <a:rPr lang="en-US" dirty="0" err="1"/>
+              <a:t>lập</a:t>
+            </a:r>
+            <a:r>
+              <a:rPr lang="en-US" dirty="0"/>
+              <a:t>)</a:t>
             </a:r>
           </a:p>
           <a:p>
             <a:pPr marL="0" indent="0">
               <a:buNone/>
             </a:pPr>
-            <a:r>
-              <a:rPr lang="en-US" dirty="0"/>
-              <a:t>2. </a:t>
-            </a:r>
-            <a:r>
-              <a:rPr lang="en-US" dirty="0" err="1"/>
-              <a:t>Xác</a:t>
-            </a:r>
-            <a:r>
-              <a:rPr lang="en-US" dirty="0"/>
-              <a:t> </a:t>
-            </a:r>
-            <a:r>
-              <a:rPr lang="en-US" dirty="0" err="1"/>
-              <a:t>định</a:t>
-            </a:r>
-            <a:r>
-              <a:rPr lang="en-US" dirty="0"/>
-              <a:t> </a:t>
-            </a:r>
-            <a:r>
-              <a:rPr lang="en-US" dirty="0" err="1"/>
-              <a:t>mục</a:t>
-            </a:r>
-            <a:r>
-              <a:rPr lang="en-US" dirty="0"/>
-              <a:t> </a:t>
-            </a:r>
-            <a:r>
-              <a:rPr lang="en-US" dirty="0" err="1"/>
-              <a:t>tiêu</a:t>
-            </a:r>
-            <a:r>
-              <a:rPr lang="en-US" dirty="0"/>
-              <a:t> Fine-Tune</a:t>
-            </a:r>
-          </a:p>
-          <a:p>
-            <a:r>
-              <a:rPr lang="vi-VN" dirty="0" err="1"/>
-              <a:t>Dạy</a:t>
-            </a:r>
-            <a:r>
-              <a:rPr lang="vi-VN" dirty="0"/>
-              <a:t> </a:t>
-            </a:r>
-            <a:r>
-              <a:rPr lang="vi-VN" dirty="0" err="1"/>
-              <a:t>kiến</a:t>
-            </a:r>
-            <a:r>
-              <a:rPr lang="vi-VN" dirty="0"/>
-              <a:t> </a:t>
-            </a:r>
-            <a:r>
-              <a:rPr lang="vi-VN" dirty="0" err="1"/>
-              <a:t>thức</a:t>
-            </a:r>
-            <a:r>
-              <a:rPr lang="en-US" dirty="0"/>
-              <a:t>? </a:t>
-            </a:r>
-            <a:r>
-              <a:rPr lang="vi-VN" dirty="0" err="1"/>
-              <a:t>Dạy</a:t>
-            </a:r>
-            <a:r>
-              <a:rPr lang="vi-VN" dirty="0"/>
-              <a:t> phong </a:t>
-            </a:r>
-            <a:r>
-              <a:rPr lang="vi-VN" dirty="0" err="1"/>
-              <a:t>cách</a:t>
-            </a:r>
-            <a:r>
-              <a:rPr lang="vi-VN" dirty="0"/>
-              <a:t>?</a:t>
-            </a:r>
-            <a:r>
-              <a:rPr lang="en-US" dirty="0"/>
-              <a:t> </a:t>
-            </a:r>
-            <a:r>
-              <a:rPr lang="vi-VN" dirty="0" err="1"/>
-              <a:t>Dạy</a:t>
-            </a:r>
-            <a:r>
-              <a:rPr lang="vi-VN" dirty="0"/>
-              <a:t> </a:t>
-            </a:r>
-            <a:r>
-              <a:rPr lang="vi-VN" dirty="0" err="1"/>
-              <a:t>reasoning</a:t>
-            </a:r>
-            <a:r>
-              <a:rPr lang="vi-VN" dirty="0"/>
-              <a:t>?</a:t>
-            </a:r>
-            <a:r>
-              <a:rPr lang="en-US" dirty="0"/>
-              <a:t> </a:t>
-            </a:r>
-            <a:r>
-              <a:rPr lang="vi-VN" dirty="0" err="1"/>
-              <a:t>Giảm</a:t>
-            </a:r>
-            <a:r>
-              <a:rPr lang="vi-VN" dirty="0"/>
-              <a:t> </a:t>
-            </a:r>
-            <a:r>
-              <a:rPr lang="vi-VN" dirty="0" err="1"/>
-              <a:t>hallucination</a:t>
-            </a:r>
-            <a:r>
-              <a:rPr lang="vi-VN" dirty="0"/>
-              <a:t>?</a:t>
-            </a:r>
             <a:endParaRPr lang="en-US" dirty="0"/>
           </a:p>
           <a:p>
-            <a:r>
-              <a:rPr lang="en-US" dirty="0"/>
-              <a:t>👉 </a:t>
-            </a:r>
-            <a:r>
-              <a:rPr lang="vi-VN" dirty="0" err="1"/>
-              <a:t>Tránh</a:t>
-            </a:r>
-            <a:r>
-              <a:rPr lang="vi-VN" dirty="0"/>
-              <a:t> </a:t>
-            </a:r>
-            <a:r>
-              <a:rPr lang="vi-VN" dirty="0" err="1"/>
-              <a:t>fine-tune</a:t>
-            </a:r>
-            <a:r>
-              <a:rPr lang="vi-VN" dirty="0"/>
-              <a:t> mơ </a:t>
-            </a:r>
-            <a:r>
-              <a:rPr lang="vi-VN" dirty="0" err="1"/>
-              <a:t>hồ</a:t>
-            </a:r>
-            <a:r>
-              <a:rPr lang="vi-VN" dirty="0"/>
-              <a:t>.</a:t>
+            <a:pPr marL="0" indent="0">
+              <a:buNone/>
+            </a:pPr>
+            <a:r>
+              <a:rPr lang="en-US" dirty="0"/>
+              <a:t>2. Fine-Tune Local (Experiment Phase)</a:t>
+            </a:r>
+          </a:p>
+          <a:p>
+            <a:r>
+              <a:rPr lang="vi-VN" dirty="0" err="1"/>
+              <a:t>Debug</a:t>
+            </a:r>
+            <a:r>
+              <a:rPr lang="vi-VN" dirty="0"/>
+              <a:t> </a:t>
+            </a:r>
+            <a:r>
+              <a:rPr lang="vi-VN" dirty="0" err="1"/>
+              <a:t>dataset</a:t>
             </a:r>
             <a:endParaRPr lang="en-US" dirty="0"/>
+          </a:p>
+          <a:p>
+            <a:r>
+              <a:rPr lang="vi-VN" dirty="0" err="1"/>
+              <a:t>Ước</a:t>
+            </a:r>
+            <a:r>
+              <a:rPr lang="vi-VN" dirty="0"/>
+              <a:t> </a:t>
+            </a:r>
+            <a:r>
+              <a:rPr lang="vi-VN" dirty="0" err="1"/>
+              <a:t>lượng</a:t>
+            </a:r>
+            <a:r>
+              <a:rPr lang="vi-VN" dirty="0"/>
+              <a:t> chi </a:t>
+            </a:r>
+            <a:r>
+              <a:rPr lang="vi-VN" dirty="0" err="1"/>
+              <a:t>phí</a:t>
+            </a:r>
+            <a:endParaRPr lang="en-US" dirty="0"/>
+          </a:p>
+          <a:p>
+            <a:r>
+              <a:rPr lang="vi-VN" dirty="0" err="1"/>
+              <a:t>Kiểm</a:t>
+            </a:r>
+            <a:r>
+              <a:rPr lang="vi-VN" dirty="0"/>
+              <a:t> tra </a:t>
+            </a:r>
+            <a:r>
+              <a:rPr lang="vi-VN" dirty="0" err="1"/>
+              <a:t>model</a:t>
+            </a:r>
+            <a:r>
+              <a:rPr lang="vi-VN" dirty="0"/>
+              <a:t> </a:t>
+            </a:r>
+            <a:r>
+              <a:rPr lang="vi-VN" dirty="0" err="1"/>
+              <a:t>có</a:t>
+            </a:r>
+            <a:r>
+              <a:rPr lang="vi-VN" dirty="0"/>
+              <a:t> </a:t>
+            </a:r>
+            <a:r>
+              <a:rPr lang="vi-VN" dirty="0" err="1"/>
+              <a:t>học</a:t>
+            </a:r>
+            <a:r>
+              <a:rPr lang="vi-VN" dirty="0"/>
+              <a:t> </a:t>
+            </a:r>
+            <a:r>
+              <a:rPr lang="vi-VN" dirty="0" err="1"/>
+              <a:t>đúng</a:t>
+            </a:r>
+            <a:r>
+              <a:rPr lang="vi-VN" dirty="0"/>
+              <a:t> không</a:t>
+            </a:r>
+            <a:endParaRPr lang="en-US" dirty="0"/>
+          </a:p>
+          <a:p>
+            <a:endParaRPr lang="en-US" dirty="0"/>
+          </a:p>
+          <a:p>
+            <a:pPr marL="0" indent="0">
+              <a:buNone/>
+            </a:pPr>
+            <a:r>
+              <a:rPr lang="en-US" dirty="0"/>
+              <a:t>3. </a:t>
+            </a:r>
+            <a:r>
+              <a:rPr lang="en-US" dirty="0" err="1"/>
+              <a:t>Đánh</a:t>
+            </a:r>
+            <a:r>
+              <a:rPr lang="en-US" dirty="0"/>
+              <a:t> </a:t>
+            </a:r>
+            <a:r>
+              <a:rPr lang="en-US" dirty="0" err="1"/>
+              <a:t>giá</a:t>
+            </a:r>
+            <a:r>
+              <a:rPr lang="en-US" dirty="0"/>
+              <a:t> </a:t>
+            </a:r>
+            <a:r>
+              <a:rPr lang="en-US" dirty="0" err="1"/>
+              <a:t>kết</a:t>
+            </a:r>
+            <a:r>
+              <a:rPr lang="en-US" dirty="0"/>
+              <a:t> </a:t>
+            </a:r>
+            <a:r>
+              <a:rPr lang="en-US" dirty="0" err="1"/>
+              <a:t>quả</a:t>
+            </a:r>
+            <a:r>
+              <a:rPr lang="en-US" dirty="0"/>
+              <a:t> Local</a:t>
+            </a:r>
+          </a:p>
+          <a:p>
+            <a:pPr marL="0" indent="0">
+              <a:buNone/>
+            </a:pPr>
+            <a:r>
+              <a:rPr lang="en-US" dirty="0"/>
+              <a:t>| </a:t>
+            </a:r>
+            <a:r>
+              <a:rPr lang="en-US" dirty="0" err="1"/>
+              <a:t>Nếu</a:t>
+            </a:r>
+            <a:r>
+              <a:rPr lang="en-US" dirty="0"/>
+              <a:t>        | </a:t>
+            </a:r>
+            <a:r>
+              <a:rPr lang="en-US" dirty="0" err="1"/>
+              <a:t>Hành</a:t>
+            </a:r>
+            <a:r>
+              <a:rPr lang="en-US" dirty="0"/>
+              <a:t> </a:t>
+            </a:r>
+            <a:r>
+              <a:rPr lang="en-US" dirty="0" err="1"/>
+              <a:t>động</a:t>
+            </a:r>
+            <a:r>
+              <a:rPr lang="en-US" dirty="0"/>
+              <a:t>                     |</a:t>
+            </a:r>
+          </a:p>
+          <a:p>
+            <a:pPr marL="0" indent="0">
+              <a:buNone/>
+            </a:pPr>
+            <a:r>
+              <a:rPr lang="en-US" dirty="0"/>
+              <a:t>| ---------- | ----------------------------- |</a:t>
+            </a:r>
+          </a:p>
+          <a:p>
+            <a:pPr marL="0" indent="0">
+              <a:buNone/>
+            </a:pPr>
+            <a:r>
+              <a:rPr lang="en-US" dirty="0"/>
+              <a:t>| Output </a:t>
+            </a:r>
+            <a:r>
+              <a:rPr lang="en-US" dirty="0" err="1"/>
+              <a:t>kém</a:t>
+            </a:r>
+            <a:r>
+              <a:rPr lang="en-US" dirty="0"/>
+              <a:t> | </a:t>
+            </a:r>
+            <a:r>
+              <a:rPr lang="en-US" dirty="0" err="1"/>
+              <a:t>Sửa</a:t>
+            </a:r>
+            <a:r>
+              <a:rPr lang="en-US" dirty="0"/>
+              <a:t> dataset                   |</a:t>
+            </a:r>
+          </a:p>
+          <a:p>
+            <a:pPr marL="0" indent="0">
+              <a:buNone/>
+            </a:pPr>
+            <a:r>
+              <a:rPr lang="en-US" dirty="0"/>
+              <a:t>| Format </a:t>
+            </a:r>
+            <a:r>
+              <a:rPr lang="en-US" dirty="0" err="1"/>
+              <a:t>lỗi</a:t>
+            </a:r>
+            <a:r>
+              <a:rPr lang="en-US" dirty="0"/>
+              <a:t> | </a:t>
+            </a:r>
+            <a:r>
+              <a:rPr lang="en-US" dirty="0" err="1"/>
+              <a:t>Sửa</a:t>
+            </a:r>
+            <a:r>
+              <a:rPr lang="en-US" dirty="0"/>
+              <a:t> system prompt             |</a:t>
+            </a:r>
+          </a:p>
+          <a:p>
+            <a:pPr marL="0" indent="0">
+              <a:buNone/>
+            </a:pPr>
+            <a:r>
+              <a:rPr lang="en-US" dirty="0"/>
+              <a:t>| Overfit    | </a:t>
+            </a:r>
+            <a:r>
+              <a:rPr lang="en-US" dirty="0" err="1"/>
+              <a:t>Tăng</a:t>
+            </a:r>
+            <a:r>
+              <a:rPr lang="en-US" dirty="0"/>
+              <a:t> validation / </a:t>
+            </a:r>
+            <a:r>
+              <a:rPr lang="en-US" dirty="0" err="1"/>
+              <a:t>giảm</a:t>
+            </a:r>
+            <a:r>
+              <a:rPr lang="en-US" dirty="0"/>
+              <a:t> epochs |</a:t>
+            </a:r>
           </a:p>
         </p:txBody>
       </p:sp>
     </p:spTree>
     <p:extLst>
       <p:ext uri="{BB962C8B-B14F-4D97-AF65-F5344CB8AC3E}">
-        <p14:creationId xmlns:p14="http://schemas.microsoft.com/office/powerpoint/2010/main" val="3919238436"/>
+        <p14:creationId xmlns:p14="http://schemas.microsoft.com/office/powerpoint/2010/main" val="4070601008"/>
       </p:ext>
     </p:extLst>
   </p:cSld>
@@ -6470,7 +7730,7 @@
         <p:spPr/>
         <p:txBody>
           <a:bodyPr>
-            <a:normAutofit fontScale="55000" lnSpcReduction="20000"/>
+            <a:normAutofit fontScale="92500" lnSpcReduction="20000"/>
           </a:bodyPr>
           <a:lstStyle/>
           <a:p>
@@ -6479,39 +7739,19 @@
             </a:pPr>
             <a:r>
               <a:rPr lang="en-US" dirty="0"/>
-              <a:t>3. </a:t>
-            </a:r>
-            <a:r>
-              <a:rPr lang="en-US" dirty="0" err="1"/>
-              <a:t>Chuẩn</a:t>
-            </a:r>
-            <a:r>
-              <a:rPr lang="en-US" dirty="0"/>
-              <a:t> </a:t>
-            </a:r>
-            <a:r>
-              <a:rPr lang="en-US" dirty="0" err="1"/>
-              <a:t>bị</a:t>
-            </a:r>
-            <a:r>
-              <a:rPr lang="en-US" dirty="0"/>
-              <a:t> </a:t>
-            </a:r>
-            <a:r>
-              <a:rPr lang="en-US" dirty="0" err="1"/>
-              <a:t>dữ</a:t>
-            </a:r>
-            <a:r>
-              <a:rPr lang="en-US" dirty="0"/>
-              <a:t> </a:t>
-            </a:r>
-            <a:r>
-              <a:rPr lang="en-US" dirty="0" err="1"/>
-              <a:t>liệu</a:t>
-            </a:r>
-            <a:endParaRPr lang="en-US" dirty="0"/>
-          </a:p>
-          <a:p>
+              <a:t>4. Fine-Tune Production </a:t>
+            </a:r>
+            <a:r>
+              <a:rPr lang="en-US" dirty="0" err="1"/>
+              <a:t>trên</a:t>
+            </a:r>
+            <a:r>
+              <a:rPr lang="en-US" dirty="0"/>
+              <a:t> Azure</a:t>
+            </a:r>
+          </a:p>
+          <a:p>
+            <a:pPr lvl="1"/>
             <a:r>
               <a:rPr lang="en-US" dirty="0"/>
               <a:t>Training data, Validation data, Testing data (</a:t>
@@ -6577,10 +7817,151 @@
             </a:pPr>
             <a:r>
               <a:rPr lang="en-US" dirty="0"/>
-              <a:t>4. Fine-Tune Local (Experiment Phase)</a:t>
-            </a:r>
-          </a:p>
-          <a:p>
+              <a:t>5. </a:t>
+            </a:r>
+            <a:r>
+              <a:rPr lang="en-US" dirty="0" err="1"/>
+              <a:t>Đánh</a:t>
+            </a:r>
+            <a:r>
+              <a:rPr lang="en-US" dirty="0"/>
+              <a:t> </a:t>
+            </a:r>
+            <a:r>
+              <a:rPr lang="en-US" dirty="0" err="1"/>
+              <a:t>giá</a:t>
+            </a:r>
+            <a:r>
+              <a:rPr lang="en-US" dirty="0"/>
+              <a:t> Production (Offline Evaluation</a:t>
+            </a:r>
+          </a:p>
+          <a:p>
+            <a:pPr lvl="1"/>
+            <a:r>
+              <a:rPr lang="vi-VN" dirty="0"/>
+              <a:t>So </a:t>
+            </a:r>
+            <a:r>
+              <a:rPr lang="vi-VN" dirty="0" err="1"/>
+              <a:t>sánh</a:t>
+            </a:r>
+            <a:r>
+              <a:rPr lang="vi-VN" dirty="0"/>
+              <a:t>:</a:t>
+            </a:r>
+            <a:r>
+              <a:rPr lang="en-US" dirty="0"/>
+              <a:t> </a:t>
+            </a:r>
+            <a:r>
+              <a:rPr lang="vi-VN" dirty="0" err="1"/>
+              <a:t>Base</a:t>
+            </a:r>
+            <a:r>
+              <a:rPr lang="vi-VN" dirty="0"/>
+              <a:t> </a:t>
+            </a:r>
+            <a:r>
+              <a:rPr lang="vi-VN" dirty="0" err="1"/>
+              <a:t>model</a:t>
+            </a:r>
+            <a:r>
+              <a:rPr lang="en-US" dirty="0"/>
+              <a:t> + </a:t>
+            </a:r>
+            <a:r>
+              <a:rPr lang="vi-VN" dirty="0" err="1"/>
+              <a:t>Prompt-only</a:t>
+            </a:r>
+            <a:r>
+              <a:rPr lang="en-US" dirty="0"/>
+              <a:t> </a:t>
+            </a:r>
+            <a:r>
+              <a:rPr lang="en-US" dirty="0" err="1"/>
+              <a:t>và</a:t>
+            </a:r>
+            <a:r>
+              <a:rPr lang="en-US" dirty="0"/>
+              <a:t> </a:t>
+            </a:r>
+            <a:r>
+              <a:rPr lang="vi-VN" dirty="0" err="1"/>
+              <a:t>Fine-tuned</a:t>
+            </a:r>
+            <a:r>
+              <a:rPr lang="vi-VN" dirty="0"/>
+              <a:t> </a:t>
+            </a:r>
+            <a:r>
+              <a:rPr lang="vi-VN" dirty="0" err="1"/>
+              <a:t>model</a:t>
+            </a:r>
+            <a:endParaRPr lang="en-US" dirty="0"/>
+          </a:p>
+          <a:p>
+            <a:pPr lvl="1"/>
+            <a:r>
+              <a:rPr lang="vi-VN" dirty="0" err="1"/>
+              <a:t>Chỉ</a:t>
+            </a:r>
+            <a:r>
+              <a:rPr lang="vi-VN" dirty="0"/>
+              <a:t> </a:t>
+            </a:r>
+            <a:r>
+              <a:rPr lang="vi-VN" dirty="0" err="1"/>
+              <a:t>deploy</a:t>
+            </a:r>
+            <a:r>
+              <a:rPr lang="vi-VN" dirty="0"/>
+              <a:t> </a:t>
+            </a:r>
+            <a:r>
+              <a:rPr lang="vi-VN" dirty="0" err="1"/>
+              <a:t>nếu</a:t>
+            </a:r>
+            <a:r>
+              <a:rPr lang="vi-VN" dirty="0"/>
+              <a:t> </a:t>
+            </a:r>
+            <a:r>
+              <a:rPr lang="vi-VN" dirty="0" err="1"/>
+              <a:t>fine-tune</a:t>
+            </a:r>
+            <a:r>
+              <a:rPr lang="vi-VN" dirty="0"/>
+              <a:t> </a:t>
+            </a:r>
+            <a:r>
+              <a:rPr lang="vi-VN" dirty="0" err="1"/>
+              <a:t>thật</a:t>
+            </a:r>
+            <a:r>
+              <a:rPr lang="vi-VN" dirty="0"/>
+              <a:t> </a:t>
+            </a:r>
+            <a:r>
+              <a:rPr lang="vi-VN" dirty="0" err="1"/>
+              <a:t>sự</a:t>
+            </a:r>
+            <a:r>
+              <a:rPr lang="vi-VN" dirty="0"/>
+              <a:t> </a:t>
+            </a:r>
+            <a:r>
+              <a:rPr lang="vi-VN" dirty="0" err="1"/>
+              <a:t>tốt</a:t>
+            </a:r>
+            <a:r>
+              <a:rPr lang="vi-VN" dirty="0"/>
+              <a:t> hơn.</a:t>
+            </a:r>
+            <a:endParaRPr lang="en-US" dirty="0"/>
+          </a:p>
+          <a:p>
+            <a:pPr lvl="1"/>
             <a:r>
               <a:rPr lang="vi-VN" dirty="0" err="1"/>
               <a:t>Debug</a:t>
@@ -6596,6 +7977,7 @@
             <a:endParaRPr lang="en-US" dirty="0"/>
           </a:p>
           <a:p>
+            <a:pPr lvl="1"/>
             <a:r>
               <a:rPr lang="vi-VN" dirty="0" err="1"/>
               <a:t>Ước</a:t>
@@ -6619,6 +8001,7 @@
             <a:endParaRPr lang="en-US" dirty="0"/>
           </a:p>
           <a:p>
+            <a:pPr lvl="1"/>
             <a:r>
               <a:rPr lang="vi-VN" dirty="0" err="1"/>
               <a:t>Kiểm</a:t>
@@ -6670,156 +8053,22 @@
             </a:pPr>
             <a:r>
               <a:rPr lang="en-US" dirty="0"/>
-              <a:t>5. </a:t>
-            </a:r>
-            <a:r>
-              <a:rPr lang="en-US" dirty="0" err="1"/>
-              <a:t>Đánh</a:t>
-            </a:r>
-            <a:r>
-              <a:rPr lang="en-US" dirty="0"/>
-              <a:t> </a:t>
-            </a:r>
-            <a:r>
-              <a:rPr lang="en-US" dirty="0" err="1"/>
-              <a:t>giá</a:t>
-            </a:r>
-            <a:r>
-              <a:rPr lang="en-US" dirty="0"/>
-              <a:t> </a:t>
-            </a:r>
-            <a:r>
-              <a:rPr lang="en-US" dirty="0" err="1"/>
-              <a:t>kết</a:t>
-            </a:r>
-            <a:r>
-              <a:rPr lang="en-US" dirty="0"/>
-              <a:t> </a:t>
-            </a:r>
-            <a:r>
-              <a:rPr lang="en-US" dirty="0" err="1"/>
-              <a:t>quả</a:t>
-            </a:r>
-            <a:r>
-              <a:rPr lang="en-US" dirty="0"/>
-              <a:t> Local</a:t>
-            </a:r>
-          </a:p>
-          <a:p>
-            <a:pPr marL="0" indent="0">
-              <a:buNone/>
-            </a:pPr>
-            <a:r>
-              <a:rPr lang="en-US" dirty="0"/>
-              <a:t>| </a:t>
-            </a:r>
-            <a:r>
-              <a:rPr lang="en-US" dirty="0" err="1"/>
-              <a:t>Nếu</a:t>
-            </a:r>
-            <a:r>
-              <a:rPr lang="en-US" dirty="0"/>
-              <a:t>        | </a:t>
-            </a:r>
-            <a:r>
-              <a:rPr lang="en-US" dirty="0" err="1"/>
-              <a:t>Hành</a:t>
-            </a:r>
-            <a:r>
-              <a:rPr lang="en-US" dirty="0"/>
-              <a:t> </a:t>
-            </a:r>
-            <a:r>
-              <a:rPr lang="en-US" dirty="0" err="1"/>
-              <a:t>động</a:t>
-            </a:r>
-            <a:r>
-              <a:rPr lang="en-US" dirty="0"/>
-              <a:t>                     |</a:t>
-            </a:r>
-          </a:p>
-          <a:p>
-            <a:pPr marL="0" indent="0">
-              <a:buNone/>
-            </a:pPr>
-            <a:r>
-              <a:rPr lang="en-US" dirty="0"/>
-              <a:t>| ---------- | ----------------------------- |</a:t>
-            </a:r>
-          </a:p>
-          <a:p>
-            <a:pPr marL="0" indent="0">
-              <a:buNone/>
-            </a:pPr>
-            <a:r>
-              <a:rPr lang="en-US" dirty="0"/>
-              <a:t>| Output </a:t>
-            </a:r>
-            <a:r>
-              <a:rPr lang="en-US" dirty="0" err="1"/>
-              <a:t>kém</a:t>
-            </a:r>
-            <a:r>
-              <a:rPr lang="en-US" dirty="0"/>
-              <a:t> | </a:t>
-            </a:r>
-            <a:r>
-              <a:rPr lang="en-US" dirty="0" err="1"/>
-              <a:t>Sửa</a:t>
-            </a:r>
-            <a:r>
-              <a:rPr lang="en-US" dirty="0"/>
-              <a:t> dataset                   |</a:t>
-            </a:r>
-          </a:p>
-          <a:p>
-            <a:pPr marL="0" indent="0">
-              <a:buNone/>
-            </a:pPr>
-            <a:r>
-              <a:rPr lang="en-US" dirty="0"/>
-              <a:t>| Format </a:t>
-            </a:r>
-            <a:r>
-              <a:rPr lang="en-US" dirty="0" err="1"/>
-              <a:t>lỗi</a:t>
-            </a:r>
-            <a:r>
-              <a:rPr lang="en-US" dirty="0"/>
-              <a:t> | </a:t>
-            </a:r>
-            <a:r>
-              <a:rPr lang="en-US" dirty="0" err="1"/>
-              <a:t>Sửa</a:t>
-            </a:r>
-            <a:r>
-              <a:rPr lang="en-US" dirty="0"/>
-              <a:t> system prompt             |</a:t>
-            </a:r>
-          </a:p>
-          <a:p>
-            <a:pPr marL="0" indent="0">
-              <a:buNone/>
-            </a:pPr>
-            <a:r>
-              <a:rPr lang="en-US" dirty="0"/>
-              <a:t>| Overfit    | </a:t>
-            </a:r>
-            <a:r>
-              <a:rPr lang="en-US" dirty="0" err="1"/>
-              <a:t>Tăng</a:t>
-            </a:r>
-            <a:r>
-              <a:rPr lang="en-US" dirty="0"/>
-              <a:t> validation / </a:t>
-            </a:r>
-            <a:r>
-              <a:rPr lang="en-US" dirty="0" err="1"/>
-              <a:t>giảm</a:t>
-            </a:r>
-            <a:r>
-              <a:rPr lang="en-US" dirty="0"/>
-              <a:t> epochs |</a:t>
+              <a:t>6. Deploy + Monitor (Production)</a:t>
+            </a:r>
+          </a:p>
+          <a:p>
+            <a:pPr lvl="1"/>
+            <a:r>
+              <a:rPr lang="en-US" dirty="0"/>
+              <a:t>Monitor hallucination, Monitor drift, Thu </a:t>
+            </a:r>
+            <a:r>
+              <a:rPr lang="en-US" dirty="0" err="1"/>
+              <a:t>thập</a:t>
+            </a:r>
+            <a:r>
+              <a:rPr lang="en-US" dirty="0"/>
+              <a:t> feedback user</a:t>
             </a:r>
           </a:p>
         </p:txBody>
@@ -6827,7 +8076,7 @@
     </p:spTree>
     <p:extLst>
       <p:ext uri="{BB962C8B-B14F-4D97-AF65-F5344CB8AC3E}">
-        <p14:creationId xmlns:p14="http://schemas.microsoft.com/office/powerpoint/2010/main" val="4070601008"/>
+        <p14:creationId xmlns:p14="http://schemas.microsoft.com/office/powerpoint/2010/main" val="1716746187"/>
       </p:ext>
     </p:extLst>
   </p:cSld>
@@ -7214,13 +8463,61 @@
               <a:rPr lang="vi-VN" dirty="0"/>
               <a:t>: </a:t>
             </a:r>
-            <a:r>
-              <a:rPr lang="vi-VN" dirty="0" err="1"/>
-              <a:t>Mục</a:t>
-            </a:r>
-            <a:r>
-              <a:rPr lang="vi-VN" dirty="0"/>
-              <a:t> tiêu </a:t>
+            <a:endParaRPr lang="en-US" dirty="0"/>
+          </a:p>
+          <a:p>
+            <a:pPr lvl="2"/>
+            <a:r>
+              <a:rPr lang="en-US" dirty="0"/>
+              <a:t>G</a:t>
+            </a:r>
+            <a:r>
+              <a:rPr lang="vi-VN" dirty="0" err="1"/>
+              <a:t>iúp</a:t>
+            </a:r>
+            <a:r>
+              <a:rPr lang="vi-VN" dirty="0"/>
+              <a:t> mô </a:t>
+            </a:r>
+            <a:r>
+              <a:rPr lang="vi-VN" dirty="0" err="1"/>
+              <a:t>hình</a:t>
+            </a:r>
+            <a:r>
+              <a:rPr lang="vi-VN" dirty="0"/>
+              <a:t> </a:t>
+            </a:r>
+            <a:r>
+              <a:rPr lang="vi-VN" dirty="0" err="1"/>
+              <a:t>hiểu</a:t>
+            </a:r>
+            <a:r>
+              <a:rPr lang="vi-VN" dirty="0"/>
+              <a:t> </a:t>
+            </a:r>
+            <a:r>
+              <a:rPr lang="vi-VN" dirty="0" err="1"/>
+              <a:t>các</a:t>
+            </a:r>
+            <a:r>
+              <a:rPr lang="vi-VN" dirty="0"/>
+              <a:t> nguyên </a:t>
+            </a:r>
+            <a:r>
+              <a:rPr lang="vi-VN" dirty="0" err="1"/>
+              <a:t>tắc</a:t>
+            </a:r>
+            <a:r>
+              <a:rPr lang="vi-VN" dirty="0"/>
+              <a:t> cơ </a:t>
+            </a:r>
+            <a:r>
+              <a:rPr lang="vi-VN" dirty="0" err="1"/>
+              <a:t>bản</a:t>
+            </a:r>
+            <a:r>
+              <a:rPr lang="vi-VN" dirty="0"/>
+              <a:t> </a:t>
             </a:r>
             <a:r>
               <a:rPr lang="vi-VN" dirty="0" err="1"/>
@@ -7228,86 +8525,6 @@
             </a:r>
             <a:r>
               <a:rPr lang="vi-VN" dirty="0"/>
-              <a:t> giai </a:t>
-            </a:r>
-            <a:r>
-              <a:rPr lang="vi-VN" dirty="0" err="1"/>
-              <a:t>đoạn</a:t>
-            </a:r>
-            <a:r>
-              <a:rPr lang="vi-VN" dirty="0"/>
-              <a:t> </a:t>
-            </a:r>
-            <a:r>
-              <a:rPr lang="vi-VN" dirty="0" err="1"/>
-              <a:t>pre-training</a:t>
-            </a:r>
-            <a:r>
-              <a:rPr lang="vi-VN" dirty="0"/>
-              <a:t> </a:t>
-            </a:r>
-            <a:r>
-              <a:rPr lang="vi-VN" dirty="0" err="1"/>
-              <a:t>là</a:t>
-            </a:r>
-            <a:r>
-              <a:rPr lang="vi-VN" dirty="0"/>
-              <a:t> </a:t>
-            </a:r>
-            <a:r>
-              <a:rPr lang="vi-VN" dirty="0" err="1"/>
-              <a:t>giúp</a:t>
-            </a:r>
-            <a:r>
-              <a:rPr lang="vi-VN" dirty="0"/>
-              <a:t> mô </a:t>
-            </a:r>
-            <a:r>
-              <a:rPr lang="vi-VN" dirty="0" err="1"/>
-              <a:t>hình</a:t>
-            </a:r>
-            <a:r>
-              <a:rPr lang="vi-VN" dirty="0"/>
-              <a:t> </a:t>
-            </a:r>
-            <a:r>
-              <a:rPr lang="vi-VN" dirty="0" err="1"/>
-              <a:t>hiểu</a:t>
-            </a:r>
-            <a:r>
-              <a:rPr lang="vi-VN" dirty="0"/>
-              <a:t> </a:t>
-            </a:r>
-            <a:r>
-              <a:rPr lang="vi-VN" dirty="0" err="1"/>
-              <a:t>các</a:t>
-            </a:r>
-            <a:r>
-              <a:rPr lang="vi-VN" dirty="0"/>
-              <a:t> nguyên </a:t>
-            </a:r>
-            <a:r>
-              <a:rPr lang="vi-VN" dirty="0" err="1"/>
-              <a:t>tắc</a:t>
-            </a:r>
-            <a:r>
-              <a:rPr lang="vi-VN" dirty="0"/>
-              <a:t> cơ </a:t>
-            </a:r>
-            <a:r>
-              <a:rPr lang="vi-VN" dirty="0" err="1"/>
-              <a:t>bản</a:t>
-            </a:r>
-            <a:r>
-              <a:rPr lang="vi-VN" dirty="0"/>
-              <a:t> </a:t>
-            </a:r>
-            <a:r>
-              <a:rPr lang="vi-VN" dirty="0" err="1"/>
-              <a:t>của</a:t>
-            </a:r>
-            <a:r>
-              <a:rPr lang="vi-VN" dirty="0"/>
               <a:t> ngôn </a:t>
             </a:r>
             <a:r>
@@ -7378,21 +8595,17 @@
               <a:rPr lang="vi-VN" dirty="0" err="1"/>
               <a:t>pháp</a:t>
             </a:r>
-            <a:r>
-              <a:rPr lang="vi-VN" dirty="0"/>
-              <a:t> </a:t>
-            </a:r>
-            <a:r>
-              <a:rPr lang="vi-VN" dirty="0" err="1"/>
-              <a:t>và</a:t>
-            </a:r>
-            <a:r>
-              <a:rPr lang="vi-VN" dirty="0"/>
-              <a:t> </a:t>
-            </a:r>
-            <a:r>
-              <a:rPr lang="vi-VN" dirty="0" err="1"/>
-              <a:t>tiếp</a:t>
+            <a:endParaRPr lang="en-US" dirty="0"/>
+          </a:p>
+          <a:p>
+            <a:pPr lvl="2"/>
+            <a:r>
+              <a:rPr lang="en-US" dirty="0"/>
+              <a:t>T</a:t>
+            </a:r>
+            <a:r>
+              <a:rPr lang="vi-VN" dirty="0" err="1"/>
+              <a:t>iếp</a:t>
             </a:r>
             <a:r>
               <a:rPr lang="vi-VN" dirty="0"/>
@@ -7822,8 +9035,52 @@
           <a:lstStyle/>
           <a:p>
             <a:r>
-              <a:rPr lang="en-US" dirty="0"/>
-              <a:t>Flow Fine-Tune</a:t>
+              <a:rPr lang="en-US" dirty="0" err="1"/>
+              <a:t>Các</a:t>
+            </a:r>
+            <a:r>
+              <a:rPr lang="en-US" dirty="0"/>
+              <a:t> chi </a:t>
+            </a:r>
+            <a:r>
+              <a:rPr lang="en-US" dirty="0" err="1"/>
+              <a:t>phí</a:t>
+            </a:r>
+            <a:r>
+              <a:rPr lang="en-US" dirty="0"/>
+              <a:t> </a:t>
+            </a:r>
+            <a:r>
+              <a:rPr lang="en-US" dirty="0" err="1"/>
+              <a:t>khi</a:t>
+            </a:r>
+            <a:r>
+              <a:rPr lang="en-US" dirty="0"/>
+              <a:t> </a:t>
+            </a:r>
+            <a:r>
+              <a:rPr lang="en-US" dirty="0" err="1"/>
+              <a:t>triển</a:t>
+            </a:r>
+            <a:r>
+              <a:rPr lang="en-US" dirty="0"/>
+              <a:t> </a:t>
+            </a:r>
+            <a:r>
+              <a:rPr lang="en-US" dirty="0" err="1"/>
+              <a:t>khai</a:t>
+            </a:r>
+            <a:r>
+              <a:rPr lang="en-US" dirty="0"/>
+              <a:t> Fine-Tune </a:t>
+            </a:r>
+            <a:r>
+              <a:rPr lang="en-US" dirty="0" err="1"/>
+              <a:t>trên</a:t>
+            </a:r>
+            <a:r>
+              <a:rPr lang="en-US" dirty="0"/>
+              <a:t> Azure</a:t>
             </a:r>
           </a:p>
         </p:txBody>
@@ -7847,16 +9104,195 @@
         <p:spPr/>
         <p:txBody>
           <a:bodyPr>
-            <a:normAutofit fontScale="92500" lnSpcReduction="20000"/>
+            <a:normAutofit/>
           </a:bodyPr>
           <a:lstStyle/>
           <a:p>
-            <a:pPr marL="0" indent="0">
-              <a:buNone/>
+            <a:pPr marL="514350" indent="-514350">
+              <a:buAutoNum type="arabicPeriod"/>
             </a:pPr>
             <a:r>
               <a:rPr lang="en-US" dirty="0"/>
-              <a:t>3. Fine-Tune Production </a:t>
+              <a:t>Chi </a:t>
+            </a:r>
+            <a:r>
+              <a:rPr lang="en-US" dirty="0" err="1"/>
+              <a:t>phí</a:t>
+            </a:r>
+            <a:r>
+              <a:rPr lang="en-US" dirty="0"/>
+              <a:t> training local</a:t>
+            </a:r>
+          </a:p>
+          <a:p>
+            <a:pPr lvl="1"/>
+            <a:r>
+              <a:rPr lang="en-US" dirty="0"/>
+              <a:t>| </a:t>
+            </a:r>
+            <a:r>
+              <a:rPr lang="en-US" dirty="0" err="1"/>
+              <a:t>Công</a:t>
+            </a:r>
+            <a:r>
+              <a:rPr lang="en-US" dirty="0"/>
+              <a:t> </a:t>
+            </a:r>
+            <a:r>
+              <a:rPr lang="en-US" dirty="0" err="1"/>
+              <a:t>việc</a:t>
+            </a:r>
+            <a:r>
+              <a:rPr lang="en-US" dirty="0"/>
+              <a:t>         | Cost     |</a:t>
+            </a:r>
+          </a:p>
+          <a:p>
+            <a:pPr lvl="1"/>
+            <a:r>
+              <a:rPr lang="en-US" dirty="0"/>
+              <a:t>| ----------------- | -------- |</a:t>
+            </a:r>
+          </a:p>
+          <a:p>
+            <a:pPr lvl="1"/>
+            <a:r>
+              <a:rPr lang="en-US" dirty="0"/>
+              <a:t>| </a:t>
+            </a:r>
+            <a:r>
+              <a:rPr lang="en-US" dirty="0" err="1"/>
+              <a:t>Chuẩn</a:t>
+            </a:r>
+            <a:r>
+              <a:rPr lang="en-US" dirty="0"/>
+              <a:t> </a:t>
+            </a:r>
+            <a:r>
+              <a:rPr lang="en-US" dirty="0" err="1"/>
+              <a:t>bị</a:t>
+            </a:r>
+            <a:r>
+              <a:rPr lang="en-US" dirty="0"/>
+              <a:t> data        | </a:t>
+            </a:r>
+            <a:r>
+              <a:rPr lang="en-US" dirty="0" err="1"/>
+              <a:t>Nhân</a:t>
+            </a:r>
+            <a:r>
+              <a:rPr lang="en-US" dirty="0"/>
+              <a:t> </a:t>
+            </a:r>
+            <a:r>
+              <a:rPr lang="en-US" dirty="0" err="1"/>
+              <a:t>lực</a:t>
+            </a:r>
+            <a:r>
+              <a:rPr lang="en-US" dirty="0"/>
+              <a:t> |</a:t>
+            </a:r>
+          </a:p>
+          <a:p>
+            <a:pPr lvl="1"/>
+            <a:r>
+              <a:rPr lang="en-US" dirty="0"/>
+              <a:t>| Clean data        | </a:t>
+            </a:r>
+            <a:r>
+              <a:rPr lang="en-US" dirty="0" err="1"/>
+              <a:t>Nhân</a:t>
+            </a:r>
+            <a:r>
+              <a:rPr lang="en-US" dirty="0"/>
+              <a:t> </a:t>
+            </a:r>
+            <a:r>
+              <a:rPr lang="en-US" dirty="0" err="1"/>
+              <a:t>lực</a:t>
+            </a:r>
+            <a:r>
+              <a:rPr lang="en-US" dirty="0"/>
+              <a:t> |</a:t>
+            </a:r>
+          </a:p>
+          <a:p>
+            <a:pPr lvl="1"/>
+            <a:r>
+              <a:rPr lang="en-US" dirty="0"/>
+              <a:t>| Review answer     | </a:t>
+            </a:r>
+            <a:r>
+              <a:rPr lang="en-US" dirty="0" err="1"/>
+              <a:t>Nhân</a:t>
+            </a:r>
+            <a:r>
+              <a:rPr lang="en-US" dirty="0"/>
+              <a:t> </a:t>
+            </a:r>
+            <a:r>
+              <a:rPr lang="en-US" dirty="0" err="1"/>
+              <a:t>lực</a:t>
+            </a:r>
+            <a:r>
+              <a:rPr lang="en-US" dirty="0"/>
+              <a:t> |</a:t>
+            </a:r>
+          </a:p>
+          <a:p>
+            <a:pPr lvl="1"/>
+            <a:r>
+              <a:rPr lang="en-US" dirty="0"/>
+              <a:t>| Fix hallucination | </a:t>
+            </a:r>
+            <a:r>
+              <a:rPr lang="en-US" dirty="0" err="1"/>
+              <a:t>Nhân</a:t>
+            </a:r>
+            <a:r>
+              <a:rPr lang="en-US" dirty="0"/>
+              <a:t> </a:t>
+            </a:r>
+            <a:r>
+              <a:rPr lang="en-US" dirty="0" err="1"/>
+              <a:t>lực</a:t>
+            </a:r>
+            <a:r>
+              <a:rPr lang="en-US" dirty="0"/>
+              <a:t> |</a:t>
+            </a:r>
+          </a:p>
+          <a:p>
+            <a:pPr marL="514350" indent="-514350">
+              <a:buAutoNum type="arabicPeriod"/>
+            </a:pPr>
+            <a:r>
+              <a:rPr lang="en-US" dirty="0"/>
+              <a:t>Chi </a:t>
+            </a:r>
+            <a:r>
+              <a:rPr lang="en-US" dirty="0" err="1"/>
+              <a:t>phí</a:t>
+            </a:r>
+            <a:r>
+              <a:rPr lang="en-US" dirty="0"/>
+              <a:t> </a:t>
+            </a:r>
+            <a:r>
+              <a:rPr lang="en-US" dirty="0" err="1"/>
+              <a:t>triển</a:t>
+            </a:r>
+            <a:r>
+              <a:rPr lang="en-US" dirty="0"/>
+              <a:t> </a:t>
+            </a:r>
+            <a:r>
+              <a:rPr lang="en-US" dirty="0" err="1"/>
+              <a:t>khai</a:t>
+            </a:r>
+            <a:r>
+              <a:rPr lang="en-US" dirty="0"/>
+              <a:t> </a:t>
             </a:r>
             <a:r>
               <a:rPr lang="en-US" dirty="0" err="1"/>
@@ -7871,321 +9307,23 @@
             <a:pPr lvl="1"/>
             <a:r>
               <a:rPr lang="en-US" dirty="0"/>
-              <a:t>Training data, Validation data, Testing data (</a:t>
-            </a:r>
-            <a:r>
-              <a:rPr lang="en-US" dirty="0" err="1"/>
-              <a:t>khuyến</a:t>
-            </a:r>
-            <a:r>
-              <a:rPr lang="en-US" dirty="0"/>
-              <a:t> </a:t>
-            </a:r>
-            <a:r>
-              <a:rPr lang="en-US" dirty="0" err="1"/>
-              <a:t>khích</a:t>
-            </a:r>
-            <a:r>
-              <a:rPr lang="en-US" dirty="0"/>
-              <a:t> them, </a:t>
-            </a:r>
-            <a:r>
-              <a:rPr lang="en-US" dirty="0" err="1"/>
-              <a:t>đánh</a:t>
-            </a:r>
-            <a:r>
-              <a:rPr lang="en-US" dirty="0"/>
-              <a:t> </a:t>
-            </a:r>
-            <a:r>
-              <a:rPr lang="en-US" dirty="0" err="1"/>
-              <a:t>giá</a:t>
-            </a:r>
-            <a:r>
-              <a:rPr lang="en-US" dirty="0"/>
-              <a:t> </a:t>
-            </a:r>
-            <a:r>
-              <a:rPr lang="en-US" dirty="0" err="1"/>
-              <a:t>trung</a:t>
-            </a:r>
-            <a:r>
-              <a:rPr lang="en-US" dirty="0"/>
-              <a:t> </a:t>
-            </a:r>
-            <a:r>
-              <a:rPr lang="en-US" dirty="0" err="1"/>
-              <a:t>lập</a:t>
-            </a:r>
-            <a:r>
-              <a:rPr lang="en-US" dirty="0"/>
-              <a:t>)</a:t>
-            </a:r>
-          </a:p>
-          <a:p>
-            <a:pPr marL="0" indent="0">
-              <a:buNone/>
-            </a:pPr>
-            <a:endParaRPr lang="en-US" dirty="0"/>
-          </a:p>
-          <a:p>
-            <a:pPr marL="0" indent="0">
-              <a:buNone/>
-            </a:pPr>
-            <a:r>
-              <a:rPr lang="en-US" dirty="0"/>
-              <a:t>4. </a:t>
-            </a:r>
-            <a:r>
-              <a:rPr lang="en-US" dirty="0" err="1"/>
-              <a:t>Đánh</a:t>
-            </a:r>
-            <a:r>
-              <a:rPr lang="en-US" dirty="0"/>
-              <a:t> </a:t>
-            </a:r>
-            <a:r>
-              <a:rPr lang="en-US" dirty="0" err="1"/>
-              <a:t>giá</a:t>
-            </a:r>
-            <a:r>
-              <a:rPr lang="en-US" dirty="0"/>
-              <a:t> Production (Offline Evaluation</a:t>
-            </a:r>
-          </a:p>
-          <a:p>
-            <a:pPr lvl="1"/>
-            <a:r>
-              <a:rPr lang="vi-VN" dirty="0"/>
-              <a:t>So </a:t>
-            </a:r>
-            <a:r>
-              <a:rPr lang="vi-VN" dirty="0" err="1"/>
-              <a:t>sánh</a:t>
-            </a:r>
-            <a:r>
-              <a:rPr lang="vi-VN" dirty="0"/>
-              <a:t>:</a:t>
-            </a:r>
-            <a:r>
-              <a:rPr lang="en-US" dirty="0"/>
-              <a:t> </a:t>
-            </a:r>
-            <a:r>
-              <a:rPr lang="vi-VN" dirty="0" err="1"/>
-              <a:t>Base</a:t>
-            </a:r>
-            <a:r>
-              <a:rPr lang="vi-VN" dirty="0"/>
-              <a:t> </a:t>
-            </a:r>
-            <a:r>
-              <a:rPr lang="vi-VN" dirty="0" err="1"/>
-              <a:t>model</a:t>
-            </a:r>
-            <a:r>
-              <a:rPr lang="en-US" dirty="0"/>
-              <a:t> + </a:t>
-            </a:r>
-            <a:r>
-              <a:rPr lang="vi-VN" dirty="0" err="1"/>
-              <a:t>Prompt-only</a:t>
-            </a:r>
-            <a:r>
-              <a:rPr lang="en-US" dirty="0"/>
-              <a:t> </a:t>
-            </a:r>
-            <a:r>
-              <a:rPr lang="en-US" dirty="0" err="1"/>
-              <a:t>và</a:t>
-            </a:r>
-            <a:r>
-              <a:rPr lang="en-US" dirty="0"/>
-              <a:t> </a:t>
-            </a:r>
-            <a:r>
-              <a:rPr lang="vi-VN" dirty="0" err="1"/>
-              <a:t>Fine-tuned</a:t>
-            </a:r>
-            <a:r>
-              <a:rPr lang="vi-VN" dirty="0"/>
-              <a:t> </a:t>
-            </a:r>
-            <a:r>
-              <a:rPr lang="vi-VN" dirty="0" err="1"/>
-              <a:t>model</a:t>
-            </a:r>
-            <a:endParaRPr lang="en-US" dirty="0"/>
-          </a:p>
-          <a:p>
-            <a:pPr lvl="1"/>
-            <a:r>
-              <a:rPr lang="vi-VN" dirty="0" err="1"/>
-              <a:t>Chỉ</a:t>
-            </a:r>
-            <a:r>
-              <a:rPr lang="vi-VN" dirty="0"/>
-              <a:t> </a:t>
-            </a:r>
-            <a:r>
-              <a:rPr lang="vi-VN" dirty="0" err="1"/>
-              <a:t>deploy</a:t>
-            </a:r>
-            <a:r>
-              <a:rPr lang="vi-VN" dirty="0"/>
-              <a:t> </a:t>
-            </a:r>
-            <a:r>
-              <a:rPr lang="vi-VN" dirty="0" err="1"/>
-              <a:t>nếu</a:t>
-            </a:r>
-            <a:r>
-              <a:rPr lang="vi-VN" dirty="0"/>
-              <a:t> </a:t>
-            </a:r>
-            <a:r>
-              <a:rPr lang="vi-VN" dirty="0" err="1"/>
-              <a:t>fine-tune</a:t>
-            </a:r>
-            <a:r>
-              <a:rPr lang="vi-VN" dirty="0"/>
-              <a:t> </a:t>
-            </a:r>
-            <a:r>
-              <a:rPr lang="vi-VN" dirty="0" err="1"/>
-              <a:t>thật</a:t>
-            </a:r>
-            <a:r>
-              <a:rPr lang="vi-VN" dirty="0"/>
-              <a:t> </a:t>
-            </a:r>
-            <a:r>
-              <a:rPr lang="vi-VN" dirty="0" err="1"/>
-              <a:t>sự</a:t>
-            </a:r>
-            <a:r>
-              <a:rPr lang="vi-VN" dirty="0"/>
-              <a:t> </a:t>
-            </a:r>
-            <a:r>
-              <a:rPr lang="vi-VN" dirty="0" err="1"/>
-              <a:t>tốt</a:t>
-            </a:r>
-            <a:r>
-              <a:rPr lang="vi-VN" dirty="0"/>
-              <a:t> hơn.</a:t>
-            </a:r>
-            <a:endParaRPr lang="en-US" dirty="0"/>
-          </a:p>
-          <a:p>
-            <a:pPr lvl="1"/>
-            <a:r>
-              <a:rPr lang="vi-VN" dirty="0" err="1"/>
-              <a:t>Debug</a:t>
-            </a:r>
-            <a:r>
-              <a:rPr lang="vi-VN" dirty="0"/>
-              <a:t> </a:t>
-            </a:r>
-            <a:r>
-              <a:rPr lang="vi-VN" dirty="0" err="1"/>
-              <a:t>dataset</a:t>
-            </a:r>
-            <a:endParaRPr lang="en-US" dirty="0"/>
-          </a:p>
-          <a:p>
-            <a:pPr lvl="1"/>
-            <a:r>
-              <a:rPr lang="vi-VN" dirty="0" err="1"/>
-              <a:t>Ước</a:t>
-            </a:r>
-            <a:r>
-              <a:rPr lang="vi-VN" dirty="0"/>
-              <a:t> </a:t>
-            </a:r>
-            <a:r>
-              <a:rPr lang="vi-VN" dirty="0" err="1"/>
-              <a:t>lượng</a:t>
-            </a:r>
-            <a:r>
-              <a:rPr lang="vi-VN" dirty="0"/>
-              <a:t> chi </a:t>
-            </a:r>
-            <a:r>
-              <a:rPr lang="vi-VN" dirty="0" err="1"/>
+              <a:t>Chi </a:t>
+            </a:r>
+            <a:r>
+              <a:rPr lang="en-US" dirty="0" err="1"/>
               <a:t>phí</a:t>
             </a:r>
-            <a:endParaRPr lang="en-US" dirty="0"/>
-          </a:p>
-          <a:p>
-            <a:pPr lvl="1"/>
-            <a:r>
-              <a:rPr lang="vi-VN" dirty="0" err="1"/>
-              <a:t>Kiểm</a:t>
-            </a:r>
-            <a:r>
-              <a:rPr lang="vi-VN" dirty="0"/>
-              <a:t> tra </a:t>
-            </a:r>
-            <a:r>
-              <a:rPr lang="vi-VN" dirty="0" err="1"/>
-              <a:t>model</a:t>
-            </a:r>
-            <a:r>
-              <a:rPr lang="vi-VN" dirty="0"/>
-              <a:t> </a:t>
-            </a:r>
-            <a:r>
-              <a:rPr lang="vi-VN" dirty="0" err="1"/>
-              <a:t>có</a:t>
-            </a:r>
-            <a:r>
-              <a:rPr lang="vi-VN" dirty="0"/>
-              <a:t> </a:t>
-            </a:r>
-            <a:r>
-              <a:rPr lang="vi-VN" dirty="0" err="1"/>
-              <a:t>học</a:t>
-            </a:r>
-            <a:r>
-              <a:rPr lang="vi-VN" dirty="0"/>
-              <a:t> </a:t>
-            </a:r>
-            <a:r>
-              <a:rPr lang="vi-VN" dirty="0" err="1"/>
-              <a:t>đúng</a:t>
-            </a:r>
-            <a:r>
-              <a:rPr lang="vi-VN" dirty="0"/>
-              <a:t> không</a:t>
-            </a:r>
-            <a:endParaRPr lang="en-US" dirty="0"/>
-          </a:p>
-          <a:p>
-            <a:endParaRPr lang="en-US" dirty="0"/>
-          </a:p>
-          <a:p>
-            <a:pPr marL="0" indent="0">
-              <a:buNone/>
-            </a:pPr>
-            <a:r>
-              <a:rPr lang="en-US" dirty="0"/>
-              <a:t>5. Deploy + Monitor (Production)</a:t>
-            </a:r>
-          </a:p>
-          <a:p>
-            <a:pPr lvl="1"/>
-            <a:r>
-              <a:rPr lang="en-US" dirty="0"/>
-              <a:t>Monitor hallucination, Monitor drift, Thu </a:t>
-            </a:r>
-            <a:r>
-              <a:rPr lang="en-US" dirty="0" err="1"/>
-              <a:t>thập</a:t>
-            </a:r>
-            <a:r>
-              <a:rPr lang="en-US" dirty="0"/>
-              <a:t> feedback user</a:t>
+            <a:r>
+              <a:rPr lang="en-US" dirty="0"/>
+              <a:t> Fine-Tune </a:t>
+            </a:r>
+            <a:r>
+              <a:rPr lang="en-US" dirty="0" err="1"/>
+              <a:t>trên</a:t>
+            </a:r>
+            <a:r>
+              <a:rPr lang="en-US" dirty="0"/>
+              <a:t> Azure = Training + Storage + Inference + Operations</a:t>
             </a:r>
           </a:p>
         </p:txBody>
@@ -8193,7 +9331,7 @@
     </p:spTree>
     <p:extLst>
       <p:ext uri="{BB962C8B-B14F-4D97-AF65-F5344CB8AC3E}">
-        <p14:creationId xmlns:p14="http://schemas.microsoft.com/office/powerpoint/2010/main" val="1716746187"/>
+        <p14:creationId xmlns:p14="http://schemas.microsoft.com/office/powerpoint/2010/main" val="229429348"/>
       </p:ext>
     </p:extLst>
   </p:cSld>
@@ -8311,234 +9449,444 @@
         <p:spPr/>
         <p:txBody>
           <a:bodyPr>
-            <a:normAutofit/>
+            <a:normAutofit fontScale="92500" lnSpcReduction="20000"/>
           </a:bodyPr>
           <a:lstStyle/>
           <a:p>
+            <a:pPr marL="0" indent="0">
+              <a:buNone/>
+            </a:pPr>
+            <a:r>
+              <a:rPr lang="en-US" dirty="0"/>
+              <a:t>Chi </a:t>
+            </a:r>
+            <a:r>
+              <a:rPr lang="en-US" dirty="0" err="1"/>
+              <a:t>phí</a:t>
+            </a:r>
+            <a:r>
+              <a:rPr lang="en-US" dirty="0"/>
+              <a:t> </a:t>
+            </a:r>
+            <a:r>
+              <a:rPr lang="en-US" dirty="0" err="1"/>
+              <a:t>triển</a:t>
+            </a:r>
+            <a:r>
+              <a:rPr lang="en-US" dirty="0"/>
+              <a:t> </a:t>
+            </a:r>
+            <a:r>
+              <a:rPr lang="en-US" dirty="0" err="1"/>
+              <a:t>khai</a:t>
+            </a:r>
+            <a:r>
+              <a:rPr lang="en-US" dirty="0"/>
+              <a:t> </a:t>
+            </a:r>
+            <a:r>
+              <a:rPr lang="en-US" dirty="0" err="1"/>
+              <a:t>trên</a:t>
+            </a:r>
+            <a:r>
+              <a:rPr lang="en-US" dirty="0"/>
+              <a:t> Azure</a:t>
+            </a:r>
+          </a:p>
+          <a:p>
             <a:pPr marL="514350" indent="-514350">
+              <a:buFont typeface="+mj-lt"/>
               <a:buAutoNum type="arabicPeriod"/>
             </a:pPr>
             <a:r>
+              <a:rPr lang="it-IT" dirty="0"/>
+              <a:t>Chi phí Compute Training (Lớn nhất)</a:t>
+            </a:r>
+          </a:p>
+          <a:p>
+            <a:pPr lvl="1"/>
+            <a:r>
+              <a:rPr lang="vi-VN" dirty="0" err="1"/>
+              <a:t>Bạn</a:t>
+            </a:r>
+            <a:r>
+              <a:rPr lang="vi-VN" dirty="0"/>
+              <a:t> </a:t>
+            </a:r>
+            <a:r>
+              <a:rPr lang="vi-VN" dirty="0" err="1"/>
+              <a:t>trả</a:t>
+            </a:r>
+            <a:r>
+              <a:rPr lang="vi-VN" dirty="0"/>
+              <a:t> </a:t>
+            </a:r>
+            <a:r>
+              <a:rPr lang="vi-VN" dirty="0" err="1"/>
+              <a:t>tiền</a:t>
+            </a:r>
+            <a:r>
+              <a:rPr lang="vi-VN" dirty="0"/>
+              <a:t> cho:</a:t>
+            </a:r>
+            <a:endParaRPr lang="en-US" dirty="0"/>
+          </a:p>
+          <a:p>
+            <a:pPr lvl="2"/>
+            <a:r>
+              <a:rPr lang="vi-VN" dirty="0" err="1"/>
+              <a:t>Số</a:t>
+            </a:r>
+            <a:r>
+              <a:rPr lang="vi-VN" dirty="0"/>
+              <a:t> </a:t>
+            </a:r>
+            <a:r>
+              <a:rPr lang="vi-VN" dirty="0" err="1"/>
+              <a:t>token</a:t>
+            </a:r>
+            <a:r>
+              <a:rPr lang="vi-VN" dirty="0"/>
+              <a:t> trong </a:t>
+            </a:r>
+            <a:r>
+              <a:rPr lang="vi-VN" dirty="0" err="1"/>
+              <a:t>training</a:t>
+            </a:r>
+            <a:r>
+              <a:rPr lang="vi-VN" dirty="0"/>
+              <a:t> </a:t>
+            </a:r>
+            <a:r>
+              <a:rPr lang="vi-VN" dirty="0" err="1"/>
+              <a:t>data</a:t>
+            </a:r>
+            <a:endParaRPr lang="en-US" dirty="0"/>
+          </a:p>
+          <a:p>
+            <a:pPr lvl="2"/>
+            <a:r>
+              <a:rPr lang="vi-VN" dirty="0" err="1"/>
+              <a:t>Số</a:t>
+            </a:r>
+            <a:r>
+              <a:rPr lang="vi-VN" dirty="0"/>
+              <a:t> </a:t>
+            </a:r>
+            <a:r>
+              <a:rPr lang="vi-VN" dirty="0" err="1"/>
+              <a:t>epochs</a:t>
+            </a:r>
+            <a:endParaRPr lang="en-US" dirty="0"/>
+          </a:p>
+          <a:p>
+            <a:pPr lvl="2"/>
+            <a:r>
+              <a:rPr lang="vi-VN" dirty="0" err="1"/>
+              <a:t>Model</a:t>
+            </a:r>
+            <a:r>
+              <a:rPr lang="vi-VN" dirty="0"/>
+              <a:t> </a:t>
+            </a:r>
+            <a:r>
+              <a:rPr lang="vi-VN" dirty="0" err="1"/>
+              <a:t>được</a:t>
+            </a:r>
+            <a:r>
+              <a:rPr lang="vi-VN" dirty="0"/>
+              <a:t> </a:t>
+            </a:r>
+            <a:r>
+              <a:rPr lang="vi-VN" dirty="0" err="1"/>
+              <a:t>fine-tune</a:t>
+            </a:r>
+            <a:endParaRPr lang="en-US" dirty="0"/>
+          </a:p>
+          <a:p>
+            <a:pPr lvl="1"/>
+            <a:r>
               <a:rPr lang="en-US" dirty="0"/>
               <a:t>Chi </a:t>
             </a:r>
             <a:r>
               <a:rPr lang="en-US" dirty="0" err="1"/>
-              <a:t>phí</a:t>
-            </a:r>
-            <a:r>
-              <a:rPr lang="en-US" dirty="0"/>
-              <a:t> training local</a:t>
-            </a:r>
-          </a:p>
-          <a:p>
-            <a:pPr lvl="1"/>
-            <a:r>
-              <a:rPr lang="en-US" dirty="0"/>
+              <a:t>tiết</a:t>
+            </a:r>
+            <a:endParaRPr lang="it-IT" dirty="0"/>
+          </a:p>
+          <a:p>
+            <a:pPr lvl="2"/>
+            <a:r>
+              <a:rPr lang="vi-VN" dirty="0"/>
               <a:t>| </a:t>
             </a:r>
             <a:r>
-              <a:rPr lang="en-US" dirty="0" err="1"/>
-              <a:t>Công</a:t>
-            </a:r>
-            <a:r>
-              <a:rPr lang="en-US" dirty="0"/>
-              <a:t> </a:t>
-            </a:r>
-            <a:r>
-              <a:rPr lang="en-US" dirty="0" err="1"/>
-              <a:t>việc</a:t>
-            </a:r>
-            <a:r>
-              <a:rPr lang="en-US" dirty="0"/>
-              <a:t>         | Cost     |</a:t>
-            </a:r>
-          </a:p>
-          <a:p>
-            <a:pPr lvl="1"/>
-            <a:r>
-              <a:rPr lang="en-US" dirty="0"/>
-              <a:t>| ----------------- | -------- |</a:t>
-            </a:r>
-          </a:p>
-          <a:p>
-            <a:pPr lvl="1"/>
-            <a:r>
-              <a:rPr lang="en-US" dirty="0"/>
+              <a:rPr lang="vi-VN" dirty="0" err="1"/>
+              <a:t>Yếu</a:t>
+            </a:r>
+            <a:r>
+              <a:rPr lang="vi-VN" dirty="0"/>
+              <a:t> </a:t>
+            </a:r>
+            <a:r>
+              <a:rPr lang="vi-VN" dirty="0" err="1"/>
+              <a:t>tố</a:t>
+            </a:r>
+            <a:r>
+              <a:rPr lang="vi-VN" dirty="0"/>
+              <a:t>        | </a:t>
+            </a:r>
+            <a:r>
+              <a:rPr lang="vi-VN" dirty="0" err="1"/>
+              <a:t>Ảnh</a:t>
+            </a:r>
+            <a:r>
+              <a:rPr lang="vi-VN" dirty="0"/>
+              <a:t> </a:t>
+            </a:r>
+            <a:r>
+              <a:rPr lang="vi-VN" dirty="0" err="1"/>
+              <a:t>hưởng</a:t>
+            </a:r>
+            <a:r>
+              <a:rPr lang="vi-VN" dirty="0"/>
+              <a:t>               |</a:t>
+            </a:r>
+          </a:p>
+          <a:p>
+            <a:pPr lvl="2"/>
+            <a:r>
+              <a:rPr lang="vi-VN" dirty="0"/>
+              <a:t>| ------------- | ----------------------- |</a:t>
+            </a:r>
+          </a:p>
+          <a:p>
+            <a:pPr lvl="2"/>
+            <a:r>
+              <a:rPr lang="vi-VN" dirty="0"/>
               <a:t>| </a:t>
             </a:r>
             <a:r>
-              <a:rPr lang="en-US" dirty="0" err="1"/>
-              <a:t>Chuẩn</a:t>
-            </a:r>
-            <a:r>
-              <a:rPr lang="en-US" dirty="0"/>
-              <a:t> </a:t>
-            </a:r>
-            <a:r>
-              <a:rPr lang="en-US" dirty="0" err="1"/>
-              <a:t>bị</a:t>
-            </a:r>
-            <a:r>
-              <a:rPr lang="en-US" dirty="0"/>
-              <a:t> data        | </a:t>
-            </a:r>
-            <a:r>
-              <a:rPr lang="en-US" dirty="0" err="1"/>
-              <a:t>Nhân</a:t>
-            </a:r>
-            <a:r>
-              <a:rPr lang="en-US" dirty="0"/>
-              <a:t> </a:t>
-            </a:r>
-            <a:r>
-              <a:rPr lang="en-US" dirty="0" err="1"/>
-              <a:t>lực</a:t>
-            </a:r>
-            <a:r>
-              <a:rPr lang="en-US" dirty="0"/>
+              <a:rPr lang="vi-VN" dirty="0" err="1"/>
+              <a:t>Dataset</a:t>
+            </a:r>
+            <a:r>
+              <a:rPr lang="vi-VN" dirty="0"/>
+              <a:t> </a:t>
+            </a:r>
+            <a:r>
+              <a:rPr lang="vi-VN" dirty="0" err="1"/>
+              <a:t>size</a:t>
+            </a:r>
+            <a:r>
+              <a:rPr lang="vi-VN" dirty="0"/>
+              <a:t>  | </a:t>
+            </a:r>
+            <a:r>
+              <a:rPr lang="vi-VN" dirty="0" err="1"/>
+              <a:t>Càng</a:t>
+            </a:r>
+            <a:r>
+              <a:rPr lang="vi-VN" dirty="0"/>
+              <a:t> </a:t>
+            </a:r>
+            <a:r>
+              <a:rPr lang="vi-VN" dirty="0" err="1"/>
+              <a:t>lớn</a:t>
+            </a:r>
+            <a:r>
+              <a:rPr lang="vi-VN" dirty="0"/>
+              <a:t> </a:t>
+            </a:r>
+            <a:r>
+              <a:rPr lang="vi-VN" dirty="0" err="1"/>
+              <a:t>càng</a:t>
+            </a:r>
+            <a:r>
+              <a:rPr lang="vi-VN" dirty="0"/>
+              <a:t> </a:t>
+            </a:r>
+            <a:r>
+              <a:rPr lang="vi-VN" dirty="0" err="1"/>
+              <a:t>tốn</a:t>
+            </a:r>
+            <a:r>
+              <a:rPr lang="vi-VN" dirty="0"/>
+              <a:t>       |</a:t>
+            </a:r>
+          </a:p>
+          <a:p>
+            <a:pPr lvl="2"/>
+            <a:r>
+              <a:rPr lang="vi-VN" dirty="0"/>
+              <a:t>| </a:t>
+            </a:r>
+            <a:r>
+              <a:rPr lang="vi-VN" dirty="0" err="1"/>
+              <a:t>Epochs</a:t>
+            </a:r>
+            <a:r>
+              <a:rPr lang="vi-VN" dirty="0"/>
+              <a:t>        | </a:t>
+            </a:r>
+            <a:r>
+              <a:rPr lang="vi-VN" dirty="0" err="1"/>
+              <a:t>Epochs</a:t>
+            </a:r>
+            <a:r>
+              <a:rPr lang="vi-VN" dirty="0"/>
+              <a:t> </a:t>
+            </a:r>
+            <a:r>
+              <a:rPr lang="vi-VN" dirty="0" err="1"/>
+              <a:t>nhiều</a:t>
+            </a:r>
+            <a:r>
+              <a:rPr lang="vi-VN" dirty="0"/>
+              <a:t> = </a:t>
+            </a:r>
+            <a:r>
+              <a:rPr lang="vi-VN" dirty="0" err="1"/>
+              <a:t>tốn</a:t>
+            </a:r>
+            <a:r>
+              <a:rPr lang="vi-VN" dirty="0"/>
+              <a:t>      |</a:t>
+            </a:r>
+          </a:p>
+          <a:p>
+            <a:pPr lvl="2"/>
+            <a:r>
+              <a:rPr lang="vi-VN" dirty="0"/>
+              <a:t>| </a:t>
+            </a:r>
+            <a:r>
+              <a:rPr lang="vi-VN" dirty="0" err="1"/>
+              <a:t>Model</a:t>
+            </a:r>
+            <a:r>
+              <a:rPr lang="vi-VN" dirty="0"/>
+              <a:t> </a:t>
+            </a:r>
+            <a:r>
+              <a:rPr lang="vi-VN" dirty="0" err="1"/>
+              <a:t>size</a:t>
+            </a:r>
+            <a:r>
+              <a:rPr lang="vi-VN" dirty="0"/>
+              <a:t>    | GPT-4o &gt; GPT-4o-mini    |</a:t>
+            </a:r>
+          </a:p>
+          <a:p>
+            <a:pPr lvl="2"/>
+            <a:r>
+              <a:rPr lang="vi-VN" dirty="0"/>
+              <a:t>| </a:t>
+            </a:r>
+            <a:r>
+              <a:rPr lang="vi-VN" dirty="0" err="1"/>
+              <a:t>Prompt</a:t>
+            </a:r>
+            <a:r>
+              <a:rPr lang="vi-VN" dirty="0"/>
+              <a:t> </a:t>
+            </a:r>
+            <a:r>
+              <a:rPr lang="vi-VN" dirty="0" err="1"/>
+              <a:t>length</a:t>
+            </a:r>
+            <a:r>
+              <a:rPr lang="vi-VN" dirty="0"/>
+              <a:t> | </a:t>
+            </a:r>
+            <a:r>
+              <a:rPr lang="vi-VN" dirty="0" err="1"/>
+              <a:t>Prompt</a:t>
+            </a:r>
+            <a:r>
+              <a:rPr lang="vi-VN" dirty="0"/>
+              <a:t> </a:t>
+            </a:r>
+            <a:r>
+              <a:rPr lang="vi-VN" dirty="0" err="1"/>
+              <a:t>dài</a:t>
+            </a:r>
+            <a:r>
+              <a:rPr lang="vi-VN" dirty="0"/>
+              <a:t> = tăng </a:t>
+            </a:r>
+            <a:r>
+              <a:rPr lang="vi-VN" dirty="0" err="1"/>
+              <a:t>token</a:t>
+            </a:r>
+            <a:r>
+              <a:rPr lang="vi-VN" dirty="0"/>
               <a:t> |</a:t>
             </a:r>
           </a:p>
           <a:p>
-            <a:pPr lvl="1"/>
-            <a:r>
-              <a:rPr lang="en-US" dirty="0"/>
-              <a:t>| Clean data        | </a:t>
-            </a:r>
-            <a:r>
-              <a:rPr lang="en-US" dirty="0" err="1"/>
-              <a:t>Nhân</a:t>
-            </a:r>
-            <a:r>
-              <a:rPr lang="en-US" dirty="0"/>
-              <a:t> </a:t>
-            </a:r>
-            <a:r>
-              <a:rPr lang="en-US" dirty="0" err="1"/>
-              <a:t>lực</a:t>
-            </a:r>
-            <a:r>
-              <a:rPr lang="en-US" dirty="0"/>
-              <a:t> |</a:t>
-            </a:r>
-          </a:p>
-          <a:p>
-            <a:pPr lvl="1"/>
-            <a:r>
-              <a:rPr lang="en-US" dirty="0"/>
-              <a:t>| Review answer     | </a:t>
-            </a:r>
-            <a:r>
-              <a:rPr lang="en-US" dirty="0" err="1"/>
-              <a:t>Nhân</a:t>
-            </a:r>
-            <a:r>
-              <a:rPr lang="en-US" dirty="0"/>
-              <a:t> </a:t>
-            </a:r>
-            <a:r>
-              <a:rPr lang="en-US" dirty="0" err="1"/>
-              <a:t>lực</a:t>
-            </a:r>
-            <a:r>
-              <a:rPr lang="en-US" dirty="0"/>
-              <a:t> |</a:t>
-            </a:r>
-          </a:p>
-          <a:p>
-            <a:pPr lvl="1"/>
-            <a:r>
-              <a:rPr lang="en-US" dirty="0"/>
-              <a:t>| Fix hallucination | </a:t>
-            </a:r>
-            <a:r>
-              <a:rPr lang="en-US" dirty="0" err="1"/>
-              <a:t>Nhân</a:t>
-            </a:r>
-            <a:r>
-              <a:rPr lang="en-US" dirty="0"/>
-              <a:t> </a:t>
-            </a:r>
-            <a:r>
-              <a:rPr lang="en-US" dirty="0" err="1"/>
-              <a:t>lực</a:t>
-            </a:r>
-            <a:r>
-              <a:rPr lang="en-US" dirty="0"/>
-              <a:t> |</a:t>
-            </a:r>
-          </a:p>
-          <a:p>
-            <a:pPr marL="514350" indent="-514350">
-              <a:buAutoNum type="arabicPeriod"/>
-            </a:pPr>
-            <a:r>
-              <a:rPr lang="en-US" dirty="0"/>
-              <a:t>Chi </a:t>
-            </a:r>
-            <a:r>
-              <a:rPr lang="en-US" dirty="0" err="1"/>
-              <a:t>phí</a:t>
-            </a:r>
-            <a:r>
-              <a:rPr lang="en-US" dirty="0"/>
-              <a:t> </a:t>
-            </a:r>
-            <a:r>
-              <a:rPr lang="en-US" dirty="0" err="1"/>
-              <a:t>triển</a:t>
-            </a:r>
-            <a:r>
-              <a:rPr lang="en-US" dirty="0"/>
-              <a:t> </a:t>
-            </a:r>
-            <a:r>
-              <a:rPr lang="en-US" dirty="0" err="1"/>
-              <a:t>khai</a:t>
-            </a:r>
-            <a:r>
-              <a:rPr lang="en-US" dirty="0"/>
-              <a:t> </a:t>
-            </a:r>
-            <a:r>
-              <a:rPr lang="en-US" dirty="0" err="1"/>
-              <a:t>trên</a:t>
-            </a:r>
-            <a:r>
-              <a:rPr lang="en-US" dirty="0"/>
-              <a:t> Azure</a:t>
-            </a:r>
-          </a:p>
-          <a:p>
-            <a:pPr lvl="1"/>
-            <a:r>
-              <a:rPr lang="en-US" dirty="0"/>
-              <a:t>Chi </a:t>
-            </a:r>
-            <a:r>
-              <a:rPr lang="en-US" dirty="0" err="1"/>
-              <a:t>phí</a:t>
-            </a:r>
-            <a:r>
-              <a:rPr lang="en-US" dirty="0"/>
-              <a:t> Fine-Tune </a:t>
-            </a:r>
-            <a:r>
-              <a:rPr lang="en-US" dirty="0" err="1"/>
-              <a:t>trên</a:t>
-            </a:r>
-            <a:r>
-              <a:rPr lang="en-US" dirty="0"/>
-              <a:t> Azure = Training + Storage + Inference + Operations</a:t>
-            </a:r>
+            <a:pPr lvl="2"/>
+            <a:r>
+              <a:rPr lang="en-US" dirty="0"/>
+              <a:t>Tip: </a:t>
+            </a:r>
+            <a:r>
+              <a:rPr lang="vi-VN" dirty="0" err="1"/>
+              <a:t>Fine-tune</a:t>
+            </a:r>
+            <a:r>
+              <a:rPr lang="vi-VN" dirty="0"/>
+              <a:t> GPT-4o-mini </a:t>
+            </a:r>
+            <a:r>
+              <a:rPr lang="vi-VN" dirty="0" err="1"/>
+              <a:t>rẻ</a:t>
+            </a:r>
+            <a:r>
+              <a:rPr lang="vi-VN" dirty="0"/>
+              <a:t> hơn </a:t>
+            </a:r>
+            <a:r>
+              <a:rPr lang="vi-VN" dirty="0" err="1"/>
+              <a:t>rất</a:t>
+            </a:r>
+            <a:r>
+              <a:rPr lang="vi-VN" dirty="0"/>
+              <a:t> </a:t>
+            </a:r>
+            <a:r>
+              <a:rPr lang="vi-VN" dirty="0" err="1"/>
+              <a:t>nhiều</a:t>
+            </a:r>
+            <a:r>
+              <a:rPr lang="vi-VN" dirty="0"/>
+              <a:t> so </a:t>
+            </a:r>
+            <a:r>
+              <a:rPr lang="vi-VN" dirty="0" err="1"/>
+              <a:t>với</a:t>
+            </a:r>
+            <a:r>
+              <a:rPr lang="vi-VN" dirty="0"/>
+              <a:t> GPT-4o </a:t>
+            </a:r>
+            <a:r>
+              <a:rPr lang="vi-VN" dirty="0" err="1"/>
+              <a:t>full</a:t>
+            </a:r>
+            <a:r>
+              <a:rPr lang="vi-VN" dirty="0"/>
+              <a:t>.</a:t>
+            </a:r>
+            <a:endParaRPr lang="en-US" dirty="0"/>
           </a:p>
         </p:txBody>
       </p:sp>
     </p:spTree>
     <p:extLst>
       <p:ext uri="{BB962C8B-B14F-4D97-AF65-F5344CB8AC3E}">
-        <p14:creationId xmlns:p14="http://schemas.microsoft.com/office/powerpoint/2010/main" val="229429348"/>
+        <p14:creationId xmlns:p14="http://schemas.microsoft.com/office/powerpoint/2010/main" val="1973793886"/>
       </p:ext>
     </p:extLst>
   </p:cSld>
@@ -8701,391 +10049,319 @@
             </a:r>
           </a:p>
           <a:p>
-            <a:pPr marL="514350" indent="-514350">
-              <a:buFont typeface="+mj-lt"/>
-              <a:buAutoNum type="arabicPeriod"/>
+            <a:pPr marL="0" indent="0">
+              <a:buNone/>
             </a:pPr>
             <a:r>
               <a:rPr lang="it-IT" dirty="0"/>
-              <a:t>Chi phí Compute Training (Lớn nhất)</a:t>
+              <a:t>2. Chi phí Storage (Dữ liệu &amp; Model)</a:t>
             </a:r>
           </a:p>
           <a:p>
             <a:pPr lvl="1"/>
             <a:r>
-              <a:rPr lang="vi-VN" dirty="0" err="1"/>
-              <a:t>Bạn</a:t>
-            </a:r>
-            <a:r>
-              <a:rPr lang="vi-VN" dirty="0"/>
-              <a:t> </a:t>
-            </a:r>
-            <a:r>
-              <a:rPr lang="vi-VN" dirty="0" err="1"/>
-              <a:t>trả</a:t>
-            </a:r>
-            <a:r>
-              <a:rPr lang="vi-VN" dirty="0"/>
-              <a:t> </a:t>
-            </a:r>
-            <a:r>
-              <a:rPr lang="vi-VN" dirty="0" err="1"/>
-              <a:t>tiền</a:t>
-            </a:r>
-            <a:r>
-              <a:rPr lang="vi-VN" dirty="0"/>
-              <a:t> cho:</a:t>
-            </a:r>
-            <a:endParaRPr lang="en-US" dirty="0"/>
+              <a:rPr lang="it-IT" dirty="0"/>
+              <a:t>Chi phí lưu tr</a:t>
+            </a:r>
+            <a:r>
+              <a:rPr lang="en-US" dirty="0"/>
+              <a:t>ữ dataset (</a:t>
+            </a:r>
+            <a:r>
+              <a:rPr lang="en-US" dirty="0" err="1"/>
+              <a:t>trainning</a:t>
+            </a:r>
+            <a:r>
+              <a:rPr lang="en-US" dirty="0"/>
+              <a:t> </a:t>
+            </a:r>
+            <a:r>
+              <a:rPr lang="en-US" dirty="0" err="1"/>
+              <a:t>và</a:t>
+            </a:r>
+            <a:r>
+              <a:rPr lang="en-US" dirty="0"/>
+              <a:t> validation data)</a:t>
+            </a:r>
+          </a:p>
+          <a:p>
+            <a:pPr lvl="1"/>
+            <a:r>
+              <a:rPr lang="en-US" dirty="0"/>
+              <a:t>Chi </a:t>
+            </a:r>
+            <a:r>
+              <a:rPr lang="en-US" dirty="0" err="1"/>
+              <a:t>phí</a:t>
+            </a:r>
+            <a:r>
+              <a:rPr lang="en-US" dirty="0"/>
+              <a:t> </a:t>
+            </a:r>
+            <a:r>
+              <a:rPr lang="en-US" dirty="0" err="1"/>
+              <a:t>lưu</a:t>
+            </a:r>
+            <a:r>
+              <a:rPr lang="en-US" dirty="0"/>
+              <a:t> </a:t>
+            </a:r>
+            <a:r>
+              <a:rPr lang="en-US" dirty="0" err="1"/>
+              <a:t>trữ</a:t>
+            </a:r>
+            <a:r>
+              <a:rPr lang="en-US" dirty="0"/>
+              <a:t> Logs &amp; metrics </a:t>
+            </a:r>
+            <a:r>
+              <a:rPr lang="en-US" dirty="0" err="1"/>
+              <a:t>trong</a:t>
+            </a:r>
+            <a:r>
+              <a:rPr lang="en-US" dirty="0"/>
+              <a:t> </a:t>
+            </a:r>
+            <a:r>
+              <a:rPr lang="en-US" dirty="0" err="1"/>
+              <a:t>quá</a:t>
+            </a:r>
+            <a:r>
+              <a:rPr lang="en-US" dirty="0"/>
+              <a:t> </a:t>
+            </a:r>
+            <a:r>
+              <a:rPr lang="en-US" dirty="0" err="1"/>
+              <a:t>trình</a:t>
+            </a:r>
+            <a:r>
+              <a:rPr lang="en-US" dirty="0"/>
+              <a:t> training</a:t>
+            </a:r>
+            <a:endParaRPr lang="it-IT" dirty="0"/>
+          </a:p>
+          <a:p>
+            <a:pPr lvl="1"/>
+            <a:r>
+              <a:rPr lang="vi-VN" dirty="0"/>
+              <a:t>Chi </a:t>
+            </a:r>
+            <a:r>
+              <a:rPr lang="vi-VN" dirty="0" err="1"/>
+              <a:t>phí</a:t>
+            </a:r>
+            <a:r>
+              <a:rPr lang="vi-VN" dirty="0"/>
+              <a:t> </a:t>
+            </a:r>
+            <a:r>
+              <a:rPr lang="vi-VN" dirty="0" err="1"/>
+              <a:t>thường</a:t>
+            </a:r>
+            <a:r>
+              <a:rPr lang="vi-VN" dirty="0"/>
+              <a:t> </a:t>
+            </a:r>
+            <a:r>
+              <a:rPr lang="vi-VN" dirty="0" err="1"/>
+              <a:t>nhỏ</a:t>
+            </a:r>
+            <a:r>
+              <a:rPr lang="en-US" dirty="0"/>
+              <a:t> (</a:t>
+            </a:r>
+            <a:r>
+              <a:rPr lang="en-US" dirty="0" err="1"/>
+              <a:t>trừ</a:t>
+            </a:r>
+            <a:r>
+              <a:rPr lang="en-US" dirty="0"/>
+              <a:t> </a:t>
+            </a:r>
+            <a:r>
+              <a:rPr lang="en-US" dirty="0" err="1"/>
+              <a:t>khi</a:t>
+            </a:r>
+            <a:r>
+              <a:rPr lang="en-US" dirty="0"/>
+              <a:t> dataset </a:t>
+            </a:r>
+            <a:r>
+              <a:rPr lang="en-US" dirty="0" err="1"/>
+              <a:t>rất</a:t>
+            </a:r>
+            <a:r>
+              <a:rPr lang="en-US" dirty="0"/>
+              <a:t> </a:t>
+            </a:r>
+            <a:r>
+              <a:rPr lang="en-US" dirty="0" err="1"/>
+              <a:t>lớn</a:t>
+            </a:r>
+            <a:r>
+              <a:rPr lang="en-US" dirty="0"/>
+              <a:t>)</a:t>
+            </a:r>
+          </a:p>
+          <a:p>
+            <a:pPr marL="0" indent="0">
+              <a:buNone/>
+            </a:pPr>
+            <a:r>
+              <a:rPr lang="en-US" dirty="0"/>
+              <a:t>3. </a:t>
+            </a:r>
+            <a:r>
+              <a:rPr lang="it-IT" dirty="0"/>
+              <a:t>Chi phí Inference Model Fine-Tuned (Khi chạy thật)</a:t>
+            </a:r>
+          </a:p>
+          <a:p>
+            <a:pPr lvl="1"/>
+            <a:r>
+              <a:rPr lang="it-IT" dirty="0"/>
+              <a:t>Sau khi deploy, bạn trả tiền cho:</a:t>
+            </a:r>
           </a:p>
           <a:p>
             <a:pPr lvl="2"/>
             <a:r>
-              <a:rPr lang="vi-VN" dirty="0" err="1"/>
-              <a:t>Số</a:t>
-            </a:r>
-            <a:r>
-              <a:rPr lang="vi-VN" dirty="0"/>
-              <a:t> </a:t>
-            </a:r>
-            <a:r>
-              <a:rPr lang="vi-VN" dirty="0" err="1"/>
-              <a:t>token</a:t>
-            </a:r>
-            <a:r>
-              <a:rPr lang="vi-VN" dirty="0"/>
-              <a:t> trong </a:t>
-            </a:r>
-            <a:r>
-              <a:rPr lang="vi-VN" dirty="0" err="1"/>
-              <a:t>training</a:t>
-            </a:r>
-            <a:r>
-              <a:rPr lang="vi-VN" dirty="0"/>
-              <a:t> </a:t>
-            </a:r>
-            <a:r>
-              <a:rPr lang="vi-VN" dirty="0" err="1"/>
-              <a:t>data</a:t>
-            </a:r>
-            <a:endParaRPr lang="en-US" dirty="0"/>
+              <a:rPr lang="it-IT" dirty="0"/>
+              <a:t>Token input, Token output</a:t>
+            </a:r>
           </a:p>
           <a:p>
             <a:pPr lvl="2"/>
             <a:r>
-              <a:rPr lang="vi-VN" dirty="0" err="1"/>
-              <a:t>Số</a:t>
-            </a:r>
-            <a:r>
-              <a:rPr lang="vi-VN" dirty="0"/>
-              <a:t> </a:t>
-            </a:r>
-            <a:r>
-              <a:rPr lang="vi-VN" dirty="0" err="1"/>
-              <a:t>epochs</a:t>
-            </a:r>
-            <a:endParaRPr lang="en-US" dirty="0"/>
+              <a:rPr lang="it-IT" dirty="0"/>
+              <a:t>Model inference compute</a:t>
+            </a:r>
+          </a:p>
+          <a:p>
+            <a:pPr lvl="1"/>
+            <a:r>
+              <a:rPr lang="it-IT" dirty="0"/>
+              <a:t>So sánh</a:t>
+            </a:r>
           </a:p>
           <a:p>
             <a:pPr lvl="2"/>
             <a:r>
+              <a:rPr lang="vi-VN" dirty="0"/>
+              <a:t>| </a:t>
+            </a:r>
+            <a:r>
+              <a:rPr lang="vi-VN" dirty="0" err="1"/>
+              <a:t>Base</a:t>
+            </a:r>
+            <a:r>
+              <a:rPr lang="vi-VN" dirty="0"/>
+              <a:t> </a:t>
+            </a:r>
+            <a:r>
               <a:rPr lang="vi-VN" dirty="0" err="1"/>
               <a:t>Model</a:t>
             </a:r>
             <a:r>
               <a:rPr lang="vi-VN" dirty="0"/>
-              <a:t> </a:t>
-            </a:r>
-            <a:r>
-              <a:rPr lang="vi-VN" dirty="0" err="1"/>
-              <a:t>được</a:t>
-            </a:r>
-            <a:r>
-              <a:rPr lang="vi-VN" dirty="0"/>
-              <a:t> </a:t>
-            </a:r>
-            <a:r>
-              <a:rPr lang="vi-VN" dirty="0" err="1"/>
-              <a:t>fine-tune</a:t>
-            </a:r>
-            <a:endParaRPr lang="en-US" dirty="0"/>
+              <a:t>        | </a:t>
+            </a:r>
+            <a:r>
+              <a:rPr lang="vi-VN" dirty="0" err="1"/>
+              <a:t>Fine-Tuned</a:t>
+            </a:r>
+            <a:r>
+              <a:rPr lang="vi-VN" dirty="0"/>
+              <a:t> </a:t>
+            </a:r>
+            <a:r>
+              <a:rPr lang="vi-VN" dirty="0" err="1"/>
+              <a:t>Model</a:t>
+            </a:r>
+            <a:r>
+              <a:rPr lang="vi-VN" dirty="0"/>
+              <a:t>          |</a:t>
+            </a:r>
+          </a:p>
+          <a:p>
+            <a:pPr lvl="2"/>
+            <a:r>
+              <a:rPr lang="vi-VN" dirty="0"/>
+              <a:t>| ----------------- | ------------------------- |</a:t>
+            </a:r>
+          </a:p>
+          <a:p>
+            <a:pPr lvl="2"/>
+            <a:r>
+              <a:rPr lang="vi-VN" dirty="0"/>
+              <a:t>| </a:t>
+            </a:r>
+            <a:r>
+              <a:rPr lang="vi-VN" dirty="0" err="1"/>
+              <a:t>Rẻ</a:t>
+            </a:r>
+            <a:r>
+              <a:rPr lang="vi-VN" dirty="0"/>
+              <a:t>                | </a:t>
+            </a:r>
+            <a:r>
+              <a:rPr lang="vi-VN" dirty="0" err="1"/>
+              <a:t>Thường</a:t>
+            </a:r>
+            <a:r>
+              <a:rPr lang="vi-VN" dirty="0"/>
+              <a:t> **</a:t>
+            </a:r>
+            <a:r>
+              <a:rPr lang="vi-VN" dirty="0" err="1"/>
+              <a:t>đắt</a:t>
+            </a:r>
+            <a:r>
+              <a:rPr lang="vi-VN" dirty="0"/>
+              <a:t> hơn 10–30%** |</a:t>
+            </a:r>
+          </a:p>
+          <a:p>
+            <a:pPr lvl="2"/>
+            <a:r>
+              <a:rPr lang="vi-VN" dirty="0"/>
+              <a:t>| Không </a:t>
+            </a:r>
+            <a:r>
+              <a:rPr lang="vi-VN" dirty="0" err="1"/>
+              <a:t>tối</a:t>
+            </a:r>
+            <a:r>
+              <a:rPr lang="vi-VN" dirty="0"/>
+              <a:t> ưu </a:t>
+            </a:r>
+            <a:r>
+              <a:rPr lang="vi-VN" dirty="0" err="1"/>
+              <a:t>task</a:t>
+            </a:r>
+            <a:r>
+              <a:rPr lang="vi-VN" dirty="0"/>
+              <a:t> | </a:t>
+            </a:r>
+            <a:r>
+              <a:rPr lang="vi-VN" dirty="0" err="1"/>
+              <a:t>Chính</a:t>
+            </a:r>
+            <a:r>
+              <a:rPr lang="vi-VN" dirty="0"/>
+              <a:t> </a:t>
+            </a:r>
+            <a:r>
+              <a:rPr lang="vi-VN" dirty="0" err="1"/>
+              <a:t>xác</a:t>
+            </a:r>
+            <a:r>
+              <a:rPr lang="vi-VN" dirty="0"/>
+              <a:t> hơn             |</a:t>
+            </a:r>
           </a:p>
           <a:p>
             <a:pPr lvl="1"/>
-            <a:r>
-              <a:rPr lang="en-US" dirty="0"/>
-              <a:t>Chi </a:t>
-            </a:r>
-            <a:r>
-              <a:rPr lang="en-US" dirty="0" err="1"/>
-              <a:t>tiết</a:t>
-            </a:r>
-            <a:endParaRPr lang="it-IT" dirty="0"/>
-          </a:p>
-          <a:p>
-            <a:pPr lvl="2"/>
-            <a:r>
-              <a:rPr lang="vi-VN" dirty="0"/>
-              <a:t>| </a:t>
-            </a:r>
-            <a:r>
-              <a:rPr lang="vi-VN" dirty="0" err="1"/>
-              <a:t>Yếu</a:t>
-            </a:r>
-            <a:r>
-              <a:rPr lang="vi-VN" dirty="0"/>
-              <a:t> </a:t>
-            </a:r>
-            <a:r>
-              <a:rPr lang="vi-VN" dirty="0" err="1"/>
-              <a:t>tố</a:t>
-            </a:r>
-            <a:r>
-              <a:rPr lang="vi-VN" dirty="0"/>
-              <a:t>        | </a:t>
-            </a:r>
-            <a:r>
-              <a:rPr lang="vi-VN" dirty="0" err="1"/>
-              <a:t>Ảnh</a:t>
-            </a:r>
-            <a:r>
-              <a:rPr lang="vi-VN" dirty="0"/>
-              <a:t> </a:t>
-            </a:r>
-            <a:r>
-              <a:rPr lang="vi-VN" dirty="0" err="1"/>
-              <a:t>hưởng</a:t>
-            </a:r>
-            <a:r>
-              <a:rPr lang="vi-VN" dirty="0"/>
-              <a:t>               |</a:t>
-            </a:r>
-          </a:p>
-          <a:p>
-            <a:pPr lvl="2"/>
-            <a:r>
-              <a:rPr lang="vi-VN" dirty="0"/>
-              <a:t>| ------------- | ----------------------- |</a:t>
-            </a:r>
-          </a:p>
-          <a:p>
-            <a:pPr lvl="2"/>
-            <a:r>
-              <a:rPr lang="vi-VN" dirty="0"/>
-              <a:t>| </a:t>
-            </a:r>
-            <a:r>
-              <a:rPr lang="vi-VN" dirty="0" err="1"/>
-              <a:t>Dataset</a:t>
-            </a:r>
-            <a:r>
-              <a:rPr lang="vi-VN" dirty="0"/>
-              <a:t> </a:t>
-            </a:r>
-            <a:r>
-              <a:rPr lang="vi-VN" dirty="0" err="1"/>
-              <a:t>size</a:t>
-            </a:r>
-            <a:r>
-              <a:rPr lang="vi-VN" dirty="0"/>
-              <a:t>  | </a:t>
-            </a:r>
-            <a:r>
-              <a:rPr lang="vi-VN" dirty="0" err="1"/>
-              <a:t>Càng</a:t>
-            </a:r>
-            <a:r>
-              <a:rPr lang="vi-VN" dirty="0"/>
-              <a:t> </a:t>
-            </a:r>
-            <a:r>
-              <a:rPr lang="vi-VN" dirty="0" err="1"/>
-              <a:t>lớn</a:t>
-            </a:r>
-            <a:r>
-              <a:rPr lang="vi-VN" dirty="0"/>
-              <a:t> </a:t>
-            </a:r>
-            <a:r>
-              <a:rPr lang="vi-VN" dirty="0" err="1"/>
-              <a:t>càng</a:t>
-            </a:r>
-            <a:r>
-              <a:rPr lang="vi-VN" dirty="0"/>
-              <a:t> </a:t>
-            </a:r>
-            <a:r>
-              <a:rPr lang="vi-VN" dirty="0" err="1"/>
-              <a:t>tốn</a:t>
-            </a:r>
-            <a:r>
-              <a:rPr lang="vi-VN" dirty="0"/>
-              <a:t>       |</a:t>
-            </a:r>
-          </a:p>
-          <a:p>
-            <a:pPr lvl="2"/>
-            <a:r>
-              <a:rPr lang="vi-VN" dirty="0"/>
-              <a:t>| </a:t>
-            </a:r>
-            <a:r>
-              <a:rPr lang="vi-VN" dirty="0" err="1"/>
-              <a:t>Epochs</a:t>
-            </a:r>
-            <a:r>
-              <a:rPr lang="vi-VN" dirty="0"/>
-              <a:t>        | </a:t>
-            </a:r>
-            <a:r>
-              <a:rPr lang="vi-VN" dirty="0" err="1"/>
-              <a:t>Epochs</a:t>
-            </a:r>
-            <a:r>
-              <a:rPr lang="vi-VN" dirty="0"/>
-              <a:t> </a:t>
-            </a:r>
-            <a:r>
-              <a:rPr lang="vi-VN" dirty="0" err="1"/>
-              <a:t>nhiều</a:t>
-            </a:r>
-            <a:r>
-              <a:rPr lang="vi-VN" dirty="0"/>
-              <a:t> = </a:t>
-            </a:r>
-            <a:r>
-              <a:rPr lang="vi-VN" dirty="0" err="1"/>
-              <a:t>tốn</a:t>
-            </a:r>
-            <a:r>
-              <a:rPr lang="vi-VN" dirty="0"/>
-              <a:t>      |</a:t>
-            </a:r>
-          </a:p>
-          <a:p>
-            <a:pPr lvl="2"/>
-            <a:r>
-              <a:rPr lang="vi-VN" dirty="0"/>
-              <a:t>| </a:t>
-            </a:r>
-            <a:r>
-              <a:rPr lang="vi-VN" dirty="0" err="1"/>
-              <a:t>Model</a:t>
-            </a:r>
-            <a:r>
-              <a:rPr lang="vi-VN" dirty="0"/>
-              <a:t> </a:t>
-            </a:r>
-            <a:r>
-              <a:rPr lang="vi-VN" dirty="0" err="1"/>
-              <a:t>size</a:t>
-            </a:r>
-            <a:r>
-              <a:rPr lang="vi-VN" dirty="0"/>
-              <a:t>    | GPT-4o &gt; GPT-4o-mini    |</a:t>
-            </a:r>
-          </a:p>
-          <a:p>
-            <a:pPr lvl="2"/>
-            <a:r>
-              <a:rPr lang="vi-VN" dirty="0"/>
-              <a:t>| </a:t>
-            </a:r>
-            <a:r>
-              <a:rPr lang="vi-VN" dirty="0" err="1"/>
-              <a:t>Prompt</a:t>
-            </a:r>
-            <a:r>
-              <a:rPr lang="vi-VN" dirty="0"/>
-              <a:t> </a:t>
-            </a:r>
-            <a:r>
-              <a:rPr lang="vi-VN" dirty="0" err="1"/>
-              <a:t>length</a:t>
-            </a:r>
-            <a:r>
-              <a:rPr lang="vi-VN" dirty="0"/>
-              <a:t> | </a:t>
-            </a:r>
-            <a:r>
-              <a:rPr lang="vi-VN" dirty="0" err="1"/>
-              <a:t>Prompt</a:t>
-            </a:r>
-            <a:r>
-              <a:rPr lang="vi-VN" dirty="0"/>
-              <a:t> </a:t>
-            </a:r>
-            <a:r>
-              <a:rPr lang="vi-VN" dirty="0" err="1"/>
-              <a:t>dài</a:t>
-            </a:r>
-            <a:r>
-              <a:rPr lang="vi-VN" dirty="0"/>
-              <a:t> = tăng </a:t>
-            </a:r>
-            <a:r>
-              <a:rPr lang="vi-VN" dirty="0" err="1"/>
-              <a:t>token</a:t>
-            </a:r>
-            <a:r>
-              <a:rPr lang="vi-VN" dirty="0"/>
-              <a:t> |</a:t>
-            </a:r>
-          </a:p>
-          <a:p>
-            <a:pPr lvl="2"/>
-            <a:r>
-              <a:rPr lang="en-US" dirty="0"/>
-              <a:t>Tip: </a:t>
-            </a:r>
-            <a:r>
-              <a:rPr lang="vi-VN" dirty="0" err="1"/>
-              <a:t>Fine-tune</a:t>
-            </a:r>
-            <a:r>
-              <a:rPr lang="vi-VN" dirty="0"/>
-              <a:t> GPT-4o-mini </a:t>
-            </a:r>
-            <a:r>
-              <a:rPr lang="vi-VN" dirty="0" err="1"/>
-              <a:t>rẻ</a:t>
-            </a:r>
-            <a:r>
-              <a:rPr lang="vi-VN" dirty="0"/>
-              <a:t> hơn </a:t>
-            </a:r>
-            <a:r>
-              <a:rPr lang="vi-VN" dirty="0" err="1"/>
-              <a:t>rất</a:t>
-            </a:r>
-            <a:r>
-              <a:rPr lang="vi-VN" dirty="0"/>
-              <a:t> </a:t>
-            </a:r>
-            <a:r>
-              <a:rPr lang="vi-VN" dirty="0" err="1"/>
-              <a:t>nhiều</a:t>
-            </a:r>
-            <a:r>
-              <a:rPr lang="vi-VN" dirty="0"/>
-              <a:t> so </a:t>
-            </a:r>
-            <a:r>
-              <a:rPr lang="vi-VN" dirty="0" err="1"/>
-              <a:t>với</a:t>
-            </a:r>
-            <a:r>
-              <a:rPr lang="vi-VN" dirty="0"/>
-              <a:t> GPT-4o </a:t>
-            </a:r>
-            <a:r>
-              <a:rPr lang="vi-VN" dirty="0" err="1"/>
-              <a:t>full</a:t>
-            </a:r>
-            <a:r>
-              <a:rPr lang="vi-VN" dirty="0"/>
-              <a:t>.</a:t>
-            </a:r>
             <a:endParaRPr lang="en-US" dirty="0"/>
           </a:p>
         </p:txBody>
@@ -9093,7 +10369,7 @@
     </p:spTree>
     <p:extLst>
       <p:ext uri="{BB962C8B-B14F-4D97-AF65-F5344CB8AC3E}">
-        <p14:creationId xmlns:p14="http://schemas.microsoft.com/office/powerpoint/2010/main" val="1973793886"/>
+        <p14:creationId xmlns:p14="http://schemas.microsoft.com/office/powerpoint/2010/main" val="2715320065"/>
       </p:ext>
     </p:extLst>
   </p:cSld>
@@ -9211,7 +10487,7 @@
         <p:spPr/>
         <p:txBody>
           <a:bodyPr>
-            <a:normAutofit fontScale="92500" lnSpcReduction="20000"/>
+            <a:normAutofit/>
           </a:bodyPr>
           <a:lstStyle/>
           <a:p>
@@ -9256,497 +10532,12 @@
             </a:r>
           </a:p>
           <a:p>
-            <a:pPr marL="514350" indent="-514350">
-              <a:buFont typeface="+mj-lt"/>
-              <a:buAutoNum type="arabicPeriod"/>
-            </a:pPr>
-            <a:r>
-              <a:rPr lang="it-IT" dirty="0"/>
-              <a:t>Chi phí Storage (Dữ liệu &amp; Model)</a:t>
-            </a:r>
-          </a:p>
-          <a:p>
-            <a:pPr lvl="1"/>
-            <a:r>
-              <a:rPr lang="it-IT" dirty="0"/>
-              <a:t>Chi phí lưu tr</a:t>
-            </a:r>
-            <a:r>
-              <a:rPr lang="en-US" dirty="0"/>
-              <a:t>ữ dataset (</a:t>
-            </a:r>
-            <a:r>
-              <a:rPr lang="en-US" dirty="0" err="1"/>
-              <a:t>trainning</a:t>
-            </a:r>
-            <a:r>
-              <a:rPr lang="en-US" dirty="0"/>
-              <a:t> </a:t>
-            </a:r>
-            <a:r>
-              <a:rPr lang="en-US" dirty="0" err="1"/>
-              <a:t>và</a:t>
-            </a:r>
-            <a:r>
-              <a:rPr lang="en-US" dirty="0"/>
-              <a:t> validation data)</a:t>
-            </a:r>
-          </a:p>
-          <a:p>
-            <a:pPr lvl="1"/>
-            <a:r>
-              <a:rPr lang="en-US" dirty="0"/>
-              <a:t>Chi </a:t>
-            </a:r>
-            <a:r>
-              <a:rPr lang="en-US" dirty="0" err="1"/>
-              <a:t>phí</a:t>
-            </a:r>
-            <a:r>
-              <a:rPr lang="en-US" dirty="0"/>
-              <a:t> </a:t>
-            </a:r>
-            <a:r>
-              <a:rPr lang="en-US" dirty="0" err="1"/>
-              <a:t>lưu</a:t>
-            </a:r>
-            <a:r>
-              <a:rPr lang="en-US" dirty="0"/>
-              <a:t> </a:t>
-            </a:r>
-            <a:r>
-              <a:rPr lang="en-US" dirty="0" err="1"/>
-              <a:t>trữ</a:t>
-            </a:r>
-            <a:r>
-              <a:rPr lang="en-US" dirty="0"/>
-              <a:t> Logs &amp; metrics </a:t>
-            </a:r>
-            <a:r>
-              <a:rPr lang="en-US" dirty="0" err="1"/>
-              <a:t>trong</a:t>
-            </a:r>
-            <a:r>
-              <a:rPr lang="en-US" dirty="0"/>
-              <a:t> </a:t>
-            </a:r>
-            <a:r>
-              <a:rPr lang="en-US" dirty="0" err="1"/>
-              <a:t>quá</a:t>
-            </a:r>
-            <a:r>
-              <a:rPr lang="en-US" dirty="0"/>
-              <a:t> </a:t>
-            </a:r>
-            <a:r>
-              <a:rPr lang="en-US" dirty="0" err="1"/>
-              <a:t>trình</a:t>
-            </a:r>
-            <a:r>
-              <a:rPr lang="en-US" dirty="0"/>
-              <a:t> training</a:t>
-            </a:r>
-            <a:endParaRPr lang="it-IT" dirty="0"/>
-          </a:p>
-          <a:p>
-            <a:pPr lvl="1"/>
-            <a:r>
-              <a:rPr lang="vi-VN" dirty="0"/>
-              <a:t>Chi </a:t>
-            </a:r>
-            <a:r>
-              <a:rPr lang="vi-VN" dirty="0" err="1"/>
-              <a:t>phí</a:t>
-            </a:r>
-            <a:r>
-              <a:rPr lang="vi-VN" dirty="0"/>
-              <a:t> </a:t>
-            </a:r>
-            <a:r>
-              <a:rPr lang="vi-VN" dirty="0" err="1"/>
-              <a:t>thường</a:t>
-            </a:r>
-            <a:r>
-              <a:rPr lang="vi-VN" dirty="0"/>
-              <a:t> </a:t>
-            </a:r>
-            <a:r>
-              <a:rPr lang="vi-VN" dirty="0" err="1"/>
-              <a:t>nhỏ</a:t>
-            </a:r>
-            <a:r>
-              <a:rPr lang="en-US" dirty="0"/>
-              <a:t> (</a:t>
-            </a:r>
-            <a:r>
-              <a:rPr lang="en-US" dirty="0" err="1"/>
-              <a:t>trừ</a:t>
-            </a:r>
-            <a:r>
-              <a:rPr lang="en-US" dirty="0"/>
-              <a:t> </a:t>
-            </a:r>
-            <a:r>
-              <a:rPr lang="en-US" dirty="0" err="1"/>
-              <a:t>khi</a:t>
-            </a:r>
-            <a:r>
-              <a:rPr lang="en-US" dirty="0"/>
-              <a:t> dataset </a:t>
-            </a:r>
-            <a:r>
-              <a:rPr lang="en-US" dirty="0" err="1"/>
-              <a:t>rất</a:t>
-            </a:r>
-            <a:r>
-              <a:rPr lang="en-US" dirty="0"/>
-              <a:t> </a:t>
-            </a:r>
-            <a:r>
-              <a:rPr lang="en-US" dirty="0" err="1"/>
-              <a:t>lớn</a:t>
-            </a:r>
-            <a:r>
-              <a:rPr lang="en-US" dirty="0"/>
-              <a:t>)</a:t>
-            </a:r>
-          </a:p>
-          <a:p>
             <a:pPr marL="0" indent="0">
               <a:buNone/>
             </a:pPr>
             <a:r>
-              <a:rPr lang="en-US" dirty="0"/>
-              <a:t>2. </a:t>
-            </a:r>
-            <a:r>
               <a:rPr lang="it-IT" dirty="0"/>
-              <a:t>Chi phí Inference Model Fine-Tuned (Khi chạy thật)</a:t>
-            </a:r>
-          </a:p>
-          <a:p>
-            <a:pPr lvl="1"/>
-            <a:r>
-              <a:rPr lang="it-IT" dirty="0"/>
-              <a:t>Sau khi deploy, bạn trả tiền cho:</a:t>
-            </a:r>
-          </a:p>
-          <a:p>
-            <a:pPr lvl="2"/>
-            <a:r>
-              <a:rPr lang="it-IT" dirty="0"/>
-              <a:t>Token input, Token output</a:t>
-            </a:r>
-          </a:p>
-          <a:p>
-            <a:pPr lvl="2"/>
-            <a:r>
-              <a:rPr lang="it-IT" dirty="0"/>
-              <a:t>Model inference compute</a:t>
-            </a:r>
-          </a:p>
-          <a:p>
-            <a:pPr lvl="1"/>
-            <a:r>
-              <a:rPr lang="it-IT" dirty="0"/>
-              <a:t>So sánh</a:t>
-            </a:r>
-          </a:p>
-          <a:p>
-            <a:pPr lvl="2"/>
-            <a:r>
-              <a:rPr lang="vi-VN" dirty="0"/>
-              <a:t>| </a:t>
-            </a:r>
-            <a:r>
-              <a:rPr lang="vi-VN" dirty="0" err="1"/>
-              <a:t>Base</a:t>
-            </a:r>
-            <a:r>
-              <a:rPr lang="vi-VN" dirty="0"/>
-              <a:t> </a:t>
-            </a:r>
-            <a:r>
-              <a:rPr lang="vi-VN" dirty="0" err="1"/>
-              <a:t>Model</a:t>
-            </a:r>
-            <a:r>
-              <a:rPr lang="vi-VN" dirty="0"/>
-              <a:t>        | </a:t>
-            </a:r>
-            <a:r>
-              <a:rPr lang="vi-VN" dirty="0" err="1"/>
-              <a:t>Fine-Tuned</a:t>
-            </a:r>
-            <a:r>
-              <a:rPr lang="vi-VN" dirty="0"/>
-              <a:t> </a:t>
-            </a:r>
-            <a:r>
-              <a:rPr lang="vi-VN" dirty="0" err="1"/>
-              <a:t>Model</a:t>
-            </a:r>
-            <a:r>
-              <a:rPr lang="vi-VN" dirty="0"/>
-              <a:t>          |</a:t>
-            </a:r>
-          </a:p>
-          <a:p>
-            <a:pPr lvl="2"/>
-            <a:r>
-              <a:rPr lang="vi-VN" dirty="0"/>
-              <a:t>| ----------------- | ------------------------- |</a:t>
-            </a:r>
-          </a:p>
-          <a:p>
-            <a:pPr lvl="2"/>
-            <a:r>
-              <a:rPr lang="vi-VN" dirty="0"/>
-              <a:t>| </a:t>
-            </a:r>
-            <a:r>
-              <a:rPr lang="vi-VN" dirty="0" err="1"/>
-              <a:t>Rẻ</a:t>
-            </a:r>
-            <a:r>
-              <a:rPr lang="vi-VN" dirty="0"/>
-              <a:t>                | </a:t>
-            </a:r>
-            <a:r>
-              <a:rPr lang="vi-VN" dirty="0" err="1"/>
-              <a:t>Thường</a:t>
-            </a:r>
-            <a:r>
-              <a:rPr lang="vi-VN" dirty="0"/>
-              <a:t> **</a:t>
-            </a:r>
-            <a:r>
-              <a:rPr lang="vi-VN" dirty="0" err="1"/>
-              <a:t>đắt</a:t>
-            </a:r>
-            <a:r>
-              <a:rPr lang="vi-VN" dirty="0"/>
-              <a:t> hơn 10–30%** |</a:t>
-            </a:r>
-          </a:p>
-          <a:p>
-            <a:pPr lvl="2"/>
-            <a:r>
-              <a:rPr lang="vi-VN" dirty="0"/>
-              <a:t>| Không </a:t>
-            </a:r>
-            <a:r>
-              <a:rPr lang="vi-VN" dirty="0" err="1"/>
-              <a:t>tối</a:t>
-            </a:r>
-            <a:r>
-              <a:rPr lang="vi-VN" dirty="0"/>
-              <a:t> ưu </a:t>
-            </a:r>
-            <a:r>
-              <a:rPr lang="vi-VN" dirty="0" err="1"/>
-              <a:t>task</a:t>
-            </a:r>
-            <a:r>
-              <a:rPr lang="vi-VN" dirty="0"/>
-              <a:t> | </a:t>
-            </a:r>
-            <a:r>
-              <a:rPr lang="vi-VN" dirty="0" err="1"/>
-              <a:t>Chính</a:t>
-            </a:r>
-            <a:r>
-              <a:rPr lang="vi-VN" dirty="0"/>
-              <a:t> </a:t>
-            </a:r>
-            <a:r>
-              <a:rPr lang="vi-VN" dirty="0" err="1"/>
-              <a:t>xác</a:t>
-            </a:r>
-            <a:r>
-              <a:rPr lang="vi-VN" dirty="0"/>
-              <a:t> hơn             |</a:t>
-            </a:r>
-          </a:p>
-          <a:p>
-            <a:pPr lvl="1"/>
-            <a:endParaRPr lang="en-US" dirty="0"/>
-          </a:p>
-        </p:txBody>
-      </p:sp>
-    </p:spTree>
-    <p:extLst>
-      <p:ext uri="{BB962C8B-B14F-4D97-AF65-F5344CB8AC3E}">
-        <p14:creationId xmlns:p14="http://schemas.microsoft.com/office/powerpoint/2010/main" val="2715320065"/>
-      </p:ext>
-    </p:extLst>
-  </p:cSld>
-  <p:clrMapOvr>
-    <a:masterClrMapping/>
-  </p:clrMapOvr>
-</p:sld>
-</file>
-
-<file path=ppt/slides/slide24.xml><?xml version="1.0" encoding="utf-8"?>
-<p:sld xmlns:a="http://schemas.openxmlformats.org/drawingml/2006/main" xmlns:r="http://schemas.openxmlformats.org/officeDocument/2006/relationships" xmlns:p="http://schemas.openxmlformats.org/presentationml/2006/main">
-  <p:cSld>
-    <p:spTree>
-      <p:nvGrpSpPr>
-        <p:cNvPr id="1" name=""/>
-        <p:cNvGrpSpPr/>
-        <p:nvPr/>
-      </p:nvGrpSpPr>
-      <p:grpSpPr>
-        <a:xfrm>
-          <a:off x="0" y="0"/>
-          <a:ext cx="0" cy="0"/>
-          <a:chOff x="0" y="0"/>
-          <a:chExt cx="0" cy="0"/>
-        </a:xfrm>
-      </p:grpSpPr>
-      <p:sp>
-        <p:nvSpPr>
-          <p:cNvPr id="2" name="Title 1">
-            <a:extLst>
-              <a:ext uri="{FF2B5EF4-FFF2-40B4-BE49-F238E27FC236}">
-                <a16:creationId xmlns:a16="http://schemas.microsoft.com/office/drawing/2014/main" id="{D3EB5C88-F4AF-455A-8324-E302EED87B34}"/>
-              </a:ext>
-            </a:extLst>
-          </p:cNvPr>
-          <p:cNvSpPr>
-            <a:spLocks noGrp="1"/>
-          </p:cNvSpPr>
-          <p:nvPr>
-            <p:ph type="title"/>
-          </p:nvPr>
-        </p:nvSpPr>
-        <p:spPr/>
-        <p:txBody>
-          <a:bodyPr/>
-          <a:lstStyle/>
-          <a:p>
-            <a:r>
-              <a:rPr lang="en-US" dirty="0" err="1"/>
-              <a:t>Các</a:t>
-            </a:r>
-            <a:r>
-              <a:rPr lang="en-US" dirty="0"/>
-              <a:t> chi </a:t>
-            </a:r>
-            <a:r>
-              <a:rPr lang="en-US" dirty="0" err="1"/>
-              <a:t>phí</a:t>
-            </a:r>
-            <a:r>
-              <a:rPr lang="en-US" dirty="0"/>
-              <a:t> </a:t>
-            </a:r>
-            <a:r>
-              <a:rPr lang="en-US" dirty="0" err="1"/>
-              <a:t>khi</a:t>
-            </a:r>
-            <a:r>
-              <a:rPr lang="en-US" dirty="0"/>
-              <a:t> </a:t>
-            </a:r>
-            <a:r>
-              <a:rPr lang="en-US" dirty="0" err="1"/>
-              <a:t>triển</a:t>
-            </a:r>
-            <a:r>
-              <a:rPr lang="en-US" dirty="0"/>
-              <a:t> </a:t>
-            </a:r>
-            <a:r>
-              <a:rPr lang="en-US" dirty="0" err="1"/>
-              <a:t>khai</a:t>
-            </a:r>
-            <a:r>
-              <a:rPr lang="en-US" dirty="0"/>
-              <a:t> Fine-Tune </a:t>
-            </a:r>
-            <a:r>
-              <a:rPr lang="en-US" dirty="0" err="1"/>
-              <a:t>trên</a:t>
-            </a:r>
-            <a:r>
-              <a:rPr lang="en-US" dirty="0"/>
-              <a:t> Azure</a:t>
-            </a:r>
-          </a:p>
-        </p:txBody>
-      </p:sp>
-      <p:sp>
-        <p:nvSpPr>
-          <p:cNvPr id="3" name="Content Placeholder 2">
-            <a:extLst>
-              <a:ext uri="{FF2B5EF4-FFF2-40B4-BE49-F238E27FC236}">
-                <a16:creationId xmlns:a16="http://schemas.microsoft.com/office/drawing/2014/main" id="{7E71AD3B-8519-4A93-ACB3-4399F3171A80}"/>
-              </a:ext>
-            </a:extLst>
-          </p:cNvPr>
-          <p:cNvSpPr>
-            <a:spLocks noGrp="1"/>
-          </p:cNvSpPr>
-          <p:nvPr>
-            <p:ph idx="1"/>
-          </p:nvPr>
-        </p:nvSpPr>
-        <p:spPr/>
-        <p:txBody>
-          <a:bodyPr>
-            <a:normAutofit/>
-          </a:bodyPr>
-          <a:lstStyle/>
-          <a:p>
-            <a:pPr marL="0" indent="0">
-              <a:buNone/>
-            </a:pPr>
-            <a:r>
-              <a:rPr lang="en-US" dirty="0"/>
-              <a:t>Chi </a:t>
-            </a:r>
-            <a:r>
-              <a:rPr lang="en-US" dirty="0" err="1"/>
-              <a:t>phí</a:t>
-            </a:r>
-            <a:r>
-              <a:rPr lang="en-US" dirty="0"/>
-              <a:t> </a:t>
-            </a:r>
-            <a:r>
-              <a:rPr lang="en-US" dirty="0" err="1"/>
-              <a:t>triển</a:t>
-            </a:r>
-            <a:r>
-              <a:rPr lang="en-US" dirty="0"/>
-              <a:t> </a:t>
-            </a:r>
-            <a:r>
-              <a:rPr lang="en-US" dirty="0" err="1"/>
-              <a:t>khai</a:t>
-            </a:r>
-            <a:r>
-              <a:rPr lang="en-US" dirty="0"/>
-              <a:t> </a:t>
-            </a:r>
-            <a:r>
-              <a:rPr lang="en-US" dirty="0" err="1"/>
-              <a:t>trên</a:t>
-            </a:r>
-            <a:r>
-              <a:rPr lang="en-US" dirty="0"/>
-              <a:t> Azure</a:t>
-            </a:r>
-          </a:p>
-          <a:p>
-            <a:pPr marL="514350" indent="-514350">
-              <a:buFont typeface="+mj-lt"/>
-              <a:buAutoNum type="arabicPeriod"/>
-            </a:pPr>
-            <a:r>
-              <a:rPr lang="it-IT" dirty="0"/>
-              <a:t>Các chi khác của </a:t>
+              <a:t>4. Các chi khác của </a:t>
             </a:r>
             <a:r>
               <a:rPr lang="en-US" dirty="0" err="1"/>
@@ -9922,7 +10713,7 @@
           <a:lstStyle/>
           <a:p>
             <a:r>
-              <a:rPr lang="vi-VN" b="1" dirty="0" err="1"/>
+              <a:rPr lang="vi-VN" dirty="0" err="1"/>
               <a:t>Fine-tuning</a:t>
             </a:r>
             <a:r>
@@ -10188,8 +10979,16 @@
               <a:t>hình</a:t>
             </a:r>
             <a:r>
-              <a:rPr lang="vi-VN" dirty="0"/>
-              <a:t> Ngôn </a:t>
+              <a:rPr lang="en-US" dirty="0"/>
+              <a:t> n</a:t>
+            </a:r>
+            <a:r>
+              <a:rPr lang="vi-VN" dirty="0" err="1"/>
+              <a:t>gôn</a:t>
+            </a:r>
+            <a:r>
+              <a:rPr lang="vi-VN" dirty="0"/>
+              <a:t> </a:t>
             </a:r>
             <a:r>
               <a:rPr lang="vi-VN" dirty="0" err="1"/>
@@ -10865,7 +11664,7 @@
           <p:cNvPr id="2" name="Title 1">
             <a:extLst>
               <a:ext uri="{FF2B5EF4-FFF2-40B4-BE49-F238E27FC236}">
-                <a16:creationId xmlns:a16="http://schemas.microsoft.com/office/drawing/2014/main" id="{32159C52-6A20-42D2-A0FE-08CFC9B09DB8}"/>
+                <a16:creationId xmlns:a16="http://schemas.microsoft.com/office/drawing/2014/main" id="{5180AB1E-A1D3-4255-85BF-51B4F4CBB03B}"/>
               </a:ext>
             </a:extLst>
           </p:cNvPr>
@@ -10893,7 +11692,7 @@
           <p:cNvPr id="3" name="Content Placeholder 2">
             <a:extLst>
               <a:ext uri="{FF2B5EF4-FFF2-40B4-BE49-F238E27FC236}">
-                <a16:creationId xmlns:a16="http://schemas.microsoft.com/office/drawing/2014/main" id="{38529BA7-22D4-4B9A-9F6B-24783A91C211}"/>
+                <a16:creationId xmlns:a16="http://schemas.microsoft.com/office/drawing/2014/main" id="{6130CD08-91F5-474A-98CC-60A8D3992072}"/>
               </a:ext>
             </a:extLst>
           </p:cNvPr>
@@ -10912,862 +11711,44 @@
             <a:pPr marL="0" indent="0">
               <a:buNone/>
             </a:pPr>
-            <a:r>
-              <a:rPr lang="en-US" dirty="0" err="1"/>
-              <a:t>Mục</a:t>
-            </a:r>
-            <a:r>
-              <a:rPr lang="en-US" dirty="0"/>
-              <a:t> </a:t>
-            </a:r>
-            <a:r>
-              <a:rPr lang="en-US" dirty="0" err="1"/>
-              <a:t>tiêu</a:t>
-            </a:r>
-            <a:r>
-              <a:rPr lang="en-US" dirty="0"/>
-              <a:t> </a:t>
-            </a:r>
-            <a:r>
-              <a:rPr lang="en-US" dirty="0" err="1"/>
-              <a:t>của</a:t>
-            </a:r>
-            <a:r>
-              <a:rPr lang="en-US" dirty="0"/>
-              <a:t> </a:t>
-            </a:r>
-            <a:r>
-              <a:rPr lang="en-US" dirty="0" err="1"/>
-              <a:t>quá</a:t>
-            </a:r>
-            <a:r>
-              <a:rPr lang="en-US" dirty="0"/>
-              <a:t> </a:t>
-            </a:r>
-            <a:r>
-              <a:rPr lang="en-US" dirty="0" err="1"/>
-              <a:t>trình</a:t>
-            </a:r>
-            <a:r>
-              <a:rPr lang="en-US" dirty="0"/>
-              <a:t> </a:t>
-            </a:r>
-            <a:r>
-              <a:rPr lang="en-US" dirty="0" err="1"/>
-              <a:t>này</a:t>
-            </a:r>
-            <a:r>
-              <a:rPr lang="en-US" dirty="0"/>
-              <a:t> </a:t>
-            </a:r>
-            <a:r>
-              <a:rPr lang="en-US" dirty="0" err="1"/>
-              <a:t>là</a:t>
-            </a:r>
-            <a:endParaRPr lang="en-US" dirty="0"/>
-          </a:p>
-          <a:p>
-            <a:r>
-              <a:rPr lang="vi-VN" dirty="0"/>
-              <a:t>Chuyên môn </a:t>
-            </a:r>
-            <a:r>
-              <a:rPr lang="vi-VN" dirty="0" err="1"/>
-              <a:t>hóa</a:t>
-            </a:r>
-            <a:r>
-              <a:rPr lang="vi-VN" dirty="0"/>
-              <a:t>: </a:t>
-            </a:r>
-            <a:r>
-              <a:rPr lang="vi-VN" dirty="0" err="1"/>
-              <a:t>Giúp</a:t>
-            </a:r>
-            <a:r>
-              <a:rPr lang="vi-VN" dirty="0"/>
-              <a:t> mô </a:t>
-            </a:r>
-            <a:r>
-              <a:rPr lang="vi-VN" dirty="0" err="1"/>
-              <a:t>hình</a:t>
-            </a:r>
-            <a:r>
-              <a:rPr lang="vi-VN" dirty="0"/>
-              <a:t> </a:t>
-            </a:r>
-            <a:r>
-              <a:rPr lang="vi-VN" dirty="0" err="1"/>
-              <a:t>hiểu</a:t>
-            </a:r>
-            <a:r>
-              <a:rPr lang="vi-VN" dirty="0"/>
-              <a:t> sâu hơn </a:t>
-            </a:r>
-            <a:r>
-              <a:rPr lang="vi-VN" dirty="0" err="1"/>
-              <a:t>về</a:t>
-            </a:r>
-            <a:r>
-              <a:rPr lang="vi-VN" dirty="0"/>
-              <a:t> </a:t>
-            </a:r>
-            <a:r>
-              <a:rPr lang="vi-VN" dirty="0" err="1"/>
-              <a:t>các</a:t>
-            </a:r>
-            <a:r>
-              <a:rPr lang="vi-VN" dirty="0"/>
-              <a:t> </a:t>
-            </a:r>
-            <a:r>
-              <a:rPr lang="vi-VN" dirty="0" err="1"/>
-              <a:t>thuật</a:t>
-            </a:r>
-            <a:r>
-              <a:rPr lang="vi-VN" dirty="0"/>
-              <a:t> </a:t>
-            </a:r>
-            <a:r>
-              <a:rPr lang="vi-VN" dirty="0" err="1"/>
-              <a:t>ngữ</a:t>
-            </a:r>
-            <a:r>
-              <a:rPr lang="vi-VN" dirty="0"/>
-              <a:t>, </a:t>
-            </a:r>
-            <a:r>
-              <a:rPr lang="vi-VN" dirty="0" err="1"/>
-              <a:t>mẫu</a:t>
-            </a:r>
-            <a:r>
-              <a:rPr lang="vi-VN" dirty="0"/>
-              <a:t> </a:t>
-            </a:r>
-            <a:r>
-              <a:rPr lang="vi-VN" dirty="0" err="1"/>
-              <a:t>dữ</a:t>
-            </a:r>
-            <a:r>
-              <a:rPr lang="vi-VN" dirty="0"/>
-              <a:t> </a:t>
-            </a:r>
-            <a:r>
-              <a:rPr lang="vi-VN" dirty="0" err="1"/>
-              <a:t>liệu</a:t>
-            </a:r>
-            <a:r>
-              <a:rPr lang="vi-VN" dirty="0"/>
-              <a:t> </a:t>
-            </a:r>
-            <a:r>
-              <a:rPr lang="vi-VN" dirty="0" err="1"/>
-              <a:t>hoặc</a:t>
-            </a:r>
-            <a:r>
-              <a:rPr lang="vi-VN" dirty="0"/>
-              <a:t> </a:t>
-            </a:r>
-            <a:r>
-              <a:rPr lang="vi-VN" dirty="0" err="1"/>
-              <a:t>tình</a:t>
-            </a:r>
-            <a:r>
-              <a:rPr lang="vi-VN" dirty="0"/>
-              <a:t> </a:t>
-            </a:r>
-            <a:r>
-              <a:rPr lang="vi-VN" dirty="0" err="1"/>
-              <a:t>huống</a:t>
-            </a:r>
-            <a:r>
-              <a:rPr lang="vi-VN" dirty="0"/>
-              <a:t> </a:t>
-            </a:r>
-            <a:r>
-              <a:rPr lang="vi-VN" dirty="0" err="1"/>
-              <a:t>đặc</a:t>
-            </a:r>
-            <a:r>
-              <a:rPr lang="vi-VN" dirty="0"/>
-              <a:t> </a:t>
-            </a:r>
-            <a:r>
-              <a:rPr lang="vi-VN" dirty="0" err="1"/>
-              <a:t>thù</a:t>
-            </a:r>
-            <a:r>
-              <a:rPr lang="vi-VN" dirty="0"/>
-              <a:t> </a:t>
-            </a:r>
-            <a:r>
-              <a:rPr lang="vi-VN" dirty="0" err="1"/>
-              <a:t>của</a:t>
-            </a:r>
-            <a:r>
-              <a:rPr lang="vi-VN" dirty="0"/>
-              <a:t> </a:t>
-            </a:r>
-            <a:r>
-              <a:rPr lang="vi-VN" dirty="0" err="1"/>
-              <a:t>một</a:t>
-            </a:r>
-            <a:r>
-              <a:rPr lang="vi-VN" dirty="0"/>
-              <a:t> </a:t>
-            </a:r>
-            <a:r>
-              <a:rPr lang="vi-VN" dirty="0" err="1"/>
-              <a:t>lĩnh</a:t>
-            </a:r>
-            <a:r>
-              <a:rPr lang="vi-VN" dirty="0"/>
-              <a:t> </a:t>
-            </a:r>
-            <a:r>
-              <a:rPr lang="vi-VN" dirty="0" err="1"/>
-              <a:t>vực</a:t>
-            </a:r>
-            <a:r>
-              <a:rPr lang="vi-VN" dirty="0"/>
-              <a:t> </a:t>
-            </a:r>
-            <a:r>
-              <a:rPr lang="vi-VN" dirty="0" err="1"/>
-              <a:t>cụ</a:t>
-            </a:r>
-            <a:r>
-              <a:rPr lang="vi-VN" dirty="0"/>
-              <a:t> </a:t>
-            </a:r>
-            <a:r>
-              <a:rPr lang="vi-VN" dirty="0" err="1"/>
-              <a:t>thể</a:t>
-            </a:r>
-            <a:r>
-              <a:rPr lang="vi-VN" dirty="0"/>
-              <a:t> (như y </a:t>
-            </a:r>
-            <a:r>
-              <a:rPr lang="vi-VN" dirty="0" err="1"/>
-              <a:t>tế</a:t>
-            </a:r>
-            <a:r>
-              <a:rPr lang="vi-VN" dirty="0"/>
-              <a:t>, </a:t>
-            </a:r>
-            <a:r>
-              <a:rPr lang="vi-VN" dirty="0" err="1"/>
-              <a:t>pháp</a:t>
-            </a:r>
-            <a:r>
-              <a:rPr lang="vi-VN" dirty="0"/>
-              <a:t> </a:t>
-            </a:r>
-            <a:r>
-              <a:rPr lang="vi-VN" dirty="0" err="1"/>
-              <a:t>lý</a:t>
-            </a:r>
-            <a:r>
-              <a:rPr lang="vi-VN" dirty="0"/>
-              <a:t>, </a:t>
-            </a:r>
-            <a:r>
-              <a:rPr lang="vi-VN" dirty="0" err="1"/>
-              <a:t>tài</a:t>
-            </a:r>
-            <a:r>
-              <a:rPr lang="vi-VN" dirty="0"/>
-              <a:t> </a:t>
-            </a:r>
-            <a:r>
-              <a:rPr lang="vi-VN" dirty="0" err="1"/>
-              <a:t>chính</a:t>
-            </a:r>
-            <a:r>
-              <a:rPr lang="vi-VN" dirty="0"/>
-              <a:t>) </a:t>
-            </a:r>
-            <a:r>
-              <a:rPr lang="vi-VN" dirty="0" err="1"/>
-              <a:t>mà</a:t>
-            </a:r>
-            <a:r>
-              <a:rPr lang="vi-VN" dirty="0"/>
-              <a:t> mô </a:t>
-            </a:r>
-            <a:r>
-              <a:rPr lang="vi-VN" dirty="0" err="1"/>
-              <a:t>hình</a:t>
-            </a:r>
-            <a:r>
-              <a:rPr lang="vi-VN" dirty="0"/>
-              <a:t> </a:t>
-            </a:r>
-            <a:r>
-              <a:rPr lang="vi-VN" dirty="0" err="1"/>
-              <a:t>gốc</a:t>
-            </a:r>
-            <a:r>
-              <a:rPr lang="vi-VN" dirty="0"/>
-              <a:t> </a:t>
-            </a:r>
-            <a:r>
-              <a:rPr lang="vi-VN" dirty="0" err="1"/>
-              <a:t>có</a:t>
-            </a:r>
-            <a:r>
-              <a:rPr lang="vi-VN" dirty="0"/>
-              <a:t> </a:t>
-            </a:r>
-            <a:r>
-              <a:rPr lang="vi-VN" dirty="0" err="1"/>
-              <a:t>thể</a:t>
-            </a:r>
-            <a:r>
-              <a:rPr lang="vi-VN" dirty="0"/>
-              <a:t> chưa </a:t>
-            </a:r>
-            <a:r>
-              <a:rPr lang="vi-VN" dirty="0" err="1"/>
-              <a:t>nắm</a:t>
-            </a:r>
-            <a:r>
-              <a:rPr lang="vi-VN" dirty="0"/>
-              <a:t> </a:t>
-            </a:r>
-            <a:r>
-              <a:rPr lang="vi-VN" dirty="0" err="1"/>
-              <a:t>vững</a:t>
-            </a:r>
-            <a:endParaRPr lang="en-US" dirty="0"/>
-          </a:p>
-          <a:p>
-            <a:r>
-              <a:rPr lang="en-US" dirty="0" err="1"/>
-              <a:t>Thay</a:t>
-            </a:r>
-            <a:r>
-              <a:rPr lang="en-US" dirty="0"/>
-              <a:t> </a:t>
-            </a:r>
-            <a:r>
-              <a:rPr lang="en-US" dirty="0" err="1"/>
-              <a:t>đổi</a:t>
-            </a:r>
-            <a:r>
-              <a:rPr lang="en-US" dirty="0"/>
-              <a:t> </a:t>
-            </a:r>
-            <a:r>
-              <a:rPr lang="en-US" dirty="0" err="1"/>
-              <a:t>hành</a:t>
-            </a:r>
-            <a:r>
-              <a:rPr lang="en-US" dirty="0"/>
-              <a:t> vi: </a:t>
-            </a:r>
-            <a:r>
-              <a:rPr lang="en-US" dirty="0" err="1"/>
-              <a:t>Điều</a:t>
-            </a:r>
-            <a:r>
-              <a:rPr lang="en-US" dirty="0"/>
-              <a:t> </a:t>
-            </a:r>
-            <a:r>
-              <a:rPr lang="en-US" dirty="0" err="1"/>
-              <a:t>chỉnh</a:t>
-            </a:r>
-            <a:r>
-              <a:rPr lang="en-US" dirty="0"/>
-              <a:t> </a:t>
-            </a:r>
-            <a:r>
-              <a:rPr lang="en-US" dirty="0" err="1"/>
-              <a:t>các</a:t>
-            </a:r>
-            <a:r>
-              <a:rPr lang="en-US" dirty="0"/>
-              <a:t> </a:t>
-            </a:r>
-            <a:r>
-              <a:rPr lang="en-US" dirty="0" err="1"/>
-              <a:t>tham</a:t>
-            </a:r>
-            <a:r>
-              <a:rPr lang="en-US" dirty="0"/>
-              <a:t> </a:t>
-            </a:r>
-            <a:r>
-              <a:rPr lang="en-US" dirty="0" err="1"/>
-              <a:t>số</a:t>
-            </a:r>
-            <a:r>
-              <a:rPr lang="en-US" dirty="0"/>
-              <a:t> (weights) </a:t>
-            </a:r>
-            <a:r>
-              <a:rPr lang="en-US" dirty="0" err="1"/>
-              <a:t>bên</a:t>
-            </a:r>
-            <a:r>
-              <a:rPr lang="en-US" dirty="0"/>
-              <a:t> </a:t>
-            </a:r>
-            <a:r>
-              <a:rPr lang="en-US" dirty="0" err="1"/>
-              <a:t>trong</a:t>
-            </a:r>
-            <a:r>
-              <a:rPr lang="en-US" dirty="0"/>
-              <a:t> </a:t>
-            </a:r>
-            <a:r>
-              <a:rPr lang="en-US" dirty="0" err="1"/>
-              <a:t>mô</a:t>
-            </a:r>
-            <a:r>
-              <a:rPr lang="en-US" dirty="0"/>
-              <a:t> </a:t>
-            </a:r>
-            <a:r>
-              <a:rPr lang="en-US" dirty="0" err="1"/>
-              <a:t>hình</a:t>
-            </a:r>
-            <a:r>
-              <a:rPr lang="en-US" dirty="0"/>
-              <a:t> </a:t>
-            </a:r>
-            <a:r>
-              <a:rPr lang="en-US" dirty="0" err="1"/>
-              <a:t>để</a:t>
-            </a:r>
-            <a:r>
-              <a:rPr lang="en-US" dirty="0"/>
-              <a:t> </a:t>
-            </a:r>
-            <a:r>
-              <a:rPr lang="en-US" dirty="0" err="1"/>
-              <a:t>nó</a:t>
-            </a:r>
-            <a:r>
-              <a:rPr lang="en-US" dirty="0"/>
-              <a:t> </a:t>
-            </a:r>
-            <a:r>
-              <a:rPr lang="en-US" dirty="0" err="1"/>
-              <a:t>tạo</a:t>
-            </a:r>
-            <a:r>
-              <a:rPr lang="en-US" dirty="0"/>
-              <a:t> ra </a:t>
-            </a:r>
-            <a:r>
-              <a:rPr lang="en-US" dirty="0" err="1"/>
-              <a:t>đầu</a:t>
-            </a:r>
-            <a:r>
-              <a:rPr lang="en-US" dirty="0"/>
-              <a:t> ra </a:t>
-            </a:r>
-            <a:r>
-              <a:rPr lang="en-US" dirty="0" err="1"/>
-              <a:t>theo</a:t>
-            </a:r>
-            <a:r>
-              <a:rPr lang="en-US" dirty="0"/>
-              <a:t> </a:t>
-            </a:r>
-            <a:r>
-              <a:rPr lang="en-US" dirty="0" err="1"/>
-              <a:t>một</a:t>
-            </a:r>
-            <a:r>
-              <a:rPr lang="en-US" dirty="0"/>
-              <a:t> </a:t>
-            </a:r>
-            <a:r>
-              <a:rPr lang="en-US" dirty="0" err="1"/>
-              <a:t>phong</a:t>
-            </a:r>
-            <a:r>
-              <a:rPr lang="en-US" dirty="0"/>
-              <a:t> </a:t>
-            </a:r>
-            <a:r>
-              <a:rPr lang="en-US" dirty="0" err="1"/>
-              <a:t>cách</a:t>
-            </a:r>
-            <a:r>
-              <a:rPr lang="en-US" dirty="0"/>
-              <a:t>, </a:t>
-            </a:r>
-            <a:r>
-              <a:rPr lang="en-US" dirty="0" err="1"/>
-              <a:t>giọng</a:t>
-            </a:r>
-            <a:r>
-              <a:rPr lang="en-US" dirty="0"/>
-              <a:t> </a:t>
-            </a:r>
-            <a:r>
-              <a:rPr lang="en-US" dirty="0" err="1"/>
-              <a:t>điệu</a:t>
-            </a:r>
-            <a:r>
-              <a:rPr lang="en-US" dirty="0"/>
-              <a:t> </a:t>
-            </a:r>
-            <a:r>
-              <a:rPr lang="en-US" dirty="0" err="1"/>
-              <a:t>hoặc</a:t>
-            </a:r>
-            <a:r>
-              <a:rPr lang="en-US" dirty="0"/>
-              <a:t> </a:t>
-            </a:r>
-            <a:r>
-              <a:rPr lang="en-US" dirty="0" err="1"/>
-              <a:t>định</a:t>
-            </a:r>
-            <a:r>
-              <a:rPr lang="en-US" dirty="0"/>
-              <a:t> </a:t>
-            </a:r>
-            <a:r>
-              <a:rPr lang="en-US" dirty="0" err="1"/>
-              <a:t>dạng</a:t>
-            </a:r>
-            <a:r>
-              <a:rPr lang="en-US" dirty="0"/>
-              <a:t> </a:t>
-            </a:r>
-            <a:r>
-              <a:rPr lang="en-US" dirty="0" err="1"/>
-              <a:t>cố</a:t>
-            </a:r>
-            <a:r>
-              <a:rPr lang="en-US" dirty="0"/>
-              <a:t> </a:t>
-            </a:r>
-            <a:r>
-              <a:rPr lang="en-US" dirty="0" err="1"/>
-              <a:t>định</a:t>
-            </a:r>
-            <a:r>
-              <a:rPr lang="en-US" dirty="0"/>
-              <a:t> (</a:t>
-            </a:r>
-            <a:r>
-              <a:rPr lang="en-US" dirty="0" err="1"/>
-              <a:t>ví</a:t>
-            </a:r>
-            <a:r>
-              <a:rPr lang="en-US" dirty="0"/>
-              <a:t> </a:t>
-            </a:r>
-            <a:r>
-              <a:rPr lang="en-US" dirty="0" err="1"/>
-              <a:t>dụ</a:t>
-            </a:r>
-            <a:r>
-              <a:rPr lang="en-US" dirty="0"/>
-              <a:t>: </a:t>
-            </a:r>
-            <a:r>
-              <a:rPr lang="en-US" dirty="0" err="1"/>
-              <a:t>viết</a:t>
-            </a:r>
-            <a:r>
-              <a:rPr lang="en-US" dirty="0"/>
-              <a:t> </a:t>
-            </a:r>
-            <a:r>
-              <a:rPr lang="en-US" dirty="0" err="1"/>
-              <a:t>báo</a:t>
-            </a:r>
-            <a:r>
-              <a:rPr lang="en-US" dirty="0"/>
-              <a:t> </a:t>
-            </a:r>
-            <a:r>
-              <a:rPr lang="en-US" dirty="0" err="1"/>
-              <a:t>cáo</a:t>
-            </a:r>
-            <a:r>
-              <a:rPr lang="en-US" dirty="0"/>
-              <a:t> </a:t>
-            </a:r>
-            <a:r>
-              <a:rPr lang="en-US" dirty="0" err="1"/>
-              <a:t>theo</a:t>
-            </a:r>
-            <a:r>
-              <a:rPr lang="en-US" dirty="0"/>
-              <a:t> </a:t>
-            </a:r>
-            <a:r>
-              <a:rPr lang="en-US" dirty="0" err="1"/>
-              <a:t>mẫu</a:t>
-            </a:r>
-            <a:r>
-              <a:rPr lang="en-US" dirty="0"/>
-              <a:t>, </a:t>
-            </a:r>
-            <a:r>
-              <a:rPr lang="en-US" dirty="0" err="1"/>
-              <a:t>viết</a:t>
-            </a:r>
-            <a:r>
-              <a:rPr lang="en-US" dirty="0"/>
-              <a:t> code </a:t>
-            </a:r>
-            <a:r>
-              <a:rPr lang="en-US" dirty="0" err="1"/>
-              <a:t>theo</a:t>
-            </a:r>
-            <a:r>
-              <a:rPr lang="en-US" dirty="0"/>
-              <a:t> </a:t>
-            </a:r>
-            <a:r>
-              <a:rPr lang="en-US" dirty="0" err="1"/>
-              <a:t>chuẩn</a:t>
-            </a:r>
-            <a:r>
-              <a:rPr lang="en-US" dirty="0"/>
-              <a:t> </a:t>
-            </a:r>
-            <a:r>
-              <a:rPr lang="en-US" dirty="0" err="1"/>
-              <a:t>riêng</a:t>
-            </a:r>
-            <a:r>
-              <a:rPr lang="en-US" dirty="0"/>
-              <a:t>)</a:t>
-            </a:r>
-          </a:p>
-          <a:p>
-            <a:r>
-              <a:rPr lang="en-US" dirty="0" err="1"/>
-              <a:t>Hiệu</a:t>
-            </a:r>
-            <a:r>
-              <a:rPr lang="en-US" dirty="0"/>
-              <a:t> </a:t>
-            </a:r>
-            <a:r>
-              <a:rPr lang="en-US" dirty="0" err="1"/>
-              <a:t>quả</a:t>
-            </a:r>
-            <a:r>
-              <a:rPr lang="en-US" dirty="0"/>
-              <a:t>: </a:t>
-            </a:r>
-            <a:r>
-              <a:rPr lang="en-US" dirty="0" err="1"/>
-              <a:t>Biến</a:t>
-            </a:r>
-            <a:r>
-              <a:rPr lang="en-US" dirty="0"/>
-              <a:t> </a:t>
-            </a:r>
-            <a:r>
-              <a:rPr lang="en-US" dirty="0" err="1"/>
-              <a:t>một</a:t>
-            </a:r>
-            <a:r>
-              <a:rPr lang="en-US" dirty="0"/>
-              <a:t> </a:t>
-            </a:r>
-            <a:r>
-              <a:rPr lang="en-US" dirty="0" err="1"/>
-              <a:t>mô</a:t>
-            </a:r>
-            <a:r>
-              <a:rPr lang="en-US" dirty="0"/>
-              <a:t> </a:t>
-            </a:r>
-            <a:r>
-              <a:rPr lang="en-US" dirty="0" err="1"/>
-              <a:t>hình</a:t>
-            </a:r>
-            <a:r>
-              <a:rPr lang="en-US" dirty="0"/>
-              <a:t> </a:t>
-            </a:r>
-            <a:r>
-              <a:rPr lang="en-US" dirty="0" err="1"/>
-              <a:t>tổng</a:t>
-            </a:r>
-            <a:r>
-              <a:rPr lang="en-US" dirty="0"/>
-              <a:t> </a:t>
-            </a:r>
-            <a:r>
-              <a:rPr lang="en-US" dirty="0" err="1"/>
-              <a:t>quát</a:t>
-            </a:r>
-            <a:r>
-              <a:rPr lang="en-US" dirty="0"/>
-              <a:t> </a:t>
-            </a:r>
-            <a:r>
-              <a:rPr lang="en-US" dirty="0" err="1"/>
-              <a:t>thành</a:t>
-            </a:r>
-            <a:r>
-              <a:rPr lang="en-US" dirty="0"/>
-              <a:t> </a:t>
-            </a:r>
-            <a:r>
-              <a:rPr lang="en-US" dirty="0" err="1"/>
-              <a:t>một</a:t>
-            </a:r>
-            <a:r>
-              <a:rPr lang="en-US" dirty="0"/>
-              <a:t> "</a:t>
-            </a:r>
-            <a:r>
-              <a:rPr lang="en-US" dirty="0" err="1"/>
-              <a:t>chuyên</a:t>
-            </a:r>
-            <a:r>
-              <a:rPr lang="en-US" dirty="0"/>
-              <a:t> </a:t>
-            </a:r>
-            <a:r>
-              <a:rPr lang="en-US" dirty="0" err="1"/>
-              <a:t>gia</a:t>
-            </a:r>
-            <a:r>
-              <a:rPr lang="en-US" dirty="0"/>
-              <a:t>" </a:t>
-            </a:r>
-            <a:r>
-              <a:rPr lang="en-US" dirty="0" err="1"/>
-              <a:t>trong</a:t>
-            </a:r>
-            <a:r>
-              <a:rPr lang="en-US" dirty="0"/>
-              <a:t> </a:t>
-            </a:r>
-            <a:r>
-              <a:rPr lang="en-US" dirty="0" err="1"/>
-              <a:t>lĩnh</a:t>
-            </a:r>
-            <a:r>
-              <a:rPr lang="en-US" dirty="0"/>
-              <a:t> </a:t>
-            </a:r>
-            <a:r>
-              <a:rPr lang="en-US" dirty="0" err="1"/>
-              <a:t>vực</a:t>
-            </a:r>
-            <a:r>
-              <a:rPr lang="en-US" dirty="0"/>
-              <a:t> </a:t>
-            </a:r>
-            <a:r>
-              <a:rPr lang="en-US" dirty="0" err="1"/>
-              <a:t>hẹp</a:t>
-            </a:r>
-            <a:r>
-              <a:rPr lang="en-US" dirty="0"/>
-              <a:t>, </a:t>
-            </a:r>
-            <a:r>
-              <a:rPr lang="en-US" dirty="0" err="1"/>
-              <a:t>giúp</a:t>
-            </a:r>
-            <a:r>
-              <a:rPr lang="en-US" dirty="0"/>
-              <a:t> </a:t>
-            </a:r>
-            <a:r>
-              <a:rPr lang="en-US" dirty="0" err="1"/>
-              <a:t>tăng</a:t>
-            </a:r>
-            <a:r>
-              <a:rPr lang="en-US" dirty="0"/>
-              <a:t> </a:t>
-            </a:r>
-            <a:r>
-              <a:rPr lang="en-US" dirty="0" err="1"/>
-              <a:t>độ</a:t>
-            </a:r>
-            <a:r>
-              <a:rPr lang="en-US" dirty="0"/>
-              <a:t> </a:t>
-            </a:r>
-            <a:r>
-              <a:rPr lang="en-US" dirty="0" err="1"/>
-              <a:t>chính</a:t>
-            </a:r>
-            <a:r>
-              <a:rPr lang="en-US" dirty="0"/>
-              <a:t> </a:t>
-            </a:r>
-            <a:r>
-              <a:rPr lang="en-US" dirty="0" err="1"/>
-              <a:t>xác</a:t>
-            </a:r>
-            <a:r>
-              <a:rPr lang="en-US" dirty="0"/>
-              <a:t> </a:t>
-            </a:r>
-            <a:r>
-              <a:rPr lang="en-US" dirty="0" err="1"/>
-              <a:t>cho</a:t>
-            </a:r>
-            <a:r>
-              <a:rPr lang="en-US" dirty="0"/>
-              <a:t> </a:t>
-            </a:r>
-            <a:r>
-              <a:rPr lang="en-US" dirty="0" err="1"/>
-              <a:t>các</a:t>
-            </a:r>
-            <a:r>
-              <a:rPr lang="en-US" dirty="0"/>
-              <a:t> </a:t>
-            </a:r>
-            <a:r>
-              <a:rPr lang="en-US" dirty="0" err="1"/>
-              <a:t>tác</a:t>
-            </a:r>
-            <a:r>
-              <a:rPr lang="en-US" dirty="0"/>
-              <a:t> </a:t>
-            </a:r>
-            <a:r>
-              <a:rPr lang="en-US" dirty="0" err="1"/>
-              <a:t>vụ</a:t>
-            </a:r>
-            <a:r>
-              <a:rPr lang="en-US" dirty="0"/>
-              <a:t> </a:t>
-            </a:r>
-            <a:r>
-              <a:rPr lang="en-US" dirty="0" err="1"/>
-              <a:t>cụ</a:t>
-            </a:r>
-            <a:r>
-              <a:rPr lang="en-US" dirty="0"/>
-              <a:t> </a:t>
-            </a:r>
-            <a:r>
-              <a:rPr lang="en-US" dirty="0" err="1"/>
-              <a:t>thể</a:t>
-            </a:r>
             <a:endParaRPr lang="en-US" dirty="0"/>
           </a:p>
         </p:txBody>
       </p:sp>
+      <p:pic>
+        <p:nvPicPr>
+          <p:cNvPr id="5" name="Picture 4">
+            <a:extLst>
+              <a:ext uri="{FF2B5EF4-FFF2-40B4-BE49-F238E27FC236}">
+                <a16:creationId xmlns:a16="http://schemas.microsoft.com/office/drawing/2014/main" id="{A4841E7E-6E50-4B8D-8CDB-6E9FD523512A}"/>
+              </a:ext>
+            </a:extLst>
+          </p:cNvPr>
+          <p:cNvPicPr>
+            <a:picLocks noChangeAspect="1"/>
+          </p:cNvPicPr>
+          <p:nvPr/>
+        </p:nvPicPr>
+        <p:blipFill>
+          <a:blip r:embed="rId2"/>
+          <a:stretch>
+            <a:fillRect/>
+          </a:stretch>
+        </p:blipFill>
+        <p:spPr>
+          <a:xfrm>
+            <a:off x="1297777" y="2346533"/>
+            <a:ext cx="9247164" cy="3865769"/>
+          </a:xfrm>
+          <a:prstGeom prst="rect">
+            <a:avLst/>
+          </a:prstGeom>
+        </p:spPr>
+      </p:pic>
     </p:spTree>
     <p:extLst>
       <p:ext uri="{BB962C8B-B14F-4D97-AF65-F5344CB8AC3E}">
-        <p14:creationId xmlns:p14="http://schemas.microsoft.com/office/powerpoint/2010/main" val="3777636830"/>
+        <p14:creationId xmlns:p14="http://schemas.microsoft.com/office/powerpoint/2010/main" val="26255296"/>
       </p:ext>
     </p:extLst>
   </p:cSld>
@@ -11799,7 +11780,7 @@
           <p:cNvPr id="2" name="Title 1">
             <a:extLst>
               <a:ext uri="{FF2B5EF4-FFF2-40B4-BE49-F238E27FC236}">
-                <a16:creationId xmlns:a16="http://schemas.microsoft.com/office/drawing/2014/main" id="{F79238BA-BC47-4B6C-98CA-E36358425DAC}"/>
+                <a16:creationId xmlns:a16="http://schemas.microsoft.com/office/drawing/2014/main" id="{32159C52-6A20-42D2-A0FE-08CFC9B09DB8}"/>
               </a:ext>
             </a:extLst>
           </p:cNvPr>
@@ -11816,10 +11797,9 @@
           <a:lstStyle/>
           <a:p>
             <a:r>
-              <a:rPr lang="de-DE" dirty="0"/>
-              <a:t>Fine-tune &amp; RAG &amp; (System + User) Prompt</a:t>
-            </a:r>
-            <a:endParaRPr lang="en-US" dirty="0"/>
+              <a:rPr lang="en-US" dirty="0"/>
+              <a:t>2. Fine-tuning</a:t>
+            </a:r>
           </a:p>
         </p:txBody>
       </p:sp>
@@ -11828,7 +11808,7 @@
           <p:cNvPr id="3" name="Content Placeholder 2">
             <a:extLst>
               <a:ext uri="{FF2B5EF4-FFF2-40B4-BE49-F238E27FC236}">
-                <a16:creationId xmlns:a16="http://schemas.microsoft.com/office/drawing/2014/main" id="{87F2818A-5523-452C-A173-92E5B3C4628C}"/>
+                <a16:creationId xmlns:a16="http://schemas.microsoft.com/office/drawing/2014/main" id="{38529BA7-22D4-4B9A-9F6B-24783A91C211}"/>
               </a:ext>
             </a:extLst>
           </p:cNvPr>
@@ -11849,589 +11829,851 @@
             </a:pPr>
             <a:r>
               <a:rPr lang="en-US" dirty="0" err="1"/>
-              <a:t>Bản</a:t>
-            </a:r>
-            <a:r>
-              <a:rPr lang="en-US" dirty="0"/>
-              <a:t> </a:t>
-            </a:r>
-            <a:r>
-              <a:rPr lang="en-US" dirty="0" err="1"/>
-              <a:t>chất</a:t>
-            </a:r>
-            <a:r>
-              <a:rPr lang="en-US" dirty="0"/>
-              <a:t> </a:t>
-            </a:r>
-            <a:r>
-              <a:rPr lang="en-US" dirty="0" err="1"/>
-              <a:t>cốt</a:t>
-            </a:r>
-            <a:r>
-              <a:rPr lang="en-US" dirty="0"/>
-              <a:t> </a:t>
-            </a:r>
-            <a:r>
-              <a:rPr lang="en-US" dirty="0" err="1"/>
-              <a:t>lõi</a:t>
+              <a:t>Mục</a:t>
+            </a:r>
+            <a:r>
+              <a:rPr lang="en-US" dirty="0"/>
+              <a:t> </a:t>
+            </a:r>
+            <a:r>
+              <a:rPr lang="en-US" dirty="0" err="1"/>
+              <a:t>tiêu</a:t>
+            </a:r>
+            <a:r>
+              <a:rPr lang="en-US" dirty="0"/>
+              <a:t> </a:t>
+            </a:r>
+            <a:r>
+              <a:rPr lang="en-US" dirty="0" err="1"/>
+              <a:t>của</a:t>
+            </a:r>
+            <a:r>
+              <a:rPr lang="en-US" dirty="0"/>
+              <a:t> </a:t>
+            </a:r>
+            <a:r>
+              <a:rPr lang="en-US" dirty="0" err="1"/>
+              <a:t>quá</a:t>
+            </a:r>
+            <a:r>
+              <a:rPr lang="en-US" dirty="0"/>
+              <a:t> </a:t>
+            </a:r>
+            <a:r>
+              <a:rPr lang="en-US" dirty="0" err="1"/>
+              <a:t>trình</a:t>
+            </a:r>
+            <a:r>
+              <a:rPr lang="en-US" dirty="0"/>
+              <a:t> </a:t>
+            </a:r>
+            <a:r>
+              <a:rPr lang="en-US" dirty="0" err="1"/>
+              <a:t>này</a:t>
+            </a:r>
+            <a:r>
+              <a:rPr lang="en-US" dirty="0"/>
+              <a:t> </a:t>
+            </a:r>
+            <a:r>
+              <a:rPr lang="en-US" dirty="0" err="1"/>
+              <a:t>là</a:t>
             </a:r>
             <a:endParaRPr lang="en-US" dirty="0"/>
           </a:p>
           <a:p>
             <a:r>
-              <a:rPr lang="vi-VN" dirty="0" err="1"/>
-              <a:t>System</a:t>
-            </a:r>
-            <a:r>
-              <a:rPr lang="vi-VN" dirty="0"/>
-              <a:t> + </a:t>
-            </a:r>
-            <a:r>
-              <a:rPr lang="vi-VN" dirty="0" err="1"/>
-              <a:t>User</a:t>
-            </a:r>
-            <a:r>
-              <a:rPr lang="vi-VN" dirty="0"/>
-              <a:t> </a:t>
-            </a:r>
-            <a:r>
-              <a:rPr lang="vi-VN" dirty="0" err="1"/>
-              <a:t>Prompt</a:t>
-            </a:r>
-            <a:r>
-              <a:rPr lang="vi-VN" dirty="0"/>
+              <a:rPr lang="vi-VN" dirty="0"/>
+              <a:t>Chuyên môn </a:t>
+            </a:r>
+            <a:r>
+              <a:rPr lang="vi-VN" dirty="0" err="1"/>
+              <a:t>hóa</a:t>
+            </a:r>
+            <a:r>
+              <a:rPr lang="vi-VN" dirty="0"/>
+              <a:t>: </a:t>
+            </a:r>
+            <a:r>
+              <a:rPr lang="vi-VN" dirty="0" err="1"/>
+              <a:t>Giúp</a:t>
+            </a:r>
+            <a:r>
+              <a:rPr lang="vi-VN" dirty="0"/>
+              <a:t> mô </a:t>
+            </a:r>
+            <a:r>
+              <a:rPr lang="vi-VN" dirty="0" err="1"/>
+              <a:t>hình</a:t>
+            </a:r>
+            <a:r>
+              <a:rPr lang="vi-VN" dirty="0"/>
+              <a:t> </a:t>
+            </a:r>
+            <a:r>
+              <a:rPr lang="vi-VN" dirty="0" err="1"/>
+              <a:t>hiểu</a:t>
+            </a:r>
+            <a:r>
+              <a:rPr lang="vi-VN" dirty="0"/>
+              <a:t> sâu hơn </a:t>
+            </a:r>
+            <a:r>
+              <a:rPr lang="vi-VN" dirty="0" err="1"/>
+              <a:t>về</a:t>
+            </a:r>
+            <a:r>
+              <a:rPr lang="vi-VN" dirty="0"/>
+              <a:t> </a:t>
+            </a:r>
+            <a:r>
+              <a:rPr lang="vi-VN" dirty="0" err="1"/>
+              <a:t>các</a:t>
+            </a:r>
+            <a:r>
+              <a:rPr lang="vi-VN" dirty="0"/>
+              <a:t> </a:t>
+            </a:r>
+            <a:r>
+              <a:rPr lang="vi-VN" dirty="0" err="1"/>
+              <a:t>thuật</a:t>
+            </a:r>
+            <a:r>
+              <a:rPr lang="vi-VN" dirty="0"/>
+              <a:t> </a:t>
+            </a:r>
+            <a:r>
+              <a:rPr lang="vi-VN" dirty="0" err="1"/>
+              <a:t>ngữ</a:t>
+            </a:r>
+            <a:r>
+              <a:rPr lang="vi-VN" dirty="0"/>
+              <a:t>, </a:t>
+            </a:r>
+            <a:r>
+              <a:rPr lang="vi-VN" dirty="0" err="1"/>
+              <a:t>mẫu</a:t>
+            </a:r>
+            <a:r>
+              <a:rPr lang="vi-VN" dirty="0"/>
+              <a:t> </a:t>
+            </a:r>
+            <a:r>
+              <a:rPr lang="vi-VN" dirty="0" err="1"/>
+              <a:t>dữ</a:t>
+            </a:r>
+            <a:r>
+              <a:rPr lang="vi-VN" dirty="0"/>
+              <a:t> </a:t>
+            </a:r>
+            <a:r>
+              <a:rPr lang="vi-VN" dirty="0" err="1"/>
+              <a:t>liệu</a:t>
+            </a:r>
+            <a:r>
+              <a:rPr lang="vi-VN" dirty="0"/>
+              <a:t> </a:t>
+            </a:r>
+            <a:r>
+              <a:rPr lang="vi-VN" dirty="0" err="1"/>
+              <a:t>hoặc</a:t>
+            </a:r>
+            <a:r>
+              <a:rPr lang="vi-VN" dirty="0"/>
+              <a:t> </a:t>
+            </a:r>
+            <a:r>
+              <a:rPr lang="vi-VN" dirty="0" err="1"/>
+              <a:t>tình</a:t>
+            </a:r>
+            <a:r>
+              <a:rPr lang="vi-VN" dirty="0"/>
+              <a:t> </a:t>
+            </a:r>
+            <a:r>
+              <a:rPr lang="vi-VN" dirty="0" err="1"/>
+              <a:t>huống</a:t>
+            </a:r>
+            <a:r>
+              <a:rPr lang="vi-VN" dirty="0"/>
+              <a:t> </a:t>
+            </a:r>
+            <a:r>
+              <a:rPr lang="vi-VN" dirty="0" err="1"/>
+              <a:t>đặc</a:t>
+            </a:r>
+            <a:r>
+              <a:rPr lang="vi-VN" dirty="0"/>
+              <a:t> </a:t>
+            </a:r>
+            <a:r>
+              <a:rPr lang="vi-VN" dirty="0" err="1"/>
+              <a:t>thù</a:t>
+            </a:r>
+            <a:r>
+              <a:rPr lang="vi-VN" dirty="0"/>
+              <a:t> </a:t>
+            </a:r>
+            <a:r>
+              <a:rPr lang="vi-VN" dirty="0" err="1"/>
+              <a:t>của</a:t>
+            </a:r>
+            <a:r>
+              <a:rPr lang="vi-VN" dirty="0"/>
+              <a:t> </a:t>
+            </a:r>
+            <a:r>
+              <a:rPr lang="vi-VN" dirty="0" err="1"/>
+              <a:t>một</a:t>
+            </a:r>
+            <a:r>
+              <a:rPr lang="vi-VN" dirty="0"/>
+              <a:t> </a:t>
+            </a:r>
+            <a:r>
+              <a:rPr lang="vi-VN" dirty="0" err="1"/>
+              <a:t>lĩnh</a:t>
+            </a:r>
+            <a:r>
+              <a:rPr lang="vi-VN" dirty="0"/>
+              <a:t> </a:t>
+            </a:r>
+            <a:r>
+              <a:rPr lang="vi-VN" dirty="0" err="1"/>
+              <a:t>vực</a:t>
+            </a:r>
+            <a:r>
+              <a:rPr lang="vi-VN" dirty="0"/>
+              <a:t> </a:t>
+            </a:r>
+            <a:r>
+              <a:rPr lang="vi-VN" dirty="0" err="1"/>
+              <a:t>cụ</a:t>
+            </a:r>
+            <a:r>
+              <a:rPr lang="vi-VN" dirty="0"/>
+              <a:t> </a:t>
+            </a:r>
+            <a:r>
+              <a:rPr lang="vi-VN" dirty="0" err="1"/>
+              <a:t>thể</a:t>
+            </a:r>
+            <a:r>
+              <a:rPr lang="vi-VN" dirty="0"/>
+              <a:t> (như y </a:t>
+            </a:r>
+            <a:r>
+              <a:rPr lang="vi-VN" dirty="0" err="1"/>
+              <a:t>tế</a:t>
+            </a:r>
+            <a:r>
+              <a:rPr lang="vi-VN" dirty="0"/>
+              <a:t>, </a:t>
+            </a:r>
+            <a:r>
+              <a:rPr lang="vi-VN" dirty="0" err="1"/>
+              <a:t>pháp</a:t>
+            </a:r>
+            <a:r>
+              <a:rPr lang="vi-VN" dirty="0"/>
+              <a:t> </a:t>
+            </a:r>
+            <a:r>
+              <a:rPr lang="vi-VN" dirty="0" err="1"/>
+              <a:t>lý</a:t>
+            </a:r>
+            <a:r>
+              <a:rPr lang="vi-VN" dirty="0"/>
+              <a:t>, </a:t>
+            </a:r>
+            <a:r>
+              <a:rPr lang="vi-VN" dirty="0" err="1"/>
+              <a:t>tài</a:t>
+            </a:r>
+            <a:r>
+              <a:rPr lang="vi-VN" dirty="0"/>
+              <a:t> </a:t>
+            </a:r>
+            <a:r>
+              <a:rPr lang="vi-VN" dirty="0" err="1"/>
+              <a:t>chính</a:t>
+            </a:r>
+            <a:r>
+              <a:rPr lang="vi-VN" dirty="0"/>
+              <a:t>) </a:t>
+            </a:r>
+            <a:r>
+              <a:rPr lang="vi-VN" dirty="0" err="1"/>
+              <a:t>mà</a:t>
+            </a:r>
+            <a:r>
+              <a:rPr lang="vi-VN" dirty="0"/>
+              <a:t> mô </a:t>
+            </a:r>
+            <a:r>
+              <a:rPr lang="vi-VN" dirty="0" err="1"/>
+              <a:t>hình</a:t>
+            </a:r>
+            <a:r>
+              <a:rPr lang="vi-VN" dirty="0"/>
+              <a:t> </a:t>
+            </a:r>
+            <a:r>
+              <a:rPr lang="vi-VN" dirty="0" err="1"/>
+              <a:t>gốc</a:t>
+            </a:r>
+            <a:r>
+              <a:rPr lang="vi-VN" dirty="0"/>
+              <a:t> </a:t>
+            </a:r>
+            <a:r>
+              <a:rPr lang="vi-VN" dirty="0" err="1"/>
+              <a:t>có</a:t>
+            </a:r>
+            <a:r>
+              <a:rPr lang="vi-VN" dirty="0"/>
+              <a:t> </a:t>
+            </a:r>
+            <a:r>
+              <a:rPr lang="vi-VN" dirty="0" err="1"/>
+              <a:t>thể</a:t>
+            </a:r>
+            <a:r>
+              <a:rPr lang="vi-VN" dirty="0"/>
+              <a:t> chưa </a:t>
+            </a:r>
+            <a:r>
+              <a:rPr lang="vi-VN" dirty="0" err="1"/>
+              <a:t>nắm</a:t>
+            </a:r>
+            <a:r>
+              <a:rPr lang="vi-VN" dirty="0"/>
+              <a:t> </a:t>
+            </a:r>
+            <a:r>
+              <a:rPr lang="vi-VN" dirty="0" err="1"/>
+              <a:t>vững</a:t>
+            </a:r>
+            <a:endParaRPr lang="en-US" dirty="0"/>
+          </a:p>
+          <a:p>
+            <a:r>
+              <a:rPr lang="en-US" dirty="0" err="1"/>
+              <a:t>Thay</a:t>
+            </a:r>
+            <a:r>
+              <a:rPr lang="en-US" dirty="0"/>
+              <a:t> </a:t>
+            </a:r>
+            <a:r>
+              <a:rPr lang="en-US" dirty="0" err="1"/>
+              <a:t>đổi</a:t>
+            </a:r>
+            <a:r>
+              <a:rPr lang="en-US" dirty="0"/>
+              <a:t> </a:t>
+            </a:r>
+            <a:r>
+              <a:rPr lang="en-US" dirty="0" err="1"/>
+              <a:t>hành</a:t>
+            </a:r>
+            <a:r>
+              <a:rPr lang="en-US" dirty="0"/>
+              <a:t> vi: </a:t>
+            </a:r>
+            <a:r>
+              <a:rPr lang="en-US" dirty="0" err="1"/>
+              <a:t>Điều</a:t>
+            </a:r>
+            <a:r>
+              <a:rPr lang="en-US" dirty="0"/>
+              <a:t> </a:t>
+            </a:r>
+            <a:r>
+              <a:rPr lang="en-US" dirty="0" err="1"/>
+              <a:t>chỉnh</a:t>
+            </a:r>
+            <a:r>
+              <a:rPr lang="en-US" dirty="0"/>
+              <a:t> </a:t>
+            </a:r>
+            <a:r>
+              <a:rPr lang="en-US" dirty="0" err="1"/>
+              <a:t>các</a:t>
+            </a:r>
+            <a:r>
+              <a:rPr lang="en-US" dirty="0"/>
+              <a:t> </a:t>
+            </a:r>
+            <a:r>
+              <a:rPr lang="en-US" dirty="0" err="1"/>
+              <a:t>tham</a:t>
+            </a:r>
+            <a:r>
+              <a:rPr lang="en-US" dirty="0"/>
+              <a:t> </a:t>
+            </a:r>
+            <a:r>
+              <a:rPr lang="en-US" dirty="0" err="1"/>
+              <a:t>số</a:t>
+            </a:r>
+            <a:r>
+              <a:rPr lang="en-US" dirty="0"/>
+              <a:t> (weights) </a:t>
+            </a:r>
+            <a:r>
+              <a:rPr lang="en-US" dirty="0" err="1"/>
+              <a:t>bên</a:t>
+            </a:r>
+            <a:r>
+              <a:rPr lang="en-US" dirty="0"/>
+              <a:t> </a:t>
+            </a:r>
+            <a:r>
+              <a:rPr lang="en-US" dirty="0" err="1"/>
+              <a:t>trong</a:t>
+            </a:r>
+            <a:r>
+              <a:rPr lang="en-US" dirty="0"/>
+              <a:t> </a:t>
+            </a:r>
+            <a:r>
+              <a:rPr lang="en-US" dirty="0" err="1"/>
+              <a:t>mô</a:t>
+            </a:r>
+            <a:r>
+              <a:rPr lang="en-US" dirty="0"/>
+              <a:t> </a:t>
+            </a:r>
+            <a:r>
+              <a:rPr lang="en-US" dirty="0" err="1"/>
+              <a:t>hình</a:t>
+            </a:r>
+            <a:r>
+              <a:rPr lang="en-US" dirty="0"/>
+              <a:t> </a:t>
+            </a:r>
+            <a:r>
+              <a:rPr lang="en-US" dirty="0" err="1"/>
+              <a:t>để</a:t>
+            </a:r>
+            <a:r>
+              <a:rPr lang="en-US" dirty="0"/>
+              <a:t> </a:t>
+            </a:r>
+            <a:r>
+              <a:rPr lang="en-US" dirty="0" err="1"/>
+              <a:t>nó</a:t>
+            </a:r>
+            <a:r>
+              <a:rPr lang="en-US" dirty="0"/>
+              <a:t> </a:t>
+            </a:r>
+            <a:r>
+              <a:rPr lang="en-US" dirty="0" err="1"/>
+              <a:t>tạo</a:t>
+            </a:r>
+            <a:r>
+              <a:rPr lang="en-US" dirty="0"/>
+              <a:t> ra </a:t>
+            </a:r>
+            <a:r>
+              <a:rPr lang="en-US" dirty="0" err="1"/>
+              <a:t>đầu</a:t>
+            </a:r>
+            <a:r>
+              <a:rPr lang="en-US" dirty="0"/>
+              <a:t> ra </a:t>
+            </a:r>
+            <a:r>
+              <a:rPr lang="en-US" dirty="0" err="1"/>
+              <a:t>theo</a:t>
+            </a:r>
+            <a:r>
+              <a:rPr lang="en-US" dirty="0"/>
+              <a:t> </a:t>
+            </a:r>
+            <a:r>
+              <a:rPr lang="en-US" dirty="0" err="1"/>
+              <a:t>một</a:t>
+            </a:r>
+            <a:r>
+              <a:rPr lang="en-US" dirty="0"/>
+              <a:t> </a:t>
+            </a:r>
+            <a:r>
+              <a:rPr lang="en-US" dirty="0" err="1"/>
+              <a:t>phong</a:t>
+            </a:r>
+            <a:r>
+              <a:rPr lang="en-US" dirty="0"/>
+              <a:t> </a:t>
+            </a:r>
+            <a:r>
+              <a:rPr lang="en-US" dirty="0" err="1"/>
+              <a:t>cách</a:t>
+            </a:r>
+            <a:r>
+              <a:rPr lang="en-US" dirty="0"/>
+              <a:t>, </a:t>
+            </a:r>
+            <a:r>
+              <a:rPr lang="en-US" dirty="0" err="1"/>
+              <a:t>giọng</a:t>
+            </a:r>
+            <a:r>
+              <a:rPr lang="en-US" dirty="0"/>
+              <a:t> </a:t>
+            </a:r>
+            <a:r>
+              <a:rPr lang="en-US" dirty="0" err="1"/>
+              <a:t>điệu</a:t>
+            </a:r>
+            <a:r>
+              <a:rPr lang="en-US" dirty="0"/>
+              <a:t> </a:t>
+            </a:r>
+            <a:r>
+              <a:rPr lang="en-US" dirty="0" err="1"/>
+              <a:t>hoặc</a:t>
+            </a:r>
+            <a:r>
+              <a:rPr lang="en-US" dirty="0"/>
+              <a:t> </a:t>
+            </a:r>
+            <a:r>
+              <a:rPr lang="en-US" dirty="0" err="1"/>
+              <a:t>định</a:t>
+            </a:r>
+            <a:r>
+              <a:rPr lang="en-US" dirty="0"/>
+              <a:t> </a:t>
+            </a:r>
+            <a:r>
+              <a:rPr lang="en-US" dirty="0" err="1"/>
+              <a:t>dạng</a:t>
+            </a:r>
+            <a:r>
+              <a:rPr lang="en-US" dirty="0"/>
+              <a:t> </a:t>
+            </a:r>
+            <a:r>
+              <a:rPr lang="en-US" dirty="0" err="1"/>
+              <a:t>cố</a:t>
+            </a:r>
+            <a:r>
+              <a:rPr lang="en-US" dirty="0"/>
+              <a:t> </a:t>
+            </a:r>
+            <a:r>
+              <a:rPr lang="en-US" dirty="0" err="1"/>
+              <a:t>định</a:t>
+            </a:r>
+            <a:r>
+              <a:rPr lang="en-US" dirty="0"/>
               <a:t> (</a:t>
             </a:r>
             <a:r>
-              <a:rPr lang="vi-VN" dirty="0" err="1"/>
-              <a:t>Prompt</a:t>
-            </a:r>
-            <a:r>
-              <a:rPr lang="vi-VN" dirty="0"/>
-              <a:t> </a:t>
-            </a:r>
-            <a:r>
-              <a:rPr lang="vi-VN" dirty="0" err="1"/>
-              <a:t>Engineering</a:t>
-            </a:r>
-            <a:r>
-              <a:rPr lang="vi-VN" dirty="0"/>
-              <a:t>): </a:t>
-            </a:r>
-            <a:r>
-              <a:rPr lang="vi-VN" dirty="0" err="1"/>
-              <a:t>Là</a:t>
-            </a:r>
-            <a:r>
-              <a:rPr lang="vi-VN" dirty="0"/>
-              <a:t> </a:t>
-            </a:r>
-            <a:r>
-              <a:rPr lang="vi-VN" dirty="0" err="1"/>
-              <a:t>việc</a:t>
-            </a:r>
-            <a:r>
-              <a:rPr lang="vi-VN" dirty="0"/>
-              <a:t> </a:t>
-            </a:r>
-            <a:r>
-              <a:rPr lang="vi-VN" dirty="0" err="1"/>
-              <a:t>bạn</a:t>
-            </a:r>
-            <a:r>
-              <a:rPr lang="vi-VN" dirty="0"/>
-              <a:t> </a:t>
-            </a:r>
-            <a:r>
-              <a:rPr lang="vi-VN" dirty="0" err="1"/>
+              <a:rPr lang="en-US" dirty="0" err="1"/>
+              <a:t>ví</a:t>
+            </a:r>
+            <a:r>
+              <a:rPr lang="en-US" dirty="0"/>
+              <a:t> </a:t>
+            </a:r>
+            <a:r>
+              <a:rPr lang="en-US" dirty="0" err="1"/>
+              <a:t>dụ</a:t>
+            </a:r>
+            <a:r>
+              <a:rPr lang="en-US" dirty="0"/>
+              <a:t>: </a:t>
+            </a:r>
+            <a:r>
+              <a:rPr lang="en-US" dirty="0" err="1"/>
               <a:t>viết</a:t>
             </a:r>
             <a:r>
-              <a:rPr lang="vi-VN" dirty="0"/>
-              <a:t> </a:t>
-            </a:r>
-            <a:r>
-              <a:rPr lang="vi-VN" dirty="0" err="1"/>
-              <a:t>hướng</a:t>
-            </a:r>
-            <a:r>
-              <a:rPr lang="vi-VN" dirty="0"/>
-              <a:t> </a:t>
-            </a:r>
-            <a:r>
-              <a:rPr lang="vi-VN" dirty="0" err="1"/>
-              <a:t>dẫn</a:t>
-            </a:r>
-            <a:r>
-              <a:rPr lang="vi-VN" dirty="0"/>
-              <a:t> (</a:t>
-            </a:r>
-            <a:r>
-              <a:rPr lang="vi-VN" dirty="0" err="1"/>
-              <a:t>instruction</a:t>
-            </a:r>
-            <a:r>
-              <a:rPr lang="vi-VN" dirty="0"/>
-              <a:t>) </a:t>
-            </a:r>
-            <a:r>
-              <a:rPr lang="vi-VN" dirty="0" err="1"/>
-              <a:t>vào</a:t>
-            </a:r>
-            <a:r>
-              <a:rPr lang="vi-VN" dirty="0"/>
-              <a:t> khung </a:t>
-            </a:r>
-            <a:r>
-              <a:rPr lang="vi-VN" dirty="0" err="1"/>
-              <a:t>chat</a:t>
-            </a:r>
-            <a:r>
-              <a:rPr lang="vi-VN" dirty="0"/>
-              <a:t> </a:t>
-            </a:r>
-            <a:r>
-              <a:rPr lang="vi-VN" dirty="0" err="1"/>
-              <a:t>để</a:t>
-            </a:r>
-            <a:r>
-              <a:rPr lang="vi-VN" dirty="0"/>
-              <a:t> yêu </a:t>
-            </a:r>
-            <a:r>
-              <a:rPr lang="vi-VN" dirty="0" err="1"/>
-              <a:t>cầu</a:t>
-            </a:r>
-            <a:r>
-              <a:rPr lang="vi-VN" dirty="0"/>
-              <a:t> mô </a:t>
-            </a:r>
-            <a:r>
-              <a:rPr lang="vi-VN" dirty="0" err="1"/>
+              <a:rPr lang="en-US" dirty="0"/>
+              <a:t> </a:t>
+            </a:r>
+            <a:r>
+              <a:rPr lang="en-US" dirty="0" err="1"/>
+              <a:t>báo</a:t>
+            </a:r>
+            <a:r>
+              <a:rPr lang="en-US" dirty="0"/>
+              <a:t> </a:t>
+            </a:r>
+            <a:r>
+              <a:rPr lang="en-US" dirty="0" err="1"/>
+              <a:t>cáo</a:t>
+            </a:r>
+            <a:r>
+              <a:rPr lang="en-US" dirty="0"/>
+              <a:t> </a:t>
+            </a:r>
+            <a:r>
+              <a:rPr lang="en-US" dirty="0" err="1"/>
+              <a:t>theo</a:t>
+            </a:r>
+            <a:r>
+              <a:rPr lang="en-US" dirty="0"/>
+              <a:t> </a:t>
+            </a:r>
+            <a:r>
+              <a:rPr lang="en-US" dirty="0" err="1"/>
+              <a:t>mẫu</a:t>
+            </a:r>
+            <a:r>
+              <a:rPr lang="en-US" dirty="0"/>
+              <a:t>, </a:t>
+            </a:r>
+            <a:r>
+              <a:rPr lang="en-US" dirty="0" err="1"/>
+              <a:t>viết</a:t>
+            </a:r>
+            <a:r>
+              <a:rPr lang="en-US" dirty="0"/>
+              <a:t> code </a:t>
+            </a:r>
+            <a:r>
+              <a:rPr lang="en-US" dirty="0" err="1"/>
+              <a:t>theo</a:t>
+            </a:r>
+            <a:r>
+              <a:rPr lang="en-US" dirty="0"/>
+              <a:t> </a:t>
+            </a:r>
+            <a:r>
+              <a:rPr lang="en-US" dirty="0" err="1"/>
+              <a:t>chuẩn</a:t>
+            </a:r>
+            <a:r>
+              <a:rPr lang="en-US" dirty="0"/>
+              <a:t> </a:t>
+            </a:r>
+            <a:r>
+              <a:rPr lang="en-US" dirty="0" err="1"/>
+              <a:t>riêng</a:t>
+            </a:r>
+            <a:r>
+              <a:rPr lang="en-US" dirty="0"/>
+              <a:t>)</a:t>
+            </a:r>
+          </a:p>
+          <a:p>
+            <a:r>
+              <a:rPr lang="en-US" dirty="0" err="1"/>
+              <a:t>Hiệu</a:t>
+            </a:r>
+            <a:r>
+              <a:rPr lang="en-US" dirty="0"/>
+              <a:t> </a:t>
+            </a:r>
+            <a:r>
+              <a:rPr lang="en-US" dirty="0" err="1"/>
+              <a:t>quả</a:t>
+            </a:r>
+            <a:r>
+              <a:rPr lang="en-US" dirty="0"/>
+              <a:t>: </a:t>
+            </a:r>
+            <a:r>
+              <a:rPr lang="en-US" dirty="0" err="1"/>
+              <a:t>Biến</a:t>
+            </a:r>
+            <a:r>
+              <a:rPr lang="en-US" dirty="0"/>
+              <a:t> </a:t>
+            </a:r>
+            <a:r>
+              <a:rPr lang="en-US" dirty="0" err="1"/>
+              <a:t>một</a:t>
+            </a:r>
+            <a:r>
+              <a:rPr lang="en-US" dirty="0"/>
+              <a:t> </a:t>
+            </a:r>
+            <a:r>
+              <a:rPr lang="en-US" dirty="0" err="1"/>
+              <a:t>mô</a:t>
+            </a:r>
+            <a:r>
+              <a:rPr lang="en-US" dirty="0"/>
+              <a:t> </a:t>
+            </a:r>
+            <a:r>
+              <a:rPr lang="en-US" dirty="0" err="1"/>
               <a:t>hình</a:t>
             </a:r>
             <a:r>
-              <a:rPr lang="vi-VN" dirty="0"/>
-              <a:t> </a:t>
-            </a:r>
-            <a:r>
-              <a:rPr lang="vi-VN" dirty="0" err="1"/>
-              <a:t>trả</a:t>
-            </a:r>
-            <a:r>
-              <a:rPr lang="vi-VN" dirty="0"/>
-              <a:t> </a:t>
-            </a:r>
-            <a:r>
-              <a:rPr lang="vi-VN" dirty="0" err="1"/>
-              <a:t>lời</a:t>
-            </a:r>
-            <a:r>
-              <a:rPr lang="vi-VN" dirty="0"/>
-              <a:t> theo ý </a:t>
-            </a:r>
-            <a:r>
-              <a:rPr lang="vi-VN" dirty="0" err="1"/>
-              <a:t>mình</a:t>
-            </a:r>
-            <a:r>
-              <a:rPr lang="vi-VN" dirty="0"/>
-              <a:t> </a:t>
-            </a:r>
-            <a:r>
-              <a:rPr lang="vi-VN" dirty="0" err="1"/>
-              <a:t>mà</a:t>
-            </a:r>
-            <a:r>
-              <a:rPr lang="vi-VN" dirty="0"/>
-              <a:t> không thay </a:t>
-            </a:r>
-            <a:r>
-              <a:rPr lang="vi-VN" dirty="0" err="1"/>
-              <a:t>đổi</a:t>
-            </a:r>
-            <a:r>
-              <a:rPr lang="vi-VN" dirty="0"/>
-              <a:t> </a:t>
-            </a:r>
-            <a:r>
-              <a:rPr lang="vi-VN" dirty="0" err="1"/>
-              <a:t>bất</a:t>
-            </a:r>
-            <a:r>
-              <a:rPr lang="vi-VN" dirty="0"/>
-              <a:t> </a:t>
-            </a:r>
-            <a:r>
-              <a:rPr lang="vi-VN" dirty="0" err="1"/>
-              <a:t>kỳ</a:t>
-            </a:r>
-            <a:r>
-              <a:rPr lang="vi-VN" dirty="0"/>
-              <a:t> </a:t>
-            </a:r>
-            <a:r>
-              <a:rPr lang="vi-VN" dirty="0" err="1"/>
-              <a:t>điều</a:t>
-            </a:r>
-            <a:r>
-              <a:rPr lang="vi-VN" dirty="0"/>
-              <a:t> </a:t>
-            </a:r>
-            <a:r>
-              <a:rPr lang="vi-VN" dirty="0" err="1"/>
-              <a:t>gì</a:t>
-            </a:r>
-            <a:r>
-              <a:rPr lang="vi-VN" dirty="0"/>
-              <a:t> bên trong mô </a:t>
-            </a:r>
-            <a:r>
-              <a:rPr lang="vi-VN" dirty="0" err="1"/>
-              <a:t>hình</a:t>
-            </a:r>
-            <a:r>
-              <a:rPr lang="vi-VN" dirty="0"/>
-              <a:t> hay </a:t>
-            </a:r>
-            <a:r>
-              <a:rPr lang="vi-VN" dirty="0" err="1"/>
-              <a:t>kết</a:t>
-            </a:r>
-            <a:r>
-              <a:rPr lang="vi-VN" dirty="0"/>
-              <a:t> </a:t>
-            </a:r>
-            <a:r>
-              <a:rPr lang="vi-VN" dirty="0" err="1"/>
-              <a:t>nối</a:t>
-            </a:r>
-            <a:r>
-              <a:rPr lang="vi-VN" dirty="0"/>
-              <a:t> </a:t>
-            </a:r>
-            <a:r>
-              <a:rPr lang="vi-VN" dirty="0" err="1"/>
-              <a:t>với</a:t>
-            </a:r>
-            <a:r>
-              <a:rPr lang="vi-VN" dirty="0"/>
-              <a:t> </a:t>
-            </a:r>
-            <a:r>
-              <a:rPr lang="vi-VN" dirty="0" err="1"/>
-              <a:t>dữ</a:t>
-            </a:r>
-            <a:r>
-              <a:rPr lang="vi-VN" dirty="0"/>
-              <a:t> </a:t>
-            </a:r>
-            <a:r>
-              <a:rPr lang="vi-VN" dirty="0" err="1"/>
-              <a:t>liệu</a:t>
-            </a:r>
-            <a:r>
-              <a:rPr lang="vi-VN" dirty="0"/>
-              <a:t> </a:t>
-            </a:r>
-            <a:r>
-              <a:rPr lang="vi-VN" dirty="0" err="1"/>
-              <a:t>ngoài</a:t>
-            </a:r>
-            <a:r>
-              <a:rPr lang="vi-VN" dirty="0"/>
-              <a:t> </a:t>
-            </a:r>
-            <a:r>
-              <a:rPr lang="vi-VN" dirty="0" err="1"/>
-              <a:t>hệ</a:t>
-            </a:r>
-            <a:r>
-              <a:rPr lang="vi-VN" dirty="0"/>
-              <a:t> </a:t>
-            </a:r>
-            <a:r>
-              <a:rPr lang="vi-VN" dirty="0" err="1"/>
-              <a:t>thống</a:t>
-            </a:r>
-            <a:endParaRPr lang="en-US" dirty="0"/>
-          </a:p>
-          <a:p>
-            <a:pPr lvl="1"/>
-            <a:r>
-              <a:rPr lang="vi-VN" dirty="0"/>
-              <a:t> Cơ </a:t>
-            </a:r>
-            <a:r>
-              <a:rPr lang="vi-VN" dirty="0" err="1"/>
-              <a:t>chế</a:t>
-            </a:r>
-            <a:r>
-              <a:rPr lang="vi-VN" dirty="0"/>
-              <a:t>: Cung </a:t>
-            </a:r>
-            <a:r>
-              <a:rPr lang="vi-VN" dirty="0" err="1"/>
-              <a:t>cấp</a:t>
-            </a:r>
-            <a:r>
-              <a:rPr lang="vi-VN" dirty="0"/>
-              <a:t> </a:t>
-            </a:r>
-            <a:r>
-              <a:rPr lang="vi-VN" dirty="0" err="1"/>
-              <a:t>ngữ</a:t>
-            </a:r>
-            <a:r>
-              <a:rPr lang="vi-VN" dirty="0"/>
-              <a:t> </a:t>
-            </a:r>
-            <a:r>
-              <a:rPr lang="vi-VN" dirty="0" err="1"/>
-              <a:t>cảnh</a:t>
-            </a:r>
-            <a:r>
-              <a:rPr lang="vi-VN" dirty="0"/>
-              <a:t> </a:t>
-            </a:r>
-            <a:r>
-              <a:rPr lang="vi-VN" dirty="0" err="1"/>
-              <a:t>ngắn</a:t>
-            </a:r>
-            <a:r>
-              <a:rPr lang="vi-VN" dirty="0"/>
-              <a:t> </a:t>
-            </a:r>
-            <a:r>
-              <a:rPr lang="vi-VN" dirty="0" err="1"/>
-              <a:t>hạn</a:t>
-            </a:r>
-            <a:r>
-              <a:rPr lang="vi-VN" dirty="0"/>
-              <a:t> trong "</a:t>
-            </a:r>
-            <a:r>
-              <a:rPr lang="vi-VN" dirty="0" err="1"/>
-              <a:t>bộ</a:t>
-            </a:r>
-            <a:r>
-              <a:rPr lang="vi-VN" dirty="0"/>
-              <a:t> </a:t>
-            </a:r>
-            <a:r>
-              <a:rPr lang="vi-VN" dirty="0" err="1"/>
-              <a:t>nhớ</a:t>
-            </a:r>
-            <a:r>
-              <a:rPr lang="vi-VN" dirty="0"/>
-              <a:t> </a:t>
-            </a:r>
-            <a:r>
-              <a:rPr lang="vi-VN" dirty="0" err="1"/>
-              <a:t>tạm</a:t>
-            </a:r>
-            <a:r>
-              <a:rPr lang="vi-VN" dirty="0"/>
-              <a:t>" (</a:t>
-            </a:r>
-            <a:r>
-              <a:rPr lang="vi-VN" dirty="0" err="1"/>
-              <a:t>context</a:t>
-            </a:r>
-            <a:r>
-              <a:rPr lang="vi-VN" dirty="0"/>
-              <a:t> </a:t>
-            </a:r>
-            <a:r>
-              <a:rPr lang="vi-VN" dirty="0" err="1"/>
-              <a:t>window</a:t>
-            </a:r>
-            <a:r>
-              <a:rPr lang="vi-VN" dirty="0"/>
-              <a:t>) </a:t>
-            </a:r>
-            <a:r>
-              <a:rPr lang="vi-VN" dirty="0" err="1"/>
-              <a:t>của</a:t>
-            </a:r>
-            <a:r>
-              <a:rPr lang="vi-VN" dirty="0"/>
-              <a:t> </a:t>
-            </a:r>
-            <a:r>
-              <a:rPr lang="vi-VN" dirty="0" err="1"/>
-              <a:t>cuộc</a:t>
-            </a:r>
-            <a:r>
-              <a:rPr lang="vi-VN" dirty="0"/>
-              <a:t> </a:t>
-            </a:r>
-            <a:r>
-              <a:rPr lang="vi-VN" dirty="0" err="1"/>
-              <a:t>hội</a:t>
-            </a:r>
-            <a:r>
-              <a:rPr lang="vi-VN" dirty="0"/>
-              <a:t> </a:t>
-            </a:r>
-            <a:r>
-              <a:rPr lang="vi-VN" dirty="0" err="1"/>
-              <a:t>thoại</a:t>
-            </a:r>
-            <a:r>
-              <a:rPr lang="vi-VN" dirty="0"/>
-              <a:t> </a:t>
-            </a:r>
-            <a:r>
-              <a:rPr lang="vi-VN" dirty="0" err="1"/>
-              <a:t>hiện</a:t>
-            </a:r>
-            <a:r>
-              <a:rPr lang="vi-VN" dirty="0"/>
-              <a:t> </a:t>
-            </a:r>
-            <a:r>
-              <a:rPr lang="vi-VN" dirty="0" err="1"/>
-              <a:t>tại</a:t>
-            </a:r>
-            <a:r>
-              <a:rPr lang="vi-VN" dirty="0"/>
-              <a:t>.</a:t>
-            </a:r>
-          </a:p>
-          <a:p>
-            <a:pPr lvl="1"/>
-            <a:r>
-              <a:rPr lang="vi-VN" dirty="0"/>
-              <a:t> </a:t>
-            </a:r>
-            <a:r>
-              <a:rPr lang="vi-VN" dirty="0" err="1"/>
-              <a:t>Ví</a:t>
-            </a:r>
-            <a:r>
-              <a:rPr lang="vi-VN" dirty="0"/>
-              <a:t> </a:t>
-            </a:r>
-            <a:r>
-              <a:rPr lang="vi-VN" dirty="0" err="1"/>
-              <a:t>dụ</a:t>
-            </a:r>
-            <a:r>
-              <a:rPr lang="vi-VN" dirty="0"/>
-              <a:t>: "</a:t>
-            </a:r>
-            <a:r>
-              <a:rPr lang="vi-VN" dirty="0" err="1"/>
-              <a:t>Bạn</a:t>
-            </a:r>
-            <a:r>
-              <a:rPr lang="vi-VN" dirty="0"/>
-              <a:t> </a:t>
-            </a:r>
-            <a:r>
-              <a:rPr lang="vi-VN" dirty="0" err="1"/>
-              <a:t>là</a:t>
-            </a:r>
-            <a:r>
-              <a:rPr lang="vi-VN" dirty="0"/>
-              <a:t> </a:t>
-            </a:r>
-            <a:r>
-              <a:rPr lang="vi-VN" dirty="0" err="1"/>
+              <a:rPr lang="en-US" dirty="0"/>
+              <a:t> </a:t>
+            </a:r>
+            <a:r>
+              <a:rPr lang="en-US" dirty="0" err="1"/>
+              <a:t>tổng</a:t>
+            </a:r>
+            <a:r>
+              <a:rPr lang="en-US" dirty="0"/>
+              <a:t> </a:t>
+            </a:r>
+            <a:r>
+              <a:rPr lang="en-US" dirty="0" err="1"/>
+              <a:t>quát</a:t>
+            </a:r>
+            <a:r>
+              <a:rPr lang="en-US" dirty="0"/>
+              <a:t> </a:t>
+            </a:r>
+            <a:r>
+              <a:rPr lang="en-US" dirty="0" err="1"/>
+              <a:t>thành</a:t>
+            </a:r>
+            <a:r>
+              <a:rPr lang="en-US" dirty="0"/>
+              <a:t> </a:t>
+            </a:r>
+            <a:r>
+              <a:rPr lang="en-US" dirty="0" err="1"/>
               <a:t>một</a:t>
             </a:r>
             <a:r>
-              <a:rPr lang="vi-VN" dirty="0"/>
-              <a:t> chuyên gia </a:t>
-            </a:r>
-            <a:r>
-              <a:rPr lang="vi-VN" dirty="0" err="1"/>
-              <a:t>marketing</a:t>
-            </a:r>
-            <a:r>
-              <a:rPr lang="vi-VN" dirty="0"/>
-              <a:t> (</a:t>
-            </a:r>
-            <a:r>
-              <a:rPr lang="vi-VN" dirty="0" err="1"/>
-              <a:t>System</a:t>
-            </a:r>
-            <a:r>
-              <a:rPr lang="vi-VN" dirty="0"/>
-              <a:t> </a:t>
-            </a:r>
-            <a:r>
-              <a:rPr lang="vi-VN" dirty="0" err="1"/>
-              <a:t>prompt</a:t>
-            </a:r>
-            <a:r>
-              <a:rPr lang="vi-VN" dirty="0"/>
-              <a:t>), </a:t>
-            </a:r>
-            <a:r>
-              <a:rPr lang="vi-VN" dirty="0" err="1"/>
-              <a:t>hãy</a:t>
-            </a:r>
-            <a:r>
-              <a:rPr lang="vi-VN" dirty="0"/>
-              <a:t> </a:t>
-            </a:r>
-            <a:r>
-              <a:rPr lang="vi-VN" dirty="0" err="1"/>
-              <a:t>viết</a:t>
-            </a:r>
-            <a:r>
-              <a:rPr lang="vi-VN" dirty="0"/>
-              <a:t> cho tôi </a:t>
-            </a:r>
-            <a:r>
-              <a:rPr lang="vi-VN" dirty="0" err="1"/>
-              <a:t>một</a:t>
-            </a:r>
-            <a:r>
-              <a:rPr lang="vi-VN" dirty="0"/>
-              <a:t> </a:t>
-            </a:r>
-            <a:r>
-              <a:rPr lang="vi-VN" dirty="0" err="1"/>
-              <a:t>email</a:t>
-            </a:r>
-            <a:r>
-              <a:rPr lang="vi-VN" dirty="0"/>
-              <a:t> </a:t>
-            </a:r>
-            <a:r>
-              <a:rPr lang="vi-VN" dirty="0" err="1"/>
-              <a:t>bán</a:t>
-            </a:r>
-            <a:r>
-              <a:rPr lang="vi-VN" dirty="0"/>
-              <a:t> </a:t>
-            </a:r>
-            <a:r>
-              <a:rPr lang="vi-VN" dirty="0" err="1"/>
-              <a:t>hàng</a:t>
-            </a:r>
-            <a:r>
-              <a:rPr lang="vi-VN" dirty="0"/>
-              <a:t> (</a:t>
-            </a:r>
-            <a:r>
-              <a:rPr lang="vi-VN" dirty="0" err="1"/>
-              <a:t>User</a:t>
-            </a:r>
-            <a:r>
-              <a:rPr lang="vi-VN" dirty="0"/>
-              <a:t> </a:t>
-            </a:r>
-            <a:r>
-              <a:rPr lang="vi-VN" dirty="0" err="1"/>
-              <a:t>prompt</a:t>
-            </a:r>
-            <a:r>
-              <a:rPr lang="vi-VN" dirty="0"/>
-              <a:t>)."</a:t>
+              <a:rPr lang="en-US" dirty="0"/>
+              <a:t> "</a:t>
+            </a:r>
+            <a:r>
+              <a:rPr lang="en-US" dirty="0" err="1"/>
+              <a:t>chuyên</a:t>
+            </a:r>
+            <a:r>
+              <a:rPr lang="en-US" dirty="0"/>
+              <a:t> </a:t>
+            </a:r>
+            <a:r>
+              <a:rPr lang="en-US" dirty="0" err="1"/>
+              <a:t>gia</a:t>
+            </a:r>
+            <a:r>
+              <a:rPr lang="en-US" dirty="0"/>
+              <a:t>" </a:t>
+            </a:r>
+            <a:r>
+              <a:rPr lang="en-US" dirty="0" err="1"/>
+              <a:t>trong</a:t>
+            </a:r>
+            <a:r>
+              <a:rPr lang="en-US" dirty="0"/>
+              <a:t> </a:t>
+            </a:r>
+            <a:r>
+              <a:rPr lang="en-US" dirty="0" err="1"/>
+              <a:t>lĩnh</a:t>
+            </a:r>
+            <a:r>
+              <a:rPr lang="en-US" dirty="0"/>
+              <a:t> </a:t>
+            </a:r>
+            <a:r>
+              <a:rPr lang="en-US" dirty="0" err="1"/>
+              <a:t>vực</a:t>
+            </a:r>
+            <a:r>
+              <a:rPr lang="en-US" dirty="0"/>
+              <a:t> </a:t>
+            </a:r>
+            <a:r>
+              <a:rPr lang="en-US" dirty="0" err="1"/>
+              <a:t>hẹp</a:t>
+            </a:r>
+            <a:r>
+              <a:rPr lang="en-US" dirty="0"/>
+              <a:t>, </a:t>
+            </a:r>
+            <a:r>
+              <a:rPr lang="en-US" dirty="0" err="1"/>
+              <a:t>giúp</a:t>
+            </a:r>
+            <a:r>
+              <a:rPr lang="en-US" dirty="0"/>
+              <a:t> </a:t>
+            </a:r>
+            <a:r>
+              <a:rPr lang="en-US" dirty="0" err="1"/>
+              <a:t>tăng</a:t>
+            </a:r>
+            <a:r>
+              <a:rPr lang="en-US" dirty="0"/>
+              <a:t> </a:t>
+            </a:r>
+            <a:r>
+              <a:rPr lang="en-US" dirty="0" err="1"/>
+              <a:t>độ</a:t>
+            </a:r>
+            <a:r>
+              <a:rPr lang="en-US" dirty="0"/>
+              <a:t> </a:t>
+            </a:r>
+            <a:r>
+              <a:rPr lang="en-US" dirty="0" err="1"/>
+              <a:t>chính</a:t>
+            </a:r>
+            <a:r>
+              <a:rPr lang="en-US" dirty="0"/>
+              <a:t> </a:t>
+            </a:r>
+            <a:r>
+              <a:rPr lang="en-US" dirty="0" err="1"/>
+              <a:t>xác</a:t>
+            </a:r>
+            <a:r>
+              <a:rPr lang="en-US" dirty="0"/>
+              <a:t> </a:t>
+            </a:r>
+            <a:r>
+              <a:rPr lang="en-US" dirty="0" err="1"/>
+              <a:t>cho</a:t>
+            </a:r>
+            <a:r>
+              <a:rPr lang="en-US" dirty="0"/>
+              <a:t> </a:t>
+            </a:r>
+            <a:r>
+              <a:rPr lang="en-US" dirty="0" err="1"/>
+              <a:t>các</a:t>
+            </a:r>
+            <a:r>
+              <a:rPr lang="en-US" dirty="0"/>
+              <a:t> </a:t>
+            </a:r>
+            <a:r>
+              <a:rPr lang="en-US" dirty="0" err="1"/>
+              <a:t>tác</a:t>
+            </a:r>
+            <a:r>
+              <a:rPr lang="en-US" dirty="0"/>
+              <a:t> </a:t>
+            </a:r>
+            <a:r>
+              <a:rPr lang="en-US" dirty="0" err="1"/>
+              <a:t>vụ</a:t>
+            </a:r>
+            <a:r>
+              <a:rPr lang="en-US" dirty="0"/>
+              <a:t> </a:t>
+            </a:r>
+            <a:r>
+              <a:rPr lang="en-US" dirty="0" err="1"/>
+              <a:t>cụ</a:t>
+            </a:r>
+            <a:r>
+              <a:rPr lang="en-US" dirty="0"/>
+              <a:t> </a:t>
+            </a:r>
+            <a:r>
+              <a:rPr lang="en-US" dirty="0" err="1"/>
+              <a:t>thể</a:t>
             </a:r>
             <a:endParaRPr lang="en-US" dirty="0"/>
           </a:p>
@@ -12440,7 +12682,7 @@
     </p:spTree>
     <p:extLst>
       <p:ext uri="{BB962C8B-B14F-4D97-AF65-F5344CB8AC3E}">
-        <p14:creationId xmlns:p14="http://schemas.microsoft.com/office/powerpoint/2010/main" val="2938089451"/>
+        <p14:creationId xmlns:p14="http://schemas.microsoft.com/office/powerpoint/2010/main" val="3777636830"/>
       </p:ext>
     </p:extLst>
   </p:cSld>
@@ -12490,7 +12732,7 @@
           <a:p>
             <a:r>
               <a:rPr lang="de-DE" dirty="0"/>
-              <a:t>Fine-tune &amp; RAG &amp; (System + User) Prompt</a:t>
+              <a:t>3.Fine-tune &amp; RAG &amp; (System + User) Prompt</a:t>
             </a:r>
             <a:endParaRPr lang="en-US" dirty="0"/>
           </a:p>
@@ -12521,99 +12763,459 @@
               <a:buNone/>
             </a:pPr>
             <a:r>
-              <a:rPr lang="en-US" dirty="0" err="1"/>
-              <a:t>Bản</a:t>
-            </a:r>
-            <a:r>
-              <a:rPr lang="en-US" dirty="0"/>
-              <a:t> </a:t>
-            </a:r>
-            <a:r>
-              <a:rPr lang="en-US" dirty="0" err="1"/>
-              <a:t>chất</a:t>
-            </a:r>
-            <a:r>
-              <a:rPr lang="en-US" dirty="0"/>
-              <a:t> </a:t>
-            </a:r>
-            <a:r>
-              <a:rPr lang="en-US" dirty="0" err="1"/>
-              <a:t>cốt</a:t>
-            </a:r>
-            <a:r>
-              <a:rPr lang="en-US" dirty="0"/>
-              <a:t> </a:t>
-            </a:r>
-            <a:r>
-              <a:rPr lang="en-US" dirty="0" err="1"/>
-              <a:t>lõi</a:t>
+              <a:rPr lang="vi-VN" dirty="0" err="1"/>
+              <a:t>System</a:t>
+            </a:r>
+            <a:r>
+              <a:rPr lang="vi-VN" dirty="0"/>
+              <a:t> + </a:t>
+            </a:r>
+            <a:r>
+              <a:rPr lang="vi-VN" dirty="0" err="1"/>
+              <a:t>User</a:t>
+            </a:r>
+            <a:r>
+              <a:rPr lang="vi-VN" dirty="0"/>
+              <a:t> </a:t>
+            </a:r>
+            <a:r>
+              <a:rPr lang="vi-VN" dirty="0" err="1"/>
+              <a:t>Prompt</a:t>
+            </a:r>
+            <a:r>
+              <a:rPr lang="vi-VN" dirty="0"/>
+              <a:t> (</a:t>
+            </a:r>
+            <a:r>
+              <a:rPr lang="vi-VN" dirty="0" err="1"/>
+              <a:t>Prompt</a:t>
+            </a:r>
+            <a:r>
+              <a:rPr lang="vi-VN" dirty="0"/>
+              <a:t> </a:t>
+            </a:r>
+            <a:r>
+              <a:rPr lang="vi-VN" dirty="0" err="1"/>
+              <a:t>Engineering</a:t>
+            </a:r>
+            <a:r>
+              <a:rPr lang="vi-VN" dirty="0"/>
+              <a:t>): </a:t>
+            </a:r>
+            <a:r>
+              <a:rPr lang="vi-VN" dirty="0" err="1"/>
+              <a:t>Là</a:t>
+            </a:r>
+            <a:r>
+              <a:rPr lang="vi-VN" dirty="0"/>
+              <a:t> </a:t>
+            </a:r>
+            <a:r>
+              <a:rPr lang="vi-VN" dirty="0" err="1"/>
+              <a:t>việc</a:t>
+            </a:r>
+            <a:r>
+              <a:rPr lang="vi-VN" dirty="0"/>
+              <a:t> </a:t>
+            </a:r>
+            <a:r>
+              <a:rPr lang="vi-VN" dirty="0" err="1"/>
+              <a:t>bạn</a:t>
+            </a:r>
+            <a:r>
+              <a:rPr lang="vi-VN" dirty="0"/>
+              <a:t> </a:t>
+            </a:r>
+            <a:r>
+              <a:rPr lang="vi-VN" dirty="0" err="1"/>
+              <a:t>viết</a:t>
+            </a:r>
+            <a:r>
+              <a:rPr lang="vi-VN" dirty="0"/>
+              <a:t> </a:t>
+            </a:r>
+            <a:r>
+              <a:rPr lang="vi-VN" dirty="0" err="1"/>
+              <a:t>hướng</a:t>
+            </a:r>
+            <a:r>
+              <a:rPr lang="vi-VN" dirty="0"/>
+              <a:t> </a:t>
+            </a:r>
+            <a:r>
+              <a:rPr lang="vi-VN" dirty="0" err="1"/>
+              <a:t>dẫn</a:t>
+            </a:r>
+            <a:r>
+              <a:rPr lang="vi-VN" dirty="0"/>
+              <a:t> (</a:t>
+            </a:r>
+            <a:r>
+              <a:rPr lang="vi-VN" dirty="0" err="1"/>
+              <a:t>instruction</a:t>
+            </a:r>
+            <a:r>
+              <a:rPr lang="vi-VN" dirty="0"/>
+              <a:t>) </a:t>
+            </a:r>
+            <a:r>
+              <a:rPr lang="vi-VN" dirty="0" err="1"/>
+              <a:t>vào</a:t>
+            </a:r>
+            <a:r>
+              <a:rPr lang="vi-VN" dirty="0"/>
+              <a:t> khung </a:t>
+            </a:r>
+            <a:r>
+              <a:rPr lang="vi-VN" dirty="0" err="1"/>
+              <a:t>chat</a:t>
+            </a:r>
+            <a:r>
+              <a:rPr lang="vi-VN" dirty="0"/>
+              <a:t> </a:t>
+            </a:r>
+            <a:r>
+              <a:rPr lang="vi-VN" dirty="0" err="1"/>
+              <a:t>để</a:t>
+            </a:r>
+            <a:r>
+              <a:rPr lang="vi-VN" dirty="0"/>
+              <a:t> yêu </a:t>
+            </a:r>
+            <a:r>
+              <a:rPr lang="vi-VN" dirty="0" err="1"/>
+              <a:t>cầu</a:t>
+            </a:r>
+            <a:r>
+              <a:rPr lang="vi-VN" dirty="0"/>
+              <a:t> mô </a:t>
+            </a:r>
+            <a:r>
+              <a:rPr lang="vi-VN" dirty="0" err="1"/>
+              <a:t>hình</a:t>
+            </a:r>
+            <a:r>
+              <a:rPr lang="vi-VN" dirty="0"/>
+              <a:t> </a:t>
+            </a:r>
+            <a:r>
+              <a:rPr lang="vi-VN" dirty="0" err="1"/>
+              <a:t>trả</a:t>
+            </a:r>
+            <a:r>
+              <a:rPr lang="vi-VN" dirty="0"/>
+              <a:t> </a:t>
+            </a:r>
+            <a:r>
+              <a:rPr lang="vi-VN" dirty="0" err="1"/>
+              <a:t>lời</a:t>
+            </a:r>
+            <a:r>
+              <a:rPr lang="vi-VN" dirty="0"/>
+              <a:t> theo ý </a:t>
+            </a:r>
+            <a:r>
+              <a:rPr lang="vi-VN" dirty="0" err="1"/>
+              <a:t>mình</a:t>
+            </a:r>
+            <a:r>
+              <a:rPr lang="vi-VN" dirty="0"/>
+              <a:t> </a:t>
+            </a:r>
+            <a:r>
+              <a:rPr lang="vi-VN" dirty="0" err="1"/>
+              <a:t>mà</a:t>
+            </a:r>
+            <a:r>
+              <a:rPr lang="vi-VN" dirty="0"/>
+              <a:t> không thay </a:t>
+            </a:r>
+            <a:r>
+              <a:rPr lang="vi-VN" dirty="0" err="1"/>
+              <a:t>đổi</a:t>
+            </a:r>
+            <a:r>
+              <a:rPr lang="vi-VN" dirty="0"/>
+              <a:t> </a:t>
+            </a:r>
+            <a:r>
+              <a:rPr lang="vi-VN" dirty="0" err="1"/>
+              <a:t>bất</a:t>
+            </a:r>
+            <a:r>
+              <a:rPr lang="vi-VN" dirty="0"/>
+              <a:t> </a:t>
+            </a:r>
+            <a:r>
+              <a:rPr lang="vi-VN" dirty="0" err="1"/>
+              <a:t>kỳ</a:t>
+            </a:r>
+            <a:r>
+              <a:rPr lang="vi-VN" dirty="0"/>
+              <a:t> </a:t>
+            </a:r>
+            <a:r>
+              <a:rPr lang="vi-VN" dirty="0" err="1"/>
+              <a:t>điều</a:t>
+            </a:r>
+            <a:r>
+              <a:rPr lang="vi-VN" dirty="0"/>
+              <a:t> </a:t>
+            </a:r>
+            <a:r>
+              <a:rPr lang="vi-VN" dirty="0" err="1"/>
+              <a:t>gì</a:t>
+            </a:r>
+            <a:r>
+              <a:rPr lang="vi-VN" dirty="0"/>
+              <a:t> bên trong mô </a:t>
+            </a:r>
+            <a:r>
+              <a:rPr lang="vi-VN" dirty="0" err="1"/>
+              <a:t>hình</a:t>
+            </a:r>
+            <a:r>
+              <a:rPr lang="vi-VN" dirty="0"/>
+              <a:t> hay </a:t>
+            </a:r>
+            <a:r>
+              <a:rPr lang="vi-VN" dirty="0" err="1"/>
+              <a:t>kết</a:t>
+            </a:r>
+            <a:r>
+              <a:rPr lang="vi-VN" dirty="0"/>
+              <a:t> </a:t>
+            </a:r>
+            <a:r>
+              <a:rPr lang="vi-VN" dirty="0" err="1"/>
+              <a:t>nối</a:t>
+            </a:r>
+            <a:r>
+              <a:rPr lang="vi-VN" dirty="0"/>
+              <a:t> </a:t>
+            </a:r>
+            <a:r>
+              <a:rPr lang="vi-VN" dirty="0" err="1"/>
+              <a:t>với</a:t>
+            </a:r>
+            <a:r>
+              <a:rPr lang="vi-VN" dirty="0"/>
+              <a:t> </a:t>
+            </a:r>
+            <a:r>
+              <a:rPr lang="vi-VN" dirty="0" err="1"/>
+              <a:t>dữ</a:t>
+            </a:r>
+            <a:r>
+              <a:rPr lang="vi-VN" dirty="0"/>
+              <a:t> </a:t>
+            </a:r>
+            <a:r>
+              <a:rPr lang="vi-VN" dirty="0" err="1"/>
+              <a:t>liệu</a:t>
+            </a:r>
+            <a:r>
+              <a:rPr lang="vi-VN" dirty="0"/>
+              <a:t> </a:t>
+            </a:r>
+            <a:r>
+              <a:rPr lang="vi-VN" dirty="0" err="1"/>
+              <a:t>ngoài</a:t>
+            </a:r>
+            <a:r>
+              <a:rPr lang="vi-VN" dirty="0"/>
+              <a:t> </a:t>
+            </a:r>
+            <a:r>
+              <a:rPr lang="vi-VN" dirty="0" err="1"/>
+              <a:t>hệ</a:t>
+            </a:r>
+            <a:r>
+              <a:rPr lang="vi-VN" dirty="0"/>
+              <a:t> </a:t>
+            </a:r>
+            <a:r>
+              <a:rPr lang="vi-VN" dirty="0" err="1"/>
+              <a:t>thống</a:t>
             </a:r>
             <a:endParaRPr lang="en-US" dirty="0"/>
           </a:p>
           <a:p>
-            <a:r>
-              <a:rPr lang="vi-VN" dirty="0"/>
-              <a:t>RAG (</a:t>
-            </a:r>
-            <a:r>
-              <a:rPr lang="vi-VN" dirty="0" err="1"/>
-              <a:t>Retrieval-Augmented</a:t>
-            </a:r>
-            <a:r>
-              <a:rPr lang="vi-VN" dirty="0"/>
-              <a:t> </a:t>
-            </a:r>
-            <a:r>
-              <a:rPr lang="vi-VN" dirty="0" err="1"/>
-              <a:t>Generation</a:t>
-            </a:r>
-            <a:r>
-              <a:rPr lang="vi-VN" dirty="0"/>
-              <a:t>): </a:t>
-            </a:r>
-            <a:r>
-              <a:rPr lang="vi-VN" dirty="0" err="1"/>
-              <a:t>Là</a:t>
-            </a:r>
-            <a:r>
-              <a:rPr lang="vi-VN" dirty="0"/>
-              <a:t> </a:t>
-            </a:r>
-            <a:r>
-              <a:rPr lang="vi-VN" dirty="0" err="1"/>
-              <a:t>việc</a:t>
-            </a:r>
-            <a:r>
-              <a:rPr lang="vi-VN" dirty="0"/>
-              <a:t> </a:t>
-            </a:r>
-            <a:r>
-              <a:rPr lang="vi-VN" dirty="0" err="1"/>
-              <a:t>kết</a:t>
-            </a:r>
-            <a:r>
-              <a:rPr lang="vi-VN" dirty="0"/>
-              <a:t> </a:t>
-            </a:r>
-            <a:r>
-              <a:rPr lang="vi-VN" dirty="0" err="1"/>
-              <a:t>nối</a:t>
-            </a:r>
-            <a:r>
-              <a:rPr lang="vi-VN" dirty="0"/>
-              <a:t> mô </a:t>
-            </a:r>
-            <a:r>
-              <a:rPr lang="vi-VN" dirty="0" err="1"/>
-              <a:t>hình</a:t>
-            </a:r>
-            <a:r>
-              <a:rPr lang="vi-VN" dirty="0"/>
-              <a:t> </a:t>
-            </a:r>
-            <a:r>
-              <a:rPr lang="vi-VN" dirty="0" err="1"/>
-              <a:t>với</a:t>
+            <a:pPr lvl="1"/>
+            <a:r>
+              <a:rPr lang="vi-VN" dirty="0"/>
+              <a:t> Cơ </a:t>
+            </a:r>
+            <a:r>
+              <a:rPr lang="vi-VN" dirty="0" err="1"/>
+              <a:t>chế</a:t>
+            </a:r>
+            <a:r>
+              <a:rPr lang="vi-VN" dirty="0"/>
+              <a:t>: Cung </a:t>
+            </a:r>
+            <a:r>
+              <a:rPr lang="vi-VN" dirty="0" err="1"/>
+              <a:t>cấp</a:t>
+            </a:r>
+            <a:r>
+              <a:rPr lang="vi-VN" dirty="0"/>
+              <a:t> </a:t>
+            </a:r>
+            <a:r>
+              <a:rPr lang="vi-VN" dirty="0" err="1"/>
+              <a:t>ngữ</a:t>
+            </a:r>
+            <a:r>
+              <a:rPr lang="vi-VN" dirty="0"/>
+              <a:t> </a:t>
+            </a:r>
+            <a:r>
+              <a:rPr lang="vi-VN" dirty="0" err="1"/>
+              <a:t>cảnh</a:t>
+            </a:r>
+            <a:r>
+              <a:rPr lang="vi-VN" dirty="0"/>
+              <a:t> </a:t>
+            </a:r>
+            <a:r>
+              <a:rPr lang="vi-VN" dirty="0" err="1"/>
+              <a:t>ngắn</a:t>
+            </a:r>
+            <a:r>
+              <a:rPr lang="vi-VN" dirty="0"/>
+              <a:t> </a:t>
+            </a:r>
+            <a:r>
+              <a:rPr lang="vi-VN" dirty="0" err="1"/>
+              <a:t>hạn</a:t>
+            </a:r>
+            <a:r>
+              <a:rPr lang="vi-VN" dirty="0"/>
+              <a:t> trong "</a:t>
+            </a:r>
+            <a:r>
+              <a:rPr lang="vi-VN" dirty="0" err="1"/>
+              <a:t>bộ</a:t>
+            </a:r>
+            <a:r>
+              <a:rPr lang="vi-VN" dirty="0"/>
+              <a:t> </a:t>
+            </a:r>
+            <a:r>
+              <a:rPr lang="vi-VN" dirty="0" err="1"/>
+              <a:t>nhớ</a:t>
+            </a:r>
+            <a:r>
+              <a:rPr lang="vi-VN" dirty="0"/>
+              <a:t> </a:t>
+            </a:r>
+            <a:r>
+              <a:rPr lang="vi-VN" dirty="0" err="1"/>
+              <a:t>tạm</a:t>
+            </a:r>
+            <a:r>
+              <a:rPr lang="vi-VN" dirty="0"/>
+              <a:t>" (</a:t>
+            </a:r>
+            <a:r>
+              <a:rPr lang="vi-VN" dirty="0" err="1"/>
+              <a:t>context</a:t>
+            </a:r>
+            <a:r>
+              <a:rPr lang="vi-VN" dirty="0"/>
+              <a:t> </a:t>
+            </a:r>
+            <a:r>
+              <a:rPr lang="vi-VN" dirty="0" err="1"/>
+              <a:t>window</a:t>
+            </a:r>
+            <a:r>
+              <a:rPr lang="vi-VN" dirty="0"/>
+              <a:t>) </a:t>
+            </a:r>
+            <a:r>
+              <a:rPr lang="vi-VN" dirty="0" err="1"/>
+              <a:t>của</a:t>
+            </a:r>
+            <a:r>
+              <a:rPr lang="vi-VN" dirty="0"/>
+              <a:t> </a:t>
+            </a:r>
+            <a:r>
+              <a:rPr lang="vi-VN" dirty="0" err="1"/>
+              <a:t>cuộc</a:t>
+            </a:r>
+            <a:r>
+              <a:rPr lang="vi-VN" dirty="0"/>
+              <a:t> </a:t>
+            </a:r>
+            <a:r>
+              <a:rPr lang="vi-VN" dirty="0" err="1"/>
+              <a:t>hội</a:t>
+            </a:r>
+            <a:r>
+              <a:rPr lang="vi-VN" dirty="0"/>
+              <a:t> </a:t>
+            </a:r>
+            <a:r>
+              <a:rPr lang="vi-VN" dirty="0" err="1"/>
+              <a:t>thoại</a:t>
+            </a:r>
+            <a:r>
+              <a:rPr lang="vi-VN" dirty="0"/>
+              <a:t> </a:t>
+            </a:r>
+            <a:r>
+              <a:rPr lang="vi-VN" dirty="0" err="1"/>
+              <a:t>hiện</a:t>
+            </a:r>
+            <a:r>
+              <a:rPr lang="vi-VN" dirty="0"/>
+              <a:t> </a:t>
+            </a:r>
+            <a:r>
+              <a:rPr lang="vi-VN" dirty="0" err="1"/>
+              <a:t>tại</a:t>
+            </a:r>
+            <a:r>
+              <a:rPr lang="vi-VN" dirty="0"/>
+              <a:t>.</a:t>
+            </a:r>
+          </a:p>
+          <a:p>
+            <a:pPr lvl="1"/>
+            <a:r>
+              <a:rPr lang="vi-VN" dirty="0"/>
+              <a:t> </a:t>
+            </a:r>
+            <a:r>
+              <a:rPr lang="vi-VN" dirty="0" err="1"/>
+              <a:t>Ví</a:t>
+            </a:r>
+            <a:r>
+              <a:rPr lang="vi-VN" dirty="0"/>
+              <a:t> </a:t>
+            </a:r>
+            <a:r>
+              <a:rPr lang="vi-VN" dirty="0" err="1"/>
+              <a:t>dụ</a:t>
+            </a:r>
+            <a:r>
+              <a:rPr lang="vi-VN" dirty="0"/>
+              <a:t>: "</a:t>
+            </a:r>
+            <a:r>
+              <a:rPr lang="vi-VN" dirty="0" err="1"/>
+              <a:t>Bạn</a:t>
+            </a:r>
+            <a:r>
+              <a:rPr lang="vi-VN" dirty="0"/>
+              <a:t> </a:t>
+            </a:r>
+            <a:r>
+              <a:rPr lang="vi-VN" dirty="0" err="1"/>
+              <a:t>là</a:t>
             </a:r>
             <a:r>
               <a:rPr lang="vi-VN" dirty="0"/>
@@ -12625,139 +13227,19 @@
             </a:r>
             <a:r>
               <a:rPr lang="vi-VN" dirty="0"/>
-              <a:t> </a:t>
-            </a:r>
-            <a:r>
-              <a:rPr lang="vi-VN" dirty="0" err="1"/>
-              <a:t>tủ</a:t>
-            </a:r>
-            <a:r>
-              <a:rPr lang="vi-VN" dirty="0"/>
-              <a:t> </a:t>
-            </a:r>
-            <a:r>
-              <a:rPr lang="vi-VN" dirty="0" err="1"/>
-              <a:t>sách</a:t>
-            </a:r>
-            <a:r>
-              <a:rPr lang="vi-VN" dirty="0"/>
-              <a:t> tra </a:t>
-            </a:r>
-            <a:r>
-              <a:rPr lang="vi-VN" dirty="0" err="1"/>
-              <a:t>cứu</a:t>
-            </a:r>
-            <a:r>
-              <a:rPr lang="vi-VN" dirty="0"/>
-              <a:t> bên </a:t>
-            </a:r>
-            <a:r>
-              <a:rPr lang="vi-VN" dirty="0" err="1"/>
-              <a:t>ngoài</a:t>
-            </a:r>
-            <a:r>
-              <a:rPr lang="vi-VN" dirty="0"/>
-              <a:t>. Khi </a:t>
-            </a:r>
-            <a:r>
-              <a:rPr lang="vi-VN" dirty="0" err="1"/>
-              <a:t>bạn</a:t>
-            </a:r>
-            <a:r>
-              <a:rPr lang="vi-VN" dirty="0"/>
-              <a:t> </a:t>
-            </a:r>
-            <a:r>
-              <a:rPr lang="vi-VN" dirty="0" err="1"/>
-              <a:t>hỏi</a:t>
-            </a:r>
-            <a:r>
-              <a:rPr lang="vi-VN" dirty="0"/>
-              <a:t>, </a:t>
-            </a:r>
-            <a:r>
-              <a:rPr lang="vi-VN" dirty="0" err="1"/>
-              <a:t>hệ</a:t>
-            </a:r>
-            <a:r>
-              <a:rPr lang="vi-VN" dirty="0"/>
-              <a:t> </a:t>
-            </a:r>
-            <a:r>
-              <a:rPr lang="vi-VN" dirty="0" err="1"/>
-              <a:t>thống</a:t>
-            </a:r>
-            <a:r>
-              <a:rPr lang="vi-VN" dirty="0"/>
-              <a:t> </a:t>
-            </a:r>
-            <a:r>
-              <a:rPr lang="vi-VN" dirty="0" err="1"/>
-              <a:t>sẽ</a:t>
-            </a:r>
-            <a:r>
-              <a:rPr lang="vi-VN" dirty="0"/>
-              <a:t> </a:t>
-            </a:r>
-            <a:r>
-              <a:rPr lang="vi-VN" dirty="0" err="1"/>
-              <a:t>tự</a:t>
-            </a:r>
-            <a:r>
-              <a:rPr lang="vi-VN" dirty="0"/>
-              <a:t> </a:t>
-            </a:r>
-            <a:r>
-              <a:rPr lang="vi-VN" dirty="0" err="1"/>
-              <a:t>động</a:t>
-            </a:r>
-            <a:r>
-              <a:rPr lang="vi-VN" dirty="0"/>
-              <a:t> </a:t>
-            </a:r>
-            <a:r>
-              <a:rPr lang="vi-VN" dirty="0" err="1"/>
-              <a:t>tìm</a:t>
-            </a:r>
-            <a:r>
-              <a:rPr lang="vi-VN" dirty="0"/>
-              <a:t> </a:t>
-            </a:r>
-            <a:r>
-              <a:rPr lang="vi-VN" dirty="0" err="1"/>
-              <a:t>tài</a:t>
-            </a:r>
-            <a:r>
-              <a:rPr lang="vi-VN" dirty="0"/>
-              <a:t> </a:t>
-            </a:r>
-            <a:r>
-              <a:rPr lang="vi-VN" dirty="0" err="1"/>
-              <a:t>liệu</a:t>
-            </a:r>
-            <a:r>
-              <a:rPr lang="vi-VN" dirty="0"/>
-              <a:t> liên quan </a:t>
-            </a:r>
-            <a:r>
-              <a:rPr lang="vi-VN" dirty="0" err="1"/>
-              <a:t>và</a:t>
-            </a:r>
-            <a:r>
-              <a:rPr lang="vi-VN" dirty="0"/>
-              <a:t> "</a:t>
-            </a:r>
-            <a:r>
-              <a:rPr lang="vi-VN" dirty="0" err="1"/>
-              <a:t>nhồi</a:t>
-            </a:r>
-            <a:r>
-              <a:rPr lang="vi-VN" dirty="0"/>
-              <a:t>" </a:t>
-            </a:r>
-            <a:r>
-              <a:rPr lang="vi-VN" dirty="0" err="1"/>
-              <a:t>vào</a:t>
+              <a:t> chuyên gia </a:t>
+            </a:r>
+            <a:r>
+              <a:rPr lang="vi-VN" dirty="0" err="1"/>
+              <a:t>marketing</a:t>
+            </a:r>
+            <a:r>
+              <a:rPr lang="vi-VN" dirty="0"/>
+              <a:t> (</a:t>
+            </a:r>
+            <a:r>
+              <a:rPr lang="vi-VN" dirty="0" err="1"/>
+              <a:t>System</a:t>
             </a:r>
             <a:r>
               <a:rPr lang="vi-VN" dirty="0"/>
@@ -12769,175 +13251,23 @@
             </a:r>
             <a:r>
               <a:rPr lang="vi-VN" dirty="0"/>
-              <a:t> </a:t>
-            </a:r>
-            <a:r>
-              <a:rPr lang="vi-VN" dirty="0" err="1"/>
-              <a:t>để</a:t>
-            </a:r>
-            <a:r>
-              <a:rPr lang="vi-VN" dirty="0"/>
-              <a:t> mô </a:t>
-            </a:r>
-            <a:r>
-              <a:rPr lang="vi-VN" dirty="0" err="1"/>
-              <a:t>hình</a:t>
-            </a:r>
-            <a:r>
-              <a:rPr lang="vi-VN" dirty="0"/>
-              <a:t> </a:t>
-            </a:r>
-            <a:r>
-              <a:rPr lang="vi-VN" dirty="0" err="1"/>
-              <a:t>trả</a:t>
-            </a:r>
-            <a:r>
-              <a:rPr lang="vi-VN" dirty="0"/>
-              <a:t> </a:t>
-            </a:r>
-            <a:r>
-              <a:rPr lang="vi-VN" dirty="0" err="1"/>
-              <a:t>lời</a:t>
-            </a:r>
-            <a:r>
-              <a:rPr lang="vi-VN" dirty="0"/>
-              <a:t> </a:t>
-            </a:r>
-            <a:r>
-              <a:rPr lang="vi-VN" dirty="0" err="1"/>
-              <a:t>dựa</a:t>
-            </a:r>
-            <a:r>
-              <a:rPr lang="vi-VN" dirty="0"/>
-              <a:t> trên </a:t>
-            </a:r>
-            <a:r>
-              <a:rPr lang="vi-VN" dirty="0" err="1"/>
-              <a:t>tài</a:t>
-            </a:r>
-            <a:r>
-              <a:rPr lang="vi-VN" dirty="0"/>
-              <a:t> </a:t>
-            </a:r>
-            <a:r>
-              <a:rPr lang="vi-VN" dirty="0" err="1"/>
-              <a:t>liệu</a:t>
-            </a:r>
-            <a:r>
-              <a:rPr lang="vi-VN" dirty="0"/>
-              <a:t> </a:t>
-            </a:r>
-            <a:r>
-              <a:rPr lang="vi-VN" dirty="0" err="1"/>
-              <a:t>đó</a:t>
-            </a:r>
-            <a:endParaRPr lang="en-US" dirty="0"/>
-          </a:p>
-          <a:p>
-            <a:pPr lvl="1"/>
-            <a:r>
-              <a:rPr lang="en-US" dirty="0"/>
-              <a:t>C</a:t>
-            </a:r>
-            <a:r>
-              <a:rPr lang="vi-VN" dirty="0"/>
-              <a:t>ơ </a:t>
-            </a:r>
-            <a:r>
-              <a:rPr lang="vi-VN" dirty="0" err="1"/>
-              <a:t>chế</a:t>
-            </a:r>
-            <a:r>
-              <a:rPr lang="vi-VN" dirty="0"/>
-              <a:t>: </a:t>
-            </a:r>
-            <a:r>
-              <a:rPr lang="vi-VN" dirty="0" err="1"/>
-              <a:t>Tìm</a:t>
-            </a:r>
-            <a:r>
-              <a:rPr lang="vi-VN" dirty="0"/>
-              <a:t> </a:t>
-            </a:r>
-            <a:r>
-              <a:rPr lang="vi-VN" dirty="0" err="1"/>
-              <a:t>kiếm</a:t>
-            </a:r>
-            <a:r>
-              <a:rPr lang="vi-VN" dirty="0"/>
-              <a:t> </a:t>
-            </a:r>
-            <a:r>
-              <a:rPr lang="vi-VN" dirty="0" err="1"/>
-              <a:t>dữ</a:t>
-            </a:r>
-            <a:r>
-              <a:rPr lang="vi-VN" dirty="0"/>
-              <a:t> </a:t>
-            </a:r>
-            <a:r>
-              <a:rPr lang="vi-VN" dirty="0" err="1"/>
-              <a:t>liệu</a:t>
-            </a:r>
-            <a:r>
-              <a:rPr lang="vi-VN" dirty="0"/>
-              <a:t> + </a:t>
-            </a:r>
-            <a:r>
-              <a:rPr lang="vi-VN" dirty="0" err="1"/>
-              <a:t>Tạo</a:t>
-            </a:r>
-            <a:r>
-              <a:rPr lang="vi-VN" dirty="0"/>
-              <a:t> câu </a:t>
-            </a:r>
-            <a:r>
-              <a:rPr lang="vi-VN" dirty="0" err="1"/>
-              <a:t>trả</a:t>
-            </a:r>
-            <a:r>
-              <a:rPr lang="vi-VN" dirty="0"/>
-              <a:t> </a:t>
-            </a:r>
-            <a:r>
-              <a:rPr lang="vi-VN" dirty="0" err="1"/>
-              <a:t>lời</a:t>
-            </a:r>
-            <a:r>
-              <a:rPr lang="vi-VN" dirty="0"/>
-              <a:t>. Thông tin </a:t>
-            </a:r>
-            <a:r>
-              <a:rPr lang="vi-VN" dirty="0" err="1"/>
-              <a:t>được</a:t>
-            </a:r>
-            <a:r>
-              <a:rPr lang="vi-VN" dirty="0"/>
-              <a:t> đưa </a:t>
-            </a:r>
-            <a:r>
-              <a:rPr lang="vi-VN" dirty="0" err="1"/>
-              <a:t>vào</a:t>
-            </a:r>
-            <a:r>
-              <a:rPr lang="vi-VN" dirty="0"/>
-              <a:t> </a:t>
-            </a:r>
-            <a:r>
-              <a:rPr lang="vi-VN" dirty="0" err="1"/>
-              <a:t>context</a:t>
-            </a:r>
-            <a:r>
-              <a:rPr lang="vi-VN" dirty="0"/>
-              <a:t> </a:t>
-            </a:r>
-            <a:r>
-              <a:rPr lang="vi-VN" dirty="0" err="1"/>
-              <a:t>window</a:t>
-            </a:r>
-            <a:r>
-              <a:rPr lang="vi-VN" dirty="0"/>
-              <a:t> </a:t>
+              <a:t>), </a:t>
+            </a:r>
+            <a:r>
+              <a:rPr lang="vi-VN" dirty="0" err="1"/>
+              <a:t>hãy</a:t>
+            </a:r>
+            <a:r>
+              <a:rPr lang="vi-VN" dirty="0"/>
+              <a:t> </a:t>
+            </a:r>
+            <a:r>
+              <a:rPr lang="vi-VN" dirty="0" err="1"/>
+              <a:t>viết</a:t>
+            </a:r>
+            <a:r>
+              <a:rPr lang="vi-VN" dirty="0"/>
+              <a:t> cho tôi </a:t>
             </a:r>
             <a:r>
               <a:rPr lang="vi-VN" dirty="0" err="1"/>
@@ -12949,28 +13279,602 @@
             </a:r>
             <a:r>
               <a:rPr lang="vi-VN" dirty="0" err="1"/>
-              <a:t>cách</a:t>
-            </a:r>
-            <a:r>
-              <a:rPr lang="vi-VN" dirty="0"/>
-              <a:t> </a:t>
-            </a:r>
-            <a:r>
-              <a:rPr lang="vi-VN" dirty="0" err="1"/>
-              <a:t>tự</a:t>
-            </a:r>
-            <a:r>
-              <a:rPr lang="vi-VN" dirty="0"/>
-              <a:t> </a:t>
-            </a:r>
-            <a:r>
-              <a:rPr lang="vi-VN" dirty="0" err="1"/>
-              <a:t>động</a:t>
+              <a:t>email</a:t>
+            </a:r>
+            <a:r>
+              <a:rPr lang="vi-VN" dirty="0"/>
+              <a:t> </a:t>
+            </a:r>
+            <a:r>
+              <a:rPr lang="vi-VN" dirty="0" err="1"/>
+              <a:t>bán</a:t>
+            </a:r>
+            <a:r>
+              <a:rPr lang="vi-VN" dirty="0"/>
+              <a:t> </a:t>
+            </a:r>
+            <a:r>
+              <a:rPr lang="vi-VN" dirty="0" err="1"/>
+              <a:t>hàng</a:t>
+            </a:r>
+            <a:r>
+              <a:rPr lang="vi-VN" dirty="0"/>
+              <a:t> (</a:t>
+            </a:r>
+            <a:r>
+              <a:rPr lang="vi-VN" dirty="0" err="1"/>
+              <a:t>User</a:t>
+            </a:r>
+            <a:r>
+              <a:rPr lang="vi-VN" dirty="0"/>
+              <a:t> </a:t>
+            </a:r>
+            <a:r>
+              <a:rPr lang="vi-VN" dirty="0" err="1"/>
+              <a:t>prompt</a:t>
+            </a:r>
+            <a:r>
+              <a:rPr lang="vi-VN" dirty="0"/>
+              <a:t>)."</a:t>
             </a:r>
             <a:endParaRPr lang="en-US" dirty="0"/>
           </a:p>
         </p:txBody>
       </p:sp>
+    </p:spTree>
+    <p:extLst>
+      <p:ext uri="{BB962C8B-B14F-4D97-AF65-F5344CB8AC3E}">
+        <p14:creationId xmlns:p14="http://schemas.microsoft.com/office/powerpoint/2010/main" val="2938089451"/>
+      </p:ext>
+    </p:extLst>
+  </p:cSld>
+  <p:clrMapOvr>
+    <a:masterClrMapping/>
+  </p:clrMapOvr>
+</p:sld>
+</file>
+
+<file path=ppt/slides/slide7.xml><?xml version="1.0" encoding="utf-8"?>
+<p:sld xmlns:a="http://schemas.openxmlformats.org/drawingml/2006/main" xmlns:r="http://schemas.openxmlformats.org/officeDocument/2006/relationships" xmlns:p="http://schemas.openxmlformats.org/presentationml/2006/main">
+  <p:cSld>
+    <p:spTree>
+      <p:nvGrpSpPr>
+        <p:cNvPr id="1" name=""/>
+        <p:cNvGrpSpPr/>
+        <p:nvPr/>
+      </p:nvGrpSpPr>
+      <p:grpSpPr>
+        <a:xfrm>
+          <a:off x="0" y="0"/>
+          <a:ext cx="0" cy="0"/>
+          <a:chOff x="0" y="0"/>
+          <a:chExt cx="0" cy="0"/>
+        </a:xfrm>
+      </p:grpSpPr>
+      <p:sp>
+        <p:nvSpPr>
+          <p:cNvPr id="2" name="Title 1">
+            <a:extLst>
+              <a:ext uri="{FF2B5EF4-FFF2-40B4-BE49-F238E27FC236}">
+                <a16:creationId xmlns:a16="http://schemas.microsoft.com/office/drawing/2014/main" id="{F79238BA-BC47-4B6C-98CA-E36358425DAC}"/>
+              </a:ext>
+            </a:extLst>
+          </p:cNvPr>
+          <p:cNvSpPr>
+            <a:spLocks noGrp="1"/>
+          </p:cNvSpPr>
+          <p:nvPr>
+            <p:ph type="title"/>
+          </p:nvPr>
+        </p:nvSpPr>
+        <p:spPr/>
+        <p:txBody>
+          <a:bodyPr/>
+          <a:lstStyle/>
+          <a:p>
+            <a:r>
+              <a:rPr lang="de-DE" dirty="0"/>
+              <a:t>Fine-tune &amp; RAG &amp; (System + User) Prompt</a:t>
+            </a:r>
+            <a:endParaRPr lang="en-US" dirty="0"/>
+          </a:p>
+        </p:txBody>
+      </p:sp>
+      <p:sp>
+        <p:nvSpPr>
+          <p:cNvPr id="3" name="Content Placeholder 2">
+            <a:extLst>
+              <a:ext uri="{FF2B5EF4-FFF2-40B4-BE49-F238E27FC236}">
+                <a16:creationId xmlns:a16="http://schemas.microsoft.com/office/drawing/2014/main" id="{87F2818A-5523-452C-A173-92E5B3C4628C}"/>
+              </a:ext>
+            </a:extLst>
+          </p:cNvPr>
+          <p:cNvSpPr>
+            <a:spLocks noGrp="1"/>
+          </p:cNvSpPr>
+          <p:nvPr>
+            <p:ph idx="1"/>
+          </p:nvPr>
+        </p:nvSpPr>
+        <p:spPr/>
+        <p:txBody>
+          <a:bodyPr/>
+          <a:lstStyle/>
+          <a:p>
+            <a:pPr marL="0" indent="0">
+              <a:buNone/>
+            </a:pPr>
+            <a:r>
+              <a:rPr lang="vi-VN" dirty="0"/>
+              <a:t>RAG (</a:t>
+            </a:r>
+            <a:r>
+              <a:rPr lang="vi-VN" dirty="0" err="1"/>
+              <a:t>Retrieval-Augmented</a:t>
+            </a:r>
+            <a:r>
+              <a:rPr lang="vi-VN" dirty="0"/>
+              <a:t> </a:t>
+            </a:r>
+            <a:r>
+              <a:rPr lang="vi-VN" dirty="0" err="1"/>
+              <a:t>Generation</a:t>
+            </a:r>
+            <a:r>
+              <a:rPr lang="vi-VN" dirty="0"/>
+              <a:t>): </a:t>
+            </a:r>
+            <a:r>
+              <a:rPr lang="vi-VN" dirty="0" err="1"/>
+              <a:t>Là</a:t>
+            </a:r>
+            <a:r>
+              <a:rPr lang="vi-VN" dirty="0"/>
+              <a:t> </a:t>
+            </a:r>
+            <a:r>
+              <a:rPr lang="vi-VN" dirty="0" err="1"/>
+              <a:t>việc</a:t>
+            </a:r>
+            <a:r>
+              <a:rPr lang="vi-VN" dirty="0"/>
+              <a:t> </a:t>
+            </a:r>
+            <a:r>
+              <a:rPr lang="vi-VN" dirty="0" err="1"/>
+              <a:t>kết</a:t>
+            </a:r>
+            <a:r>
+              <a:rPr lang="vi-VN" dirty="0"/>
+              <a:t> </a:t>
+            </a:r>
+            <a:r>
+              <a:rPr lang="vi-VN" dirty="0" err="1"/>
+              <a:t>nối</a:t>
+            </a:r>
+            <a:r>
+              <a:rPr lang="vi-VN" dirty="0"/>
+              <a:t> mô </a:t>
+            </a:r>
+            <a:r>
+              <a:rPr lang="vi-VN" dirty="0" err="1"/>
+              <a:t>hình</a:t>
+            </a:r>
+            <a:r>
+              <a:rPr lang="vi-VN" dirty="0"/>
+              <a:t> </a:t>
+            </a:r>
+            <a:r>
+              <a:rPr lang="vi-VN" dirty="0" err="1"/>
+              <a:t>với</a:t>
+            </a:r>
+            <a:r>
+              <a:rPr lang="vi-VN" dirty="0"/>
+              <a:t> </a:t>
+            </a:r>
+            <a:r>
+              <a:rPr lang="vi-VN" dirty="0" err="1"/>
+              <a:t>một</a:t>
+            </a:r>
+            <a:r>
+              <a:rPr lang="vi-VN" dirty="0"/>
+              <a:t> </a:t>
+            </a:r>
+            <a:r>
+              <a:rPr lang="vi-VN" dirty="0" err="1"/>
+              <a:t>tủ</a:t>
+            </a:r>
+            <a:r>
+              <a:rPr lang="vi-VN" dirty="0"/>
+              <a:t> </a:t>
+            </a:r>
+            <a:r>
+              <a:rPr lang="vi-VN" dirty="0" err="1"/>
+              <a:t>sách</a:t>
+            </a:r>
+            <a:r>
+              <a:rPr lang="vi-VN" dirty="0"/>
+              <a:t> tra </a:t>
+            </a:r>
+            <a:r>
+              <a:rPr lang="vi-VN" dirty="0" err="1"/>
+              <a:t>cứu</a:t>
+            </a:r>
+            <a:r>
+              <a:rPr lang="vi-VN" dirty="0"/>
+              <a:t> bên </a:t>
+            </a:r>
+            <a:r>
+              <a:rPr lang="vi-VN" dirty="0" err="1"/>
+              <a:t>ngoài</a:t>
+            </a:r>
+            <a:r>
+              <a:rPr lang="vi-VN" dirty="0"/>
+              <a:t>. Khi </a:t>
+            </a:r>
+            <a:r>
+              <a:rPr lang="vi-VN" dirty="0" err="1"/>
+              <a:t>bạn</a:t>
+            </a:r>
+            <a:r>
+              <a:rPr lang="vi-VN" dirty="0"/>
+              <a:t> </a:t>
+            </a:r>
+            <a:r>
+              <a:rPr lang="vi-VN" dirty="0" err="1"/>
+              <a:t>hỏi</a:t>
+            </a:r>
+            <a:r>
+              <a:rPr lang="vi-VN" dirty="0"/>
+              <a:t>, </a:t>
+            </a:r>
+            <a:r>
+              <a:rPr lang="vi-VN" dirty="0" err="1"/>
+              <a:t>hệ</a:t>
+            </a:r>
+            <a:r>
+              <a:rPr lang="vi-VN" dirty="0"/>
+              <a:t> </a:t>
+            </a:r>
+            <a:r>
+              <a:rPr lang="vi-VN" dirty="0" err="1"/>
+              <a:t>thống</a:t>
+            </a:r>
+            <a:r>
+              <a:rPr lang="vi-VN" dirty="0"/>
+              <a:t> </a:t>
+            </a:r>
+            <a:r>
+              <a:rPr lang="vi-VN" dirty="0" err="1"/>
+              <a:t>sẽ</a:t>
+            </a:r>
+            <a:r>
+              <a:rPr lang="vi-VN" dirty="0"/>
+              <a:t> </a:t>
+            </a:r>
+            <a:r>
+              <a:rPr lang="vi-VN" dirty="0" err="1"/>
+              <a:t>tự</a:t>
+            </a:r>
+            <a:r>
+              <a:rPr lang="vi-VN" dirty="0"/>
+              <a:t> </a:t>
+            </a:r>
+            <a:r>
+              <a:rPr lang="vi-VN" dirty="0" err="1"/>
+              <a:t>động</a:t>
+            </a:r>
+            <a:r>
+              <a:rPr lang="vi-VN" dirty="0"/>
+              <a:t> </a:t>
+            </a:r>
+            <a:r>
+              <a:rPr lang="vi-VN" dirty="0" err="1"/>
+              <a:t>tìm</a:t>
+            </a:r>
+            <a:r>
+              <a:rPr lang="vi-VN" dirty="0"/>
+              <a:t> </a:t>
+            </a:r>
+            <a:r>
+              <a:rPr lang="vi-VN" dirty="0" err="1"/>
+              <a:t>tài</a:t>
+            </a:r>
+            <a:r>
+              <a:rPr lang="vi-VN" dirty="0"/>
+              <a:t> </a:t>
+            </a:r>
+            <a:r>
+              <a:rPr lang="vi-VN" dirty="0" err="1"/>
+              <a:t>liệu</a:t>
+            </a:r>
+            <a:r>
+              <a:rPr lang="vi-VN" dirty="0"/>
+              <a:t> liên quan </a:t>
+            </a:r>
+            <a:r>
+              <a:rPr lang="vi-VN" dirty="0" err="1"/>
+              <a:t>và</a:t>
+            </a:r>
+            <a:r>
+              <a:rPr lang="vi-VN" dirty="0"/>
+              <a:t> "</a:t>
+            </a:r>
+            <a:r>
+              <a:rPr lang="vi-VN" dirty="0" err="1"/>
+              <a:t>nhồi</a:t>
+            </a:r>
+            <a:r>
+              <a:rPr lang="vi-VN" dirty="0"/>
+              <a:t>" </a:t>
+            </a:r>
+            <a:r>
+              <a:rPr lang="vi-VN" dirty="0" err="1"/>
+              <a:t>vào</a:t>
+            </a:r>
+            <a:r>
+              <a:rPr lang="vi-VN" dirty="0"/>
+              <a:t> </a:t>
+            </a:r>
+            <a:r>
+              <a:rPr lang="vi-VN" dirty="0" err="1"/>
+              <a:t>prompt</a:t>
+            </a:r>
+            <a:r>
+              <a:rPr lang="vi-VN" dirty="0"/>
+              <a:t> </a:t>
+            </a:r>
+            <a:r>
+              <a:rPr lang="vi-VN" dirty="0" err="1"/>
+              <a:t>để</a:t>
+            </a:r>
+            <a:r>
+              <a:rPr lang="vi-VN" dirty="0"/>
+              <a:t> mô </a:t>
+            </a:r>
+            <a:r>
+              <a:rPr lang="vi-VN" dirty="0" err="1"/>
+              <a:t>hình</a:t>
+            </a:r>
+            <a:r>
+              <a:rPr lang="vi-VN" dirty="0"/>
+              <a:t> </a:t>
+            </a:r>
+            <a:r>
+              <a:rPr lang="vi-VN" dirty="0" err="1"/>
+              <a:t>trả</a:t>
+            </a:r>
+            <a:r>
+              <a:rPr lang="vi-VN" dirty="0"/>
+              <a:t> </a:t>
+            </a:r>
+            <a:r>
+              <a:rPr lang="vi-VN" dirty="0" err="1"/>
+              <a:t>lời</a:t>
+            </a:r>
+            <a:r>
+              <a:rPr lang="vi-VN" dirty="0"/>
+              <a:t> </a:t>
+            </a:r>
+            <a:r>
+              <a:rPr lang="vi-VN" dirty="0" err="1"/>
+              <a:t>dựa</a:t>
+            </a:r>
+            <a:r>
+              <a:rPr lang="vi-VN" dirty="0"/>
+              <a:t> trên </a:t>
+            </a:r>
+            <a:r>
+              <a:rPr lang="vi-VN" dirty="0" err="1"/>
+              <a:t>tài</a:t>
+            </a:r>
+            <a:r>
+              <a:rPr lang="vi-VN" dirty="0"/>
+              <a:t> </a:t>
+            </a:r>
+            <a:r>
+              <a:rPr lang="vi-VN" dirty="0" err="1"/>
+              <a:t>liệu</a:t>
+            </a:r>
+            <a:r>
+              <a:rPr lang="vi-VN" dirty="0"/>
+              <a:t> </a:t>
+            </a:r>
+            <a:r>
+              <a:rPr lang="vi-VN" dirty="0" err="1"/>
+              <a:t>đó</a:t>
+            </a:r>
+            <a:endParaRPr lang="en-US" dirty="0"/>
+          </a:p>
+          <a:p>
+            <a:pPr lvl="1"/>
+            <a:r>
+              <a:rPr lang="en-US" dirty="0"/>
+              <a:t>C</a:t>
+            </a:r>
+            <a:r>
+              <a:rPr lang="vi-VN" dirty="0"/>
+              <a:t>ơ </a:t>
+            </a:r>
+            <a:r>
+              <a:rPr lang="vi-VN" dirty="0" err="1"/>
+              <a:t>chế</a:t>
+            </a:r>
+            <a:r>
+              <a:rPr lang="vi-VN" dirty="0"/>
+              <a:t>: </a:t>
+            </a:r>
+            <a:r>
+              <a:rPr lang="vi-VN" dirty="0" err="1"/>
+              <a:t>Tìm</a:t>
+            </a:r>
+            <a:r>
+              <a:rPr lang="vi-VN" dirty="0"/>
+              <a:t> </a:t>
+            </a:r>
+            <a:r>
+              <a:rPr lang="vi-VN" dirty="0" err="1"/>
+              <a:t>kiếm</a:t>
+            </a:r>
+            <a:r>
+              <a:rPr lang="vi-VN" dirty="0"/>
+              <a:t> </a:t>
+            </a:r>
+            <a:r>
+              <a:rPr lang="vi-VN" dirty="0" err="1"/>
+              <a:t>dữ</a:t>
+            </a:r>
+            <a:r>
+              <a:rPr lang="vi-VN" dirty="0"/>
+              <a:t> </a:t>
+            </a:r>
+            <a:r>
+              <a:rPr lang="vi-VN" dirty="0" err="1"/>
+              <a:t>liệu</a:t>
+            </a:r>
+            <a:r>
+              <a:rPr lang="vi-VN" dirty="0"/>
+              <a:t> + </a:t>
+            </a:r>
+            <a:r>
+              <a:rPr lang="vi-VN" dirty="0" err="1"/>
+              <a:t>Tạo</a:t>
+            </a:r>
+            <a:r>
+              <a:rPr lang="vi-VN" dirty="0"/>
+              <a:t> câu </a:t>
+            </a:r>
+            <a:r>
+              <a:rPr lang="vi-VN" dirty="0" err="1"/>
+              <a:t>trả</a:t>
+            </a:r>
+            <a:r>
+              <a:rPr lang="vi-VN" dirty="0"/>
+              <a:t> </a:t>
+            </a:r>
+            <a:r>
+              <a:rPr lang="vi-VN" dirty="0" err="1"/>
+              <a:t>lời</a:t>
+            </a:r>
+            <a:r>
+              <a:rPr lang="vi-VN" dirty="0"/>
+              <a:t>. Thông tin </a:t>
+            </a:r>
+            <a:r>
+              <a:rPr lang="vi-VN" dirty="0" err="1"/>
+              <a:t>được</a:t>
+            </a:r>
+            <a:r>
+              <a:rPr lang="vi-VN" dirty="0"/>
+              <a:t> đưa </a:t>
+            </a:r>
+            <a:r>
+              <a:rPr lang="vi-VN" dirty="0" err="1"/>
+              <a:t>vào</a:t>
+            </a:r>
+            <a:r>
+              <a:rPr lang="vi-VN" dirty="0"/>
+              <a:t> </a:t>
+            </a:r>
+            <a:r>
+              <a:rPr lang="vi-VN" dirty="0" err="1"/>
+              <a:t>context</a:t>
+            </a:r>
+            <a:r>
+              <a:rPr lang="vi-VN" dirty="0"/>
+              <a:t> </a:t>
+            </a:r>
+            <a:r>
+              <a:rPr lang="vi-VN" dirty="0" err="1"/>
+              <a:t>window</a:t>
+            </a:r>
+            <a:r>
+              <a:rPr lang="vi-VN" dirty="0"/>
+              <a:t> </a:t>
+            </a:r>
+            <a:r>
+              <a:rPr lang="vi-VN" dirty="0" err="1"/>
+              <a:t>một</a:t>
+            </a:r>
+            <a:r>
+              <a:rPr lang="vi-VN" dirty="0"/>
+              <a:t> </a:t>
+            </a:r>
+            <a:r>
+              <a:rPr lang="vi-VN" dirty="0" err="1"/>
+              <a:t>cách</a:t>
+            </a:r>
+            <a:r>
+              <a:rPr lang="vi-VN" dirty="0"/>
+              <a:t> </a:t>
+            </a:r>
+            <a:r>
+              <a:rPr lang="vi-VN" dirty="0" err="1"/>
+              <a:t>tự</a:t>
+            </a:r>
+            <a:r>
+              <a:rPr lang="vi-VN" dirty="0"/>
+              <a:t> </a:t>
+            </a:r>
+            <a:r>
+              <a:rPr lang="vi-VN" dirty="0" err="1"/>
+              <a:t>động</a:t>
+            </a:r>
+            <a:endParaRPr lang="en-US" dirty="0"/>
+          </a:p>
+          <a:p>
+            <a:pPr lvl="1"/>
+            <a:endParaRPr lang="en-US" dirty="0"/>
+          </a:p>
+        </p:txBody>
+      </p:sp>
+      <p:pic>
+        <p:nvPicPr>
+          <p:cNvPr id="4" name="Picture 2" descr="Ảnh-màn-hình-2025-07-25-lúc-4.31.32-CH.png (976×548)">
+            <a:extLst>
+              <a:ext uri="{FF2B5EF4-FFF2-40B4-BE49-F238E27FC236}">
+                <a16:creationId xmlns:a16="http://schemas.microsoft.com/office/drawing/2014/main" id="{0C9FF96B-E091-42D8-9D93-DCA92F081954}"/>
+              </a:ext>
+            </a:extLst>
+          </p:cNvPr>
+          <p:cNvPicPr>
+            <a:picLocks noChangeAspect="1" noChangeArrowheads="1"/>
+          </p:cNvPicPr>
+          <p:nvPr/>
+        </p:nvPicPr>
+        <p:blipFill>
+          <a:blip r:embed="rId2">
+            <a:extLst>
+              <a:ext uri="{28A0092B-C50C-407E-A947-70E740481C1C}">
+                <a14:useLocalDpi xmlns:a14="http://schemas.microsoft.com/office/drawing/2010/main" val="0"/>
+              </a:ext>
+            </a:extLst>
+          </a:blip>
+          <a:srcRect/>
+          <a:stretch>
+            <a:fillRect/>
+          </a:stretch>
+        </p:blipFill>
+        <p:spPr bwMode="auto">
+          <a:xfrm>
+            <a:off x="6705868" y="3914386"/>
+            <a:ext cx="3750373" cy="2105742"/>
+          </a:xfrm>
+          <a:prstGeom prst="rect">
+            <a:avLst/>
+          </a:prstGeom>
+          <a:noFill/>
+          <a:extLst>
+            <a:ext uri="{909E8E84-426E-40DD-AFC4-6F175D3DCCD1}">
+              <a14:hiddenFill xmlns:a14="http://schemas.microsoft.com/office/drawing/2010/main">
+                <a:solidFill>
+                  <a:srgbClr val="FFFFFF"/>
+                </a:solidFill>
+              </a14:hiddenFill>
+            </a:ext>
+          </a:extLst>
+        </p:spPr>
+      </p:pic>
     </p:spTree>
     <p:extLst>
       <p:ext uri="{BB962C8B-B14F-4D97-AF65-F5344CB8AC3E}">
@@ -12984,7 +13888,7 @@
 </p:sld>
 </file>
 
-<file path=ppt/slides/slide7.xml><?xml version="1.0" encoding="utf-8"?>
+<file path=ppt/slides/slide8.xml><?xml version="1.0" encoding="utf-8"?>
 <p:sld xmlns:a="http://schemas.openxmlformats.org/drawingml/2006/main" xmlns:r="http://schemas.openxmlformats.org/officeDocument/2006/relationships" xmlns:p="http://schemas.openxmlformats.org/presentationml/2006/main">
   <p:cSld>
     <p:spTree>
@@ -13122,7 +14026,7 @@
 </p:sld>
 </file>
 
-<file path=ppt/slides/slide8.xml><?xml version="1.0" encoding="utf-8"?>
+<file path=ppt/slides/slide9.xml><?xml version="1.0" encoding="utf-8"?>
 <p:sld xmlns:a="http://schemas.openxmlformats.org/drawingml/2006/main" xmlns:r="http://schemas.openxmlformats.org/officeDocument/2006/relationships" xmlns:p="http://schemas.openxmlformats.org/presentationml/2006/main">
   <p:cSld>
     <p:spTree>
@@ -13553,105 +14457,23 @@
             </a:r>
             <a:endParaRPr lang="en-US" dirty="0"/>
           </a:p>
-        </p:txBody>
-      </p:sp>
-    </p:spTree>
-    <p:extLst>
-      <p:ext uri="{BB962C8B-B14F-4D97-AF65-F5344CB8AC3E}">
-        <p14:creationId xmlns:p14="http://schemas.microsoft.com/office/powerpoint/2010/main" val="3532065659"/>
-      </p:ext>
-    </p:extLst>
-  </p:cSld>
-  <p:clrMapOvr>
-    <a:masterClrMapping/>
-  </p:clrMapOvr>
-</p:sld>
-</file>
-
-<file path=ppt/slides/slide9.xml><?xml version="1.0" encoding="utf-8"?>
-<p:sld xmlns:a="http://schemas.openxmlformats.org/drawingml/2006/main" xmlns:r="http://schemas.openxmlformats.org/officeDocument/2006/relationships" xmlns:p="http://schemas.openxmlformats.org/presentationml/2006/main">
-  <p:cSld>
-    <p:spTree>
-      <p:nvGrpSpPr>
-        <p:cNvPr id="1" name=""/>
-        <p:cNvGrpSpPr/>
-        <p:nvPr/>
-      </p:nvGrpSpPr>
-      <p:grpSpPr>
-        <a:xfrm>
-          <a:off x="0" y="0"/>
-          <a:ext cx="0" cy="0"/>
-          <a:chOff x="0" y="0"/>
-          <a:chExt cx="0" cy="0"/>
-        </a:xfrm>
-      </p:grpSpPr>
-      <p:sp>
-        <p:nvSpPr>
-          <p:cNvPr id="2" name="Title 1">
-            <a:extLst>
-              <a:ext uri="{FF2B5EF4-FFF2-40B4-BE49-F238E27FC236}">
-                <a16:creationId xmlns:a16="http://schemas.microsoft.com/office/drawing/2014/main" id="{5180AB1E-A1D3-4255-85BF-51B4F4CBB03B}"/>
-              </a:ext>
-            </a:extLst>
-          </p:cNvPr>
-          <p:cNvSpPr>
-            <a:spLocks noGrp="1"/>
-          </p:cNvSpPr>
-          <p:nvPr>
-            <p:ph type="title"/>
-          </p:nvPr>
-        </p:nvSpPr>
-        <p:spPr/>
-        <p:txBody>
-          <a:bodyPr/>
-          <a:lstStyle/>
-          <a:p>
-            <a:r>
-              <a:rPr lang="de-DE" dirty="0"/>
-              <a:t>Fine-tune &amp; RAG &amp; (System + User) Prompt</a:t>
-            </a:r>
+          <a:p>
             <a:endParaRPr lang="en-US" dirty="0"/>
           </a:p>
-        </p:txBody>
-      </p:sp>
-      <p:sp>
-        <p:nvSpPr>
-          <p:cNvPr id="3" name="Content Placeholder 2">
-            <a:extLst>
-              <a:ext uri="{FF2B5EF4-FFF2-40B4-BE49-F238E27FC236}">
-                <a16:creationId xmlns:a16="http://schemas.microsoft.com/office/drawing/2014/main" id="{6130CD08-91F5-474A-98CC-60A8D3992072}"/>
-              </a:ext>
-            </a:extLst>
-          </p:cNvPr>
-          <p:cNvSpPr>
-            <a:spLocks noGrp="1"/>
-          </p:cNvSpPr>
-          <p:nvPr>
-            <p:ph idx="1"/>
-          </p:nvPr>
-        </p:nvSpPr>
-        <p:spPr/>
-        <p:txBody>
-          <a:bodyPr/>
-          <a:lstStyle/>
-          <a:p>
-            <a:pPr marL="0" indent="0">
+          <a:p>
+            <a:pPr marL="457200" lvl="1" indent="0">
               <a:buNone/>
             </a:pPr>
-            <a:r>
-              <a:rPr lang="de-DE" dirty="0"/>
-              <a:t>Fine-tune</a:t>
-            </a:r>
             <a:endParaRPr lang="en-US" dirty="0"/>
           </a:p>
         </p:txBody>
       </p:sp>
       <p:pic>
         <p:nvPicPr>
-          <p:cNvPr id="5" name="Picture 4">
+          <p:cNvPr id="4" name="Picture 3">
             <a:extLst>
               <a:ext uri="{FF2B5EF4-FFF2-40B4-BE49-F238E27FC236}">
-                <a16:creationId xmlns:a16="http://schemas.microsoft.com/office/drawing/2014/main" id="{A4841E7E-6E50-4B8D-8CDB-6E9FD523512A}"/>
+                <a16:creationId xmlns:a16="http://schemas.microsoft.com/office/drawing/2014/main" id="{AB7D881B-DFEA-480A-98D8-81BE38344FE0}"/>
               </a:ext>
             </a:extLst>
           </p:cNvPr>
@@ -13668,8 +14490,8 @@
         </p:blipFill>
         <p:spPr>
           <a:xfrm>
-            <a:off x="1297777" y="2346533"/>
-            <a:ext cx="9247164" cy="3865769"/>
+            <a:off x="5646700" y="3972758"/>
+            <a:ext cx="4458717" cy="2133566"/>
           </a:xfrm>
           <a:prstGeom prst="rect">
             <a:avLst/>
@@ -13679,7 +14501,7 @@
     </p:spTree>
     <p:extLst>
       <p:ext uri="{BB962C8B-B14F-4D97-AF65-F5344CB8AC3E}">
-        <p14:creationId xmlns:p14="http://schemas.microsoft.com/office/powerpoint/2010/main" val="26255296"/>
+        <p14:creationId xmlns:p14="http://schemas.microsoft.com/office/powerpoint/2010/main" val="3532065659"/>
       </p:ext>
     </p:extLst>
   </p:cSld>
